--- a/docs/Briefing-Juri-LKS2026-Robot-Otonom.pptx
+++ b/docs/Briefing-Juri-LKS2026-Robot-Otonom.pptx
@@ -25,7 +25,6 @@
     <p:sldId id="273" r:id="rId24"/>
     <p:sldId id="274" r:id="rId25"/>
     <p:sldId id="275" r:id="rId26"/>
-    <p:sldId id="276" r:id="rId27"/>
   </p:sldIdLst>
   <p:sldSz cx="9144000" cy="6858000" type="screen4x3"/>
   <p:notesSz cx="6858000" cy="9144000"/>
@@ -3116,8 +3115,217 @@
         </p:nvSpPr>
         <p:spPr>
           <a:xfrm>
+            <a:off x="0" y="1097280"/>
+            <a:ext cx="9144000" cy="4754880"/>
+          </a:xfrm>
+          <a:prstGeom prst="rect">
+            <a:avLst/>
+          </a:prstGeom>
+          <a:solidFill>
+            <a:srgbClr val="F5F5F5"/>
+          </a:solidFill>
+          <a:ln>
+            <a:noFill/>
+          </a:ln>
+        </p:spPr>
+        <p:style>
+          <a:lnRef idx="1">
+            <a:schemeClr val="accent1"/>
+          </a:lnRef>
+          <a:fillRef idx="3">
+            <a:schemeClr val="accent1"/>
+          </a:fillRef>
+          <a:effectRef idx="2">
+            <a:schemeClr val="accent1"/>
+          </a:effectRef>
+          <a:fontRef idx="minor">
+            <a:schemeClr val="lt1"/>
+          </a:fontRef>
+        </p:style>
+        <p:txBody>
+          <a:bodyPr rtlCol="0" anchor="ctr"/>
+          <a:lstStyle/>
+          <a:p>
+            <a:pPr algn="ctr"/>
+          </a:p>
+        </p:txBody>
+      </p:sp>
+      <p:pic>
+        <p:nvPicPr>
+          <p:cNvPr id="3" name="Picture 2" descr="logo-kemendikdasmen.png"/>
+          <p:cNvPicPr>
+            <a:picLocks noChangeAspect="1"/>
+          </p:cNvPicPr>
+          <p:nvPr/>
+        </p:nvPicPr>
+        <p:blipFill>
+          <a:blip r:embed="rId2"/>
+          <a:stretch>
+            <a:fillRect/>
+          </a:stretch>
+        </p:blipFill>
+        <p:spPr>
+          <a:xfrm>
+            <a:off x="457200" y="137160"/>
+            <a:ext cx="2060745" cy="640080"/>
+          </a:xfrm>
+          <a:prstGeom prst="rect">
+            <a:avLst/>
+          </a:prstGeom>
+        </p:spPr>
+      </p:pic>
+      <p:pic>
+        <p:nvPicPr>
+          <p:cNvPr id="4" name="Picture 3" descr="logo-lks-dikmen.png"/>
+          <p:cNvPicPr>
+            <a:picLocks noChangeAspect="1"/>
+          </p:cNvPicPr>
+          <p:nvPr/>
+        </p:nvPicPr>
+        <p:blipFill>
+          <a:blip r:embed="rId3"/>
+          <a:stretch>
+            <a:fillRect/>
+          </a:stretch>
+        </p:blipFill>
+        <p:spPr>
+          <a:xfrm>
+            <a:off x="3749039" y="1371600"/>
+            <a:ext cx="1463040" cy="1463040"/>
+          </a:xfrm>
+          <a:prstGeom prst="rect">
+            <a:avLst/>
+          </a:prstGeom>
+        </p:spPr>
+      </p:pic>
+      <p:pic>
+        <p:nvPicPr>
+          <p:cNvPr id="5" name="Picture 4" descr="logo-lks-geometric.png"/>
+          <p:cNvPicPr>
+            <a:picLocks noChangeAspect="1"/>
+          </p:cNvPicPr>
+          <p:nvPr/>
+        </p:nvPicPr>
+        <p:blipFill>
+          <a:blip r:embed="rId4"/>
+          <a:stretch>
+            <a:fillRect/>
+          </a:stretch>
+        </p:blipFill>
+        <p:spPr>
+          <a:xfrm>
+            <a:off x="6583680" y="1417320"/>
+            <a:ext cx="1371600" cy="1371600"/>
+          </a:xfrm>
+          <a:prstGeom prst="rect">
+            <a:avLst/>
+          </a:prstGeom>
+        </p:spPr>
+      </p:pic>
+      <p:sp>
+        <p:nvSpPr>
+          <p:cNvPr id="6" name="TextBox 5"/>
+          <p:cNvSpPr txBox="1"/>
+          <p:nvPr/>
+        </p:nvSpPr>
+        <p:spPr>
+          <a:xfrm>
+            <a:off x="548640" y="3108960"/>
+            <a:ext cx="8046720" cy="1097280"/>
+          </a:xfrm>
+          <a:prstGeom prst="rect">
+            <a:avLst/>
+          </a:prstGeom>
+          <a:noFill/>
+        </p:spPr>
+        <p:txBody>
+          <a:bodyPr wrap="none">
+            <a:spAutoFit/>
+          </a:bodyPr>
+          <a:lstStyle/>
+          <a:p>
+            <a:pPr algn="ctr">
+              <a:defRPr sz="3600" b="1">
+                <a:solidFill>
+                  <a:srgbClr val="1F4E79"/>
+                </a:solidFill>
+              </a:defRPr>
+            </a:pPr>
+            <a:r>
+              <a:t>Briefing Juri</a:t>
+            </a:r>
+          </a:p>
+        </p:txBody>
+      </p:sp>
+      <p:sp>
+        <p:nvSpPr>
+          <p:cNvPr id="7" name="TextBox 6"/>
+          <p:cNvSpPr txBox="1"/>
+          <p:nvPr/>
+        </p:nvSpPr>
+        <p:spPr>
+          <a:xfrm>
+            <a:off x="548640" y="4114800"/>
+            <a:ext cx="8046720" cy="1371600"/>
+          </a:xfrm>
+          <a:prstGeom prst="rect">
+            <a:avLst/>
+          </a:prstGeom>
+          <a:noFill/>
+        </p:spPr>
+        <p:txBody>
+          <a:bodyPr wrap="square">
+            <a:spAutoFit/>
+          </a:bodyPr>
+          <a:lstStyle/>
+          <a:p>
+            <a:pPr algn="ctr">
+              <a:defRPr sz="1800">
+                <a:solidFill>
+                  <a:srgbClr val="333333"/>
+                </a:solidFill>
+              </a:defRPr>
+            </a:pPr>
+            <a:r>
+              <a:t>Robot Bergerak Otonom (Autonomous Mobile Robotics)</a:t>
+            </a:r>
+          </a:p>
+          <a:p>
+            <a:pPr algn="ctr">
+              <a:defRPr sz="1600">
+                <a:solidFill>
+                  <a:srgbClr val="ED7D31"/>
+                </a:solidFill>
+              </a:defRPr>
+            </a:pPr>
+            <a:r>
+              <a:t>LKS Pendidikan Menengah Tingkat Nasional XXXIV 2026</a:t>
+            </a:r>
+          </a:p>
+          <a:p>
+            <a:pPr algn="ctr">
+              <a:defRPr sz="1600">
+                <a:solidFill>
+                  <a:srgbClr val="ED7D31"/>
+                </a:solidFill>
+              </a:defRPr>
+            </a:pPr>
+            <a:r>
+              <a:t>Kemendikdasmen — Pusat Prestasi Nasional</a:t>
+            </a:r>
+          </a:p>
+        </p:txBody>
+      </p:sp>
+      <p:sp>
+        <p:nvSpPr>
+          <p:cNvPr id="8" name="Rectangle 7"/>
+          <p:cNvSpPr/>
+          <p:nvPr/>
+        </p:nvSpPr>
+        <p:spPr>
+          <a:xfrm>
             <a:off x="0" y="0"/>
-            <a:ext cx="9144000" cy="1280160"/>
+            <a:ext cx="9144000" cy="777240"/>
           </a:xfrm>
           <a:prstGeom prst="rect">
             <a:avLst/>
@@ -3153,14 +3361,148 @@
       </p:sp>
       <p:sp>
         <p:nvSpPr>
-          <p:cNvPr id="3" name="TextBox 2"/>
+          <p:cNvPr id="9" name="Rectangle 8"/>
+          <p:cNvSpPr/>
+          <p:nvPr/>
+        </p:nvSpPr>
+        <p:spPr>
+          <a:xfrm>
+            <a:off x="0" y="777240"/>
+            <a:ext cx="9144000" cy="54864"/>
+          </a:xfrm>
+          <a:prstGeom prst="rect">
+            <a:avLst/>
+          </a:prstGeom>
+          <a:solidFill>
+            <a:srgbClr val="ED7D31"/>
+          </a:solidFill>
+          <a:ln>
+            <a:noFill/>
+          </a:ln>
+        </p:spPr>
+        <p:style>
+          <a:lnRef idx="1">
+            <a:schemeClr val="accent1"/>
+          </a:lnRef>
+          <a:fillRef idx="3">
+            <a:schemeClr val="accent1"/>
+          </a:fillRef>
+          <a:effectRef idx="2">
+            <a:schemeClr val="accent1"/>
+          </a:effectRef>
+          <a:fontRef idx="minor">
+            <a:schemeClr val="lt1"/>
+          </a:fontRef>
+        </p:style>
+        <p:txBody>
+          <a:bodyPr rtlCol="0" anchor="ctr"/>
+          <a:lstStyle/>
+          <a:p>
+            <a:pPr algn="ctr"/>
+          </a:p>
+        </p:txBody>
+      </p:sp>
+      <p:pic>
+        <p:nvPicPr>
+          <p:cNvPr id="10" name="Picture 9" descr="logo-kemendikdasmen.png"/>
+          <p:cNvPicPr>
+            <a:picLocks noChangeAspect="1"/>
+          </p:cNvPicPr>
+          <p:nvPr/>
+        </p:nvPicPr>
+        <p:blipFill>
+          <a:blip r:embed="rId2"/>
+          <a:stretch>
+            <a:fillRect/>
+          </a:stretch>
+        </p:blipFill>
+        <p:spPr>
+          <a:xfrm>
+            <a:off x="137160" y="73152"/>
+            <a:ext cx="1619157" cy="502920"/>
+          </a:xfrm>
+          <a:prstGeom prst="rect">
+            <a:avLst/>
+          </a:prstGeom>
+        </p:spPr>
+      </p:pic>
+      <p:pic>
+        <p:nvPicPr>
+          <p:cNvPr id="11" name="Picture 10" descr="logo-lks-dikmen.png"/>
+          <p:cNvPicPr>
+            <a:picLocks noChangeAspect="1"/>
+          </p:cNvPicPr>
+          <p:nvPr/>
+        </p:nvPicPr>
+        <p:blipFill>
+          <a:blip r:embed="rId3"/>
+          <a:stretch>
+            <a:fillRect/>
+          </a:stretch>
+        </p:blipFill>
+        <p:spPr>
+          <a:xfrm>
+            <a:off x="7818120" y="45720"/>
+            <a:ext cx="658368" cy="658368"/>
+          </a:xfrm>
+          <a:prstGeom prst="rect">
+            <a:avLst/>
+          </a:prstGeom>
+        </p:spPr>
+      </p:pic>
+      <p:sp>
+        <p:nvSpPr>
+          <p:cNvPr id="12" name="Rectangle 11"/>
+          <p:cNvSpPr/>
+          <p:nvPr/>
+        </p:nvSpPr>
+        <p:spPr>
+          <a:xfrm>
+            <a:off x="0" y="6446520"/>
+            <a:ext cx="9144000" cy="411480"/>
+          </a:xfrm>
+          <a:prstGeom prst="rect">
+            <a:avLst/>
+          </a:prstGeom>
+          <a:solidFill>
+            <a:srgbClr val="2E7D32"/>
+          </a:solidFill>
+          <a:ln>
+            <a:noFill/>
+          </a:ln>
+        </p:spPr>
+        <p:style>
+          <a:lnRef idx="1">
+            <a:schemeClr val="accent1"/>
+          </a:lnRef>
+          <a:fillRef idx="3">
+            <a:schemeClr val="accent1"/>
+          </a:fillRef>
+          <a:effectRef idx="2">
+            <a:schemeClr val="accent1"/>
+          </a:effectRef>
+          <a:fontRef idx="minor">
+            <a:schemeClr val="lt1"/>
+          </a:fontRef>
+        </p:style>
+        <p:txBody>
+          <a:bodyPr rtlCol="0" anchor="ctr"/>
+          <a:lstStyle/>
+          <a:p>
+            <a:pPr algn="ctr"/>
+          </a:p>
+        </p:txBody>
+      </p:sp>
+      <p:sp>
+        <p:nvSpPr>
+          <p:cNvPr id="13" name="TextBox 12"/>
           <p:cNvSpPr txBox="1"/>
           <p:nvPr/>
         </p:nvSpPr>
         <p:spPr>
           <a:xfrm>
-            <a:off x="548640" y="1645920"/>
-            <a:ext cx="8046720" cy="1371600"/>
+            <a:off x="274320" y="6492240"/>
+            <a:ext cx="8595360" cy="320040"/>
           </a:xfrm>
           <a:prstGeom prst="rect">
             <a:avLst/>
@@ -3173,54 +3515,15 @@
           </a:bodyPr>
           <a:lstStyle/>
           <a:p>
-            <a:pPr>
-              <a:defRPr sz="3200" b="1">
+            <a:pPr algn="ctr">
+              <a:defRPr sz="1000">
                 <a:solidFill>
-                  <a:srgbClr val="1F4E79"/>
+                  <a:srgbClr val="FFFFFF"/>
                 </a:solidFill>
               </a:defRPr>
             </a:pPr>
             <a:r>
-              <a:t>Briefing Juri</a:t>
-            </a:r>
-          </a:p>
-        </p:txBody>
-      </p:sp>
-      <p:sp>
-        <p:nvSpPr>
-          <p:cNvPr id="4" name="TextBox 3"/>
-          <p:cNvSpPr txBox="1"/>
-          <p:nvPr/>
-        </p:nvSpPr>
-        <p:spPr>
-          <a:xfrm>
-            <a:off x="548640" y="3017520"/>
-            <a:ext cx="8046720" cy="1097280"/>
-          </a:xfrm>
-          <a:prstGeom prst="rect">
-            <a:avLst/>
-          </a:prstGeom>
-          <a:noFill/>
-        </p:spPr>
-        <p:txBody>
-          <a:bodyPr wrap="none">
-            <a:spAutoFit/>
-          </a:bodyPr>
-          <a:lstStyle/>
-          <a:p>
-            <a:pPr>
-              <a:defRPr sz="1800">
-                <a:solidFill>
-                  <a:srgbClr val="ED7D31"/>
-                </a:solidFill>
-              </a:defRPr>
-            </a:pPr>
-            <a:r>
-              <a:t>Robot Bergerak Otonom (Autonomous Mobile Robotics)</a:t>
-            </a:r>
-            <a:br/>
-            <a:r>
-              <a:t>LKS Nasional XXXIV 2026</a:t>
+              <a:t>Briefing Juri | Robot Bergerak Otonom | LKS 2026</a:t>
             </a:r>
           </a:p>
         </p:txBody>
@@ -3252,7 +3555,7 @@
         <p:spPr>
           <a:xfrm>
             <a:off x="0" y="0"/>
-            <a:ext cx="9144000" cy="822960"/>
+            <a:ext cx="9144000" cy="777240"/>
           </a:xfrm>
           <a:prstGeom prst="rect">
             <a:avLst/>
@@ -3288,14 +3591,105 @@
       </p:sp>
       <p:sp>
         <p:nvSpPr>
-          <p:cNvPr id="3" name="TextBox 2"/>
+          <p:cNvPr id="3" name="Rectangle 2"/>
+          <p:cNvSpPr/>
+          <p:nvPr/>
+        </p:nvSpPr>
+        <p:spPr>
+          <a:xfrm>
+            <a:off x="0" y="777240"/>
+            <a:ext cx="9144000" cy="54864"/>
+          </a:xfrm>
+          <a:prstGeom prst="rect">
+            <a:avLst/>
+          </a:prstGeom>
+          <a:solidFill>
+            <a:srgbClr val="ED7D31"/>
+          </a:solidFill>
+          <a:ln>
+            <a:noFill/>
+          </a:ln>
+        </p:spPr>
+        <p:style>
+          <a:lnRef idx="1">
+            <a:schemeClr val="accent1"/>
+          </a:lnRef>
+          <a:fillRef idx="3">
+            <a:schemeClr val="accent1"/>
+          </a:fillRef>
+          <a:effectRef idx="2">
+            <a:schemeClr val="accent1"/>
+          </a:effectRef>
+          <a:fontRef idx="minor">
+            <a:schemeClr val="lt1"/>
+          </a:fontRef>
+        </p:style>
+        <p:txBody>
+          <a:bodyPr rtlCol="0" anchor="ctr"/>
+          <a:lstStyle/>
+          <a:p>
+            <a:pPr algn="ctr"/>
+          </a:p>
+        </p:txBody>
+      </p:sp>
+      <p:pic>
+        <p:nvPicPr>
+          <p:cNvPr id="4" name="Picture 3" descr="logo-kemendikdasmen.png"/>
+          <p:cNvPicPr>
+            <a:picLocks noChangeAspect="1"/>
+          </p:cNvPicPr>
+          <p:nvPr/>
+        </p:nvPicPr>
+        <p:blipFill>
+          <a:blip r:embed="rId2"/>
+          <a:stretch>
+            <a:fillRect/>
+          </a:stretch>
+        </p:blipFill>
+        <p:spPr>
+          <a:xfrm>
+            <a:off x="137160" y="73152"/>
+            <a:ext cx="1619157" cy="502920"/>
+          </a:xfrm>
+          <a:prstGeom prst="rect">
+            <a:avLst/>
+          </a:prstGeom>
+        </p:spPr>
+      </p:pic>
+      <p:pic>
+        <p:nvPicPr>
+          <p:cNvPr id="5" name="Picture 4" descr="logo-lks-dikmen.png"/>
+          <p:cNvPicPr>
+            <a:picLocks noChangeAspect="1"/>
+          </p:cNvPicPr>
+          <p:nvPr/>
+        </p:nvPicPr>
+        <p:blipFill>
+          <a:blip r:embed="rId3"/>
+          <a:stretch>
+            <a:fillRect/>
+          </a:stretch>
+        </p:blipFill>
+        <p:spPr>
+          <a:xfrm>
+            <a:off x="7818120" y="45720"/>
+            <a:ext cx="658368" cy="658368"/>
+          </a:xfrm>
+          <a:prstGeom prst="rect">
+            <a:avLst/>
+          </a:prstGeom>
+        </p:spPr>
+      </p:pic>
+      <p:sp>
+        <p:nvSpPr>
+          <p:cNvPr id="6" name="TextBox 5"/>
           <p:cNvSpPr txBox="1"/>
           <p:nvPr/>
         </p:nvSpPr>
         <p:spPr>
           <a:xfrm>
-            <a:off x="457200" y="137160"/>
-            <a:ext cx="8229600" cy="640080"/>
+            <a:off x="2286000" y="109728"/>
+            <a:ext cx="5303520" cy="594360"/>
           </a:xfrm>
           <a:prstGeom prst="rect">
             <a:avLst/>
@@ -3308,7 +3702,163 @@
           </a:bodyPr>
           <a:lstStyle/>
           <a:p>
-            <a:pPr>
+            <a:pPr algn="ctr">
+              <a:defRPr sz="1800" b="1">
+                <a:solidFill>
+                  <a:srgbClr val="FFFFFF"/>
+                </a:solidFill>
+              </a:defRPr>
+            </a:pPr>
+            <a:r>
+              <a:t>Demo Modul E — Langkah 4</a:t>
+            </a:r>
+          </a:p>
+        </p:txBody>
+      </p:sp>
+      <p:sp>
+        <p:nvSpPr>
+          <p:cNvPr id="7" name="Rectangle 6"/>
+          <p:cNvSpPr/>
+          <p:nvPr/>
+        </p:nvSpPr>
+        <p:spPr>
+          <a:xfrm>
+            <a:off x="0" y="6446520"/>
+            <a:ext cx="9144000" cy="411480"/>
+          </a:xfrm>
+          <a:prstGeom prst="rect">
+            <a:avLst/>
+          </a:prstGeom>
+          <a:solidFill>
+            <a:srgbClr val="2E7D32"/>
+          </a:solidFill>
+          <a:ln>
+            <a:noFill/>
+          </a:ln>
+        </p:spPr>
+        <p:style>
+          <a:lnRef idx="1">
+            <a:schemeClr val="accent1"/>
+          </a:lnRef>
+          <a:fillRef idx="3">
+            <a:schemeClr val="accent1"/>
+          </a:fillRef>
+          <a:effectRef idx="2">
+            <a:schemeClr val="accent1"/>
+          </a:effectRef>
+          <a:fontRef idx="minor">
+            <a:schemeClr val="lt1"/>
+          </a:fontRef>
+        </p:style>
+        <p:txBody>
+          <a:bodyPr rtlCol="0" anchor="ctr"/>
+          <a:lstStyle/>
+          <a:p>
+            <a:pPr algn="ctr"/>
+          </a:p>
+        </p:txBody>
+      </p:sp>
+      <p:sp>
+        <p:nvSpPr>
+          <p:cNvPr id="8" name="TextBox 7"/>
+          <p:cNvSpPr txBox="1"/>
+          <p:nvPr/>
+        </p:nvSpPr>
+        <p:spPr>
+          <a:xfrm>
+            <a:off x="274320" y="6492240"/>
+            <a:ext cx="8595360" cy="320040"/>
+          </a:xfrm>
+          <a:prstGeom prst="rect">
+            <a:avLst/>
+          </a:prstGeom>
+          <a:noFill/>
+        </p:spPr>
+        <p:txBody>
+          <a:bodyPr wrap="none">
+            <a:spAutoFit/>
+          </a:bodyPr>
+          <a:lstStyle/>
+          <a:p>
+            <a:pPr algn="ctr">
+              <a:defRPr sz="1000">
+                <a:solidFill>
+                  <a:srgbClr val="FFFFFF"/>
+                </a:solidFill>
+              </a:defRPr>
+            </a:pPr>
+            <a:r>
+              <a:t>LKS Nasional 2026 — Robot Bergerak Otonom | Kemendikdasmen</a:t>
+            </a:r>
+          </a:p>
+        </p:txBody>
+      </p:sp>
+      <p:sp>
+        <p:nvSpPr>
+          <p:cNvPr id="9" name="Rectangle 8"/>
+          <p:cNvSpPr/>
+          <p:nvPr/>
+        </p:nvSpPr>
+        <p:spPr>
+          <a:xfrm>
+            <a:off x="457200" y="1005840"/>
+            <a:ext cx="640080" cy="640080"/>
+          </a:xfrm>
+          <a:prstGeom prst="rect">
+            <a:avLst/>
+          </a:prstGeom>
+          <a:solidFill>
+            <a:srgbClr val="ED7D31"/>
+          </a:solidFill>
+          <a:ln>
+            <a:noFill/>
+          </a:ln>
+        </p:spPr>
+        <p:style>
+          <a:lnRef idx="1">
+            <a:schemeClr val="accent1"/>
+          </a:lnRef>
+          <a:fillRef idx="3">
+            <a:schemeClr val="accent1"/>
+          </a:fillRef>
+          <a:effectRef idx="2">
+            <a:schemeClr val="accent1"/>
+          </a:effectRef>
+          <a:fontRef idx="minor">
+            <a:schemeClr val="lt1"/>
+          </a:fontRef>
+        </p:style>
+        <p:txBody>
+          <a:bodyPr rtlCol="0" anchor="ctr"/>
+          <a:lstStyle/>
+          <a:p>
+            <a:pPr algn="ctr"/>
+          </a:p>
+        </p:txBody>
+      </p:sp>
+      <p:sp>
+        <p:nvSpPr>
+          <p:cNvPr id="10" name="TextBox 9"/>
+          <p:cNvSpPr txBox="1"/>
+          <p:nvPr/>
+        </p:nvSpPr>
+        <p:spPr>
+          <a:xfrm>
+            <a:off x="457200" y="1078992"/>
+            <a:ext cx="640080" cy="502920"/>
+          </a:xfrm>
+          <a:prstGeom prst="rect">
+            <a:avLst/>
+          </a:prstGeom>
+          <a:noFill/>
+        </p:spPr>
+        <p:txBody>
+          <a:bodyPr wrap="none">
+            <a:spAutoFit/>
+          </a:bodyPr>
+          <a:lstStyle/>
+          <a:p>
+            <a:pPr algn="ctr">
               <a:defRPr sz="2200" b="1">
                 <a:solidFill>
                   <a:srgbClr val="FFFFFF"/>
@@ -3316,21 +3866,56 @@
               </a:defRPr>
             </a:pPr>
             <a:r>
-              <a:t>Modul B — Jurnal Teknis (10 poin)</a:t>
-            </a:r>
-          </a:p>
-        </p:txBody>
-      </p:sp>
-      <p:sp>
-        <p:nvSpPr>
-          <p:cNvPr id="4" name="TextBox 3"/>
+              <a:t>4</a:t>
+            </a:r>
+          </a:p>
+        </p:txBody>
+      </p:sp>
+      <p:sp>
+        <p:nvSpPr>
+          <p:cNvPr id="11" name="TextBox 10"/>
           <p:cNvSpPr txBox="1"/>
           <p:nvPr/>
         </p:nvSpPr>
         <p:spPr>
           <a:xfrm>
-            <a:off x="548640" y="1005840"/>
-            <a:ext cx="8046720" cy="5029200"/>
+            <a:off x="1280160" y="960120"/>
+            <a:ext cx="7315200" cy="731520"/>
+          </a:xfrm>
+          <a:prstGeom prst="rect">
+            <a:avLst/>
+          </a:prstGeom>
+          <a:noFill/>
+        </p:spPr>
+        <p:txBody>
+          <a:bodyPr wrap="none">
+            <a:spAutoFit/>
+          </a:bodyPr>
+          <a:lstStyle/>
+          <a:p>
+            <a:pPr>
+              <a:defRPr sz="2200" b="1">
+                <a:solidFill>
+                  <a:srgbClr val="1F4E79"/>
+                </a:solidFill>
+              </a:defRPr>
+            </a:pPr>
+            <a:r>
+              <a:t>Pengacakan Posisi Kubus</a:t>
+            </a:r>
+          </a:p>
+        </p:txBody>
+      </p:sp>
+      <p:sp>
+        <p:nvSpPr>
+          <p:cNvPr id="12" name="TextBox 11"/>
+          <p:cNvSpPr txBox="1"/>
+          <p:nvPr/>
+        </p:nvSpPr>
+        <p:spPr>
+          <a:xfrm>
+            <a:off x="548640" y="1828800"/>
+            <a:ext cx="8046720" cy="4114800"/>
           </a:xfrm>
           <a:prstGeom prst="rect">
             <a:avLst/>
@@ -3345,61 +3930,125 @@
           <a:p>
             <a:pPr>
               <a:spcAft>
-                <a:spcPts val="800"/>
+                <a:spcPts val="1000"/>
               </a:spcAft>
-              <a:defRPr sz="1600">
+              <a:defRPr sz="1500"/>
+            </a:pPr>
+            <a:r>
+              <a:t>• Juri/acara mengacak posisi 9 kubus (rak + stand)</a:t>
+            </a:r>
+          </a:p>
+          <a:p>
+            <a:pPr>
+              <a:spcAft>
+                <a:spcPts val="1000"/>
+              </a:spcAft>
+              <a:defRPr sz="1500"/>
+            </a:pPr>
+            <a:r>
+              <a:t>• Beberapa kubus sengaja di posisi SALAH — perlu dipindahkan robot</a:t>
+            </a:r>
+          </a:p>
+          <a:p>
+            <a:pPr>
+              <a:spcAft>
+                <a:spcPts val="1000"/>
+              </a:spcAft>
+              <a:defRPr sz="1500"/>
+            </a:pPr>
+            <a:r>
+              <a:t>• Isi templates/lembar-undian-kubus.csv atau Excel Modul E</a:t>
+            </a:r>
+          </a:p>
+          <a:p>
+            <a:pPr>
+              <a:spcAft>
+                <a:spcPts val="1000"/>
+              </a:spcAft>
+              <a:defRPr sz="1500"/>
+            </a:pPr>
+            <a:r>
+              <a:t>• Peserta TIDAK ikut mengatur posisi setelah SIAP</a:t>
+            </a:r>
+          </a:p>
+        </p:txBody>
+      </p:sp>
+      <p:sp>
+        <p:nvSpPr>
+          <p:cNvPr id="13" name="Rectangle 12"/>
+          <p:cNvSpPr/>
+          <p:nvPr/>
+        </p:nvSpPr>
+        <p:spPr>
+          <a:xfrm>
+            <a:off x="457200" y="5669280"/>
+            <a:ext cx="8229600" cy="640080"/>
+          </a:xfrm>
+          <a:prstGeom prst="rect">
+            <a:avLst/>
+          </a:prstGeom>
+          <a:solidFill>
+            <a:srgbClr val="FFF3E0"/>
+          </a:solidFill>
+          <a:ln>
+            <a:solidFill>
+              <a:srgbClr val="ED7D31"/>
+            </a:solidFill>
+          </a:ln>
+        </p:spPr>
+        <p:style>
+          <a:lnRef idx="1">
+            <a:schemeClr val="accent1"/>
+          </a:lnRef>
+          <a:fillRef idx="3">
+            <a:schemeClr val="accent1"/>
+          </a:fillRef>
+          <a:effectRef idx="2">
+            <a:schemeClr val="accent1"/>
+          </a:effectRef>
+          <a:fontRef idx="minor">
+            <a:schemeClr val="lt1"/>
+          </a:fontRef>
+        </p:style>
+        <p:txBody>
+          <a:bodyPr rtlCol="0" anchor="ctr"/>
+          <a:lstStyle/>
+          <a:p>
+            <a:pPr algn="ctr"/>
+          </a:p>
+        </p:txBody>
+      </p:sp>
+      <p:sp>
+        <p:nvSpPr>
+          <p:cNvPr id="14" name="TextBox 13"/>
+          <p:cNvSpPr txBox="1"/>
+          <p:nvPr/>
+        </p:nvSpPr>
+        <p:spPr>
+          <a:xfrm>
+            <a:off x="594360" y="5742432"/>
+            <a:ext cx="7955279" cy="502920"/>
+          </a:xfrm>
+          <a:prstGeom prst="rect">
+            <a:avLst/>
+          </a:prstGeom>
+          <a:noFill/>
+        </p:spPr>
+        <p:txBody>
+          <a:bodyPr wrap="none">
+            <a:spAutoFit/>
+          </a:bodyPr>
+          <a:lstStyle/>
+          <a:p>
+            <a:pPr>
+              <a:defRPr sz="1200" b="1">
                 <a:solidFill>
-                  <a:srgbClr val="333333"/>
+                  <a:srgbClr val="ED7D31"/>
                 </a:solidFill>
               </a:defRPr>
             </a:pPr>
             <a:r>
-              <a:t>Judgement 8 poin: fabrikasi, wiring, integrasi, kalibrasi, optimasi, kelengkapan dokumen</a:t>
-            </a:r>
-          </a:p>
-          <a:p>
-            <a:pPr>
-              <a:spcAft>
-                <a:spcPts val="800"/>
-              </a:spcAft>
-              <a:defRPr sz="1600">
-                <a:solidFill>
-                  <a:srgbClr val="333333"/>
-                </a:solidFill>
-              </a:defRPr>
-            </a:pPr>
-            <a:r>
-              <a:t>Measurement 2 poin: ketepatan pengumpulan sesuai deadline</a:t>
-            </a:r>
-          </a:p>
-          <a:p>
-            <a:pPr>
-              <a:spcAft>
-                <a:spcPts val="800"/>
-              </a:spcAft>
-              <a:defRPr sz="1600">
-                <a:solidFill>
-                  <a:srgbClr val="333333"/>
-                </a:solidFill>
-              </a:defRPr>
-            </a:pPr>
-            <a:r>
-              <a:t>Maks. 4 lembar isi (8 halaman A4) + sampul</a:t>
-            </a:r>
-          </a:p>
-          <a:p>
-            <a:pPr>
-              <a:spcAft>
-                <a:spcPts val="800"/>
-              </a:spcAft>
-              <a:defRPr sz="1600">
-                <a:solidFill>
-                  <a:srgbClr val="333333"/>
-                </a:solidFill>
-              </a:defRPr>
-            </a:pPr>
-            <a:r>
-              <a:t>Wajib: desain mekanik, diagram blok, BOM, algoritma navigasi &amp; visi, flowchart, data kalibrasi</a:t>
+              <a:t>⚠ Juri: Setelah SIAP, acak ulang — bukan hanya sebelum run pertama.</a:t>
             </a:r>
           </a:p>
         </p:txBody>
@@ -3431,7 +4080,7 @@
         <p:spPr>
           <a:xfrm>
             <a:off x="0" y="0"/>
-            <a:ext cx="9144000" cy="822960"/>
+            <a:ext cx="9144000" cy="777240"/>
           </a:xfrm>
           <a:prstGeom prst="rect">
             <a:avLst/>
@@ -3467,14 +4116,105 @@
       </p:sp>
       <p:sp>
         <p:nvSpPr>
-          <p:cNvPr id="3" name="TextBox 2"/>
+          <p:cNvPr id="3" name="Rectangle 2"/>
+          <p:cNvSpPr/>
+          <p:nvPr/>
+        </p:nvSpPr>
+        <p:spPr>
+          <a:xfrm>
+            <a:off x="0" y="777240"/>
+            <a:ext cx="9144000" cy="54864"/>
+          </a:xfrm>
+          <a:prstGeom prst="rect">
+            <a:avLst/>
+          </a:prstGeom>
+          <a:solidFill>
+            <a:srgbClr val="ED7D31"/>
+          </a:solidFill>
+          <a:ln>
+            <a:noFill/>
+          </a:ln>
+        </p:spPr>
+        <p:style>
+          <a:lnRef idx="1">
+            <a:schemeClr val="accent1"/>
+          </a:lnRef>
+          <a:fillRef idx="3">
+            <a:schemeClr val="accent1"/>
+          </a:fillRef>
+          <a:effectRef idx="2">
+            <a:schemeClr val="accent1"/>
+          </a:effectRef>
+          <a:fontRef idx="minor">
+            <a:schemeClr val="lt1"/>
+          </a:fontRef>
+        </p:style>
+        <p:txBody>
+          <a:bodyPr rtlCol="0" anchor="ctr"/>
+          <a:lstStyle/>
+          <a:p>
+            <a:pPr algn="ctr"/>
+          </a:p>
+        </p:txBody>
+      </p:sp>
+      <p:pic>
+        <p:nvPicPr>
+          <p:cNvPr id="4" name="Picture 3" descr="logo-kemendikdasmen.png"/>
+          <p:cNvPicPr>
+            <a:picLocks noChangeAspect="1"/>
+          </p:cNvPicPr>
+          <p:nvPr/>
+        </p:nvPicPr>
+        <p:blipFill>
+          <a:blip r:embed="rId2"/>
+          <a:stretch>
+            <a:fillRect/>
+          </a:stretch>
+        </p:blipFill>
+        <p:spPr>
+          <a:xfrm>
+            <a:off x="137160" y="73152"/>
+            <a:ext cx="1619157" cy="502920"/>
+          </a:xfrm>
+          <a:prstGeom prst="rect">
+            <a:avLst/>
+          </a:prstGeom>
+        </p:spPr>
+      </p:pic>
+      <p:pic>
+        <p:nvPicPr>
+          <p:cNvPr id="5" name="Picture 4" descr="logo-lks-dikmen.png"/>
+          <p:cNvPicPr>
+            <a:picLocks noChangeAspect="1"/>
+          </p:cNvPicPr>
+          <p:nvPr/>
+        </p:nvPicPr>
+        <p:blipFill>
+          <a:blip r:embed="rId3"/>
+          <a:stretch>
+            <a:fillRect/>
+          </a:stretch>
+        </p:blipFill>
+        <p:spPr>
+          <a:xfrm>
+            <a:off x="7818120" y="45720"/>
+            <a:ext cx="658368" cy="658368"/>
+          </a:xfrm>
+          <a:prstGeom prst="rect">
+            <a:avLst/>
+          </a:prstGeom>
+        </p:spPr>
+      </p:pic>
+      <p:sp>
+        <p:nvSpPr>
+          <p:cNvPr id="6" name="TextBox 5"/>
           <p:cNvSpPr txBox="1"/>
           <p:nvPr/>
         </p:nvSpPr>
         <p:spPr>
           <a:xfrm>
-            <a:off x="457200" y="137160"/>
-            <a:ext cx="8229600" cy="640080"/>
+            <a:off x="2286000" y="109728"/>
+            <a:ext cx="5303520" cy="594360"/>
           </a:xfrm>
           <a:prstGeom prst="rect">
             <a:avLst/>
@@ -3487,7 +4227,163 @@
           </a:bodyPr>
           <a:lstStyle/>
           <a:p>
-            <a:pPr>
+            <a:pPr algn="ctr">
+              <a:defRPr sz="1800" b="1">
+                <a:solidFill>
+                  <a:srgbClr val="FFFFFF"/>
+                </a:solidFill>
+              </a:defRPr>
+            </a:pPr>
+            <a:r>
+              <a:t>Demo Modul E — Langkah 5</a:t>
+            </a:r>
+          </a:p>
+        </p:txBody>
+      </p:sp>
+      <p:sp>
+        <p:nvSpPr>
+          <p:cNvPr id="7" name="Rectangle 6"/>
+          <p:cNvSpPr/>
+          <p:nvPr/>
+        </p:nvSpPr>
+        <p:spPr>
+          <a:xfrm>
+            <a:off x="0" y="6446520"/>
+            <a:ext cx="9144000" cy="411480"/>
+          </a:xfrm>
+          <a:prstGeom prst="rect">
+            <a:avLst/>
+          </a:prstGeom>
+          <a:solidFill>
+            <a:srgbClr val="2E7D32"/>
+          </a:solidFill>
+          <a:ln>
+            <a:noFill/>
+          </a:ln>
+        </p:spPr>
+        <p:style>
+          <a:lnRef idx="1">
+            <a:schemeClr val="accent1"/>
+          </a:lnRef>
+          <a:fillRef idx="3">
+            <a:schemeClr val="accent1"/>
+          </a:fillRef>
+          <a:effectRef idx="2">
+            <a:schemeClr val="accent1"/>
+          </a:effectRef>
+          <a:fontRef idx="minor">
+            <a:schemeClr val="lt1"/>
+          </a:fontRef>
+        </p:style>
+        <p:txBody>
+          <a:bodyPr rtlCol="0" anchor="ctr"/>
+          <a:lstStyle/>
+          <a:p>
+            <a:pPr algn="ctr"/>
+          </a:p>
+        </p:txBody>
+      </p:sp>
+      <p:sp>
+        <p:nvSpPr>
+          <p:cNvPr id="8" name="TextBox 7"/>
+          <p:cNvSpPr txBox="1"/>
+          <p:nvPr/>
+        </p:nvSpPr>
+        <p:spPr>
+          <a:xfrm>
+            <a:off x="274320" y="6492240"/>
+            <a:ext cx="8595360" cy="320040"/>
+          </a:xfrm>
+          <a:prstGeom prst="rect">
+            <a:avLst/>
+          </a:prstGeom>
+          <a:noFill/>
+        </p:spPr>
+        <p:txBody>
+          <a:bodyPr wrap="none">
+            <a:spAutoFit/>
+          </a:bodyPr>
+          <a:lstStyle/>
+          <a:p>
+            <a:pPr algn="ctr">
+              <a:defRPr sz="1000">
+                <a:solidFill>
+                  <a:srgbClr val="FFFFFF"/>
+                </a:solidFill>
+              </a:defRPr>
+            </a:pPr>
+            <a:r>
+              <a:t>LKS Nasional 2026 — Robot Bergerak Otonom | Kemendikdasmen</a:t>
+            </a:r>
+          </a:p>
+        </p:txBody>
+      </p:sp>
+      <p:sp>
+        <p:nvSpPr>
+          <p:cNvPr id="9" name="Rectangle 8"/>
+          <p:cNvSpPr/>
+          <p:nvPr/>
+        </p:nvSpPr>
+        <p:spPr>
+          <a:xfrm>
+            <a:off x="457200" y="1005840"/>
+            <a:ext cx="640080" cy="640080"/>
+          </a:xfrm>
+          <a:prstGeom prst="rect">
+            <a:avLst/>
+          </a:prstGeom>
+          <a:solidFill>
+            <a:srgbClr val="ED7D31"/>
+          </a:solidFill>
+          <a:ln>
+            <a:noFill/>
+          </a:ln>
+        </p:spPr>
+        <p:style>
+          <a:lnRef idx="1">
+            <a:schemeClr val="accent1"/>
+          </a:lnRef>
+          <a:fillRef idx="3">
+            <a:schemeClr val="accent1"/>
+          </a:fillRef>
+          <a:effectRef idx="2">
+            <a:schemeClr val="accent1"/>
+          </a:effectRef>
+          <a:fontRef idx="minor">
+            <a:schemeClr val="lt1"/>
+          </a:fontRef>
+        </p:style>
+        <p:txBody>
+          <a:bodyPr rtlCol="0" anchor="ctr"/>
+          <a:lstStyle/>
+          <a:p>
+            <a:pPr algn="ctr"/>
+          </a:p>
+        </p:txBody>
+      </p:sp>
+      <p:sp>
+        <p:nvSpPr>
+          <p:cNvPr id="10" name="TextBox 9"/>
+          <p:cNvSpPr txBox="1"/>
+          <p:nvPr/>
+        </p:nvSpPr>
+        <p:spPr>
+          <a:xfrm>
+            <a:off x="457200" y="1078992"/>
+            <a:ext cx="640080" cy="502920"/>
+          </a:xfrm>
+          <a:prstGeom prst="rect">
+            <a:avLst/>
+          </a:prstGeom>
+          <a:noFill/>
+        </p:spPr>
+        <p:txBody>
+          <a:bodyPr wrap="none">
+            <a:spAutoFit/>
+          </a:bodyPr>
+          <a:lstStyle/>
+          <a:p>
+            <a:pPr algn="ctr">
               <a:defRPr sz="2200" b="1">
                 <a:solidFill>
                   <a:srgbClr val="FFFFFF"/>
@@ -3495,21 +4391,56 @@
               </a:defRPr>
             </a:pPr>
             <a:r>
-              <a:t>Modul C — Perakitan Robot (10 poin)</a:t>
-            </a:r>
-          </a:p>
-        </p:txBody>
-      </p:sp>
-      <p:sp>
-        <p:nvSpPr>
-          <p:cNvPr id="4" name="TextBox 3"/>
+              <a:t>5</a:t>
+            </a:r>
+          </a:p>
+        </p:txBody>
+      </p:sp>
+      <p:sp>
+        <p:nvSpPr>
+          <p:cNvPr id="11" name="TextBox 10"/>
           <p:cNvSpPr txBox="1"/>
           <p:nvPr/>
         </p:nvSpPr>
         <p:spPr>
           <a:xfrm>
-            <a:off x="548640" y="1005840"/>
-            <a:ext cx="8046720" cy="5029200"/>
+            <a:off x="1280160" y="960120"/>
+            <a:ext cx="7315200" cy="731520"/>
+          </a:xfrm>
+          <a:prstGeom prst="rect">
+            <a:avLst/>
+          </a:prstGeom>
+          <a:noFill/>
+        </p:spPr>
+        <p:txBody>
+          <a:bodyPr wrap="none">
+            <a:spAutoFit/>
+          </a:bodyPr>
+          <a:lstStyle/>
+          <a:p>
+            <a:pPr>
+              <a:defRPr sz="2200" b="1">
+                <a:solidFill>
+                  <a:srgbClr val="1F4E79"/>
+                </a:solidFill>
+              </a:defRPr>
+            </a:pPr>
+            <a:r>
+              <a:t>Sinyal START &amp; Run Otonom</a:t>
+            </a:r>
+          </a:p>
+        </p:txBody>
+      </p:sp>
+      <p:sp>
+        <p:nvSpPr>
+          <p:cNvPr id="12" name="TextBox 11"/>
+          <p:cNvSpPr txBox="1"/>
+          <p:nvPr/>
+        </p:nvSpPr>
+        <p:spPr>
+          <a:xfrm>
+            <a:off x="548640" y="1828800"/>
+            <a:ext cx="8046720" cy="4114800"/>
           </a:xfrm>
           <a:prstGeom prst="rect">
             <a:avLst/>
@@ -3524,76 +4455,125 @@
           <a:p>
             <a:pPr>
               <a:spcAft>
-                <a:spcPts val="800"/>
+                <a:spcPts val="1000"/>
               </a:spcAft>
-              <a:defRPr sz="1600">
+              <a:defRPr sz="1500"/>
+            </a:pPr>
+            <a:r>
+              <a:t>• Juri beri sinyal START</a:t>
+            </a:r>
+          </a:p>
+          <a:p>
+            <a:pPr>
+              <a:spcAft>
+                <a:spcPts val="1000"/>
+              </a:spcAft>
+              <a:defRPr sz="1500"/>
+            </a:pPr>
+            <a:r>
+              <a:t>• Peserta menekan tombol START pada robot (bukan keyboard)</a:t>
+            </a:r>
+          </a:p>
+          <a:p>
+            <a:pPr>
+              <a:spcAft>
+                <a:spcPts val="1000"/>
+              </a:spcAft>
+              <a:defRPr sz="1500"/>
+            </a:pPr>
+            <a:r>
+              <a:t>• Robot bergerak, navigasi, pick &amp; place secara otonom</a:t>
+            </a:r>
+          </a:p>
+          <a:p>
+            <a:pPr>
+              <a:spcAft>
+                <a:spcPts val="1000"/>
+              </a:spcAft>
+              <a:defRPr sz="1500"/>
+            </a:pPr>
+            <a:r>
+              <a:t>• Juri catat kronologi di lembar-run-otonom.csv</a:t>
+            </a:r>
+          </a:p>
+        </p:txBody>
+      </p:sp>
+      <p:sp>
+        <p:nvSpPr>
+          <p:cNvPr id="13" name="Rectangle 12"/>
+          <p:cNvSpPr/>
+          <p:nvPr/>
+        </p:nvSpPr>
+        <p:spPr>
+          <a:xfrm>
+            <a:off x="457200" y="5669280"/>
+            <a:ext cx="8229600" cy="640080"/>
+          </a:xfrm>
+          <a:prstGeom prst="rect">
+            <a:avLst/>
+          </a:prstGeom>
+          <a:solidFill>
+            <a:srgbClr val="FFF3E0"/>
+          </a:solidFill>
+          <a:ln>
+            <a:solidFill>
+              <a:srgbClr val="ED7D31"/>
+            </a:solidFill>
+          </a:ln>
+        </p:spPr>
+        <p:style>
+          <a:lnRef idx="1">
+            <a:schemeClr val="accent1"/>
+          </a:lnRef>
+          <a:fillRef idx="3">
+            <a:schemeClr val="accent1"/>
+          </a:fillRef>
+          <a:effectRef idx="2">
+            <a:schemeClr val="accent1"/>
+          </a:effectRef>
+          <a:fontRef idx="minor">
+            <a:schemeClr val="lt1"/>
+          </a:fontRef>
+        </p:style>
+        <p:txBody>
+          <a:bodyPr rtlCol="0" anchor="ctr"/>
+          <a:lstStyle/>
+          <a:p>
+            <a:pPr algn="ctr"/>
+          </a:p>
+        </p:txBody>
+      </p:sp>
+      <p:sp>
+        <p:nvSpPr>
+          <p:cNvPr id="14" name="TextBox 13"/>
+          <p:cNvSpPr txBox="1"/>
+          <p:nvPr/>
+        </p:nvSpPr>
+        <p:spPr>
+          <a:xfrm>
+            <a:off x="594360" y="5742432"/>
+            <a:ext cx="7955279" cy="502920"/>
+          </a:xfrm>
+          <a:prstGeom prst="rect">
+            <a:avLst/>
+          </a:prstGeom>
+          <a:noFill/>
+        </p:spPr>
+        <p:txBody>
+          <a:bodyPr wrap="none">
+            <a:spAutoFit/>
+          </a:bodyPr>
+          <a:lstStyle/>
+          <a:p>
+            <a:pPr>
+              <a:defRPr sz="1200" b="1">
                 <a:solidFill>
-                  <a:srgbClr val="333333"/>
+                  <a:srgbClr val="ED7D31"/>
                 </a:solidFill>
               </a:defRPr>
             </a:pPr>
             <a:r>
-              <a:t>WAJIB: L-Channel panitia sebagai penyangga utama sistem angkat</a:t>
-            </a:r>
-          </a:p>
-          <a:p>
-            <a:pPr>
-              <a:spcAft>
-                <a:spcPts val="800"/>
-              </a:spcAft>
-              <a:defRPr sz="1600">
-                <a:solidFill>
-                  <a:srgbClr val="333333"/>
-                </a:solidFill>
-              </a:defRPr>
-            </a:pPr>
-            <a:r>
-              <a:t>Integrasi lift/gripper + rewiring di lokasi — batas 2 jam</a:t>
-            </a:r>
-          </a:p>
-          <a:p>
-            <a:pPr>
-              <a:spcAft>
-                <a:spcPts val="800"/>
-              </a:spcAft>
-              <a:defRPr sz="1600">
-                <a:solidFill>
-                  <a:srgbClr val="333333"/>
-                </a:solidFill>
-              </a:defRPr>
-            </a:pPr>
-            <a:r>
-              <a:t>Motor kompatibel: JGA-25 / PG36 gear head DC</a:t>
-            </a:r>
-          </a:p>
-          <a:p>
-            <a:pPr>
-              <a:spcAft>
-                <a:spcPts val="800"/>
-              </a:spcAft>
-              <a:defRPr sz="1600">
-                <a:solidFill>
-                  <a:srgbClr val="333333"/>
-                </a:solidFill>
-              </a:defRPr>
-            </a:pPr>
-            <a:r>
-              <a:t>Inspeksi: L-Channel benar, kabel aman, tombol STOP merah berfungsi</a:t>
-            </a:r>
-          </a:p>
-          <a:p>
-            <a:pPr>
-              <a:spcAft>
-                <a:spcPts val="800"/>
-              </a:spcAft>
-              <a:defRPr sz="1600">
-                <a:solidFill>
-                  <a:srgbClr val="333333"/>
-                </a:solidFill>
-              </a:defRPr>
-            </a:pPr>
-            <a:r>
-              <a:t>CAD: drive.google.com (folder L-Channel resmi)</a:t>
+              <a:t>⚠ Juri: Peserta tidak boleh menyentuh robot setelah START.</a:t>
             </a:r>
           </a:p>
         </p:txBody>
@@ -3624,8 +4604,8 @@
         </p:nvSpPr>
         <p:spPr>
           <a:xfrm>
-            <a:off x="0" y="2286000"/>
-            <a:ext cx="9144000" cy="1097280"/>
+            <a:off x="0" y="0"/>
+            <a:ext cx="9144000" cy="777240"/>
           </a:xfrm>
           <a:prstGeom prst="rect">
             <a:avLst/>
@@ -3661,14 +4641,105 @@
       </p:sp>
       <p:sp>
         <p:nvSpPr>
-          <p:cNvPr id="3" name="TextBox 2"/>
+          <p:cNvPr id="3" name="Rectangle 2"/>
+          <p:cNvSpPr/>
+          <p:nvPr/>
+        </p:nvSpPr>
+        <p:spPr>
+          <a:xfrm>
+            <a:off x="0" y="777240"/>
+            <a:ext cx="9144000" cy="54864"/>
+          </a:xfrm>
+          <a:prstGeom prst="rect">
+            <a:avLst/>
+          </a:prstGeom>
+          <a:solidFill>
+            <a:srgbClr val="ED7D31"/>
+          </a:solidFill>
+          <a:ln>
+            <a:noFill/>
+          </a:ln>
+        </p:spPr>
+        <p:style>
+          <a:lnRef idx="1">
+            <a:schemeClr val="accent1"/>
+          </a:lnRef>
+          <a:fillRef idx="3">
+            <a:schemeClr val="accent1"/>
+          </a:fillRef>
+          <a:effectRef idx="2">
+            <a:schemeClr val="accent1"/>
+          </a:effectRef>
+          <a:fontRef idx="minor">
+            <a:schemeClr val="lt1"/>
+          </a:fontRef>
+        </p:style>
+        <p:txBody>
+          <a:bodyPr rtlCol="0" anchor="ctr"/>
+          <a:lstStyle/>
+          <a:p>
+            <a:pPr algn="ctr"/>
+          </a:p>
+        </p:txBody>
+      </p:sp>
+      <p:pic>
+        <p:nvPicPr>
+          <p:cNvPr id="4" name="Picture 3" descr="logo-kemendikdasmen.png"/>
+          <p:cNvPicPr>
+            <a:picLocks noChangeAspect="1"/>
+          </p:cNvPicPr>
+          <p:nvPr/>
+        </p:nvPicPr>
+        <p:blipFill>
+          <a:blip r:embed="rId2"/>
+          <a:stretch>
+            <a:fillRect/>
+          </a:stretch>
+        </p:blipFill>
+        <p:spPr>
+          <a:xfrm>
+            <a:off x="137160" y="73152"/>
+            <a:ext cx="1619157" cy="502920"/>
+          </a:xfrm>
+          <a:prstGeom prst="rect">
+            <a:avLst/>
+          </a:prstGeom>
+        </p:spPr>
+      </p:pic>
+      <p:pic>
+        <p:nvPicPr>
+          <p:cNvPr id="5" name="Picture 4" descr="logo-lks-dikmen.png"/>
+          <p:cNvPicPr>
+            <a:picLocks noChangeAspect="1"/>
+          </p:cNvPicPr>
+          <p:nvPr/>
+        </p:nvPicPr>
+        <p:blipFill>
+          <a:blip r:embed="rId3"/>
+          <a:stretch>
+            <a:fillRect/>
+          </a:stretch>
+        </p:blipFill>
+        <p:spPr>
+          <a:xfrm>
+            <a:off x="7818120" y="45720"/>
+            <a:ext cx="658368" cy="658368"/>
+          </a:xfrm>
+          <a:prstGeom prst="rect">
+            <a:avLst/>
+          </a:prstGeom>
+        </p:spPr>
+      </p:pic>
+      <p:sp>
+        <p:nvSpPr>
+          <p:cNvPr id="6" name="TextBox 5"/>
           <p:cNvSpPr txBox="1"/>
           <p:nvPr/>
         </p:nvSpPr>
         <p:spPr>
           <a:xfrm>
-            <a:off x="457200" y="2331720"/>
-            <a:ext cx="8229600" cy="914400"/>
+            <a:off x="2286000" y="109728"/>
+            <a:ext cx="5303520" cy="594360"/>
           </a:xfrm>
           <a:prstGeom prst="rect">
             <a:avLst/>
@@ -3682,14 +4753,272 @@
           <a:lstStyle/>
           <a:p>
             <a:pPr algn="ctr">
-              <a:defRPr sz="2800" b="1">
+              <a:defRPr sz="1800" b="1">
                 <a:solidFill>
                   <a:srgbClr val="FFFFFF"/>
                 </a:solidFill>
               </a:defRPr>
             </a:pPr>
             <a:r>
-              <a:t>Modul D — Gerakan Dasar (H2)</a:t>
+              <a:t>Demo Modul E — Langkah 6</a:t>
+            </a:r>
+          </a:p>
+        </p:txBody>
+      </p:sp>
+      <p:sp>
+        <p:nvSpPr>
+          <p:cNvPr id="7" name="Rectangle 6"/>
+          <p:cNvSpPr/>
+          <p:nvPr/>
+        </p:nvSpPr>
+        <p:spPr>
+          <a:xfrm>
+            <a:off x="0" y="6446520"/>
+            <a:ext cx="9144000" cy="411480"/>
+          </a:xfrm>
+          <a:prstGeom prst="rect">
+            <a:avLst/>
+          </a:prstGeom>
+          <a:solidFill>
+            <a:srgbClr val="2E7D32"/>
+          </a:solidFill>
+          <a:ln>
+            <a:noFill/>
+          </a:ln>
+        </p:spPr>
+        <p:style>
+          <a:lnRef idx="1">
+            <a:schemeClr val="accent1"/>
+          </a:lnRef>
+          <a:fillRef idx="3">
+            <a:schemeClr val="accent1"/>
+          </a:fillRef>
+          <a:effectRef idx="2">
+            <a:schemeClr val="accent1"/>
+          </a:effectRef>
+          <a:fontRef idx="minor">
+            <a:schemeClr val="lt1"/>
+          </a:fontRef>
+        </p:style>
+        <p:txBody>
+          <a:bodyPr rtlCol="0" anchor="ctr"/>
+          <a:lstStyle/>
+          <a:p>
+            <a:pPr algn="ctr"/>
+          </a:p>
+        </p:txBody>
+      </p:sp>
+      <p:sp>
+        <p:nvSpPr>
+          <p:cNvPr id="8" name="TextBox 7"/>
+          <p:cNvSpPr txBox="1"/>
+          <p:nvPr/>
+        </p:nvSpPr>
+        <p:spPr>
+          <a:xfrm>
+            <a:off x="274320" y="6492240"/>
+            <a:ext cx="8595360" cy="320040"/>
+          </a:xfrm>
+          <a:prstGeom prst="rect">
+            <a:avLst/>
+          </a:prstGeom>
+          <a:noFill/>
+        </p:spPr>
+        <p:txBody>
+          <a:bodyPr wrap="none">
+            <a:spAutoFit/>
+          </a:bodyPr>
+          <a:lstStyle/>
+          <a:p>
+            <a:pPr algn="ctr">
+              <a:defRPr sz="1000">
+                <a:solidFill>
+                  <a:srgbClr val="FFFFFF"/>
+                </a:solidFill>
+              </a:defRPr>
+            </a:pPr>
+            <a:r>
+              <a:t>LKS Nasional 2026 — Robot Bergerak Otonom | Kemendikdasmen</a:t>
+            </a:r>
+          </a:p>
+        </p:txBody>
+      </p:sp>
+      <p:sp>
+        <p:nvSpPr>
+          <p:cNvPr id="9" name="Rectangle 8"/>
+          <p:cNvSpPr/>
+          <p:nvPr/>
+        </p:nvSpPr>
+        <p:spPr>
+          <a:xfrm>
+            <a:off x="457200" y="1005840"/>
+            <a:ext cx="640080" cy="640080"/>
+          </a:xfrm>
+          <a:prstGeom prst="rect">
+            <a:avLst/>
+          </a:prstGeom>
+          <a:solidFill>
+            <a:srgbClr val="ED7D31"/>
+          </a:solidFill>
+          <a:ln>
+            <a:noFill/>
+          </a:ln>
+        </p:spPr>
+        <p:style>
+          <a:lnRef idx="1">
+            <a:schemeClr val="accent1"/>
+          </a:lnRef>
+          <a:fillRef idx="3">
+            <a:schemeClr val="accent1"/>
+          </a:fillRef>
+          <a:effectRef idx="2">
+            <a:schemeClr val="accent1"/>
+          </a:effectRef>
+          <a:fontRef idx="minor">
+            <a:schemeClr val="lt1"/>
+          </a:fontRef>
+        </p:style>
+        <p:txBody>
+          <a:bodyPr rtlCol="0" anchor="ctr"/>
+          <a:lstStyle/>
+          <a:p>
+            <a:pPr algn="ctr"/>
+          </a:p>
+        </p:txBody>
+      </p:sp>
+      <p:sp>
+        <p:nvSpPr>
+          <p:cNvPr id="10" name="TextBox 9"/>
+          <p:cNvSpPr txBox="1"/>
+          <p:nvPr/>
+        </p:nvSpPr>
+        <p:spPr>
+          <a:xfrm>
+            <a:off x="457200" y="1078992"/>
+            <a:ext cx="640080" cy="502920"/>
+          </a:xfrm>
+          <a:prstGeom prst="rect">
+            <a:avLst/>
+          </a:prstGeom>
+          <a:noFill/>
+        </p:spPr>
+        <p:txBody>
+          <a:bodyPr wrap="none">
+            <a:spAutoFit/>
+          </a:bodyPr>
+          <a:lstStyle/>
+          <a:p>
+            <a:pPr algn="ctr">
+              <a:defRPr sz="2200" b="1">
+                <a:solidFill>
+                  <a:srgbClr val="FFFFFF"/>
+                </a:solidFill>
+              </a:defRPr>
+            </a:pPr>
+            <a:r>
+              <a:t>6</a:t>
+            </a:r>
+          </a:p>
+        </p:txBody>
+      </p:sp>
+      <p:sp>
+        <p:nvSpPr>
+          <p:cNvPr id="11" name="TextBox 10"/>
+          <p:cNvSpPr txBox="1"/>
+          <p:nvPr/>
+        </p:nvSpPr>
+        <p:spPr>
+          <a:xfrm>
+            <a:off x="1280160" y="960120"/>
+            <a:ext cx="7315200" cy="731520"/>
+          </a:xfrm>
+          <a:prstGeom prst="rect">
+            <a:avLst/>
+          </a:prstGeom>
+          <a:noFill/>
+        </p:spPr>
+        <p:txBody>
+          <a:bodyPr wrap="none">
+            <a:spAutoFit/>
+          </a:bodyPr>
+          <a:lstStyle/>
+          <a:p>
+            <a:pPr>
+              <a:defRPr sz="2200" b="1">
+                <a:solidFill>
+                  <a:srgbClr val="1F4E79"/>
+                </a:solidFill>
+              </a:defRPr>
+            </a:pPr>
+            <a:r>
+              <a:t>Penilaian Per Kubus (Measurement)</a:t>
+            </a:r>
+          </a:p>
+        </p:txBody>
+      </p:sp>
+      <p:sp>
+        <p:nvSpPr>
+          <p:cNvPr id="12" name="TextBox 11"/>
+          <p:cNvSpPr txBox="1"/>
+          <p:nvPr/>
+        </p:nvSpPr>
+        <p:spPr>
+          <a:xfrm>
+            <a:off x="548640" y="1828800"/>
+            <a:ext cx="8046720" cy="4114800"/>
+          </a:xfrm>
+          <a:prstGeom prst="rect">
+            <a:avLst/>
+          </a:prstGeom>
+          <a:noFill/>
+        </p:spPr>
+        <p:txBody>
+          <a:bodyPr wrap="square">
+            <a:spAutoFit/>
+          </a:bodyPr>
+          <a:lstStyle/>
+          <a:p>
+            <a:pPr>
+              <a:spcAft>
+                <a:spcPts val="1000"/>
+              </a:spcAft>
+              <a:defRPr sz="1500"/>
+            </a:pPr>
+            <a:r>
+              <a:t>• Kubus SUKSES = di slot rak dengan marker warna yang cocok + stabil</a:t>
+            </a:r>
+          </a:p>
+          <a:p>
+            <a:pPr>
+              <a:spcAft>
+                <a:spcPts val="1000"/>
+              </a:spcAft>
+              <a:defRPr sz="1500"/>
+            </a:pPr>
+            <a:r>
+              <a:t>• Isi kolom Hasil (1/0) di Excel Modul E untuk tiap kubus</a:t>
+            </a:r>
+          </a:p>
+          <a:p>
+            <a:pPr>
+              <a:spcAft>
+                <a:spcPts val="1000"/>
+              </a:spcAft>
+              <a:defRPr sz="1500"/>
+            </a:pPr>
+            <a:r>
+              <a:t>• Default: 6,67 poin per kubus × 9 = 60 poin (sesuaikan CIS jika beda)</a:t>
+            </a:r>
+          </a:p>
+          <a:p>
+            <a:pPr>
+              <a:spcAft>
+                <a:spcPts val="1000"/>
+              </a:spcAft>
+              <a:defRPr sz="1500"/>
+            </a:pPr>
+            <a:r>
+              <a:t>• Kubus sudah benar sejak awal — konfirmasi ke CE apakah dapat poin</a:t>
             </a:r>
           </a:p>
         </p:txBody>
@@ -3721,7 +5050,7 @@
         <p:spPr>
           <a:xfrm>
             <a:off x="0" y="0"/>
-            <a:ext cx="9144000" cy="822960"/>
+            <a:ext cx="9144000" cy="777240"/>
           </a:xfrm>
           <a:prstGeom prst="rect">
             <a:avLst/>
@@ -3757,14 +5086,105 @@
       </p:sp>
       <p:sp>
         <p:nvSpPr>
-          <p:cNvPr id="3" name="TextBox 2"/>
+          <p:cNvPr id="3" name="Rectangle 2"/>
+          <p:cNvSpPr/>
+          <p:nvPr/>
+        </p:nvSpPr>
+        <p:spPr>
+          <a:xfrm>
+            <a:off x="0" y="777240"/>
+            <a:ext cx="9144000" cy="54864"/>
+          </a:xfrm>
+          <a:prstGeom prst="rect">
+            <a:avLst/>
+          </a:prstGeom>
+          <a:solidFill>
+            <a:srgbClr val="ED7D31"/>
+          </a:solidFill>
+          <a:ln>
+            <a:noFill/>
+          </a:ln>
+        </p:spPr>
+        <p:style>
+          <a:lnRef idx="1">
+            <a:schemeClr val="accent1"/>
+          </a:lnRef>
+          <a:fillRef idx="3">
+            <a:schemeClr val="accent1"/>
+          </a:fillRef>
+          <a:effectRef idx="2">
+            <a:schemeClr val="accent1"/>
+          </a:effectRef>
+          <a:fontRef idx="minor">
+            <a:schemeClr val="lt1"/>
+          </a:fontRef>
+        </p:style>
+        <p:txBody>
+          <a:bodyPr rtlCol="0" anchor="ctr"/>
+          <a:lstStyle/>
+          <a:p>
+            <a:pPr algn="ctr"/>
+          </a:p>
+        </p:txBody>
+      </p:sp>
+      <p:pic>
+        <p:nvPicPr>
+          <p:cNvPr id="4" name="Picture 3" descr="logo-kemendikdasmen.png"/>
+          <p:cNvPicPr>
+            <a:picLocks noChangeAspect="1"/>
+          </p:cNvPicPr>
+          <p:nvPr/>
+        </p:nvPicPr>
+        <p:blipFill>
+          <a:blip r:embed="rId2"/>
+          <a:stretch>
+            <a:fillRect/>
+          </a:stretch>
+        </p:blipFill>
+        <p:spPr>
+          <a:xfrm>
+            <a:off x="137160" y="73152"/>
+            <a:ext cx="1619157" cy="502920"/>
+          </a:xfrm>
+          <a:prstGeom prst="rect">
+            <a:avLst/>
+          </a:prstGeom>
+        </p:spPr>
+      </p:pic>
+      <p:pic>
+        <p:nvPicPr>
+          <p:cNvPr id="5" name="Picture 4" descr="logo-lks-dikmen.png"/>
+          <p:cNvPicPr>
+            <a:picLocks noChangeAspect="1"/>
+          </p:cNvPicPr>
+          <p:nvPr/>
+        </p:nvPicPr>
+        <p:blipFill>
+          <a:blip r:embed="rId3"/>
+          <a:stretch>
+            <a:fillRect/>
+          </a:stretch>
+        </p:blipFill>
+        <p:spPr>
+          <a:xfrm>
+            <a:off x="7818120" y="45720"/>
+            <a:ext cx="658368" cy="658368"/>
+          </a:xfrm>
+          <a:prstGeom prst="rect">
+            <a:avLst/>
+          </a:prstGeom>
+        </p:spPr>
+      </p:pic>
+      <p:sp>
+        <p:nvSpPr>
+          <p:cNvPr id="6" name="TextBox 5"/>
           <p:cNvSpPr txBox="1"/>
           <p:nvPr/>
         </p:nvSpPr>
         <p:spPr>
           <a:xfrm>
-            <a:off x="457200" y="137160"/>
-            <a:ext cx="8229600" cy="640080"/>
+            <a:off x="2286000" y="109728"/>
+            <a:ext cx="5303520" cy="594360"/>
           </a:xfrm>
           <a:prstGeom prst="rect">
             <a:avLst/>
@@ -3777,29 +5197,72 @@
           </a:bodyPr>
           <a:lstStyle/>
           <a:p>
-            <a:pPr>
-              <a:defRPr sz="2200" b="1">
+            <a:pPr algn="ctr">
+              <a:defRPr sz="1800" b="1">
                 <a:solidFill>
                   <a:srgbClr val="FFFFFF"/>
                 </a:solidFill>
               </a:defRPr>
             </a:pPr>
             <a:r>
-              <a:t>Modul D (12 poin, 15 menit/tim)</a:t>
-            </a:r>
-          </a:p>
-        </p:txBody>
-      </p:sp>
-      <p:sp>
-        <p:nvSpPr>
-          <p:cNvPr id="4" name="TextBox 3"/>
+              <a:t>Contoh Penilaian Run (Latihan)</a:t>
+            </a:r>
+          </a:p>
+        </p:txBody>
+      </p:sp>
+      <p:sp>
+        <p:nvSpPr>
+          <p:cNvPr id="7" name="Rectangle 6"/>
+          <p:cNvSpPr/>
+          <p:nvPr/>
+        </p:nvSpPr>
+        <p:spPr>
+          <a:xfrm>
+            <a:off x="0" y="6446520"/>
+            <a:ext cx="9144000" cy="411480"/>
+          </a:xfrm>
+          <a:prstGeom prst="rect">
+            <a:avLst/>
+          </a:prstGeom>
+          <a:solidFill>
+            <a:srgbClr val="2E7D32"/>
+          </a:solidFill>
+          <a:ln>
+            <a:noFill/>
+          </a:ln>
+        </p:spPr>
+        <p:style>
+          <a:lnRef idx="1">
+            <a:schemeClr val="accent1"/>
+          </a:lnRef>
+          <a:fillRef idx="3">
+            <a:schemeClr val="accent1"/>
+          </a:fillRef>
+          <a:effectRef idx="2">
+            <a:schemeClr val="accent1"/>
+          </a:effectRef>
+          <a:fontRef idx="minor">
+            <a:schemeClr val="lt1"/>
+          </a:fontRef>
+        </p:style>
+        <p:txBody>
+          <a:bodyPr rtlCol="0" anchor="ctr"/>
+          <a:lstStyle/>
+          <a:p>
+            <a:pPr algn="ctr"/>
+          </a:p>
+        </p:txBody>
+      </p:sp>
+      <p:sp>
+        <p:nvSpPr>
+          <p:cNvPr id="8" name="TextBox 7"/>
           <p:cNvSpPr txBox="1"/>
           <p:nvPr/>
         </p:nvSpPr>
         <p:spPr>
           <a:xfrm>
-            <a:off x="548640" y="1005840"/>
-            <a:ext cx="8046720" cy="5029200"/>
+            <a:off x="274320" y="6492240"/>
+            <a:ext cx="8595360" cy="320040"/>
           </a:xfrm>
           <a:prstGeom prst="rect">
             <a:avLst/>
@@ -3807,117 +5270,555 @@
           <a:noFill/>
         </p:spPr>
         <p:txBody>
-          <a:bodyPr wrap="square">
+          <a:bodyPr wrap="none">
             <a:spAutoFit/>
           </a:bodyPr>
           <a:lstStyle/>
           <a:p>
-            <a:pPr>
-              <a:spcAft>
-                <a:spcPts val="800"/>
-              </a:spcAft>
-              <a:defRPr sz="1600">
+            <a:pPr algn="ctr">
+              <a:defRPr sz="1000">
                 <a:solidFill>
-                  <a:srgbClr val="333333"/>
+                  <a:srgbClr val="FFFFFF"/>
                 </a:solidFill>
               </a:defRPr>
             </a:pPr>
             <a:r>
-              <a:t>D1: gerak maju/mundur/kiri/kanan (200–300 mm)</a:t>
-            </a:r>
-          </a:p>
-          <a:p>
-            <a:pPr>
-              <a:spcAft>
-                <a:spcPts val="800"/>
-              </a:spcAft>
-              <a:defRPr sz="1600">
-                <a:solidFill>
-                  <a:srgbClr val="333333"/>
-                </a:solidFill>
-              </a:defRPr>
-            </a:pPr>
-            <a:r>
-              <a:t>D2: deteksi dinding, stop 50–100 mm</a:t>
-            </a:r>
-          </a:p>
-          <a:p>
-            <a:pPr>
-              <a:spcAft>
-                <a:spcPts val="800"/>
-              </a:spcAft>
-              <a:defRPr sz="1600">
-                <a:solidFill>
-                  <a:srgbClr val="333333"/>
-                </a:solidFill>
-              </a:defRPr>
-            </a:pPr>
-            <a:r>
-              <a:t>D3: ikuti garis hitam bentuk U</a:t>
-            </a:r>
-          </a:p>
-          <a:p>
-            <a:pPr>
-              <a:spcAft>
-                <a:spcPts val="800"/>
-              </a:spcAft>
-              <a:defRPr sz="1600">
-                <a:solidFill>
-                  <a:srgbClr val="333333"/>
-                </a:solidFill>
-              </a:defRPr>
-            </a:pPr>
-            <a:r>
-              <a:t>D4–D6: deteksi warna merah/hijau/biru di monitor</a:t>
-            </a:r>
-          </a:p>
-          <a:p>
-            <a:pPr>
-              <a:spcAft>
-                <a:spcPts val="800"/>
-              </a:spcAft>
-              <a:defRPr sz="1600">
-                <a:solidFill>
-                  <a:srgbClr val="333333"/>
-                </a:solidFill>
-              </a:defRPr>
-            </a:pPr>
-            <a:r>
-              <a:t>D7–D8: deteksi lingkaran merah/hijau (O-merah, O-hijau)</a:t>
-            </a:r>
-          </a:p>
-          <a:p>
-            <a:pPr>
-              <a:spcAft>
-                <a:spcPts val="800"/>
-              </a:spcAft>
-              <a:defRPr sz="1600">
-                <a:solidFill>
-                  <a:srgbClr val="333333"/>
-                </a:solidFill>
-              </a:defRPr>
-            </a:pPr>
-            <a:r>
-              <a:t>D9–D10: pick dari rak &amp; place ke standbox — otonom</a:t>
-            </a:r>
-          </a:p>
-          <a:p>
-            <a:pPr>
-              <a:spcAft>
-                <a:spcPts val="800"/>
-              </a:spcAft>
-              <a:defRPr sz="1600">
-                <a:solidFill>
-                  <a:srgbClr val="333333"/>
-                </a:solidFill>
-              </a:defRPr>
-            </a:pPr>
-            <a:r>
-              <a:t>Catatan: bentuk persegi/segitiga tidak diuji eksplisit di Modul D</a:t>
-            </a:r>
-          </a:p>
-        </p:txBody>
-      </p:sp>
+              <a:t>LKS Nasional 2026 — Robot Bergerak Otonom | Kemendikdasmen</a:t>
+            </a:r>
+          </a:p>
+        </p:txBody>
+      </p:sp>
+      <p:graphicFrame>
+        <p:nvGraphicFramePr>
+          <p:cNvPr id="9" name="Table 8"/>
+          <p:cNvGraphicFramePr>
+            <a:graphicFrameLocks noGrp="1"/>
+          </p:cNvGraphicFramePr>
+          <p:nvPr/>
+        </p:nvGraphicFramePr>
+        <p:xfrm>
+          <a:off x="320040" y="1005840"/>
+          <a:ext cx="8503920" cy="2359152"/>
+        </p:xfrm>
+        <a:graphic>
+          <a:graphicData uri="http://schemas.openxmlformats.org/drawingml/2006/table">
+            <a:tbl>
+              <a:tblPr firstRow="1" bandRow="1">
+                <a:tableStyleId>{5C22544A-7EE6-4342-B048-85BDC9FD1C3A}</a:tableStyleId>
+              </a:tblPr>
+              <a:tblGrid>
+                <a:gridCol w="1700784"/>
+                <a:gridCol w="1700784"/>
+                <a:gridCol w="1700784"/>
+                <a:gridCol w="1700784"/>
+                <a:gridCol w="1700784"/>
+              </a:tblGrid>
+              <a:tr h="393192">
+                <a:tc>
+                  <a:txBody>
+                    <a:bodyPr/>
+                    <a:lstStyle/>
+                    <a:p>
+                      <a:pPr>
+                        <a:defRPr b="1" sz="1000">
+                          <a:solidFill>
+                            <a:srgbClr val="FFFFFF"/>
+                          </a:solidFill>
+                        </a:defRPr>
+                      </a:pPr>
+                      <a:r>
+                        <a:t>Kubus</a:t>
+                      </a:r>
+                    </a:p>
+                  </a:txBody>
+                  <a:tcPr>
+                    <a:solidFill>
+                      <a:srgbClr val="1F4E79"/>
+                    </a:solidFill>
+                  </a:tcPr>
+                </a:tc>
+                <a:tc>
+                  <a:txBody>
+                    <a:bodyPr/>
+                    <a:lstStyle/>
+                    <a:p>
+                      <a:pPr>
+                        <a:defRPr b="1" sz="1000">
+                          <a:solidFill>
+                            <a:srgbClr val="FFFFFF"/>
+                          </a:solidFill>
+                        </a:defRPr>
+                      </a:pPr>
+                      <a:r>
+                        <a:t>Awal</a:t>
+                      </a:r>
+                    </a:p>
+                  </a:txBody>
+                  <a:tcPr>
+                    <a:solidFill>
+                      <a:srgbClr val="1F4E79"/>
+                    </a:solidFill>
+                  </a:tcPr>
+                </a:tc>
+                <a:tc>
+                  <a:txBody>
+                    <a:bodyPr/>
+                    <a:lstStyle/>
+                    <a:p>
+                      <a:pPr>
+                        <a:defRPr b="1" sz="1000">
+                          <a:solidFill>
+                            <a:srgbClr val="FFFFFF"/>
+                          </a:solidFill>
+                        </a:defRPr>
+                      </a:pPr>
+                      <a:r>
+                        <a:t>Target</a:t>
+                      </a:r>
+                    </a:p>
+                  </a:txBody>
+                  <a:tcPr>
+                    <a:solidFill>
+                      <a:srgbClr val="1F4E79"/>
+                    </a:solidFill>
+                  </a:tcPr>
+                </a:tc>
+                <a:tc>
+                  <a:txBody>
+                    <a:bodyPr/>
+                    <a:lstStyle/>
+                    <a:p>
+                      <a:pPr>
+                        <a:defRPr b="1" sz="1000">
+                          <a:solidFill>
+                            <a:srgbClr val="FFFFFF"/>
+                          </a:solidFill>
+                        </a:defRPr>
+                      </a:pPr>
+                      <a:r>
+                        <a:t>Hasil</a:t>
+                      </a:r>
+                    </a:p>
+                  </a:txBody>
+                  <a:tcPr>
+                    <a:solidFill>
+                      <a:srgbClr val="1F4E79"/>
+                    </a:solidFill>
+                  </a:tcPr>
+                </a:tc>
+                <a:tc>
+                  <a:txBody>
+                    <a:bodyPr/>
+                    <a:lstStyle/>
+                    <a:p>
+                      <a:pPr>
+                        <a:defRPr b="1" sz="1000">
+                          <a:solidFill>
+                            <a:srgbClr val="FFFFFF"/>
+                          </a:solidFill>
+                        </a:defRPr>
+                      </a:pPr>
+                      <a:r>
+                        <a:t>Skor</a:t>
+                      </a:r>
+                    </a:p>
+                  </a:txBody>
+                  <a:tcPr>
+                    <a:solidFill>
+                      <a:srgbClr val="1F4E79"/>
+                    </a:solidFill>
+                  </a:tcPr>
+                </a:tc>
+              </a:tr>
+              <a:tr h="393192">
+                <a:tc>
+                  <a:txBody>
+                    <a:bodyPr/>
+                    <a:lstStyle/>
+                    <a:p>
+                      <a:pPr>
+                        <a:defRPr sz="1000"/>
+                      </a:pPr>
+                      <a:r>
+                        <a:t>K-M2 Merah□</a:t>
+                      </a:r>
+                    </a:p>
+                  </a:txBody>
+                  <a:tcPr/>
+                </a:tc>
+                <a:tc>
+                  <a:txBody>
+                    <a:bodyPr/>
+                    <a:lstStyle/>
+                    <a:p>
+                      <a:pPr>
+                        <a:defRPr sz="1000"/>
+                      </a:pPr>
+                      <a:r>
+                        <a:t>Stand A</a:t>
+                      </a:r>
+                    </a:p>
+                  </a:txBody>
+                  <a:tcPr/>
+                </a:tc>
+                <a:tc>
+                  <a:txBody>
+                    <a:bodyPr/>
+                    <a:lstStyle/>
+                    <a:p>
+                      <a:pPr>
+                        <a:defRPr sz="1000"/>
+                      </a:pPr>
+                      <a:r>
+                        <a:t>Slot marker merah</a:t>
+                      </a:r>
+                    </a:p>
+                  </a:txBody>
+                  <a:tcPr/>
+                </a:tc>
+                <a:tc>
+                  <a:txBody>
+                    <a:bodyPr/>
+                    <a:lstStyle/>
+                    <a:p>
+                      <a:pPr>
+                        <a:defRPr sz="1000"/>
+                      </a:pPr>
+                      <a:r>
+                        <a:t>Berhasil</a:t>
+                      </a:r>
+                    </a:p>
+                  </a:txBody>
+                  <a:tcPr/>
+                </a:tc>
+                <a:tc>
+                  <a:txBody>
+                    <a:bodyPr/>
+                    <a:lstStyle/>
+                    <a:p>
+                      <a:pPr>
+                        <a:defRPr sz="1000"/>
+                      </a:pPr>
+                      <a:r>
+                        <a:t>6,67</a:t>
+                      </a:r>
+                    </a:p>
+                  </a:txBody>
+                  <a:tcPr/>
+                </a:tc>
+              </a:tr>
+              <a:tr h="393192">
+                <a:tc>
+                  <a:txBody>
+                    <a:bodyPr/>
+                    <a:lstStyle/>
+                    <a:p>
+                      <a:pPr>
+                        <a:defRPr sz="1000"/>
+                      </a:pPr>
+                      <a:r>
+                        <a:t>K-H2 Hijau□</a:t>
+                      </a:r>
+                    </a:p>
+                  </a:txBody>
+                  <a:tcPr/>
+                </a:tc>
+                <a:tc>
+                  <a:txBody>
+                    <a:bodyPr/>
+                    <a:lstStyle/>
+                    <a:p>
+                      <a:pPr>
+                        <a:defRPr sz="1000"/>
+                      </a:pPr>
+                      <a:r>
+                        <a:t>Stand B</a:t>
+                      </a:r>
+                    </a:p>
+                  </a:txBody>
+                  <a:tcPr/>
+                </a:tc>
+                <a:tc>
+                  <a:txBody>
+                    <a:bodyPr/>
+                    <a:lstStyle/>
+                    <a:p>
+                      <a:pPr>
+                        <a:defRPr sz="1000"/>
+                      </a:pPr>
+                      <a:r>
+                        <a:t>Slot marker hijau</a:t>
+                      </a:r>
+                    </a:p>
+                  </a:txBody>
+                  <a:tcPr/>
+                </a:tc>
+                <a:tc>
+                  <a:txBody>
+                    <a:bodyPr/>
+                    <a:lstStyle/>
+                    <a:p>
+                      <a:pPr>
+                        <a:defRPr sz="1000"/>
+                      </a:pPr>
+                      <a:r>
+                        <a:t>Gagal (jatuh)</a:t>
+                      </a:r>
+                    </a:p>
+                  </a:txBody>
+                  <a:tcPr/>
+                </a:tc>
+                <a:tc>
+                  <a:txBody>
+                    <a:bodyPr/>
+                    <a:lstStyle/>
+                    <a:p>
+                      <a:pPr>
+                        <a:defRPr sz="1000"/>
+                      </a:pPr>
+                      <a:r>
+                        <a:t>0</a:t>
+                      </a:r>
+                    </a:p>
+                  </a:txBody>
+                  <a:tcPr/>
+                </a:tc>
+              </a:tr>
+              <a:tr h="393192">
+                <a:tc>
+                  <a:txBody>
+                    <a:bodyPr/>
+                    <a:lstStyle/>
+                    <a:p>
+                      <a:pPr>
+                        <a:defRPr sz="1000"/>
+                      </a:pPr>
+                      <a:r>
+                        <a:t>K-B3 Biru△</a:t>
+                      </a:r>
+                    </a:p>
+                  </a:txBody>
+                  <a:tcPr/>
+                </a:tc>
+                <a:tc>
+                  <a:txBody>
+                    <a:bodyPr/>
+                    <a:lstStyle/>
+                    <a:p>
+                      <a:pPr>
+                        <a:defRPr sz="1000"/>
+                      </a:pPr>
+                      <a:r>
+                        <a:t>Stand C</a:t>
+                      </a:r>
+                    </a:p>
+                  </a:txBody>
+                  <a:tcPr/>
+                </a:tc>
+                <a:tc>
+                  <a:txBody>
+                    <a:bodyPr/>
+                    <a:lstStyle/>
+                    <a:p>
+                      <a:pPr>
+                        <a:defRPr sz="1000"/>
+                      </a:pPr>
+                      <a:r>
+                        <a:t>Slot marker biru</a:t>
+                      </a:r>
+                    </a:p>
+                  </a:txBody>
+                  <a:tcPr/>
+                </a:tc>
+                <a:tc>
+                  <a:txBody>
+                    <a:bodyPr/>
+                    <a:lstStyle/>
+                    <a:p>
+                      <a:pPr>
+                        <a:defRPr sz="1000"/>
+                      </a:pPr>
+                      <a:r>
+                        <a:t>Berhasil</a:t>
+                      </a:r>
+                    </a:p>
+                  </a:txBody>
+                  <a:tcPr/>
+                </a:tc>
+                <a:tc>
+                  <a:txBody>
+                    <a:bodyPr/>
+                    <a:lstStyle/>
+                    <a:p>
+                      <a:pPr>
+                        <a:defRPr sz="1000"/>
+                      </a:pPr>
+                      <a:r>
+                        <a:t>6,67</a:t>
+                      </a:r>
+                    </a:p>
+                  </a:txBody>
+                  <a:tcPr/>
+                </a:tc>
+              </a:tr>
+              <a:tr h="393192">
+                <a:tc>
+                  <a:txBody>
+                    <a:bodyPr/>
+                    <a:lstStyle/>
+                    <a:p>
+                      <a:pPr>
+                        <a:defRPr sz="1000"/>
+                      </a:pPr>
+                      <a:r>
+                        <a:t>K-M1 Merah○</a:t>
+                      </a:r>
+                    </a:p>
+                  </a:txBody>
+                  <a:tcPr/>
+                </a:tc>
+                <a:tc>
+                  <a:txBody>
+                    <a:bodyPr/>
+                    <a:lstStyle/>
+                    <a:p>
+                      <a:pPr>
+                        <a:defRPr sz="1000"/>
+                      </a:pPr>
+                      <a:r>
+                        <a:t>Rak 1 (benar)</a:t>
+                      </a:r>
+                    </a:p>
+                  </a:txBody>
+                  <a:tcPr/>
+                </a:tc>
+                <a:tc>
+                  <a:txBody>
+                    <a:bodyPr/>
+                    <a:lstStyle/>
+                    <a:p>
+                      <a:pPr>
+                        <a:defRPr sz="1000"/>
+                      </a:pPr>
+                      <a:r>
+                        <a:t>—</a:t>
+                      </a:r>
+                    </a:p>
+                  </a:txBody>
+                  <a:tcPr/>
+                </a:tc>
+                <a:tc>
+                  <a:txBody>
+                    <a:bodyPr/>
+                    <a:lstStyle/>
+                    <a:p>
+                      <a:pPr>
+                        <a:defRPr sz="1000"/>
+                      </a:pPr>
+                      <a:r>
+                        <a:t>Sudah benar*</a:t>
+                      </a:r>
+                    </a:p>
+                  </a:txBody>
+                  <a:tcPr/>
+                </a:tc>
+                <a:tc>
+                  <a:txBody>
+                    <a:bodyPr/>
+                    <a:lstStyle/>
+                    <a:p>
+                      <a:pPr>
+                        <a:defRPr sz="1000"/>
+                      </a:pPr>
+                      <a:r>
+                        <a:t>6,67*</a:t>
+                      </a:r>
+                    </a:p>
+                  </a:txBody>
+                  <a:tcPr/>
+                </a:tc>
+              </a:tr>
+              <a:tr h="393192">
+                <a:tc>
+                  <a:txBody>
+                    <a:bodyPr/>
+                    <a:lstStyle/>
+                    <a:p>
+                      <a:pPr>
+                        <a:defRPr sz="1000"/>
+                      </a:pPr>
+                      <a:r>
+                        <a:t>...</a:t>
+                      </a:r>
+                    </a:p>
+                  </a:txBody>
+                  <a:tcPr/>
+                </a:tc>
+                <a:tc>
+                  <a:txBody>
+                    <a:bodyPr/>
+                    <a:lstStyle/>
+                    <a:p>
+                      <a:pPr>
+                        <a:defRPr sz="1000"/>
+                      </a:pPr>
+                      <a:r>
+                        <a:t>...</a:t>
+                      </a:r>
+                    </a:p>
+                  </a:txBody>
+                  <a:tcPr/>
+                </a:tc>
+                <a:tc>
+                  <a:txBody>
+                    <a:bodyPr/>
+                    <a:lstStyle/>
+                    <a:p>
+                      <a:pPr>
+                        <a:defRPr sz="1000"/>
+                      </a:pPr>
+                      <a:r>
+                        <a:t>...</a:t>
+                      </a:r>
+                    </a:p>
+                  </a:txBody>
+                  <a:tcPr/>
+                </a:tc>
+                <a:tc>
+                  <a:txBody>
+                    <a:bodyPr/>
+                    <a:lstStyle/>
+                    <a:p>
+                      <a:pPr>
+                        <a:defRPr sz="1000"/>
+                      </a:pPr>
+                      <a:r>
+                        <a:t>...</a:t>
+                      </a:r>
+                    </a:p>
+                  </a:txBody>
+                  <a:tcPr/>
+                </a:tc>
+                <a:tc>
+                  <a:txBody>
+                    <a:bodyPr/>
+                    <a:lstStyle/>
+                    <a:p>
+                      <a:pPr>
+                        <a:defRPr sz="1000"/>
+                      </a:pPr>
+                      <a:r>
+                        <a:t>...</a:t>
+                      </a:r>
+                    </a:p>
+                  </a:txBody>
+                  <a:tcPr/>
+                </a:tc>
+              </a:tr>
+            </a:tbl>
+          </a:graphicData>
+        </a:graphic>
+      </p:graphicFrame>
     </p:spTree>
   </p:cSld>
   <p:clrMapOvr>
@@ -3944,8 +5845,8 @@
         </p:nvSpPr>
         <p:spPr>
           <a:xfrm>
-            <a:off x="0" y="2286000"/>
-            <a:ext cx="9144000" cy="1097280"/>
+            <a:off x="0" y="0"/>
+            <a:ext cx="9144000" cy="777240"/>
           </a:xfrm>
           <a:prstGeom prst="rect">
             <a:avLst/>
@@ -3981,14 +5882,105 @@
       </p:sp>
       <p:sp>
         <p:nvSpPr>
-          <p:cNvPr id="3" name="TextBox 2"/>
+          <p:cNvPr id="3" name="Rectangle 2"/>
+          <p:cNvSpPr/>
+          <p:nvPr/>
+        </p:nvSpPr>
+        <p:spPr>
+          <a:xfrm>
+            <a:off x="0" y="777240"/>
+            <a:ext cx="9144000" cy="54864"/>
+          </a:xfrm>
+          <a:prstGeom prst="rect">
+            <a:avLst/>
+          </a:prstGeom>
+          <a:solidFill>
+            <a:srgbClr val="ED7D31"/>
+          </a:solidFill>
+          <a:ln>
+            <a:noFill/>
+          </a:ln>
+        </p:spPr>
+        <p:style>
+          <a:lnRef idx="1">
+            <a:schemeClr val="accent1"/>
+          </a:lnRef>
+          <a:fillRef idx="3">
+            <a:schemeClr val="accent1"/>
+          </a:fillRef>
+          <a:effectRef idx="2">
+            <a:schemeClr val="accent1"/>
+          </a:effectRef>
+          <a:fontRef idx="minor">
+            <a:schemeClr val="lt1"/>
+          </a:fontRef>
+        </p:style>
+        <p:txBody>
+          <a:bodyPr rtlCol="0" anchor="ctr"/>
+          <a:lstStyle/>
+          <a:p>
+            <a:pPr algn="ctr"/>
+          </a:p>
+        </p:txBody>
+      </p:sp>
+      <p:pic>
+        <p:nvPicPr>
+          <p:cNvPr id="4" name="Picture 3" descr="logo-kemendikdasmen.png"/>
+          <p:cNvPicPr>
+            <a:picLocks noChangeAspect="1"/>
+          </p:cNvPicPr>
+          <p:nvPr/>
+        </p:nvPicPr>
+        <p:blipFill>
+          <a:blip r:embed="rId2"/>
+          <a:stretch>
+            <a:fillRect/>
+          </a:stretch>
+        </p:blipFill>
+        <p:spPr>
+          <a:xfrm>
+            <a:off x="137160" y="73152"/>
+            <a:ext cx="1619157" cy="502920"/>
+          </a:xfrm>
+          <a:prstGeom prst="rect">
+            <a:avLst/>
+          </a:prstGeom>
+        </p:spPr>
+      </p:pic>
+      <p:pic>
+        <p:nvPicPr>
+          <p:cNvPr id="5" name="Picture 4" descr="logo-lks-dikmen.png"/>
+          <p:cNvPicPr>
+            <a:picLocks noChangeAspect="1"/>
+          </p:cNvPicPr>
+          <p:nvPr/>
+        </p:nvPicPr>
+        <p:blipFill>
+          <a:blip r:embed="rId3"/>
+          <a:stretch>
+            <a:fillRect/>
+          </a:stretch>
+        </p:blipFill>
+        <p:spPr>
+          <a:xfrm>
+            <a:off x="7818120" y="45720"/>
+            <a:ext cx="658368" cy="658368"/>
+          </a:xfrm>
+          <a:prstGeom prst="rect">
+            <a:avLst/>
+          </a:prstGeom>
+        </p:spPr>
+      </p:pic>
+      <p:sp>
+        <p:nvSpPr>
+          <p:cNvPr id="6" name="TextBox 5"/>
           <p:cNvSpPr txBox="1"/>
           <p:nvPr/>
         </p:nvSpPr>
         <p:spPr>
           <a:xfrm>
-            <a:off x="457200" y="2331720"/>
-            <a:ext cx="8229600" cy="914400"/>
+            <a:off x="2286000" y="109728"/>
+            <a:ext cx="5303520" cy="594360"/>
           </a:xfrm>
           <a:prstGeom prst="rect">
             <a:avLst/>
@@ -4002,14 +5994,272 @@
           <a:lstStyle/>
           <a:p>
             <a:pPr algn="ctr">
-              <a:defRPr sz="2800" b="1">
+              <a:defRPr sz="1800" b="1">
                 <a:solidFill>
                   <a:srgbClr val="FFFFFF"/>
                 </a:solidFill>
               </a:defRPr>
             </a:pPr>
             <a:r>
-              <a:t>Modul E — Performa Otonom (60%)</a:t>
+              <a:t>Demo Modul E — Langkah 7</a:t>
+            </a:r>
+          </a:p>
+        </p:txBody>
+      </p:sp>
+      <p:sp>
+        <p:nvSpPr>
+          <p:cNvPr id="7" name="Rectangle 6"/>
+          <p:cNvSpPr/>
+          <p:nvPr/>
+        </p:nvSpPr>
+        <p:spPr>
+          <a:xfrm>
+            <a:off x="0" y="6446520"/>
+            <a:ext cx="9144000" cy="411480"/>
+          </a:xfrm>
+          <a:prstGeom prst="rect">
+            <a:avLst/>
+          </a:prstGeom>
+          <a:solidFill>
+            <a:srgbClr val="2E7D32"/>
+          </a:solidFill>
+          <a:ln>
+            <a:noFill/>
+          </a:ln>
+        </p:spPr>
+        <p:style>
+          <a:lnRef idx="1">
+            <a:schemeClr val="accent1"/>
+          </a:lnRef>
+          <a:fillRef idx="3">
+            <a:schemeClr val="accent1"/>
+          </a:fillRef>
+          <a:effectRef idx="2">
+            <a:schemeClr val="accent1"/>
+          </a:effectRef>
+          <a:fontRef idx="minor">
+            <a:schemeClr val="lt1"/>
+          </a:fontRef>
+        </p:style>
+        <p:txBody>
+          <a:bodyPr rtlCol="0" anchor="ctr"/>
+          <a:lstStyle/>
+          <a:p>
+            <a:pPr algn="ctr"/>
+          </a:p>
+        </p:txBody>
+      </p:sp>
+      <p:sp>
+        <p:nvSpPr>
+          <p:cNvPr id="8" name="TextBox 7"/>
+          <p:cNvSpPr txBox="1"/>
+          <p:nvPr/>
+        </p:nvSpPr>
+        <p:spPr>
+          <a:xfrm>
+            <a:off x="274320" y="6492240"/>
+            <a:ext cx="8595360" cy="320040"/>
+          </a:xfrm>
+          <a:prstGeom prst="rect">
+            <a:avLst/>
+          </a:prstGeom>
+          <a:noFill/>
+        </p:spPr>
+        <p:txBody>
+          <a:bodyPr wrap="none">
+            <a:spAutoFit/>
+          </a:bodyPr>
+          <a:lstStyle/>
+          <a:p>
+            <a:pPr algn="ctr">
+              <a:defRPr sz="1000">
+                <a:solidFill>
+                  <a:srgbClr val="FFFFFF"/>
+                </a:solidFill>
+              </a:defRPr>
+            </a:pPr>
+            <a:r>
+              <a:t>LKS Nasional 2026 — Robot Bergerak Otonom | Kemendikdasmen</a:t>
+            </a:r>
+          </a:p>
+        </p:txBody>
+      </p:sp>
+      <p:sp>
+        <p:nvSpPr>
+          <p:cNvPr id="9" name="Rectangle 8"/>
+          <p:cNvSpPr/>
+          <p:nvPr/>
+        </p:nvSpPr>
+        <p:spPr>
+          <a:xfrm>
+            <a:off x="457200" y="1005840"/>
+            <a:ext cx="640080" cy="640080"/>
+          </a:xfrm>
+          <a:prstGeom prst="rect">
+            <a:avLst/>
+          </a:prstGeom>
+          <a:solidFill>
+            <a:srgbClr val="ED7D31"/>
+          </a:solidFill>
+          <a:ln>
+            <a:noFill/>
+          </a:ln>
+        </p:spPr>
+        <p:style>
+          <a:lnRef idx="1">
+            <a:schemeClr val="accent1"/>
+          </a:lnRef>
+          <a:fillRef idx="3">
+            <a:schemeClr val="accent1"/>
+          </a:fillRef>
+          <a:effectRef idx="2">
+            <a:schemeClr val="accent1"/>
+          </a:effectRef>
+          <a:fontRef idx="minor">
+            <a:schemeClr val="lt1"/>
+          </a:fontRef>
+        </p:style>
+        <p:txBody>
+          <a:bodyPr rtlCol="0" anchor="ctr"/>
+          <a:lstStyle/>
+          <a:p>
+            <a:pPr algn="ctr"/>
+          </a:p>
+        </p:txBody>
+      </p:sp>
+      <p:sp>
+        <p:nvSpPr>
+          <p:cNvPr id="10" name="TextBox 9"/>
+          <p:cNvSpPr txBox="1"/>
+          <p:nvPr/>
+        </p:nvSpPr>
+        <p:spPr>
+          <a:xfrm>
+            <a:off x="457200" y="1078992"/>
+            <a:ext cx="640080" cy="502920"/>
+          </a:xfrm>
+          <a:prstGeom prst="rect">
+            <a:avLst/>
+          </a:prstGeom>
+          <a:noFill/>
+        </p:spPr>
+        <p:txBody>
+          <a:bodyPr wrap="none">
+            <a:spAutoFit/>
+          </a:bodyPr>
+          <a:lstStyle/>
+          <a:p>
+            <a:pPr algn="ctr">
+              <a:defRPr sz="2200" b="1">
+                <a:solidFill>
+                  <a:srgbClr val="FFFFFF"/>
+                </a:solidFill>
+              </a:defRPr>
+            </a:pPr>
+            <a:r>
+              <a:t>7</a:t>
+            </a:r>
+          </a:p>
+        </p:txBody>
+      </p:sp>
+      <p:sp>
+        <p:nvSpPr>
+          <p:cNvPr id="11" name="TextBox 10"/>
+          <p:cNvSpPr txBox="1"/>
+          <p:nvPr/>
+        </p:nvSpPr>
+        <p:spPr>
+          <a:xfrm>
+            <a:off x="1280160" y="960120"/>
+            <a:ext cx="7315200" cy="731520"/>
+          </a:xfrm>
+          <a:prstGeom prst="rect">
+            <a:avLst/>
+          </a:prstGeom>
+          <a:noFill/>
+        </p:spPr>
+        <p:txBody>
+          <a:bodyPr wrap="none">
+            <a:spAutoFit/>
+          </a:bodyPr>
+          <a:lstStyle/>
+          <a:p>
+            <a:pPr>
+              <a:defRPr sz="2200" b="1">
+                <a:solidFill>
+                  <a:srgbClr val="1F4E79"/>
+                </a:solidFill>
+              </a:defRPr>
+            </a:pPr>
+            <a:r>
+              <a:t>Prosedur RETRY</a:t>
+            </a:r>
+          </a:p>
+        </p:txBody>
+      </p:sp>
+      <p:sp>
+        <p:nvSpPr>
+          <p:cNvPr id="12" name="TextBox 11"/>
+          <p:cNvSpPr txBox="1"/>
+          <p:nvPr/>
+        </p:nvSpPr>
+        <p:spPr>
+          <a:xfrm>
+            <a:off x="548640" y="1828800"/>
+            <a:ext cx="8046720" cy="4114800"/>
+          </a:xfrm>
+          <a:prstGeom prst="rect">
+            <a:avLst/>
+          </a:prstGeom>
+          <a:noFill/>
+        </p:spPr>
+        <p:txBody>
+          <a:bodyPr wrap="square">
+            <a:spAutoFit/>
+          </a:bodyPr>
+          <a:lstStyle/>
+          <a:p>
+            <a:pPr>
+              <a:spcAft>
+                <a:spcPts val="1000"/>
+              </a:spcAft>
+              <a:defRPr sz="1500"/>
+            </a:pPr>
+            <a:r>
+              <a:t>• Peserta minta RETRY → boleh ubah program</a:t>
+            </a:r>
+          </a:p>
+          <a:p>
+            <a:pPr>
+              <a:spcAft>
+                <a:spcPts val="1000"/>
+              </a:spcAft>
+              <a:defRPr sz="1500"/>
+            </a:pPr>
+            <a:r>
+              <a:t>• Kubus di badan robot HARUS dikeluarkan ke luar arena</a:t>
+            </a:r>
+          </a:p>
+          <a:p>
+            <a:pPr>
+              <a:spcAft>
+                <a:spcPts val="1000"/>
+              </a:spcAft>
+              <a:defRPr sz="1500"/>
+            </a:pPr>
+            <a:r>
+              <a:t>• Posisi kubus TIDAK dikembalikan ke kondisi awal run</a:t>
+            </a:r>
+          </a:p>
+          <a:p>
+            <a:pPr>
+              <a:spcAft>
+                <a:spcPts val="1000"/>
+              </a:spcAft>
+              <a:defRPr sz="1500"/>
+            </a:pPr>
+            <a:r>
+              <a:t>• Setelah SIAP lagi → acak ulang posisi kubus → START baru</a:t>
             </a:r>
           </a:p>
         </p:txBody>
@@ -4041,7 +6291,7 @@
         <p:spPr>
           <a:xfrm>
             <a:off x="0" y="0"/>
-            <a:ext cx="9144000" cy="822960"/>
+            <a:ext cx="9144000" cy="777240"/>
           </a:xfrm>
           <a:prstGeom prst="rect">
             <a:avLst/>
@@ -4077,14 +6327,105 @@
       </p:sp>
       <p:sp>
         <p:nvSpPr>
-          <p:cNvPr id="3" name="TextBox 2"/>
+          <p:cNvPr id="3" name="Rectangle 2"/>
+          <p:cNvSpPr/>
+          <p:nvPr/>
+        </p:nvSpPr>
+        <p:spPr>
+          <a:xfrm>
+            <a:off x="0" y="777240"/>
+            <a:ext cx="9144000" cy="54864"/>
+          </a:xfrm>
+          <a:prstGeom prst="rect">
+            <a:avLst/>
+          </a:prstGeom>
+          <a:solidFill>
+            <a:srgbClr val="ED7D31"/>
+          </a:solidFill>
+          <a:ln>
+            <a:noFill/>
+          </a:ln>
+        </p:spPr>
+        <p:style>
+          <a:lnRef idx="1">
+            <a:schemeClr val="accent1"/>
+          </a:lnRef>
+          <a:fillRef idx="3">
+            <a:schemeClr val="accent1"/>
+          </a:fillRef>
+          <a:effectRef idx="2">
+            <a:schemeClr val="accent1"/>
+          </a:effectRef>
+          <a:fontRef idx="minor">
+            <a:schemeClr val="lt1"/>
+          </a:fontRef>
+        </p:style>
+        <p:txBody>
+          <a:bodyPr rtlCol="0" anchor="ctr"/>
+          <a:lstStyle/>
+          <a:p>
+            <a:pPr algn="ctr"/>
+          </a:p>
+        </p:txBody>
+      </p:sp>
+      <p:pic>
+        <p:nvPicPr>
+          <p:cNvPr id="4" name="Picture 3" descr="logo-kemendikdasmen.png"/>
+          <p:cNvPicPr>
+            <a:picLocks noChangeAspect="1"/>
+          </p:cNvPicPr>
+          <p:nvPr/>
+        </p:nvPicPr>
+        <p:blipFill>
+          <a:blip r:embed="rId2"/>
+          <a:stretch>
+            <a:fillRect/>
+          </a:stretch>
+        </p:blipFill>
+        <p:spPr>
+          <a:xfrm>
+            <a:off x="137160" y="73152"/>
+            <a:ext cx="1619157" cy="502920"/>
+          </a:xfrm>
+          <a:prstGeom prst="rect">
+            <a:avLst/>
+          </a:prstGeom>
+        </p:spPr>
+      </p:pic>
+      <p:pic>
+        <p:nvPicPr>
+          <p:cNvPr id="5" name="Picture 4" descr="logo-lks-dikmen.png"/>
+          <p:cNvPicPr>
+            <a:picLocks noChangeAspect="1"/>
+          </p:cNvPicPr>
+          <p:nvPr/>
+        </p:nvPicPr>
+        <p:blipFill>
+          <a:blip r:embed="rId3"/>
+          <a:stretch>
+            <a:fillRect/>
+          </a:stretch>
+        </p:blipFill>
+        <p:spPr>
+          <a:xfrm>
+            <a:off x="7818120" y="45720"/>
+            <a:ext cx="658368" cy="658368"/>
+          </a:xfrm>
+          <a:prstGeom prst="rect">
+            <a:avLst/>
+          </a:prstGeom>
+        </p:spPr>
+      </p:pic>
+      <p:sp>
+        <p:nvSpPr>
+          <p:cNvPr id="6" name="TextBox 5"/>
           <p:cNvSpPr txBox="1"/>
           <p:nvPr/>
         </p:nvSpPr>
         <p:spPr>
           <a:xfrm>
-            <a:off x="457200" y="137160"/>
-            <a:ext cx="8229600" cy="640080"/>
+            <a:off x="2286000" y="109728"/>
+            <a:ext cx="5303520" cy="594360"/>
           </a:xfrm>
           <a:prstGeom prst="rect">
             <a:avLst/>
@@ -4097,7 +6438,163 @@
           </a:bodyPr>
           <a:lstStyle/>
           <a:p>
-            <a:pPr>
+            <a:pPr algn="ctr">
+              <a:defRPr sz="1800" b="1">
+                <a:solidFill>
+                  <a:srgbClr val="FFFFFF"/>
+                </a:solidFill>
+              </a:defRPr>
+            </a:pPr>
+            <a:r>
+              <a:t>Demo Modul E — Langkah 8</a:t>
+            </a:r>
+          </a:p>
+        </p:txBody>
+      </p:sp>
+      <p:sp>
+        <p:nvSpPr>
+          <p:cNvPr id="7" name="Rectangle 6"/>
+          <p:cNvSpPr/>
+          <p:nvPr/>
+        </p:nvSpPr>
+        <p:spPr>
+          <a:xfrm>
+            <a:off x="0" y="6446520"/>
+            <a:ext cx="9144000" cy="411480"/>
+          </a:xfrm>
+          <a:prstGeom prst="rect">
+            <a:avLst/>
+          </a:prstGeom>
+          <a:solidFill>
+            <a:srgbClr val="2E7D32"/>
+          </a:solidFill>
+          <a:ln>
+            <a:noFill/>
+          </a:ln>
+        </p:spPr>
+        <p:style>
+          <a:lnRef idx="1">
+            <a:schemeClr val="accent1"/>
+          </a:lnRef>
+          <a:fillRef idx="3">
+            <a:schemeClr val="accent1"/>
+          </a:fillRef>
+          <a:effectRef idx="2">
+            <a:schemeClr val="accent1"/>
+          </a:effectRef>
+          <a:fontRef idx="minor">
+            <a:schemeClr val="lt1"/>
+          </a:fontRef>
+        </p:style>
+        <p:txBody>
+          <a:bodyPr rtlCol="0" anchor="ctr"/>
+          <a:lstStyle/>
+          <a:p>
+            <a:pPr algn="ctr"/>
+          </a:p>
+        </p:txBody>
+      </p:sp>
+      <p:sp>
+        <p:nvSpPr>
+          <p:cNvPr id="8" name="TextBox 7"/>
+          <p:cNvSpPr txBox="1"/>
+          <p:nvPr/>
+        </p:nvSpPr>
+        <p:spPr>
+          <a:xfrm>
+            <a:off x="274320" y="6492240"/>
+            <a:ext cx="8595360" cy="320040"/>
+          </a:xfrm>
+          <a:prstGeom prst="rect">
+            <a:avLst/>
+          </a:prstGeom>
+          <a:noFill/>
+        </p:spPr>
+        <p:txBody>
+          <a:bodyPr wrap="none">
+            <a:spAutoFit/>
+          </a:bodyPr>
+          <a:lstStyle/>
+          <a:p>
+            <a:pPr algn="ctr">
+              <a:defRPr sz="1000">
+                <a:solidFill>
+                  <a:srgbClr val="FFFFFF"/>
+                </a:solidFill>
+              </a:defRPr>
+            </a:pPr>
+            <a:r>
+              <a:t>LKS Nasional 2026 — Robot Bergerak Otonom | Kemendikdasmen</a:t>
+            </a:r>
+          </a:p>
+        </p:txBody>
+      </p:sp>
+      <p:sp>
+        <p:nvSpPr>
+          <p:cNvPr id="9" name="Rectangle 8"/>
+          <p:cNvSpPr/>
+          <p:nvPr/>
+        </p:nvSpPr>
+        <p:spPr>
+          <a:xfrm>
+            <a:off x="457200" y="1005840"/>
+            <a:ext cx="640080" cy="640080"/>
+          </a:xfrm>
+          <a:prstGeom prst="rect">
+            <a:avLst/>
+          </a:prstGeom>
+          <a:solidFill>
+            <a:srgbClr val="ED7D31"/>
+          </a:solidFill>
+          <a:ln>
+            <a:noFill/>
+          </a:ln>
+        </p:spPr>
+        <p:style>
+          <a:lnRef idx="1">
+            <a:schemeClr val="accent1"/>
+          </a:lnRef>
+          <a:fillRef idx="3">
+            <a:schemeClr val="accent1"/>
+          </a:fillRef>
+          <a:effectRef idx="2">
+            <a:schemeClr val="accent1"/>
+          </a:effectRef>
+          <a:fontRef idx="minor">
+            <a:schemeClr val="lt1"/>
+          </a:fontRef>
+        </p:style>
+        <p:txBody>
+          <a:bodyPr rtlCol="0" anchor="ctr"/>
+          <a:lstStyle/>
+          <a:p>
+            <a:pPr algn="ctr"/>
+          </a:p>
+        </p:txBody>
+      </p:sp>
+      <p:sp>
+        <p:nvSpPr>
+          <p:cNvPr id="10" name="TextBox 9"/>
+          <p:cNvSpPr txBox="1"/>
+          <p:nvPr/>
+        </p:nvSpPr>
+        <p:spPr>
+          <a:xfrm>
+            <a:off x="457200" y="1078992"/>
+            <a:ext cx="640080" cy="502920"/>
+          </a:xfrm>
+          <a:prstGeom prst="rect">
+            <a:avLst/>
+          </a:prstGeom>
+          <a:noFill/>
+        </p:spPr>
+        <p:txBody>
+          <a:bodyPr wrap="none">
+            <a:spAutoFit/>
+          </a:bodyPr>
+          <a:lstStyle/>
+          <a:p>
+            <a:pPr algn="ctr">
               <a:defRPr sz="2200" b="1">
                 <a:solidFill>
                   <a:srgbClr val="FFFFFF"/>
@@ -4105,21 +6602,56 @@
               </a:defRPr>
             </a:pPr>
             <a:r>
-              <a:t>SOP Run Otonom — WAJIB</a:t>
-            </a:r>
-          </a:p>
-        </p:txBody>
-      </p:sp>
-      <p:sp>
-        <p:nvSpPr>
-          <p:cNvPr id="4" name="TextBox 3"/>
+              <a:t>8</a:t>
+            </a:r>
+          </a:p>
+        </p:txBody>
+      </p:sp>
+      <p:sp>
+        <p:nvSpPr>
+          <p:cNvPr id="11" name="TextBox 10"/>
           <p:cNvSpPr txBox="1"/>
           <p:nvPr/>
         </p:nvSpPr>
         <p:spPr>
           <a:xfrm>
-            <a:off x="548640" y="1005840"/>
-            <a:ext cx="8046720" cy="5029200"/>
+            <a:off x="1280160" y="960120"/>
+            <a:ext cx="7315200" cy="731520"/>
+          </a:xfrm>
+          <a:prstGeom prst="rect">
+            <a:avLst/>
+          </a:prstGeom>
+          <a:noFill/>
+        </p:spPr>
+        <p:txBody>
+          <a:bodyPr wrap="none">
+            <a:spAutoFit/>
+          </a:bodyPr>
+          <a:lstStyle/>
+          <a:p>
+            <a:pPr>
+              <a:defRPr sz="2200" b="1">
+                <a:solidFill>
+                  <a:srgbClr val="1F4E79"/>
+                </a:solidFill>
+              </a:defRPr>
+            </a:pPr>
+            <a:r>
+              <a:t>Rekap &amp; Input CIS</a:t>
+            </a:r>
+          </a:p>
+        </p:txBody>
+      </p:sp>
+      <p:sp>
+        <p:nvSpPr>
+          <p:cNvPr id="12" name="TextBox 11"/>
+          <p:cNvSpPr txBox="1"/>
+          <p:nvPr/>
+        </p:nvSpPr>
+        <p:spPr>
+          <a:xfrm>
+            <a:off x="548640" y="1828800"/>
+            <a:ext cx="8046720" cy="4114800"/>
           </a:xfrm>
           <a:prstGeom prst="rect">
             <a:avLst/>
@@ -4134,106 +6666,45 @@
           <a:p>
             <a:pPr>
               <a:spcAft>
-                <a:spcPts val="800"/>
+                <a:spcPts val="1000"/>
               </a:spcAft>
-              <a:defRPr sz="1600">
-                <a:solidFill>
-                  <a:srgbClr val="333333"/>
-                </a:solidFill>
-              </a:defRPr>
-            </a:pPr>
-            <a:r>
-              <a:t>1. Briefing layout arena ke peserta</a:t>
+              <a:defRPr sz="1500"/>
+            </a:pPr>
+            <a:r>
+              <a:t>• Kumpulkan lembar undian + run + Modul E per tim</a:t>
             </a:r>
           </a:p>
           <a:p>
             <a:pPr>
               <a:spcAft>
-                <a:spcPts val="800"/>
+                <a:spcPts val="1000"/>
               </a:spcAft>
-              <a:defRPr sz="1600">
-                <a:solidFill>
-                  <a:srgbClr val="333333"/>
-                </a:solidFill>
-              </a:defRPr>
-            </a:pPr>
-            <a:r>
-              <a:t>2. Peserta selesai programming → nyatakan SIAP</a:t>
+              <a:defRPr sz="1500"/>
+            </a:pPr>
+            <a:r>
+              <a:t>• Transfer skor ke rekapitulasi-skor.csv / sheet Rekapitulasi</a:t>
             </a:r>
           </a:p>
           <a:p>
             <a:pPr>
               <a:spcAft>
-                <a:spcPts val="800"/>
+                <a:spcPts val="1000"/>
               </a:spcAft>
-              <a:defRPr sz="1600">
-                <a:solidFill>
-                  <a:srgbClr val="333333"/>
-                </a:solidFill>
-              </a:defRPr>
-            </a:pPr>
-            <a:r>
-              <a:t>3. Setelah SIAP: peserta TIDAK BOLEH sentuh laptop</a:t>
+              <a:defRPr sz="1500"/>
+            </a:pPr>
+            <a:r>
+              <a:t>• Chief Expert review outlier &amp; pelanggaran</a:t>
             </a:r>
           </a:p>
           <a:p>
             <a:pPr>
               <a:spcAft>
-                <a:spcPts val="800"/>
+                <a:spcPts val="1000"/>
               </a:spcAft>
-              <a:defRPr sz="1600">
-                <a:solidFill>
-                  <a:srgbClr val="333333"/>
-                </a:solidFill>
-              </a:defRPr>
-            </a:pPr>
-            <a:r>
-              <a:t>4. Juri ACAK ULANG posisi kubus</a:t>
-            </a:r>
-          </a:p>
-          <a:p>
-            <a:pPr>
-              <a:spcAft>
-                <a:spcPts val="800"/>
-              </a:spcAft>
-              <a:defRPr sz="1600">
-                <a:solidFill>
-                  <a:srgbClr val="333333"/>
-                </a:solidFill>
-              </a:defRPr>
-            </a:pPr>
-            <a:r>
-              <a:t>5. Sinyal START → peserta tekan tombol START di robot</a:t>
-            </a:r>
-          </a:p>
-          <a:p>
-            <a:pPr>
-              <a:spcAft>
-                <a:spcPts val="800"/>
-              </a:spcAft>
-              <a:defRPr sz="1600">
-                <a:solidFill>
-                  <a:srgbClr val="333333"/>
-                </a:solidFill>
-              </a:defRPr>
-            </a:pPr>
-            <a:r>
-              <a:t>6. Robot berjalan sepenuhnya otonom</a:t>
-            </a:r>
-          </a:p>
-          <a:p>
-            <a:pPr>
-              <a:spcAft>
-                <a:spcPts val="800"/>
-              </a:spcAft>
-              <a:defRPr sz="1600">
-                <a:solidFill>
-                  <a:srgbClr val="333333"/>
-                </a:solidFill>
-              </a:defRPr>
-            </a:pPr>
-            <a:r>
-              <a:t>7. Catat kubus berhasil di slot marker yang benar</a:t>
+              <a:defRPr sz="1500"/>
+            </a:pPr>
+            <a:r>
+              <a:t>• Input skor final ke CIS — penentuan juara &amp; Medallion</a:t>
             </a:r>
           </a:p>
         </p:txBody>
@@ -4265,7 +6736,7 @@
         <p:spPr>
           <a:xfrm>
             <a:off x="0" y="0"/>
-            <a:ext cx="9144000" cy="822960"/>
+            <a:ext cx="9144000" cy="777240"/>
           </a:xfrm>
           <a:prstGeom prst="rect">
             <a:avLst/>
@@ -4301,14 +6772,105 @@
       </p:sp>
       <p:sp>
         <p:nvSpPr>
-          <p:cNvPr id="3" name="TextBox 2"/>
+          <p:cNvPr id="3" name="Rectangle 2"/>
+          <p:cNvSpPr/>
+          <p:nvPr/>
+        </p:nvSpPr>
+        <p:spPr>
+          <a:xfrm>
+            <a:off x="0" y="777240"/>
+            <a:ext cx="9144000" cy="54864"/>
+          </a:xfrm>
+          <a:prstGeom prst="rect">
+            <a:avLst/>
+          </a:prstGeom>
+          <a:solidFill>
+            <a:srgbClr val="ED7D31"/>
+          </a:solidFill>
+          <a:ln>
+            <a:noFill/>
+          </a:ln>
+        </p:spPr>
+        <p:style>
+          <a:lnRef idx="1">
+            <a:schemeClr val="accent1"/>
+          </a:lnRef>
+          <a:fillRef idx="3">
+            <a:schemeClr val="accent1"/>
+          </a:fillRef>
+          <a:effectRef idx="2">
+            <a:schemeClr val="accent1"/>
+          </a:effectRef>
+          <a:fontRef idx="minor">
+            <a:schemeClr val="lt1"/>
+          </a:fontRef>
+        </p:style>
+        <p:txBody>
+          <a:bodyPr rtlCol="0" anchor="ctr"/>
+          <a:lstStyle/>
+          <a:p>
+            <a:pPr algn="ctr"/>
+          </a:p>
+        </p:txBody>
+      </p:sp>
+      <p:pic>
+        <p:nvPicPr>
+          <p:cNvPr id="4" name="Picture 3" descr="logo-kemendikdasmen.png"/>
+          <p:cNvPicPr>
+            <a:picLocks noChangeAspect="1"/>
+          </p:cNvPicPr>
+          <p:nvPr/>
+        </p:nvPicPr>
+        <p:blipFill>
+          <a:blip r:embed="rId2"/>
+          <a:stretch>
+            <a:fillRect/>
+          </a:stretch>
+        </p:blipFill>
+        <p:spPr>
+          <a:xfrm>
+            <a:off x="137160" y="73152"/>
+            <a:ext cx="1619157" cy="502920"/>
+          </a:xfrm>
+          <a:prstGeom prst="rect">
+            <a:avLst/>
+          </a:prstGeom>
+        </p:spPr>
+      </p:pic>
+      <p:pic>
+        <p:nvPicPr>
+          <p:cNvPr id="5" name="Picture 4" descr="logo-lks-dikmen.png"/>
+          <p:cNvPicPr>
+            <a:picLocks noChangeAspect="1"/>
+          </p:cNvPicPr>
+          <p:nvPr/>
+        </p:nvPicPr>
+        <p:blipFill>
+          <a:blip r:embed="rId3"/>
+          <a:stretch>
+            <a:fillRect/>
+          </a:stretch>
+        </p:blipFill>
+        <p:spPr>
+          <a:xfrm>
+            <a:off x="7818120" y="45720"/>
+            <a:ext cx="658368" cy="658368"/>
+          </a:xfrm>
+          <a:prstGeom prst="rect">
+            <a:avLst/>
+          </a:prstGeom>
+        </p:spPr>
+      </p:pic>
+      <p:sp>
+        <p:nvSpPr>
+          <p:cNvPr id="6" name="TextBox 5"/>
           <p:cNvSpPr txBox="1"/>
           <p:nvPr/>
         </p:nvSpPr>
         <p:spPr>
           <a:xfrm>
-            <a:off x="457200" y="137160"/>
-            <a:ext cx="8229600" cy="640080"/>
+            <a:off x="2286000" y="109728"/>
+            <a:ext cx="5303520" cy="594360"/>
           </a:xfrm>
           <a:prstGeom prst="rect">
             <a:avLst/>
@@ -4321,29 +6883,107 @@
           </a:bodyPr>
           <a:lstStyle/>
           <a:p>
-            <a:pPr>
-              <a:defRPr sz="2200" b="1">
+            <a:pPr algn="ctr">
+              <a:defRPr sz="1800" b="1">
                 <a:solidFill>
                   <a:srgbClr val="FFFFFF"/>
                 </a:solidFill>
               </a:defRPr>
             </a:pPr>
             <a:r>
-              <a:t>Aturan RETRY</a:t>
-            </a:r>
-          </a:p>
-        </p:txBody>
-      </p:sp>
-      <p:sp>
-        <p:nvSpPr>
-          <p:cNvPr id="4" name="TextBox 3"/>
+              <a:t>Latihan Juri — Kerjakan Bersama</a:t>
+            </a:r>
+          </a:p>
+        </p:txBody>
+      </p:sp>
+      <p:sp>
+        <p:nvSpPr>
+          <p:cNvPr id="7" name="Rectangle 6"/>
+          <p:cNvSpPr/>
+          <p:nvPr/>
+        </p:nvSpPr>
+        <p:spPr>
+          <a:xfrm>
+            <a:off x="0" y="6446520"/>
+            <a:ext cx="9144000" cy="411480"/>
+          </a:xfrm>
+          <a:prstGeom prst="rect">
+            <a:avLst/>
+          </a:prstGeom>
+          <a:solidFill>
+            <a:srgbClr val="2E7D32"/>
+          </a:solidFill>
+          <a:ln>
+            <a:noFill/>
+          </a:ln>
+        </p:spPr>
+        <p:style>
+          <a:lnRef idx="1">
+            <a:schemeClr val="accent1"/>
+          </a:lnRef>
+          <a:fillRef idx="3">
+            <a:schemeClr val="accent1"/>
+          </a:fillRef>
+          <a:effectRef idx="2">
+            <a:schemeClr val="accent1"/>
+          </a:effectRef>
+          <a:fontRef idx="minor">
+            <a:schemeClr val="lt1"/>
+          </a:fontRef>
+        </p:style>
+        <p:txBody>
+          <a:bodyPr rtlCol="0" anchor="ctr"/>
+          <a:lstStyle/>
+          <a:p>
+            <a:pPr algn="ctr"/>
+          </a:p>
+        </p:txBody>
+      </p:sp>
+      <p:sp>
+        <p:nvSpPr>
+          <p:cNvPr id="8" name="TextBox 7"/>
           <p:cNvSpPr txBox="1"/>
           <p:nvPr/>
         </p:nvSpPr>
         <p:spPr>
           <a:xfrm>
-            <a:off x="548640" y="1005840"/>
-            <a:ext cx="8046720" cy="5029200"/>
+            <a:off x="274320" y="6492240"/>
+            <a:ext cx="8595360" cy="320040"/>
+          </a:xfrm>
+          <a:prstGeom prst="rect">
+            <a:avLst/>
+          </a:prstGeom>
+          <a:noFill/>
+        </p:spPr>
+        <p:txBody>
+          <a:bodyPr wrap="none">
+            <a:spAutoFit/>
+          </a:bodyPr>
+          <a:lstStyle/>
+          <a:p>
+            <a:pPr algn="ctr">
+              <a:defRPr sz="1000">
+                <a:solidFill>
+                  <a:srgbClr val="FFFFFF"/>
+                </a:solidFill>
+              </a:defRPr>
+            </a:pPr>
+            <a:r>
+              <a:t>LKS Nasional 2026 — Robot Bergerak Otonom | Kemendikdasmen</a:t>
+            </a:r>
+          </a:p>
+        </p:txBody>
+      </p:sp>
+      <p:sp>
+        <p:nvSpPr>
+          <p:cNvPr id="9" name="TextBox 8"/>
+          <p:cNvSpPr txBox="1"/>
+          <p:nvPr/>
+        </p:nvSpPr>
+        <p:spPr>
+          <a:xfrm>
+            <a:off x="502920" y="1051560"/>
+            <a:ext cx="8138160" cy="5212080"/>
           </a:xfrm>
           <a:prstGeom prst="rect">
             <a:avLst/>
@@ -4358,76 +6998,103 @@
           <a:p>
             <a:pPr>
               <a:spcAft>
-                <a:spcPts val="800"/>
+                <a:spcPts val="700"/>
               </a:spcAft>
-              <a:defRPr sz="1600">
+              <a:defRPr sz="1500">
                 <a:solidFill>
                   <a:srgbClr val="333333"/>
                 </a:solidFill>
               </a:defRPr>
             </a:pPr>
             <a:r>
-              <a:t>Peserta boleh minta RETRY dan ubah program</a:t>
+              <a:t>1. Buka docs/SKENARIO-SOAL-CONTOH.md — skenario Tim 05</a:t>
             </a:r>
           </a:p>
           <a:p>
             <a:pPr>
               <a:spcAft>
-                <a:spcPts val="800"/>
+                <a:spcPts val="700"/>
               </a:spcAft>
-              <a:defRPr sz="1600">
+              <a:defRPr sz="1500">
                 <a:solidFill>
                   <a:srgbClr val="333333"/>
                 </a:solidFill>
               </a:defRPr>
             </a:pPr>
             <a:r>
-              <a:t>Posisi kubus TIDAK dikembalikan ke kondisi awal</a:t>
+              <a:t>2. Isi lembar undian untuk Run 1</a:t>
             </a:r>
           </a:p>
           <a:p>
             <a:pPr>
               <a:spcAft>
-                <a:spcPts val="800"/>
+                <a:spcPts val="700"/>
               </a:spcAft>
-              <a:defRPr sz="1600">
+              <a:defRPr sz="1500">
                 <a:solidFill>
                   <a:srgbClr val="333333"/>
                 </a:solidFill>
               </a:defRPr>
             </a:pPr>
             <a:r>
-              <a:t>Kubus di badan robot harus dikeluarkan ke luar arena</a:t>
+              <a:t>3. Mainkan peran: SIAP → acak → START → catat 9 kubus</a:t>
             </a:r>
           </a:p>
           <a:p>
             <a:pPr>
               <a:spcAft>
-                <a:spcPts val="800"/>
+                <a:spcPts val="700"/>
               </a:spcAft>
-              <a:defRPr sz="1600">
+              <a:defRPr sz="1500">
                 <a:solidFill>
                   <a:srgbClr val="333333"/>
                 </a:solidFill>
               </a:defRPr>
             </a:pPr>
             <a:r>
-              <a:t>Setelah SIAP lagi → posisi kubus diacak ulang</a:t>
+              <a:t>4. Hitung skor di Excel Modul E</a:t>
             </a:r>
           </a:p>
           <a:p>
             <a:pPr>
               <a:spcAft>
-                <a:spcPts val="800"/>
+                <a:spcPts val="700"/>
               </a:spcAft>
-              <a:defRPr sz="1600">
+              <a:defRPr sz="1500">
                 <a:solidFill>
                   <a:srgbClr val="333333"/>
                 </a:solidFill>
               </a:defRPr>
             </a:pPr>
             <a:r>
-              <a:t>Pelanggaran: sentuh laptop setelah SIAP / sentuh robot setelah START → run batal</a:t>
+              <a:t>5. Simulasikan RETRY + pelanggaran sentuh laptop</a:t>
+            </a:r>
+          </a:p>
+          <a:p>
+            <a:pPr>
+              <a:spcAft>
+                <a:spcPts val="700"/>
+              </a:spcAft>
+              <a:defRPr sz="1500">
+                <a:solidFill>
+                  <a:srgbClr val="333333"/>
+                </a:solidFill>
+              </a:defRPr>
+            </a:pPr>
+            <a:r>
+              <a:t>6. Diskusi dengan CE: konflik slot, bobot CIS</a:t>
+            </a:r>
+          </a:p>
+          <a:p>
+            <a:pPr>
+              <a:defRPr sz="1100" i="1">
+                <a:solidFill>
+                  <a:srgbClr val="ED7D31"/>
+                </a:solidFill>
+              </a:defRPr>
+            </a:pPr>
+            <a:r>
+              <a:t>Materi: github.com/antonprafanto/LKS2026</a:t>
             </a:r>
           </a:p>
         </p:txBody>
@@ -4459,7 +7126,7 @@
         <p:spPr>
           <a:xfrm>
             <a:off x="0" y="0"/>
-            <a:ext cx="9144000" cy="822960"/>
+            <a:ext cx="9144000" cy="777240"/>
           </a:xfrm>
           <a:prstGeom prst="rect">
             <a:avLst/>
@@ -4495,14 +7162,148 @@
       </p:sp>
       <p:sp>
         <p:nvSpPr>
-          <p:cNvPr id="3" name="TextBox 2"/>
+          <p:cNvPr id="3" name="Rectangle 2"/>
+          <p:cNvSpPr/>
+          <p:nvPr/>
+        </p:nvSpPr>
+        <p:spPr>
+          <a:xfrm>
+            <a:off x="0" y="777240"/>
+            <a:ext cx="9144000" cy="54864"/>
+          </a:xfrm>
+          <a:prstGeom prst="rect">
+            <a:avLst/>
+          </a:prstGeom>
+          <a:solidFill>
+            <a:srgbClr val="ED7D31"/>
+          </a:solidFill>
+          <a:ln>
+            <a:noFill/>
+          </a:ln>
+        </p:spPr>
+        <p:style>
+          <a:lnRef idx="1">
+            <a:schemeClr val="accent1"/>
+          </a:lnRef>
+          <a:fillRef idx="3">
+            <a:schemeClr val="accent1"/>
+          </a:fillRef>
+          <a:effectRef idx="2">
+            <a:schemeClr val="accent1"/>
+          </a:effectRef>
+          <a:fontRef idx="minor">
+            <a:schemeClr val="lt1"/>
+          </a:fontRef>
+        </p:style>
+        <p:txBody>
+          <a:bodyPr rtlCol="0" anchor="ctr"/>
+          <a:lstStyle/>
+          <a:p>
+            <a:pPr algn="ctr"/>
+          </a:p>
+        </p:txBody>
+      </p:sp>
+      <p:pic>
+        <p:nvPicPr>
+          <p:cNvPr id="4" name="Picture 3" descr="logo-kemendikdasmen.png"/>
+          <p:cNvPicPr>
+            <a:picLocks noChangeAspect="1"/>
+          </p:cNvPicPr>
+          <p:nvPr/>
+        </p:nvPicPr>
+        <p:blipFill>
+          <a:blip r:embed="rId2"/>
+          <a:stretch>
+            <a:fillRect/>
+          </a:stretch>
+        </p:blipFill>
+        <p:spPr>
+          <a:xfrm>
+            <a:off x="137160" y="73152"/>
+            <a:ext cx="1619157" cy="502920"/>
+          </a:xfrm>
+          <a:prstGeom prst="rect">
+            <a:avLst/>
+          </a:prstGeom>
+        </p:spPr>
+      </p:pic>
+      <p:pic>
+        <p:nvPicPr>
+          <p:cNvPr id="5" name="Picture 4" descr="logo-lks-dikmen.png"/>
+          <p:cNvPicPr>
+            <a:picLocks noChangeAspect="1"/>
+          </p:cNvPicPr>
+          <p:nvPr/>
+        </p:nvPicPr>
+        <p:blipFill>
+          <a:blip r:embed="rId3"/>
+          <a:stretch>
+            <a:fillRect/>
+          </a:stretch>
+        </p:blipFill>
+        <p:spPr>
+          <a:xfrm>
+            <a:off x="7818120" y="45720"/>
+            <a:ext cx="658368" cy="658368"/>
+          </a:xfrm>
+          <a:prstGeom prst="rect">
+            <a:avLst/>
+          </a:prstGeom>
+        </p:spPr>
+      </p:pic>
+      <p:sp>
+        <p:nvSpPr>
+          <p:cNvPr id="6" name="Rectangle 5"/>
+          <p:cNvSpPr/>
+          <p:nvPr/>
+        </p:nvSpPr>
+        <p:spPr>
+          <a:xfrm>
+            <a:off x="0" y="6446520"/>
+            <a:ext cx="9144000" cy="411480"/>
+          </a:xfrm>
+          <a:prstGeom prst="rect">
+            <a:avLst/>
+          </a:prstGeom>
+          <a:solidFill>
+            <a:srgbClr val="2E7D32"/>
+          </a:solidFill>
+          <a:ln>
+            <a:noFill/>
+          </a:ln>
+        </p:spPr>
+        <p:style>
+          <a:lnRef idx="1">
+            <a:schemeClr val="accent1"/>
+          </a:lnRef>
+          <a:fillRef idx="3">
+            <a:schemeClr val="accent1"/>
+          </a:fillRef>
+          <a:effectRef idx="2">
+            <a:schemeClr val="accent1"/>
+          </a:effectRef>
+          <a:fontRef idx="minor">
+            <a:schemeClr val="lt1"/>
+          </a:fontRef>
+        </p:style>
+        <p:txBody>
+          <a:bodyPr rtlCol="0" anchor="ctr"/>
+          <a:lstStyle/>
+          <a:p>
+            <a:pPr algn="ctr"/>
+          </a:p>
+        </p:txBody>
+      </p:sp>
+      <p:sp>
+        <p:nvSpPr>
+          <p:cNvPr id="7" name="TextBox 6"/>
           <p:cNvSpPr txBox="1"/>
           <p:nvPr/>
         </p:nvSpPr>
         <p:spPr>
           <a:xfrm>
-            <a:off x="457200" y="137160"/>
-            <a:ext cx="8229600" cy="640080"/>
+            <a:off x="274320" y="6492240"/>
+            <a:ext cx="8595360" cy="320040"/>
           </a:xfrm>
           <a:prstGeom prst="rect">
             <a:avLst/>
@@ -4515,29 +7316,72 @@
           </a:bodyPr>
           <a:lstStyle/>
           <a:p>
-            <a:pPr>
-              <a:defRPr sz="2200" b="1">
+            <a:pPr algn="ctr">
+              <a:defRPr sz="1000">
                 <a:solidFill>
                   <a:srgbClr val="FFFFFF"/>
                 </a:solidFill>
               </a:defRPr>
             </a:pPr>
             <a:r>
-              <a:t>Arena &amp; Aksesoris</a:t>
-            </a:r>
-          </a:p>
-        </p:txBody>
-      </p:sp>
-      <p:sp>
-        <p:nvSpPr>
-          <p:cNvPr id="4" name="TextBox 3"/>
+              <a:t>LKS Nasional 2026 — Robot Bergerak Otonom | Kemendikdasmen</a:t>
+            </a:r>
+          </a:p>
+        </p:txBody>
+      </p:sp>
+      <p:sp>
+        <p:nvSpPr>
+          <p:cNvPr id="8" name="Rectangle 7"/>
+          <p:cNvSpPr/>
+          <p:nvPr/>
+        </p:nvSpPr>
+        <p:spPr>
+          <a:xfrm>
+            <a:off x="731520" y="2560320"/>
+            <a:ext cx="7680960" cy="1188720"/>
+          </a:xfrm>
+          <a:prstGeom prst="rect">
+            <a:avLst/>
+          </a:prstGeom>
+          <a:solidFill>
+            <a:srgbClr val="1F4E79"/>
+          </a:solidFill>
+          <a:ln>
+            <a:noFill/>
+          </a:ln>
+        </p:spPr>
+        <p:style>
+          <a:lnRef idx="1">
+            <a:schemeClr val="accent1"/>
+          </a:lnRef>
+          <a:fillRef idx="3">
+            <a:schemeClr val="accent1"/>
+          </a:fillRef>
+          <a:effectRef idx="2">
+            <a:schemeClr val="accent1"/>
+          </a:effectRef>
+          <a:fontRef idx="minor">
+            <a:schemeClr val="lt1"/>
+          </a:fontRef>
+        </p:style>
+        <p:txBody>
+          <a:bodyPr rtlCol="0" anchor="ctr"/>
+          <a:lstStyle/>
+          <a:p>
+            <a:pPr algn="ctr"/>
+          </a:p>
+        </p:txBody>
+      </p:sp>
+      <p:sp>
+        <p:nvSpPr>
+          <p:cNvPr id="9" name="TextBox 8"/>
           <p:cNvSpPr txBox="1"/>
           <p:nvPr/>
         </p:nvSpPr>
         <p:spPr>
           <a:xfrm>
-            <a:off x="548640" y="1005840"/>
-            <a:ext cx="8046720" cy="5029200"/>
+            <a:off x="914400" y="2697480"/>
+            <a:ext cx="7315200" cy="914400"/>
           </a:xfrm>
           <a:prstGeom prst="rect">
             <a:avLst/>
@@ -4545,83 +7389,20 @@
           <a:noFill/>
         </p:spPr>
         <p:txBody>
-          <a:bodyPr wrap="square">
+          <a:bodyPr wrap="none">
             <a:spAutoFit/>
           </a:bodyPr>
           <a:lstStyle/>
           <a:p>
-            <a:pPr>
-              <a:spcAft>
-                <a:spcPts val="800"/>
-              </a:spcAft>
-              <a:defRPr sz="1600">
+            <a:pPr algn="ctr">
+              <a:defRPr sz="2600" b="1">
                 <a:solidFill>
-                  <a:srgbClr val="333333"/>
+                  <a:srgbClr val="FFFFFF"/>
                 </a:solidFill>
               </a:defRPr>
             </a:pPr>
             <a:r>
-              <a:t>Arena: multiplex 18 mm, putih matte (~4040×2040 mm — klarifikasi CE)</a:t>
-            </a:r>
-          </a:p>
-          <a:p>
-            <a:pPr>
-              <a:spcAft>
-                <a:spcPts val="800"/>
-              </a:spcAft>
-              <a:defRPr sz="1600">
-                <a:solidFill>
-                  <a:srgbClr val="333333"/>
-                </a:solidFill>
-              </a:defRPr>
-            </a:pPr>
-            <a:r>
-              <a:t>3 rak (marker warna di atas slot), 9 kubus PLA 65³ mm</a:t>
-            </a:r>
-          </a:p>
-          <a:p>
-            <a:pPr>
-              <a:spcAft>
-                <a:spcPts val="800"/>
-              </a:spcAft>
-              <a:defRPr sz="1600">
-                <a:solidFill>
-                  <a:srgbClr val="333333"/>
-                </a:solidFill>
-              </a:defRPr>
-            </a:pPr>
-            <a:r>
-              <a:t>10 obstacle, 1 gate (aluminium 2020), reference line isolasi hitam</a:t>
-            </a:r>
-          </a:p>
-          <a:p>
-            <a:pPr>
-              <a:spcAft>
-                <a:spcPts val="800"/>
-              </a:spcAft>
-              <a:defRPr sz="1600">
-                <a:solidFill>
-                  <a:srgbClr val="333333"/>
-                </a:solidFill>
-              </a:defRPr>
-            </a:pPr>
-            <a:r>
-              <a:t>Posisi kubus &amp; marker dapat berubah (30% rule di H3)</a:t>
-            </a:r>
-          </a:p>
-          <a:p>
-            <a:pPr>
-              <a:spcAft>
-                <a:spcPts val="800"/>
-              </a:spcAft>
-              <a:defRPr sz="1600">
-                <a:solidFill>
-                  <a:srgbClr val="333333"/>
-                </a:solidFill>
-              </a:defRPr>
-            </a:pPr>
-            <a:r>
-              <a:t>4 set arena | penerangan 100 W × 2 per lapangan</a:t>
+              <a:t>Modul A–D — Ringkasan</a:t>
             </a:r>
           </a:p>
         </p:txBody>
@@ -4653,7 +7434,7 @@
         <p:spPr>
           <a:xfrm>
             <a:off x="0" y="0"/>
-            <a:ext cx="9144000" cy="822960"/>
+            <a:ext cx="9144000" cy="777240"/>
           </a:xfrm>
           <a:prstGeom prst="rect">
             <a:avLst/>
@@ -4689,14 +7470,105 @@
       </p:sp>
       <p:sp>
         <p:nvSpPr>
-          <p:cNvPr id="3" name="TextBox 2"/>
+          <p:cNvPr id="3" name="Rectangle 2"/>
+          <p:cNvSpPr/>
+          <p:nvPr/>
+        </p:nvSpPr>
+        <p:spPr>
+          <a:xfrm>
+            <a:off x="0" y="777240"/>
+            <a:ext cx="9144000" cy="54864"/>
+          </a:xfrm>
+          <a:prstGeom prst="rect">
+            <a:avLst/>
+          </a:prstGeom>
+          <a:solidFill>
+            <a:srgbClr val="ED7D31"/>
+          </a:solidFill>
+          <a:ln>
+            <a:noFill/>
+          </a:ln>
+        </p:spPr>
+        <p:style>
+          <a:lnRef idx="1">
+            <a:schemeClr val="accent1"/>
+          </a:lnRef>
+          <a:fillRef idx="3">
+            <a:schemeClr val="accent1"/>
+          </a:fillRef>
+          <a:effectRef idx="2">
+            <a:schemeClr val="accent1"/>
+          </a:effectRef>
+          <a:fontRef idx="minor">
+            <a:schemeClr val="lt1"/>
+          </a:fontRef>
+        </p:style>
+        <p:txBody>
+          <a:bodyPr rtlCol="0" anchor="ctr"/>
+          <a:lstStyle/>
+          <a:p>
+            <a:pPr algn="ctr"/>
+          </a:p>
+        </p:txBody>
+      </p:sp>
+      <p:pic>
+        <p:nvPicPr>
+          <p:cNvPr id="4" name="Picture 3" descr="logo-kemendikdasmen.png"/>
+          <p:cNvPicPr>
+            <a:picLocks noChangeAspect="1"/>
+          </p:cNvPicPr>
+          <p:nvPr/>
+        </p:nvPicPr>
+        <p:blipFill>
+          <a:blip r:embed="rId2"/>
+          <a:stretch>
+            <a:fillRect/>
+          </a:stretch>
+        </p:blipFill>
+        <p:spPr>
+          <a:xfrm>
+            <a:off x="137160" y="73152"/>
+            <a:ext cx="1619157" cy="502920"/>
+          </a:xfrm>
+          <a:prstGeom prst="rect">
+            <a:avLst/>
+          </a:prstGeom>
+        </p:spPr>
+      </p:pic>
+      <p:pic>
+        <p:nvPicPr>
+          <p:cNvPr id="5" name="Picture 4" descr="logo-lks-dikmen.png"/>
+          <p:cNvPicPr>
+            <a:picLocks noChangeAspect="1"/>
+          </p:cNvPicPr>
+          <p:nvPr/>
+        </p:nvPicPr>
+        <p:blipFill>
+          <a:blip r:embed="rId3"/>
+          <a:stretch>
+            <a:fillRect/>
+          </a:stretch>
+        </p:blipFill>
+        <p:spPr>
+          <a:xfrm>
+            <a:off x="7818120" y="45720"/>
+            <a:ext cx="658368" cy="658368"/>
+          </a:xfrm>
+          <a:prstGeom prst="rect">
+            <a:avLst/>
+          </a:prstGeom>
+        </p:spPr>
+      </p:pic>
+      <p:sp>
+        <p:nvSpPr>
+          <p:cNvPr id="6" name="TextBox 5"/>
           <p:cNvSpPr txBox="1"/>
           <p:nvPr/>
         </p:nvSpPr>
         <p:spPr>
           <a:xfrm>
-            <a:off x="457200" y="137160"/>
-            <a:ext cx="8229600" cy="640080"/>
+            <a:off x="2286000" y="109728"/>
+            <a:ext cx="5303520" cy="594360"/>
           </a:xfrm>
           <a:prstGeom prst="rect">
             <a:avLst/>
@@ -4709,29 +7581,107 @@
           </a:bodyPr>
           <a:lstStyle/>
           <a:p>
-            <a:pPr>
-              <a:defRPr sz="2200" b="1">
+            <a:pPr algn="ctr">
+              <a:defRPr sz="1800" b="1">
                 <a:solidFill>
                   <a:srgbClr val="FFFFFF"/>
                 </a:solidFill>
               </a:defRPr>
             </a:pPr>
             <a:r>
-              <a:t>Spesifikasi Robot Peserta</a:t>
-            </a:r>
-          </a:p>
-        </p:txBody>
-      </p:sp>
-      <p:sp>
-        <p:nvSpPr>
-          <p:cNvPr id="4" name="TextBox 3"/>
+              <a:t>Modul D (12 poin, 15 menit/tim)</a:t>
+            </a:r>
+          </a:p>
+        </p:txBody>
+      </p:sp>
+      <p:sp>
+        <p:nvSpPr>
+          <p:cNvPr id="7" name="Rectangle 6"/>
+          <p:cNvSpPr/>
+          <p:nvPr/>
+        </p:nvSpPr>
+        <p:spPr>
+          <a:xfrm>
+            <a:off x="0" y="6446520"/>
+            <a:ext cx="9144000" cy="411480"/>
+          </a:xfrm>
+          <a:prstGeom prst="rect">
+            <a:avLst/>
+          </a:prstGeom>
+          <a:solidFill>
+            <a:srgbClr val="2E7D32"/>
+          </a:solidFill>
+          <a:ln>
+            <a:noFill/>
+          </a:ln>
+        </p:spPr>
+        <p:style>
+          <a:lnRef idx="1">
+            <a:schemeClr val="accent1"/>
+          </a:lnRef>
+          <a:fillRef idx="3">
+            <a:schemeClr val="accent1"/>
+          </a:fillRef>
+          <a:effectRef idx="2">
+            <a:schemeClr val="accent1"/>
+          </a:effectRef>
+          <a:fontRef idx="minor">
+            <a:schemeClr val="lt1"/>
+          </a:fontRef>
+        </p:style>
+        <p:txBody>
+          <a:bodyPr rtlCol="0" anchor="ctr"/>
+          <a:lstStyle/>
+          <a:p>
+            <a:pPr algn="ctr"/>
+          </a:p>
+        </p:txBody>
+      </p:sp>
+      <p:sp>
+        <p:nvSpPr>
+          <p:cNvPr id="8" name="TextBox 7"/>
           <p:cNvSpPr txBox="1"/>
           <p:nvPr/>
         </p:nvSpPr>
         <p:spPr>
           <a:xfrm>
-            <a:off x="548640" y="1005840"/>
-            <a:ext cx="8046720" cy="5029200"/>
+            <a:off x="274320" y="6492240"/>
+            <a:ext cx="8595360" cy="320040"/>
+          </a:xfrm>
+          <a:prstGeom prst="rect">
+            <a:avLst/>
+          </a:prstGeom>
+          <a:noFill/>
+        </p:spPr>
+        <p:txBody>
+          <a:bodyPr wrap="none">
+            <a:spAutoFit/>
+          </a:bodyPr>
+          <a:lstStyle/>
+          <a:p>
+            <a:pPr algn="ctr">
+              <a:defRPr sz="1000">
+                <a:solidFill>
+                  <a:srgbClr val="FFFFFF"/>
+                </a:solidFill>
+              </a:defRPr>
+            </a:pPr>
+            <a:r>
+              <a:t>LKS Nasional 2026 — Robot Bergerak Otonom | Kemendikdasmen</a:t>
+            </a:r>
+          </a:p>
+        </p:txBody>
+      </p:sp>
+      <p:sp>
+        <p:nvSpPr>
+          <p:cNvPr id="9" name="TextBox 8"/>
+          <p:cNvSpPr txBox="1"/>
+          <p:nvPr/>
+        </p:nvSpPr>
+        <p:spPr>
+          <a:xfrm>
+            <a:off x="502920" y="1051560"/>
+            <a:ext cx="8138160" cy="5212080"/>
           </a:xfrm>
           <a:prstGeom prst="rect">
             <a:avLst/>
@@ -4746,91 +7696,61 @@
           <a:p>
             <a:pPr>
               <a:spcAft>
-                <a:spcPts val="800"/>
+                <a:spcPts val="700"/>
               </a:spcAft>
-              <a:defRPr sz="1600">
+              <a:defRPr sz="1500">
                 <a:solidFill>
                   <a:srgbClr val="333333"/>
                 </a:solidFill>
               </a:defRPr>
             </a:pPr>
             <a:r>
-              <a:t>Controller: Raspberry Pi atau myRIO</a:t>
+              <a:t>D1: gerak 4 arah | D2: stop 50–100 mm dari dinding</a:t>
             </a:r>
           </a:p>
           <a:p>
             <a:pPr>
               <a:spcAft>
-                <a:spcPts val="800"/>
+                <a:spcPts val="700"/>
               </a:spcAft>
-              <a:defRPr sz="1600">
+              <a:defRPr sz="1500">
                 <a:solidFill>
                   <a:srgbClr val="333333"/>
                 </a:solidFill>
               </a:defRPr>
             </a:pPr>
             <a:r>
-              <a:t>Bahasa: Python, C++, atau LabVIEW</a:t>
+              <a:t>D3: line follower U | D4–D6: deteksi warna di monitor</a:t>
             </a:r>
           </a:p>
           <a:p>
             <a:pPr>
               <a:spcAft>
-                <a:spcPts val="800"/>
+                <a:spcPts val="700"/>
               </a:spcAft>
-              <a:defRPr sz="1600">
+              <a:defRPr sz="1500">
                 <a:solidFill>
                   <a:srgbClr val="333333"/>
                 </a:solidFill>
               </a:defRPr>
             </a:pPr>
             <a:r>
-              <a:t>Sensor: max 1 kamera, 4 IR, 2 US, 4 line, 1 lidar, 1 IMU</a:t>
+              <a:t>D7–D8: O-merah, O-hijau | D9–D10: pick rak &amp; place stand</a:t>
             </a:r>
           </a:p>
           <a:p>
             <a:pPr>
               <a:spcAft>
-                <a:spcPts val="800"/>
+                <a:spcPts val="700"/>
               </a:spcAft>
-              <a:defRPr sz="1600">
+              <a:defRPr sz="1500">
                 <a:solidFill>
                   <a:srgbClr val="333333"/>
                 </a:solidFill>
               </a:defRPr>
             </a:pPr>
             <a:r>
-              <a:t>Aktuator: max 4 motor DC, 3 servo, 2 continuous servo</a:t>
-            </a:r>
-          </a:p>
-          <a:p>
-            <a:pPr>
-              <a:spcAft>
-                <a:spcPts val="800"/>
-              </a:spcAft>
-              <a:defRPr sz="1600">
-                <a:solidFill>
-                  <a:srgbClr val="333333"/>
-                </a:solidFill>
-              </a:defRPr>
-            </a:pPr>
-            <a:r>
-              <a:t>Baterai ≤12V nominal | tombol STOP merah wajib</a:t>
-            </a:r>
-          </a:p>
-          <a:p>
-            <a:pPr>
-              <a:spcAft>
-                <a:spcPts val="800"/>
-              </a:spcAft>
-              <a:defRPr sz="1600">
-                <a:solidFill>
-                  <a:srgbClr val="333333"/>
-                </a:solidFill>
-              </a:defRPr>
-            </a:pPr>
-            <a:r>
-              <a:t>Dimensi &amp; berat: tidak dibatasi</a:t>
+              <a:t>Tidak menguji bentuk persegi/segitiga secara eksplisit</a:t>
             </a:r>
           </a:p>
         </p:txBody>
@@ -4862,7 +7782,7 @@
         <p:spPr>
           <a:xfrm>
             <a:off x="0" y="0"/>
-            <a:ext cx="9144000" cy="822960"/>
+            <a:ext cx="9144000" cy="777240"/>
           </a:xfrm>
           <a:prstGeom prst="rect">
             <a:avLst/>
@@ -4898,14 +7818,105 @@
       </p:sp>
       <p:sp>
         <p:nvSpPr>
-          <p:cNvPr id="3" name="TextBox 2"/>
+          <p:cNvPr id="3" name="Rectangle 2"/>
+          <p:cNvSpPr/>
+          <p:nvPr/>
+        </p:nvSpPr>
+        <p:spPr>
+          <a:xfrm>
+            <a:off x="0" y="777240"/>
+            <a:ext cx="9144000" cy="54864"/>
+          </a:xfrm>
+          <a:prstGeom prst="rect">
+            <a:avLst/>
+          </a:prstGeom>
+          <a:solidFill>
+            <a:srgbClr val="ED7D31"/>
+          </a:solidFill>
+          <a:ln>
+            <a:noFill/>
+          </a:ln>
+        </p:spPr>
+        <p:style>
+          <a:lnRef idx="1">
+            <a:schemeClr val="accent1"/>
+          </a:lnRef>
+          <a:fillRef idx="3">
+            <a:schemeClr val="accent1"/>
+          </a:fillRef>
+          <a:effectRef idx="2">
+            <a:schemeClr val="accent1"/>
+          </a:effectRef>
+          <a:fontRef idx="minor">
+            <a:schemeClr val="lt1"/>
+          </a:fontRef>
+        </p:style>
+        <p:txBody>
+          <a:bodyPr rtlCol="0" anchor="ctr"/>
+          <a:lstStyle/>
+          <a:p>
+            <a:pPr algn="ctr"/>
+          </a:p>
+        </p:txBody>
+      </p:sp>
+      <p:pic>
+        <p:nvPicPr>
+          <p:cNvPr id="4" name="Picture 3" descr="logo-kemendikdasmen.png"/>
+          <p:cNvPicPr>
+            <a:picLocks noChangeAspect="1"/>
+          </p:cNvPicPr>
+          <p:nvPr/>
+        </p:nvPicPr>
+        <p:blipFill>
+          <a:blip r:embed="rId2"/>
+          <a:stretch>
+            <a:fillRect/>
+          </a:stretch>
+        </p:blipFill>
+        <p:spPr>
+          <a:xfrm>
+            <a:off x="137160" y="73152"/>
+            <a:ext cx="1619157" cy="502920"/>
+          </a:xfrm>
+          <a:prstGeom prst="rect">
+            <a:avLst/>
+          </a:prstGeom>
+        </p:spPr>
+      </p:pic>
+      <p:pic>
+        <p:nvPicPr>
+          <p:cNvPr id="5" name="Picture 4" descr="logo-lks-dikmen.png"/>
+          <p:cNvPicPr>
+            <a:picLocks noChangeAspect="1"/>
+          </p:cNvPicPr>
+          <p:nvPr/>
+        </p:nvPicPr>
+        <p:blipFill>
+          <a:blip r:embed="rId3"/>
+          <a:stretch>
+            <a:fillRect/>
+          </a:stretch>
+        </p:blipFill>
+        <p:spPr>
+          <a:xfrm>
+            <a:off x="7818120" y="45720"/>
+            <a:ext cx="658368" cy="658368"/>
+          </a:xfrm>
+          <a:prstGeom prst="rect">
+            <a:avLst/>
+          </a:prstGeom>
+        </p:spPr>
+      </p:pic>
+      <p:sp>
+        <p:nvSpPr>
+          <p:cNvPr id="6" name="TextBox 5"/>
           <p:cNvSpPr txBox="1"/>
           <p:nvPr/>
         </p:nvSpPr>
         <p:spPr>
           <a:xfrm>
-            <a:off x="457200" y="137160"/>
-            <a:ext cx="8229600" cy="640080"/>
+            <a:off x="2286000" y="109728"/>
+            <a:ext cx="5303520" cy="594360"/>
           </a:xfrm>
           <a:prstGeom prst="rect">
             <a:avLst/>
@@ -4918,29 +7929,107 @@
           </a:bodyPr>
           <a:lstStyle/>
           <a:p>
-            <a:pPr>
-              <a:defRPr sz="2200" b="1">
+            <a:pPr algn="ctr">
+              <a:defRPr sz="1800" b="1">
                 <a:solidFill>
                   <a:srgbClr val="FFFFFF"/>
                 </a:solidFill>
               </a:defRPr>
             </a:pPr>
             <a:r>
-              <a:t>K3 — Prioritas Juri</a:t>
-            </a:r>
-          </a:p>
-        </p:txBody>
-      </p:sp>
-      <p:sp>
-        <p:nvSpPr>
-          <p:cNvPr id="4" name="TextBox 3"/>
+              <a:t>Arena &amp; Robot</a:t>
+            </a:r>
+          </a:p>
+        </p:txBody>
+      </p:sp>
+      <p:sp>
+        <p:nvSpPr>
+          <p:cNvPr id="7" name="Rectangle 6"/>
+          <p:cNvSpPr/>
+          <p:nvPr/>
+        </p:nvSpPr>
+        <p:spPr>
+          <a:xfrm>
+            <a:off x="0" y="6446520"/>
+            <a:ext cx="9144000" cy="411480"/>
+          </a:xfrm>
+          <a:prstGeom prst="rect">
+            <a:avLst/>
+          </a:prstGeom>
+          <a:solidFill>
+            <a:srgbClr val="2E7D32"/>
+          </a:solidFill>
+          <a:ln>
+            <a:noFill/>
+          </a:ln>
+        </p:spPr>
+        <p:style>
+          <a:lnRef idx="1">
+            <a:schemeClr val="accent1"/>
+          </a:lnRef>
+          <a:fillRef idx="3">
+            <a:schemeClr val="accent1"/>
+          </a:fillRef>
+          <a:effectRef idx="2">
+            <a:schemeClr val="accent1"/>
+          </a:effectRef>
+          <a:fontRef idx="minor">
+            <a:schemeClr val="lt1"/>
+          </a:fontRef>
+        </p:style>
+        <p:txBody>
+          <a:bodyPr rtlCol="0" anchor="ctr"/>
+          <a:lstStyle/>
+          <a:p>
+            <a:pPr algn="ctr"/>
+          </a:p>
+        </p:txBody>
+      </p:sp>
+      <p:sp>
+        <p:nvSpPr>
+          <p:cNvPr id="8" name="TextBox 7"/>
           <p:cNvSpPr txBox="1"/>
           <p:nvPr/>
         </p:nvSpPr>
         <p:spPr>
           <a:xfrm>
-            <a:off x="548640" y="1005840"/>
-            <a:ext cx="8046720" cy="5029200"/>
+            <a:off x="274320" y="6492240"/>
+            <a:ext cx="8595360" cy="320040"/>
+          </a:xfrm>
+          <a:prstGeom prst="rect">
+            <a:avLst/>
+          </a:prstGeom>
+          <a:noFill/>
+        </p:spPr>
+        <p:txBody>
+          <a:bodyPr wrap="none">
+            <a:spAutoFit/>
+          </a:bodyPr>
+          <a:lstStyle/>
+          <a:p>
+            <a:pPr algn="ctr">
+              <a:defRPr sz="1000">
+                <a:solidFill>
+                  <a:srgbClr val="FFFFFF"/>
+                </a:solidFill>
+              </a:defRPr>
+            </a:pPr>
+            <a:r>
+              <a:t>LKS Nasional 2026 — Robot Bergerak Otonom | Kemendikdasmen</a:t>
+            </a:r>
+          </a:p>
+        </p:txBody>
+      </p:sp>
+      <p:sp>
+        <p:nvSpPr>
+          <p:cNvPr id="9" name="TextBox 8"/>
+          <p:cNvSpPr txBox="1"/>
+          <p:nvPr/>
+        </p:nvSpPr>
+        <p:spPr>
+          <a:xfrm>
+            <a:off x="502920" y="1051560"/>
+            <a:ext cx="8138160" cy="5212080"/>
           </a:xfrm>
           <a:prstGeom prst="rect">
             <a:avLst/>
@@ -4955,76 +8044,61 @@
           <a:p>
             <a:pPr>
               <a:spcAft>
-                <a:spcPts val="800"/>
+                <a:spcPts val="700"/>
               </a:spcAft>
-              <a:defRPr sz="1600">
+              <a:defRPr sz="1500">
                 <a:solidFill>
                   <a:srgbClr val="333333"/>
                 </a:solidFill>
               </a:defRPr>
             </a:pPr>
             <a:r>
-              <a:t>Larang air mineral terbuka dekat komponen listrik</a:t>
+              <a:t>Arena ~4040×2040 mm, 3 rak, 9 kubus, 10 obstacle, 1 gate</a:t>
             </a:r>
           </a:p>
           <a:p>
             <a:pPr>
               <a:spcAft>
-                <a:spcPts val="800"/>
+                <a:spcPts val="700"/>
               </a:spcAft>
-              <a:defRPr sz="1600">
+              <a:defRPr sz="1500">
                 <a:solidFill>
                   <a:srgbClr val="333333"/>
                 </a:solidFill>
               </a:defRPr>
             </a:pPr>
             <a:r>
-              <a:t>Verifikasi tombol STOP sebelum setiap run</a:t>
+              <a:t>Controller: Raspberry Pi / myRIO | Python, C++, LabVIEW</a:t>
             </a:r>
           </a:p>
           <a:p>
             <a:pPr>
               <a:spcAft>
-                <a:spcPts val="800"/>
+                <a:spcPts val="700"/>
               </a:spcAft>
-              <a:defRPr sz="1600">
+              <a:defRPr sz="1500">
                 <a:solidFill>
                   <a:srgbClr val="333333"/>
                 </a:solidFill>
               </a:defRPr>
             </a:pPr>
             <a:r>
-              <a:t>Reset obstacle yang jatuh sebelum tim berikutnya</a:t>
+              <a:t>Baterai ≤12V | tombol STOP merah wajib</a:t>
             </a:r>
           </a:p>
           <a:p>
             <a:pPr>
               <a:spcAft>
-                <a:spcPts val="800"/>
+                <a:spcPts val="700"/>
               </a:spcAft>
-              <a:defRPr sz="1600">
+              <a:defRPr sz="1500">
                 <a:solidFill>
                   <a:srgbClr val="333333"/>
                 </a:solidFill>
               </a:defRPr>
             </a:pPr>
             <a:r>
-              <a:t>Area kerja: jalur evakuasi jelas, kabel rapi</a:t>
-            </a:r>
-          </a:p>
-          <a:p>
-            <a:pPr>
-              <a:spcAft>
-                <a:spcPts val="800"/>
-              </a:spcAft>
-              <a:defRPr sz="1600">
-                <a:solidFill>
-                  <a:srgbClr val="333333"/>
-                </a:solidFill>
-              </a:defRPr>
-            </a:pPr>
-            <a:r>
-              <a:t>Robot tidak boleh membahayakan peserta, juri, atau penonton</a:t>
+              <a:t>30% rule H3: posisi objek, urutan, marker dapat berubah</a:t>
             </a:r>
           </a:p>
         </p:txBody>
@@ -5056,7 +8130,7 @@
         <p:spPr>
           <a:xfrm>
             <a:off x="0" y="0"/>
-            <a:ext cx="9144000" cy="822960"/>
+            <a:ext cx="9144000" cy="777240"/>
           </a:xfrm>
           <a:prstGeom prst="rect">
             <a:avLst/>
@@ -5092,14 +8166,105 @@
       </p:sp>
       <p:sp>
         <p:nvSpPr>
-          <p:cNvPr id="3" name="TextBox 2"/>
+          <p:cNvPr id="3" name="Rectangle 2"/>
+          <p:cNvSpPr/>
+          <p:nvPr/>
+        </p:nvSpPr>
+        <p:spPr>
+          <a:xfrm>
+            <a:off x="0" y="777240"/>
+            <a:ext cx="9144000" cy="54864"/>
+          </a:xfrm>
+          <a:prstGeom prst="rect">
+            <a:avLst/>
+          </a:prstGeom>
+          <a:solidFill>
+            <a:srgbClr val="ED7D31"/>
+          </a:solidFill>
+          <a:ln>
+            <a:noFill/>
+          </a:ln>
+        </p:spPr>
+        <p:style>
+          <a:lnRef idx="1">
+            <a:schemeClr val="accent1"/>
+          </a:lnRef>
+          <a:fillRef idx="3">
+            <a:schemeClr val="accent1"/>
+          </a:fillRef>
+          <a:effectRef idx="2">
+            <a:schemeClr val="accent1"/>
+          </a:effectRef>
+          <a:fontRef idx="minor">
+            <a:schemeClr val="lt1"/>
+          </a:fontRef>
+        </p:style>
+        <p:txBody>
+          <a:bodyPr rtlCol="0" anchor="ctr"/>
+          <a:lstStyle/>
+          <a:p>
+            <a:pPr algn="ctr"/>
+          </a:p>
+        </p:txBody>
+      </p:sp>
+      <p:pic>
+        <p:nvPicPr>
+          <p:cNvPr id="4" name="Picture 3" descr="logo-kemendikdasmen.png"/>
+          <p:cNvPicPr>
+            <a:picLocks noChangeAspect="1"/>
+          </p:cNvPicPr>
+          <p:nvPr/>
+        </p:nvPicPr>
+        <p:blipFill>
+          <a:blip r:embed="rId2"/>
+          <a:stretch>
+            <a:fillRect/>
+          </a:stretch>
+        </p:blipFill>
+        <p:spPr>
+          <a:xfrm>
+            <a:off x="137160" y="73152"/>
+            <a:ext cx="1619157" cy="502920"/>
+          </a:xfrm>
+          <a:prstGeom prst="rect">
+            <a:avLst/>
+          </a:prstGeom>
+        </p:spPr>
+      </p:pic>
+      <p:pic>
+        <p:nvPicPr>
+          <p:cNvPr id="5" name="Picture 4" descr="logo-lks-dikmen.png"/>
+          <p:cNvPicPr>
+            <a:picLocks noChangeAspect="1"/>
+          </p:cNvPicPr>
+          <p:nvPr/>
+        </p:nvPicPr>
+        <p:blipFill>
+          <a:blip r:embed="rId3"/>
+          <a:stretch>
+            <a:fillRect/>
+          </a:stretch>
+        </p:blipFill>
+        <p:spPr>
+          <a:xfrm>
+            <a:off x="7818120" y="45720"/>
+            <a:ext cx="658368" cy="658368"/>
+          </a:xfrm>
+          <a:prstGeom prst="rect">
+            <a:avLst/>
+          </a:prstGeom>
+        </p:spPr>
+      </p:pic>
+      <p:sp>
+        <p:nvSpPr>
+          <p:cNvPr id="6" name="TextBox 5"/>
           <p:cNvSpPr txBox="1"/>
           <p:nvPr/>
         </p:nvSpPr>
         <p:spPr>
           <a:xfrm>
-            <a:off x="457200" y="137160"/>
-            <a:ext cx="8229600" cy="640080"/>
+            <a:off x="2286000" y="109728"/>
+            <a:ext cx="5303520" cy="594360"/>
           </a:xfrm>
           <a:prstGeom prst="rect">
             <a:avLst/>
@@ -5112,29 +8277,107 @@
           </a:bodyPr>
           <a:lstStyle/>
           <a:p>
-            <a:pPr>
-              <a:defRPr sz="2200" b="1">
+            <a:pPr algn="ctr">
+              <a:defRPr sz="1800" b="1">
                 <a:solidFill>
                   <a:srgbClr val="FFFFFF"/>
                 </a:solidFill>
               </a:defRPr>
             </a:pPr>
             <a:r>
-              <a:t>Agenda</a:t>
-            </a:r>
-          </a:p>
-        </p:txBody>
-      </p:sp>
-      <p:sp>
-        <p:nvSpPr>
-          <p:cNvPr id="4" name="TextBox 3"/>
+              <a:t>Agenda Briefing</a:t>
+            </a:r>
+          </a:p>
+        </p:txBody>
+      </p:sp>
+      <p:sp>
+        <p:nvSpPr>
+          <p:cNvPr id="7" name="Rectangle 6"/>
+          <p:cNvSpPr/>
+          <p:nvPr/>
+        </p:nvSpPr>
+        <p:spPr>
+          <a:xfrm>
+            <a:off x="0" y="6446520"/>
+            <a:ext cx="9144000" cy="411480"/>
+          </a:xfrm>
+          <a:prstGeom prst="rect">
+            <a:avLst/>
+          </a:prstGeom>
+          <a:solidFill>
+            <a:srgbClr val="2E7D32"/>
+          </a:solidFill>
+          <a:ln>
+            <a:noFill/>
+          </a:ln>
+        </p:spPr>
+        <p:style>
+          <a:lnRef idx="1">
+            <a:schemeClr val="accent1"/>
+          </a:lnRef>
+          <a:fillRef idx="3">
+            <a:schemeClr val="accent1"/>
+          </a:fillRef>
+          <a:effectRef idx="2">
+            <a:schemeClr val="accent1"/>
+          </a:effectRef>
+          <a:fontRef idx="minor">
+            <a:schemeClr val="lt1"/>
+          </a:fontRef>
+        </p:style>
+        <p:txBody>
+          <a:bodyPr rtlCol="0" anchor="ctr"/>
+          <a:lstStyle/>
+          <a:p>
+            <a:pPr algn="ctr"/>
+          </a:p>
+        </p:txBody>
+      </p:sp>
+      <p:sp>
+        <p:nvSpPr>
+          <p:cNvPr id="8" name="TextBox 7"/>
           <p:cNvSpPr txBox="1"/>
           <p:nvPr/>
         </p:nvSpPr>
         <p:spPr>
           <a:xfrm>
-            <a:off x="548640" y="1005840"/>
-            <a:ext cx="8046720" cy="5029200"/>
+            <a:off x="274320" y="6492240"/>
+            <a:ext cx="8595360" cy="320040"/>
+          </a:xfrm>
+          <a:prstGeom prst="rect">
+            <a:avLst/>
+          </a:prstGeom>
+          <a:noFill/>
+        </p:spPr>
+        <p:txBody>
+          <a:bodyPr wrap="none">
+            <a:spAutoFit/>
+          </a:bodyPr>
+          <a:lstStyle/>
+          <a:p>
+            <a:pPr algn="ctr">
+              <a:defRPr sz="1000">
+                <a:solidFill>
+                  <a:srgbClr val="FFFFFF"/>
+                </a:solidFill>
+              </a:defRPr>
+            </a:pPr>
+            <a:r>
+              <a:t>LKS Nasional 2026 — Robot Bergerak Otonom | Kemendikdasmen</a:t>
+            </a:r>
+          </a:p>
+        </p:txBody>
+      </p:sp>
+      <p:sp>
+        <p:nvSpPr>
+          <p:cNvPr id="9" name="TextBox 8"/>
+          <p:cNvSpPr txBox="1"/>
+          <p:nvPr/>
+        </p:nvSpPr>
+        <p:spPr>
+          <a:xfrm>
+            <a:off x="502920" y="1051560"/>
+            <a:ext cx="8138160" cy="5212080"/>
           </a:xfrm>
           <a:prstGeom prst="rect">
             <a:avLst/>
@@ -5149,9 +8392,9 @@
           <a:p>
             <a:pPr>
               <a:spcAft>
-                <a:spcPts val="800"/>
+                <a:spcPts val="700"/>
               </a:spcAft>
-              <a:defRPr sz="1600">
+              <a:defRPr sz="1500">
                 <a:solidFill>
                   <a:srgbClr val="333333"/>
                 </a:solidFill>
@@ -5164,9 +8407,9 @@
           <a:p>
             <a:pPr>
               <a:spcAft>
-                <a:spcPts val="800"/>
+                <a:spcPts val="700"/>
               </a:spcAft>
-              <a:defRPr sz="1600">
+              <a:defRPr sz="1500">
                 <a:solidFill>
                   <a:srgbClr val="333333"/>
                 </a:solidFill>
@@ -5179,9 +8422,9 @@
           <a:p>
             <a:pPr>
               <a:spcAft>
-                <a:spcPts val="800"/>
+                <a:spcPts val="700"/>
               </a:spcAft>
-              <a:defRPr sz="1600">
+              <a:defRPr sz="1500">
                 <a:solidFill>
                   <a:srgbClr val="333333"/>
                 </a:solidFill>
@@ -5194,9 +8437,9 @@
           <a:p>
             <a:pPr>
               <a:spcAft>
-                <a:spcPts val="800"/>
+                <a:spcPts val="700"/>
               </a:spcAft>
-              <a:defRPr sz="1600">
+              <a:defRPr sz="1500">
                 <a:solidFill>
                   <a:srgbClr val="333333"/>
                 </a:solidFill>
@@ -5209,46 +8452,31 @@
           <a:p>
             <a:pPr>
               <a:spcAft>
-                <a:spcPts val="800"/>
+                <a:spcPts val="700"/>
               </a:spcAft>
-              <a:defRPr sz="1600">
+              <a:defRPr sz="1500">
                 <a:solidFill>
                   <a:srgbClr val="333333"/>
                 </a:solidFill>
               </a:defRPr>
             </a:pPr>
             <a:r>
-              <a:t>SOP Modul A–E (fokus run otonom)</a:t>
+              <a:t>★ Demo penilaian Modul E (step-by-step)</a:t>
             </a:r>
           </a:p>
           <a:p>
             <a:pPr>
               <a:spcAft>
-                <a:spcPts val="800"/>
+                <a:spcPts val="700"/>
               </a:spcAft>
-              <a:defRPr sz="1600">
+              <a:defRPr sz="1500">
                 <a:solidFill>
                   <a:srgbClr val="333333"/>
                 </a:solidFill>
               </a:defRPr>
             </a:pPr>
             <a:r>
-              <a:t>Arena, robot, K3</a:t>
-            </a:r>
-          </a:p>
-          <a:p>
-            <a:pPr>
-              <a:spcAft>
-                <a:spcPts val="800"/>
-              </a:spcAft>
-              <a:defRPr sz="1600">
-                <a:solidFill>
-                  <a:srgbClr val="333333"/>
-                </a:solidFill>
-              </a:defRPr>
-            </a:pPr>
-            <a:r>
-              <a:t>CIS &amp; hal yang perlu diklarifikasi CE</a:t>
+              <a:t>Arena, robot, K3, CIS</a:t>
             </a:r>
           </a:p>
         </p:txBody>
@@ -5280,7 +8508,7 @@
         <p:spPr>
           <a:xfrm>
             <a:off x="0" y="0"/>
-            <a:ext cx="9144000" cy="822960"/>
+            <a:ext cx="9144000" cy="777240"/>
           </a:xfrm>
           <a:prstGeom prst="rect">
             <a:avLst/>
@@ -5316,171 +8544,20 @@
       </p:sp>
       <p:sp>
         <p:nvSpPr>
-          <p:cNvPr id="3" name="TextBox 2"/>
-          <p:cNvSpPr txBox="1"/>
-          <p:nvPr/>
-        </p:nvSpPr>
-        <p:spPr>
-          <a:xfrm>
-            <a:off x="457200" y="137160"/>
-            <a:ext cx="8229600" cy="640080"/>
-          </a:xfrm>
-          <a:prstGeom prst="rect">
-            <a:avLst/>
-          </a:prstGeom>
-          <a:noFill/>
-        </p:spPr>
-        <p:txBody>
-          <a:bodyPr wrap="none">
-            <a:spAutoFit/>
-          </a:bodyPr>
-          <a:lstStyle/>
-          <a:p>
-            <a:pPr>
-              <a:defRPr sz="2200" b="1">
-                <a:solidFill>
-                  <a:srgbClr val="FFFFFF"/>
-                </a:solidFill>
-              </a:defRPr>
-            </a:pPr>
-            <a:r>
-              <a:t>Klarifikasi ke Chief Expert</a:t>
-            </a:r>
-          </a:p>
-        </p:txBody>
-      </p:sp>
-      <p:sp>
-        <p:nvSpPr>
-          <p:cNvPr id="4" name="TextBox 3"/>
-          <p:cNvSpPr txBox="1"/>
-          <p:nvPr/>
-        </p:nvSpPr>
-        <p:spPr>
-          <a:xfrm>
-            <a:off x="548640" y="1005840"/>
-            <a:ext cx="8046720" cy="5029200"/>
-          </a:xfrm>
-          <a:prstGeom prst="rect">
-            <a:avLst/>
-          </a:prstGeom>
-          <a:noFill/>
-        </p:spPr>
-        <p:txBody>
-          <a:bodyPr wrap="square">
-            <a:spAutoFit/>
-          </a:bodyPr>
-          <a:lstStyle/>
-          <a:p>
-            <a:pPr>
-              <a:spcAft>
-                <a:spcPts val="800"/>
-              </a:spcAft>
-              <a:defRPr sz="1600">
-                <a:solidFill>
-                  <a:srgbClr val="333333"/>
-                </a:solidFill>
-              </a:defRPr>
-            </a:pPr>
-            <a:r>
-              <a:t>Ukuran arena: 4040×2040 (Kisi-kisi) vs 2400×4800 (Daftar Bahan)</a:t>
-            </a:r>
-          </a:p>
-          <a:p>
-            <a:pPr>
-              <a:spcAft>
-                <a:spcPts val="800"/>
-              </a:spcAft>
-              <a:defRPr sz="1600">
-                <a:solidFill>
-                  <a:srgbClr val="333333"/>
-                </a:solidFill>
-              </a:defRPr>
-            </a:pPr>
-            <a:r>
-              <a:t>Bobot per kubus Modul E di CIS vs template (6,67×9)</a:t>
-            </a:r>
-          </a:p>
-          <a:p>
-            <a:pPr>
-              <a:spcAft>
-                <a:spcPts val="800"/>
-              </a:spcAft>
-              <a:defRPr sz="1600">
-                <a:solidFill>
-                  <a:srgbClr val="333333"/>
-                </a:solidFill>
-              </a:defRPr>
-            </a:pPr>
-            <a:r>
-              <a:t>Apakah kubus sudah benar di awal mendapat poin penuh?</a:t>
-            </a:r>
-          </a:p>
-          <a:p>
-            <a:pPr>
-              <a:spcAft>
-                <a:spcPts val="800"/>
-              </a:spcAft>
-              <a:defRPr sz="1600">
-                <a:solidFill>
-                  <a:srgbClr val="333333"/>
-                </a:solidFill>
-              </a:defRPr>
-            </a:pPr>
-            <a:r>
-              <a:t>Jumlah maksimum RETRY per tim</a:t>
-            </a:r>
-          </a:p>
-          <a:p>
-            <a:pPr>
-              <a:spcAft>
-                <a:spcPts val="800"/>
-              </a:spcAft>
-              <a:defRPr sz="1600">
-                <a:solidFill>
-                  <a:srgbClr val="333333"/>
-                </a:solidFill>
-              </a:defRPr>
-            </a:pPr>
-            <a:r>
-              <a:t>Agregasi skor multi-run H2 vs H3 (trial/final)</a:t>
-            </a:r>
-          </a:p>
-        </p:txBody>
-      </p:sp>
-    </p:spTree>
-  </p:cSld>
-  <p:clrMapOvr>
-    <a:masterClrMapping/>
-  </p:clrMapOvr>
-</p:sld>
-</file>
-
-<file path=ppt/slides/slide21.xml><?xml version="1.0" encoding="utf-8"?>
-<p:sld xmlns:a="http://schemas.openxmlformats.org/drawingml/2006/main" xmlns:p="http://schemas.openxmlformats.org/presentationml/2006/main" xmlns:r="http://schemas.openxmlformats.org/officeDocument/2006/relationships">
-  <p:cSld>
-    <p:spTree>
-      <p:nvGrpSpPr>
-        <p:cNvPr id="1" name=""/>
-        <p:cNvGrpSpPr/>
-        <p:nvPr/>
-      </p:nvGrpSpPr>
-      <p:grpSpPr/>
-      <p:sp>
-        <p:nvSpPr>
-          <p:cNvPr id="2" name="Rectangle 1"/>
+          <p:cNvPr id="3" name="Rectangle 2"/>
           <p:cNvSpPr/>
           <p:nvPr/>
         </p:nvSpPr>
         <p:spPr>
           <a:xfrm>
-            <a:off x="0" y="0"/>
-            <a:ext cx="9144000" cy="822960"/>
+            <a:off x="0" y="777240"/>
+            <a:ext cx="9144000" cy="54864"/>
           </a:xfrm>
           <a:prstGeom prst="rect">
             <a:avLst/>
           </a:prstGeom>
           <a:solidFill>
-            <a:srgbClr val="1F4E79"/>
+            <a:srgbClr val="ED7D31"/>
           </a:solidFill>
           <a:ln>
             <a:noFill/>
@@ -5508,16 +8585,64 @@
           </a:p>
         </p:txBody>
       </p:sp>
-      <p:sp>
-        <p:nvSpPr>
-          <p:cNvPr id="3" name="TextBox 2"/>
+      <p:pic>
+        <p:nvPicPr>
+          <p:cNvPr id="4" name="Picture 3" descr="logo-kemendikdasmen.png"/>
+          <p:cNvPicPr>
+            <a:picLocks noChangeAspect="1"/>
+          </p:cNvPicPr>
+          <p:nvPr/>
+        </p:nvPicPr>
+        <p:blipFill>
+          <a:blip r:embed="rId2"/>
+          <a:stretch>
+            <a:fillRect/>
+          </a:stretch>
+        </p:blipFill>
+        <p:spPr>
+          <a:xfrm>
+            <a:off x="137160" y="73152"/>
+            <a:ext cx="1619157" cy="502920"/>
+          </a:xfrm>
+          <a:prstGeom prst="rect">
+            <a:avLst/>
+          </a:prstGeom>
+        </p:spPr>
+      </p:pic>
+      <p:pic>
+        <p:nvPicPr>
+          <p:cNvPr id="5" name="Picture 4" descr="logo-lks-dikmen.png"/>
+          <p:cNvPicPr>
+            <a:picLocks noChangeAspect="1"/>
+          </p:cNvPicPr>
+          <p:nvPr/>
+        </p:nvPicPr>
+        <p:blipFill>
+          <a:blip r:embed="rId3"/>
+          <a:stretch>
+            <a:fillRect/>
+          </a:stretch>
+        </p:blipFill>
+        <p:spPr>
+          <a:xfrm>
+            <a:off x="7818120" y="45720"/>
+            <a:ext cx="658368" cy="658368"/>
+          </a:xfrm>
+          <a:prstGeom prst="rect">
+            <a:avLst/>
+          </a:prstGeom>
+        </p:spPr>
+      </p:pic>
+      <p:sp>
+        <p:nvSpPr>
+          <p:cNvPr id="6" name="TextBox 5"/>
           <p:cNvSpPr txBox="1"/>
           <p:nvPr/>
         </p:nvSpPr>
         <p:spPr>
           <a:xfrm>
-            <a:off x="457200" y="137160"/>
-            <a:ext cx="8229600" cy="640080"/>
+            <a:off x="2286000" y="109728"/>
+            <a:ext cx="5303520" cy="594360"/>
           </a:xfrm>
           <a:prstGeom prst="rect">
             <a:avLst/>
@@ -5530,29 +8655,107 @@
           </a:bodyPr>
           <a:lstStyle/>
           <a:p>
-            <a:pPr>
-              <a:defRPr sz="2200" b="1">
+            <a:pPr algn="ctr">
+              <a:defRPr sz="1800" b="1">
                 <a:solidFill>
                   <a:srgbClr val="FFFFFF"/>
                 </a:solidFill>
               </a:defRPr>
             </a:pPr>
             <a:r>
-              <a:t>Materi Pendukung Juri</a:t>
-            </a:r>
-          </a:p>
-        </p:txBody>
-      </p:sp>
-      <p:sp>
-        <p:nvSpPr>
-          <p:cNvPr id="4" name="TextBox 3"/>
+              <a:t>K3 &amp; Klarifikasi CE</a:t>
+            </a:r>
+          </a:p>
+        </p:txBody>
+      </p:sp>
+      <p:sp>
+        <p:nvSpPr>
+          <p:cNvPr id="7" name="Rectangle 6"/>
+          <p:cNvSpPr/>
+          <p:nvPr/>
+        </p:nvSpPr>
+        <p:spPr>
+          <a:xfrm>
+            <a:off x="0" y="6446520"/>
+            <a:ext cx="9144000" cy="411480"/>
+          </a:xfrm>
+          <a:prstGeom prst="rect">
+            <a:avLst/>
+          </a:prstGeom>
+          <a:solidFill>
+            <a:srgbClr val="2E7D32"/>
+          </a:solidFill>
+          <a:ln>
+            <a:noFill/>
+          </a:ln>
+        </p:spPr>
+        <p:style>
+          <a:lnRef idx="1">
+            <a:schemeClr val="accent1"/>
+          </a:lnRef>
+          <a:fillRef idx="3">
+            <a:schemeClr val="accent1"/>
+          </a:fillRef>
+          <a:effectRef idx="2">
+            <a:schemeClr val="accent1"/>
+          </a:effectRef>
+          <a:fontRef idx="minor">
+            <a:schemeClr val="lt1"/>
+          </a:fontRef>
+        </p:style>
+        <p:txBody>
+          <a:bodyPr rtlCol="0" anchor="ctr"/>
+          <a:lstStyle/>
+          <a:p>
+            <a:pPr algn="ctr"/>
+          </a:p>
+        </p:txBody>
+      </p:sp>
+      <p:sp>
+        <p:nvSpPr>
+          <p:cNvPr id="8" name="TextBox 7"/>
           <p:cNvSpPr txBox="1"/>
           <p:nvPr/>
         </p:nvSpPr>
         <p:spPr>
           <a:xfrm>
-            <a:off x="548640" y="1005840"/>
-            <a:ext cx="8046720" cy="5029200"/>
+            <a:off x="274320" y="6492240"/>
+            <a:ext cx="8595360" cy="320040"/>
+          </a:xfrm>
+          <a:prstGeom prst="rect">
+            <a:avLst/>
+          </a:prstGeom>
+          <a:noFill/>
+        </p:spPr>
+        <p:txBody>
+          <a:bodyPr wrap="none">
+            <a:spAutoFit/>
+          </a:bodyPr>
+          <a:lstStyle/>
+          <a:p>
+            <a:pPr algn="ctr">
+              <a:defRPr sz="1000">
+                <a:solidFill>
+                  <a:srgbClr val="FFFFFF"/>
+                </a:solidFill>
+              </a:defRPr>
+            </a:pPr>
+            <a:r>
+              <a:t>LKS Nasional 2026 — Robot Bergerak Otonom | Kemendikdasmen</a:t>
+            </a:r>
+          </a:p>
+        </p:txBody>
+      </p:sp>
+      <p:sp>
+        <p:nvSpPr>
+          <p:cNvPr id="9" name="TextBox 8"/>
+          <p:cNvSpPr txBox="1"/>
+          <p:nvPr/>
+        </p:nvSpPr>
+        <p:spPr>
+          <a:xfrm>
+            <a:off x="502920" y="1051560"/>
+            <a:ext cx="8138160" cy="5212080"/>
           </a:xfrm>
           <a:prstGeom prst="rect">
             <a:avLst/>
@@ -5567,103 +8770,73 @@
           <a:p>
             <a:pPr>
               <a:spcAft>
-                <a:spcPts val="800"/>
+                <a:spcPts val="700"/>
               </a:spcAft>
-              <a:defRPr sz="1600">
+              <a:defRPr sz="1500">
                 <a:solidFill>
                   <a:srgbClr val="333333"/>
                 </a:solidFill>
               </a:defRPr>
             </a:pPr>
             <a:r>
-              <a:t>SOP lengkap: docs/SOP-JURI.md</a:t>
+              <a:t>K3: no air terbuka dekat listrik; reset obstacle jatuh</a:t>
             </a:r>
           </a:p>
           <a:p>
             <a:pPr>
               <a:spcAft>
-                <a:spcPts val="800"/>
+                <a:spcPts val="700"/>
               </a:spcAft>
-              <a:defRPr sz="1600">
+              <a:defRPr sz="1500">
                 <a:solidFill>
                   <a:srgbClr val="333333"/>
                 </a:solidFill>
               </a:defRPr>
             </a:pPr>
             <a:r>
-              <a:t>Template Excel: templates/LKS2026-Penilaian-Juri.xlsx</a:t>
+              <a:t>Klarifikasi: ukuran arena, bobot per kubus CIS, max RETRY</a:t>
             </a:r>
           </a:p>
           <a:p>
             <a:pPr>
               <a:spcAft>
-                <a:spcPts val="800"/>
+                <a:spcPts val="700"/>
               </a:spcAft>
-              <a:defRPr sz="1600">
+              <a:defRPr sz="1500">
                 <a:solidFill>
                   <a:srgbClr val="333333"/>
                 </a:solidFill>
               </a:defRPr>
             </a:pPr>
             <a:r>
-              <a:t>Skenario latihan: docs/SKENARIO-SOAL-CONTOH.md</a:t>
+              <a:t>Dokumen resmi: smk.pusatprestasinasional.kemdikdasmen.go.id</a:t>
             </a:r>
           </a:p>
           <a:p>
             <a:pPr>
               <a:spcAft>
-                <a:spcPts val="800"/>
+                <a:spcPts val="700"/>
               </a:spcAft>
-              <a:defRPr sz="1600">
+              <a:defRPr sz="1500">
                 <a:solidFill>
                   <a:srgbClr val="333333"/>
                 </a:solidFill>
               </a:defRPr>
             </a:pPr>
             <a:r>
-              <a:t>Repo GitHub: github.com/antonprafanto/LKS2026</a:t>
+              <a:t>SOP: docs/SOP-JURI.md | Excel: templates/LKS2026-Penilaian-Juri.xlsx</a:t>
             </a:r>
           </a:p>
           <a:p>
             <a:pPr>
-              <a:spcAft>
-                <a:spcPts val="800"/>
-              </a:spcAft>
-              <a:defRPr sz="1600">
-                <a:solidFill>
-                  <a:srgbClr val="333333"/>
-                </a:solidFill>
-              </a:defRPr>
-            </a:pPr>
-            <a:r>
-              <a:t>Dokumen resmi: smk.pusatprestasinasional.kemdikdasmen.go.id</a:t>
-            </a:r>
-          </a:p>
-          <a:p>
-            <a:pPr>
-              <a:spcAft>
-                <a:spcPts val="800"/>
-              </a:spcAft>
-              <a:defRPr sz="1600">
-                <a:solidFill>
-                  <a:srgbClr val="333333"/>
-                </a:solidFill>
-              </a:defRPr>
-            </a:pPr>
-            <a:r>
-              <a:t>Marking Scheme Excel CIS — sumber kebenaran poin detail</a:t>
-            </a:r>
-          </a:p>
-          <a:p>
-            <a:pPr>
-              <a:defRPr sz="1200" i="1">
+              <a:defRPr sz="1100" i="1">
                 <a:solidFill>
                   <a:srgbClr val="ED7D31"/>
                 </a:solidFill>
               </a:defRPr>
             </a:pPr>
             <a:r>
-              <a:t>Terima kasih — semoga lancar sebagai juri!</a:t>
+              <a:t>Terima kasih — selamat bertugas sebagai juri LKS 2026!</a:t>
             </a:r>
           </a:p>
         </p:txBody>
@@ -5695,7 +8868,7 @@
         <p:spPr>
           <a:xfrm>
             <a:off x="0" y="0"/>
-            <a:ext cx="9144000" cy="822960"/>
+            <a:ext cx="9144000" cy="777240"/>
           </a:xfrm>
           <a:prstGeom prst="rect">
             <a:avLst/>
@@ -5731,14 +8904,105 @@
       </p:sp>
       <p:sp>
         <p:nvSpPr>
-          <p:cNvPr id="3" name="TextBox 2"/>
+          <p:cNvPr id="3" name="Rectangle 2"/>
+          <p:cNvSpPr/>
+          <p:nvPr/>
+        </p:nvSpPr>
+        <p:spPr>
+          <a:xfrm>
+            <a:off x="0" y="777240"/>
+            <a:ext cx="9144000" cy="54864"/>
+          </a:xfrm>
+          <a:prstGeom prst="rect">
+            <a:avLst/>
+          </a:prstGeom>
+          <a:solidFill>
+            <a:srgbClr val="ED7D31"/>
+          </a:solidFill>
+          <a:ln>
+            <a:noFill/>
+          </a:ln>
+        </p:spPr>
+        <p:style>
+          <a:lnRef idx="1">
+            <a:schemeClr val="accent1"/>
+          </a:lnRef>
+          <a:fillRef idx="3">
+            <a:schemeClr val="accent1"/>
+          </a:fillRef>
+          <a:effectRef idx="2">
+            <a:schemeClr val="accent1"/>
+          </a:effectRef>
+          <a:fontRef idx="minor">
+            <a:schemeClr val="lt1"/>
+          </a:fontRef>
+        </p:style>
+        <p:txBody>
+          <a:bodyPr rtlCol="0" anchor="ctr"/>
+          <a:lstStyle/>
+          <a:p>
+            <a:pPr algn="ctr"/>
+          </a:p>
+        </p:txBody>
+      </p:sp>
+      <p:pic>
+        <p:nvPicPr>
+          <p:cNvPr id="4" name="Picture 3" descr="logo-kemendikdasmen.png"/>
+          <p:cNvPicPr>
+            <a:picLocks noChangeAspect="1"/>
+          </p:cNvPicPr>
+          <p:nvPr/>
+        </p:nvPicPr>
+        <p:blipFill>
+          <a:blip r:embed="rId2"/>
+          <a:stretch>
+            <a:fillRect/>
+          </a:stretch>
+        </p:blipFill>
+        <p:spPr>
+          <a:xfrm>
+            <a:off x="137160" y="73152"/>
+            <a:ext cx="1619157" cy="502920"/>
+          </a:xfrm>
+          <a:prstGeom prst="rect">
+            <a:avLst/>
+          </a:prstGeom>
+        </p:spPr>
+      </p:pic>
+      <p:pic>
+        <p:nvPicPr>
+          <p:cNvPr id="5" name="Picture 4" descr="logo-lks-dikmen.png"/>
+          <p:cNvPicPr>
+            <a:picLocks noChangeAspect="1"/>
+          </p:cNvPicPr>
+          <p:nvPr/>
+        </p:nvPicPr>
+        <p:blipFill>
+          <a:blip r:embed="rId3"/>
+          <a:stretch>
+            <a:fillRect/>
+          </a:stretch>
+        </p:blipFill>
+        <p:spPr>
+          <a:xfrm>
+            <a:off x="7818120" y="45720"/>
+            <a:ext cx="658368" cy="658368"/>
+          </a:xfrm>
+          <a:prstGeom prst="rect">
+            <a:avLst/>
+          </a:prstGeom>
+        </p:spPr>
+      </p:pic>
+      <p:sp>
+        <p:nvSpPr>
+          <p:cNvPr id="6" name="TextBox 5"/>
           <p:cNvSpPr txBox="1"/>
           <p:nvPr/>
         </p:nvSpPr>
         <p:spPr>
           <a:xfrm>
-            <a:off x="457200" y="137160"/>
-            <a:ext cx="8229600" cy="640080"/>
+            <a:off x="2286000" y="109728"/>
+            <a:ext cx="5303520" cy="594360"/>
           </a:xfrm>
           <a:prstGeom prst="rect">
             <a:avLst/>
@@ -5751,8 +9015,8 @@
           </a:bodyPr>
           <a:lstStyle/>
           <a:p>
-            <a:pPr>
-              <a:defRPr sz="2200" b="1">
+            <a:pPr algn="ctr">
+              <a:defRPr sz="1800" b="1">
                 <a:solidFill>
                   <a:srgbClr val="FFFFFF"/>
                 </a:solidFill>
@@ -5766,14 +9030,92 @@
       </p:sp>
       <p:sp>
         <p:nvSpPr>
-          <p:cNvPr id="4" name="TextBox 3"/>
+          <p:cNvPr id="7" name="Rectangle 6"/>
+          <p:cNvSpPr/>
+          <p:nvPr/>
+        </p:nvSpPr>
+        <p:spPr>
+          <a:xfrm>
+            <a:off x="0" y="6446520"/>
+            <a:ext cx="9144000" cy="411480"/>
+          </a:xfrm>
+          <a:prstGeom prst="rect">
+            <a:avLst/>
+          </a:prstGeom>
+          <a:solidFill>
+            <a:srgbClr val="2E7D32"/>
+          </a:solidFill>
+          <a:ln>
+            <a:noFill/>
+          </a:ln>
+        </p:spPr>
+        <p:style>
+          <a:lnRef idx="1">
+            <a:schemeClr val="accent1"/>
+          </a:lnRef>
+          <a:fillRef idx="3">
+            <a:schemeClr val="accent1"/>
+          </a:fillRef>
+          <a:effectRef idx="2">
+            <a:schemeClr val="accent1"/>
+          </a:effectRef>
+          <a:fontRef idx="minor">
+            <a:schemeClr val="lt1"/>
+          </a:fontRef>
+        </p:style>
+        <p:txBody>
+          <a:bodyPr rtlCol="0" anchor="ctr"/>
+          <a:lstStyle/>
+          <a:p>
+            <a:pPr algn="ctr"/>
+          </a:p>
+        </p:txBody>
+      </p:sp>
+      <p:sp>
+        <p:nvSpPr>
+          <p:cNvPr id="8" name="TextBox 7"/>
           <p:cNvSpPr txBox="1"/>
           <p:nvPr/>
         </p:nvSpPr>
         <p:spPr>
           <a:xfrm>
-            <a:off x="548640" y="1005840"/>
-            <a:ext cx="8046720" cy="5029200"/>
+            <a:off x="274320" y="6492240"/>
+            <a:ext cx="8595360" cy="320040"/>
+          </a:xfrm>
+          <a:prstGeom prst="rect">
+            <a:avLst/>
+          </a:prstGeom>
+          <a:noFill/>
+        </p:spPr>
+        <p:txBody>
+          <a:bodyPr wrap="none">
+            <a:spAutoFit/>
+          </a:bodyPr>
+          <a:lstStyle/>
+          <a:p>
+            <a:pPr algn="ctr">
+              <a:defRPr sz="1000">
+                <a:solidFill>
+                  <a:srgbClr val="FFFFFF"/>
+                </a:solidFill>
+              </a:defRPr>
+            </a:pPr>
+            <a:r>
+              <a:t>LKS Nasional 2026 — Robot Bergerak Otonom | Kemendikdasmen</a:t>
+            </a:r>
+          </a:p>
+        </p:txBody>
+      </p:sp>
+      <p:sp>
+        <p:nvSpPr>
+          <p:cNvPr id="9" name="TextBox 8"/>
+          <p:cNvSpPr txBox="1"/>
+          <p:nvPr/>
+        </p:nvSpPr>
+        <p:spPr>
+          <a:xfrm>
+            <a:off x="502920" y="1051560"/>
+            <a:ext cx="8138160" cy="5212080"/>
           </a:xfrm>
           <a:prstGeom prst="rect">
             <a:avLst/>
@@ -5788,9 +9130,9 @@
           <a:p>
             <a:pPr>
               <a:spcAft>
-                <a:spcPts val="800"/>
+                <a:spcPts val="700"/>
               </a:spcAft>
-              <a:defRPr sz="1600">
+              <a:defRPr sz="1500">
                 <a:solidFill>
                   <a:srgbClr val="333333"/>
                 </a:solidFill>
@@ -5803,54 +9145,54 @@
           <a:p>
             <a:pPr>
               <a:spcAft>
-                <a:spcPts val="800"/>
+                <a:spcPts val="700"/>
               </a:spcAft>
-              <a:defRPr sz="1600">
+              <a:defRPr sz="1500">
                 <a:solidFill>
                   <a:srgbClr val="333333"/>
                 </a:solidFill>
               </a:defRPr>
             </a:pPr>
             <a:r>
-              <a:t>Tim: 2 peserta | Format: offline (luring)</a:t>
+              <a:t>Penyelenggara: Kemendikdasmen — Pusat Prestasi Nasional</a:t>
             </a:r>
           </a:p>
           <a:p>
             <a:pPr>
               <a:spcAft>
-                <a:spcPts val="800"/>
+                <a:spcPts val="700"/>
               </a:spcAft>
-              <a:defRPr sz="1600">
+              <a:defRPr sz="1500">
                 <a:solidFill>
                   <a:srgbClr val="333333"/>
                 </a:solidFill>
               </a:defRPr>
             </a:pPr>
             <a:r>
-              <a:t>Total waktu kerja: ±15 jam (3 hari)</a:t>
+              <a:t>Tim: 2 peserta | Format: offline (luring) | ±15 jam / 3 hari</a:t>
             </a:r>
           </a:p>
           <a:p>
             <a:pPr>
               <a:spcAft>
-                <a:spcPts val="800"/>
+                <a:spcPts val="700"/>
               </a:spcAft>
-              <a:defRPr sz="1600">
+              <a:defRPr sz="1500">
                 <a:solidFill>
                   <a:srgbClr val="333333"/>
                 </a:solidFill>
               </a:defRPr>
             </a:pPr>
             <a:r>
-              <a:t>Standar acuan: WorldSkills WSOS Skill 23 — Mobile Robotics</a:t>
+              <a:t>Standar: WorldSkills WSOS Skill 23 — Mobile Robotics</a:t>
             </a:r>
           </a:p>
           <a:p>
             <a:pPr>
               <a:spcAft>
-                <a:spcPts val="800"/>
+                <a:spcPts val="700"/>
               </a:spcAft>
-              <a:defRPr sz="1600">
+              <a:defRPr sz="1500">
                 <a:solidFill>
                   <a:srgbClr val="333333"/>
                 </a:solidFill>
@@ -5863,16 +9205,16 @@
           <a:p>
             <a:pPr>
               <a:spcAft>
-                <a:spcPts val="800"/>
+                <a:spcPts val="700"/>
               </a:spcAft>
-              <a:defRPr sz="1600">
+              <a:defRPr sz="1500">
                 <a:solidFill>
                   <a:srgbClr val="333333"/>
                 </a:solidFill>
               </a:defRPr>
             </a:pPr>
             <a:r>
-              <a:t>Robot = asisten perpustakaan: ambil kubus (buku) → tempatkan ke rak sesuai marker warna</a:t>
+              <a:t>Misi: robot mengambil kubus (buku) dan menempatkannya ke rak sesuai marker warna — sepenuhnya otonom</a:t>
             </a:r>
           </a:p>
         </p:txBody>
@@ -5904,7 +9246,7 @@
         <p:spPr>
           <a:xfrm>
             <a:off x="0" y="0"/>
-            <a:ext cx="9144000" cy="822960"/>
+            <a:ext cx="9144000" cy="777240"/>
           </a:xfrm>
           <a:prstGeom prst="rect">
             <a:avLst/>
@@ -5940,14 +9282,105 @@
       </p:sp>
       <p:sp>
         <p:nvSpPr>
-          <p:cNvPr id="3" name="TextBox 2"/>
+          <p:cNvPr id="3" name="Rectangle 2"/>
+          <p:cNvSpPr/>
+          <p:nvPr/>
+        </p:nvSpPr>
+        <p:spPr>
+          <a:xfrm>
+            <a:off x="0" y="777240"/>
+            <a:ext cx="9144000" cy="54864"/>
+          </a:xfrm>
+          <a:prstGeom prst="rect">
+            <a:avLst/>
+          </a:prstGeom>
+          <a:solidFill>
+            <a:srgbClr val="ED7D31"/>
+          </a:solidFill>
+          <a:ln>
+            <a:noFill/>
+          </a:ln>
+        </p:spPr>
+        <p:style>
+          <a:lnRef idx="1">
+            <a:schemeClr val="accent1"/>
+          </a:lnRef>
+          <a:fillRef idx="3">
+            <a:schemeClr val="accent1"/>
+          </a:fillRef>
+          <a:effectRef idx="2">
+            <a:schemeClr val="accent1"/>
+          </a:effectRef>
+          <a:fontRef idx="minor">
+            <a:schemeClr val="lt1"/>
+          </a:fontRef>
+        </p:style>
+        <p:txBody>
+          <a:bodyPr rtlCol="0" anchor="ctr"/>
+          <a:lstStyle/>
+          <a:p>
+            <a:pPr algn="ctr"/>
+          </a:p>
+        </p:txBody>
+      </p:sp>
+      <p:pic>
+        <p:nvPicPr>
+          <p:cNvPr id="4" name="Picture 3" descr="logo-kemendikdasmen.png"/>
+          <p:cNvPicPr>
+            <a:picLocks noChangeAspect="1"/>
+          </p:cNvPicPr>
+          <p:nvPr/>
+        </p:nvPicPr>
+        <p:blipFill>
+          <a:blip r:embed="rId2"/>
+          <a:stretch>
+            <a:fillRect/>
+          </a:stretch>
+        </p:blipFill>
+        <p:spPr>
+          <a:xfrm>
+            <a:off x="137160" y="73152"/>
+            <a:ext cx="1619157" cy="502920"/>
+          </a:xfrm>
+          <a:prstGeom prst="rect">
+            <a:avLst/>
+          </a:prstGeom>
+        </p:spPr>
+      </p:pic>
+      <p:pic>
+        <p:nvPicPr>
+          <p:cNvPr id="5" name="Picture 4" descr="logo-lks-dikmen.png"/>
+          <p:cNvPicPr>
+            <a:picLocks noChangeAspect="1"/>
+          </p:cNvPicPr>
+          <p:nvPr/>
+        </p:nvPicPr>
+        <p:blipFill>
+          <a:blip r:embed="rId3"/>
+          <a:stretch>
+            <a:fillRect/>
+          </a:stretch>
+        </p:blipFill>
+        <p:spPr>
+          <a:xfrm>
+            <a:off x="7818120" y="45720"/>
+            <a:ext cx="658368" cy="658368"/>
+          </a:xfrm>
+          <a:prstGeom prst="rect">
+            <a:avLst/>
+          </a:prstGeom>
+        </p:spPr>
+      </p:pic>
+      <p:sp>
+        <p:nvSpPr>
+          <p:cNvPr id="6" name="TextBox 5"/>
           <p:cNvSpPr txBox="1"/>
           <p:nvPr/>
         </p:nvSpPr>
         <p:spPr>
           <a:xfrm>
-            <a:off x="457200" y="137160"/>
-            <a:ext cx="8229600" cy="640080"/>
+            <a:off x="2286000" y="109728"/>
+            <a:ext cx="5303520" cy="594360"/>
           </a:xfrm>
           <a:prstGeom prst="rect">
             <a:avLst/>
@@ -5960,30 +9393,108 @@
           </a:bodyPr>
           <a:lstStyle/>
           <a:p>
-            <a:pPr>
-              <a:defRPr sz="2200" b="1">
+            <a:pPr algn="ctr">
+              <a:defRPr sz="1800" b="1">
                 <a:solidFill>
                   <a:srgbClr val="FFFFFF"/>
                 </a:solidFill>
               </a:defRPr>
             </a:pPr>
             <a:r>
-              <a:t>Bobot Modul Penilaian</a:t>
+              <a:t>Bobot Modul</a:t>
+            </a:r>
+          </a:p>
+        </p:txBody>
+      </p:sp>
+      <p:sp>
+        <p:nvSpPr>
+          <p:cNvPr id="7" name="Rectangle 6"/>
+          <p:cNvSpPr/>
+          <p:nvPr/>
+        </p:nvSpPr>
+        <p:spPr>
+          <a:xfrm>
+            <a:off x="0" y="6446520"/>
+            <a:ext cx="9144000" cy="411480"/>
+          </a:xfrm>
+          <a:prstGeom prst="rect">
+            <a:avLst/>
+          </a:prstGeom>
+          <a:solidFill>
+            <a:srgbClr val="2E7D32"/>
+          </a:solidFill>
+          <a:ln>
+            <a:noFill/>
+          </a:ln>
+        </p:spPr>
+        <p:style>
+          <a:lnRef idx="1">
+            <a:schemeClr val="accent1"/>
+          </a:lnRef>
+          <a:fillRef idx="3">
+            <a:schemeClr val="accent1"/>
+          </a:fillRef>
+          <a:effectRef idx="2">
+            <a:schemeClr val="accent1"/>
+          </a:effectRef>
+          <a:fontRef idx="minor">
+            <a:schemeClr val="lt1"/>
+          </a:fontRef>
+        </p:style>
+        <p:txBody>
+          <a:bodyPr rtlCol="0" anchor="ctr"/>
+          <a:lstStyle/>
+          <a:p>
+            <a:pPr algn="ctr"/>
+          </a:p>
+        </p:txBody>
+      </p:sp>
+      <p:sp>
+        <p:nvSpPr>
+          <p:cNvPr id="8" name="TextBox 7"/>
+          <p:cNvSpPr txBox="1"/>
+          <p:nvPr/>
+        </p:nvSpPr>
+        <p:spPr>
+          <a:xfrm>
+            <a:off x="274320" y="6492240"/>
+            <a:ext cx="8595360" cy="320040"/>
+          </a:xfrm>
+          <a:prstGeom prst="rect">
+            <a:avLst/>
+          </a:prstGeom>
+          <a:noFill/>
+        </p:spPr>
+        <p:txBody>
+          <a:bodyPr wrap="none">
+            <a:spAutoFit/>
+          </a:bodyPr>
+          <a:lstStyle/>
+          <a:p>
+            <a:pPr algn="ctr">
+              <a:defRPr sz="1000">
+                <a:solidFill>
+                  <a:srgbClr val="FFFFFF"/>
+                </a:solidFill>
+              </a:defRPr>
+            </a:pPr>
+            <a:r>
+              <a:t>LKS Nasional 2026 — Robot Bergerak Otonom | Kemendikdasmen</a:t>
             </a:r>
           </a:p>
         </p:txBody>
       </p:sp>
       <p:graphicFrame>
         <p:nvGraphicFramePr>
-          <p:cNvPr id="4" name="Table 3"/>
+          <p:cNvPr id="9" name="Table 8"/>
           <p:cNvGraphicFramePr>
             <a:graphicFrameLocks noGrp="1"/>
           </p:cNvGraphicFramePr>
           <p:nvPr/>
         </p:nvGraphicFramePr>
         <p:xfrm>
-          <a:off x="365760" y="1005840"/>
-          <a:ext cx="8412480" cy="2651760"/>
+          <a:off x="320040" y="1005840"/>
+          <a:ext cx="8503920" cy="2359152"/>
         </p:xfrm>
         <a:graphic>
           <a:graphicData uri="http://schemas.openxmlformats.org/drawingml/2006/table">
@@ -5992,20 +9503,20 @@
                 <a:tableStyleId>{5C22544A-7EE6-4342-B048-85BDC9FD1C3A}</a:tableStyleId>
               </a:tblPr>
               <a:tblGrid>
-                <a:gridCol w="1682496"/>
-                <a:gridCol w="1682496"/>
-                <a:gridCol w="1682496"/>
-                <a:gridCol w="1682496"/>
-                <a:gridCol w="1682496"/>
+                <a:gridCol w="1700784"/>
+                <a:gridCol w="1700784"/>
+                <a:gridCol w="1700784"/>
+                <a:gridCol w="1700784"/>
+                <a:gridCol w="1700784"/>
               </a:tblGrid>
-              <a:tr h="441960">
+              <a:tr h="393192">
                 <a:tc>
                   <a:txBody>
                     <a:bodyPr/>
                     <a:lstStyle/>
                     <a:p>
                       <a:pPr>
-                        <a:defRPr b="1" sz="1100">
+                        <a:defRPr b="1" sz="1000">
                           <a:solidFill>
                             <a:srgbClr val="FFFFFF"/>
                           </a:solidFill>
@@ -6028,7 +9539,7 @@
                     <a:lstStyle/>
                     <a:p>
                       <a:pPr>
-                        <a:defRPr b="1" sz="1100">
+                        <a:defRPr b="1" sz="1000">
                           <a:solidFill>
                             <a:srgbClr val="FFFFFF"/>
                           </a:solidFill>
@@ -6051,7 +9562,7 @@
                     <a:lstStyle/>
                     <a:p>
                       <a:pPr>
-                        <a:defRPr b="1" sz="1100">
+                        <a:defRPr b="1" sz="1000">
                           <a:solidFill>
                             <a:srgbClr val="FFFFFF"/>
                           </a:solidFill>
@@ -6074,7 +9585,7 @@
                     <a:lstStyle/>
                     <a:p>
                       <a:pPr>
-                        <a:defRPr b="1" sz="1100">
+                        <a:defRPr b="1" sz="1000">
                           <a:solidFill>
                             <a:srgbClr val="FFFFFF"/>
                           </a:solidFill>
@@ -6097,7 +9608,7 @@
                     <a:lstStyle/>
                     <a:p>
                       <a:pPr>
-                        <a:defRPr b="1" sz="1100">
+                        <a:defRPr b="1" sz="1000">
                           <a:solidFill>
                             <a:srgbClr val="FFFFFF"/>
                           </a:solidFill>
@@ -6115,14 +9626,14 @@
                   </a:tcPr>
                 </a:tc>
               </a:tr>
-              <a:tr h="441960">
+              <a:tr h="393192">
                 <a:tc>
                   <a:txBody>
                     <a:bodyPr/>
                     <a:lstStyle/>
                     <a:p>
                       <a:pPr>
-                        <a:defRPr sz="1100"/>
+                        <a:defRPr sz="1000"/>
                       </a:pPr>
                       <a:r>
                         <a:t>A</a:t>
@@ -6137,7 +9648,7 @@
                     <a:lstStyle/>
                     <a:p>
                       <a:pPr>
-                        <a:defRPr sz="1100"/>
+                        <a:defRPr sz="1000"/>
                       </a:pPr>
                       <a:r>
                         <a:t>Organisasi &amp; Manajemen Kerja</a:t>
@@ -6152,7 +9663,7 @@
                     <a:lstStyle/>
                     <a:p>
                       <a:pPr>
-                        <a:defRPr sz="1100"/>
+                        <a:defRPr sz="1000"/>
                       </a:pPr>
                       <a:r>
                         <a:t>H1–H3</a:t>
@@ -6167,7 +9678,7 @@
                     <a:lstStyle/>
                     <a:p>
                       <a:pPr>
-                        <a:defRPr sz="1100"/>
+                        <a:defRPr sz="1000"/>
                       </a:pPr>
                       <a:r>
                         <a:t>8%</a:t>
@@ -6182,7 +9693,7 @@
                     <a:lstStyle/>
                     <a:p>
                       <a:pPr>
-                        <a:defRPr sz="1100"/>
+                        <a:defRPr sz="1000"/>
                       </a:pPr>
                       <a:r>
                         <a:t>Judgement</a:t>
@@ -6192,14 +9703,14 @@
                   <a:tcPr/>
                 </a:tc>
               </a:tr>
-              <a:tr h="441960">
+              <a:tr h="393192">
                 <a:tc>
                   <a:txBody>
                     <a:bodyPr/>
                     <a:lstStyle/>
                     <a:p>
                       <a:pPr>
-                        <a:defRPr sz="1100"/>
+                        <a:defRPr sz="1000"/>
                       </a:pPr>
                       <a:r>
                         <a:t>B</a:t>
@@ -6214,7 +9725,7 @@
                     <a:lstStyle/>
                     <a:p>
                       <a:pPr>
-                        <a:defRPr sz="1100"/>
+                        <a:defRPr sz="1000"/>
                       </a:pPr>
                       <a:r>
                         <a:t>Jurnal / Laporan Teknis</a:t>
@@ -6229,7 +9740,7 @@
                     <a:lstStyle/>
                     <a:p>
                       <a:pPr>
-                        <a:defRPr sz="1100"/>
+                        <a:defRPr sz="1000"/>
                       </a:pPr>
                       <a:r>
                         <a:t>H1</a:t>
@@ -6244,7 +9755,7 @@
                     <a:lstStyle/>
                     <a:p>
                       <a:pPr>
-                        <a:defRPr sz="1100"/>
+                        <a:defRPr sz="1000"/>
                       </a:pPr>
                       <a:r>
                         <a:t>10%</a:t>
@@ -6259,7 +9770,7 @@
                     <a:lstStyle/>
                     <a:p>
                       <a:pPr>
-                        <a:defRPr sz="1100"/>
+                        <a:defRPr sz="1000"/>
                       </a:pPr>
                       <a:r>
                         <a:t>J + M</a:t>
@@ -6269,14 +9780,14 @@
                   <a:tcPr/>
                 </a:tc>
               </a:tr>
-              <a:tr h="441960">
+              <a:tr h="393192">
                 <a:tc>
                   <a:txBody>
                     <a:bodyPr/>
                     <a:lstStyle/>
                     <a:p>
                       <a:pPr>
-                        <a:defRPr sz="1100"/>
+                        <a:defRPr sz="1000"/>
                       </a:pPr>
                       <a:r>
                         <a:t>C</a:t>
@@ -6291,7 +9802,7 @@
                     <a:lstStyle/>
                     <a:p>
                       <a:pPr>
-                        <a:defRPr sz="1100"/>
+                        <a:defRPr sz="1000"/>
                       </a:pPr>
                       <a:r>
                         <a:t>Perakitan Robot (L-Channel)</a:t>
@@ -6306,7 +9817,7 @@
                     <a:lstStyle/>
                     <a:p>
                       <a:pPr>
-                        <a:defRPr sz="1100"/>
+                        <a:defRPr sz="1000"/>
                       </a:pPr>
                       <a:r>
                         <a:t>H1</a:t>
@@ -6321,7 +9832,7 @@
                     <a:lstStyle/>
                     <a:p>
                       <a:pPr>
-                        <a:defRPr sz="1100"/>
+                        <a:defRPr sz="1000"/>
                       </a:pPr>
                       <a:r>
                         <a:t>10%</a:t>
@@ -6336,7 +9847,7 @@
                     <a:lstStyle/>
                     <a:p>
                       <a:pPr>
-                        <a:defRPr sz="1100"/>
+                        <a:defRPr sz="1000"/>
                       </a:pPr>
                       <a:r>
                         <a:t>Judgement</a:t>
@@ -6346,14 +9857,14 @@
                   <a:tcPr/>
                 </a:tc>
               </a:tr>
-              <a:tr h="441960">
+              <a:tr h="393192">
                 <a:tc>
                   <a:txBody>
                     <a:bodyPr/>
                     <a:lstStyle/>
                     <a:p>
                       <a:pPr>
-                        <a:defRPr sz="1100"/>
+                        <a:defRPr sz="1000"/>
                       </a:pPr>
                       <a:r>
                         <a:t>D</a:t>
@@ -6368,7 +9879,7 @@
                     <a:lstStyle/>
                     <a:p>
                       <a:pPr>
-                        <a:defRPr sz="1100"/>
+                        <a:defRPr sz="1000"/>
                       </a:pPr>
                       <a:r>
                         <a:t>Gerakan Dasar &amp; Manajemen Objek</a:t>
@@ -6383,7 +9894,7 @@
                     <a:lstStyle/>
                     <a:p>
                       <a:pPr>
-                        <a:defRPr sz="1100"/>
+                        <a:defRPr sz="1000"/>
                       </a:pPr>
                       <a:r>
                         <a:t>H2</a:t>
@@ -6398,7 +9909,7 @@
                     <a:lstStyle/>
                     <a:p>
                       <a:pPr>
-                        <a:defRPr sz="1100"/>
+                        <a:defRPr sz="1000"/>
                       </a:pPr>
                       <a:r>
                         <a:t>12%</a:t>
@@ -6413,7 +9924,7 @@
                     <a:lstStyle/>
                     <a:p>
                       <a:pPr>
-                        <a:defRPr sz="1100"/>
+                        <a:defRPr sz="1000"/>
                       </a:pPr>
                       <a:r>
                         <a:t>Measurement</a:t>
@@ -6423,14 +9934,14 @@
                   <a:tcPr/>
                 </a:tc>
               </a:tr>
-              <a:tr h="441960">
+              <a:tr h="393192">
                 <a:tc>
                   <a:txBody>
                     <a:bodyPr/>
                     <a:lstStyle/>
                     <a:p>
                       <a:pPr>
-                        <a:defRPr sz="1100"/>
+                        <a:defRPr sz="1000"/>
                       </a:pPr>
                       <a:r>
                         <a:t>E</a:t>
@@ -6445,7 +9956,7 @@
                     <a:lstStyle/>
                     <a:p>
                       <a:pPr>
-                        <a:defRPr sz="1100"/>
+                        <a:defRPr sz="1000"/>
                       </a:pPr>
                       <a:r>
                         <a:t>Performansi Otonom</a:t>
@@ -6460,7 +9971,7 @@
                     <a:lstStyle/>
                     <a:p>
                       <a:pPr>
-                        <a:defRPr sz="1100"/>
+                        <a:defRPr sz="1000"/>
                       </a:pPr>
                       <a:r>
                         <a:t>H2–H3</a:t>
@@ -6475,7 +9986,7 @@
                     <a:lstStyle/>
                     <a:p>
                       <a:pPr>
-                        <a:defRPr sz="1100"/>
+                        <a:defRPr sz="1000"/>
                       </a:pPr>
                       <a:r>
                         <a:t>60%</a:t>
@@ -6490,7 +10001,7 @@
                     <a:lstStyle/>
                     <a:p>
                       <a:pPr>
-                        <a:defRPr sz="1100"/>
+                        <a:defRPr sz="1000"/>
                       </a:pPr>
                       <a:r>
                         <a:t>Measurement</a:t>
@@ -6531,7 +10042,7 @@
         <p:spPr>
           <a:xfrm>
             <a:off x="0" y="0"/>
-            <a:ext cx="9144000" cy="822960"/>
+            <a:ext cx="9144000" cy="777240"/>
           </a:xfrm>
           <a:prstGeom prst="rect">
             <a:avLst/>
@@ -6567,14 +10078,105 @@
       </p:sp>
       <p:sp>
         <p:nvSpPr>
-          <p:cNvPr id="3" name="TextBox 2"/>
+          <p:cNvPr id="3" name="Rectangle 2"/>
+          <p:cNvSpPr/>
+          <p:nvPr/>
+        </p:nvSpPr>
+        <p:spPr>
+          <a:xfrm>
+            <a:off x="0" y="777240"/>
+            <a:ext cx="9144000" cy="54864"/>
+          </a:xfrm>
+          <a:prstGeom prst="rect">
+            <a:avLst/>
+          </a:prstGeom>
+          <a:solidFill>
+            <a:srgbClr val="ED7D31"/>
+          </a:solidFill>
+          <a:ln>
+            <a:noFill/>
+          </a:ln>
+        </p:spPr>
+        <p:style>
+          <a:lnRef idx="1">
+            <a:schemeClr val="accent1"/>
+          </a:lnRef>
+          <a:fillRef idx="3">
+            <a:schemeClr val="accent1"/>
+          </a:fillRef>
+          <a:effectRef idx="2">
+            <a:schemeClr val="accent1"/>
+          </a:effectRef>
+          <a:fontRef idx="minor">
+            <a:schemeClr val="lt1"/>
+          </a:fontRef>
+        </p:style>
+        <p:txBody>
+          <a:bodyPr rtlCol="0" anchor="ctr"/>
+          <a:lstStyle/>
+          <a:p>
+            <a:pPr algn="ctr"/>
+          </a:p>
+        </p:txBody>
+      </p:sp>
+      <p:pic>
+        <p:nvPicPr>
+          <p:cNvPr id="4" name="Picture 3" descr="logo-kemendikdasmen.png"/>
+          <p:cNvPicPr>
+            <a:picLocks noChangeAspect="1"/>
+          </p:cNvPicPr>
+          <p:nvPr/>
+        </p:nvPicPr>
+        <p:blipFill>
+          <a:blip r:embed="rId2"/>
+          <a:stretch>
+            <a:fillRect/>
+          </a:stretch>
+        </p:blipFill>
+        <p:spPr>
+          <a:xfrm>
+            <a:off x="137160" y="73152"/>
+            <a:ext cx="1619157" cy="502920"/>
+          </a:xfrm>
+          <a:prstGeom prst="rect">
+            <a:avLst/>
+          </a:prstGeom>
+        </p:spPr>
+      </p:pic>
+      <p:pic>
+        <p:nvPicPr>
+          <p:cNvPr id="5" name="Picture 4" descr="logo-lks-dikmen.png"/>
+          <p:cNvPicPr>
+            <a:picLocks noChangeAspect="1"/>
+          </p:cNvPicPr>
+          <p:nvPr/>
+        </p:nvPicPr>
+        <p:blipFill>
+          <a:blip r:embed="rId3"/>
+          <a:stretch>
+            <a:fillRect/>
+          </a:stretch>
+        </p:blipFill>
+        <p:spPr>
+          <a:xfrm>
+            <a:off x="7818120" y="45720"/>
+            <a:ext cx="658368" cy="658368"/>
+          </a:xfrm>
+          <a:prstGeom prst="rect">
+            <a:avLst/>
+          </a:prstGeom>
+        </p:spPr>
+      </p:pic>
+      <p:sp>
+        <p:nvSpPr>
+          <p:cNvPr id="6" name="TextBox 5"/>
           <p:cNvSpPr txBox="1"/>
           <p:nvPr/>
         </p:nvSpPr>
         <p:spPr>
           <a:xfrm>
-            <a:off x="457200" y="137160"/>
-            <a:ext cx="8229600" cy="640080"/>
+            <a:off x="2286000" y="109728"/>
+            <a:ext cx="5303520" cy="594360"/>
           </a:xfrm>
           <a:prstGeom prst="rect">
             <a:avLst/>
@@ -6587,29 +10189,107 @@
           </a:bodyPr>
           <a:lstStyle/>
           <a:p>
-            <a:pPr>
-              <a:defRPr sz="2200" b="1">
+            <a:pPr algn="ctr">
+              <a:defRPr sz="1800" b="1">
                 <a:solidFill>
                   <a:srgbClr val="FFFFFF"/>
                 </a:solidFill>
               </a:defRPr>
             </a:pPr>
             <a:r>
-              <a:t>Dua Metode Penilaian</a:t>
-            </a:r>
-          </a:p>
-        </p:txBody>
-      </p:sp>
-      <p:sp>
-        <p:nvSpPr>
-          <p:cNvPr id="4" name="TextBox 3"/>
+              <a:t>Sistem Penilaian</a:t>
+            </a:r>
+          </a:p>
+        </p:txBody>
+      </p:sp>
+      <p:sp>
+        <p:nvSpPr>
+          <p:cNvPr id="7" name="Rectangle 6"/>
+          <p:cNvSpPr/>
+          <p:nvPr/>
+        </p:nvSpPr>
+        <p:spPr>
+          <a:xfrm>
+            <a:off x="0" y="6446520"/>
+            <a:ext cx="9144000" cy="411480"/>
+          </a:xfrm>
+          <a:prstGeom prst="rect">
+            <a:avLst/>
+          </a:prstGeom>
+          <a:solidFill>
+            <a:srgbClr val="2E7D32"/>
+          </a:solidFill>
+          <a:ln>
+            <a:noFill/>
+          </a:ln>
+        </p:spPr>
+        <p:style>
+          <a:lnRef idx="1">
+            <a:schemeClr val="accent1"/>
+          </a:lnRef>
+          <a:fillRef idx="3">
+            <a:schemeClr val="accent1"/>
+          </a:fillRef>
+          <a:effectRef idx="2">
+            <a:schemeClr val="accent1"/>
+          </a:effectRef>
+          <a:fontRef idx="minor">
+            <a:schemeClr val="lt1"/>
+          </a:fontRef>
+        </p:style>
+        <p:txBody>
+          <a:bodyPr rtlCol="0" anchor="ctr"/>
+          <a:lstStyle/>
+          <a:p>
+            <a:pPr algn="ctr"/>
+          </a:p>
+        </p:txBody>
+      </p:sp>
+      <p:sp>
+        <p:nvSpPr>
+          <p:cNvPr id="8" name="TextBox 7"/>
           <p:cNvSpPr txBox="1"/>
           <p:nvPr/>
         </p:nvSpPr>
         <p:spPr>
           <a:xfrm>
-            <a:off x="548640" y="1005840"/>
-            <a:ext cx="8046720" cy="5029200"/>
+            <a:off x="274320" y="6492240"/>
+            <a:ext cx="8595360" cy="320040"/>
+          </a:xfrm>
+          <a:prstGeom prst="rect">
+            <a:avLst/>
+          </a:prstGeom>
+          <a:noFill/>
+        </p:spPr>
+        <p:txBody>
+          <a:bodyPr wrap="none">
+            <a:spAutoFit/>
+          </a:bodyPr>
+          <a:lstStyle/>
+          <a:p>
+            <a:pPr algn="ctr">
+              <a:defRPr sz="1000">
+                <a:solidFill>
+                  <a:srgbClr val="FFFFFF"/>
+                </a:solidFill>
+              </a:defRPr>
+            </a:pPr>
+            <a:r>
+              <a:t>LKS Nasional 2026 — Robot Bergerak Otonom | Kemendikdasmen</a:t>
+            </a:r>
+          </a:p>
+        </p:txBody>
+      </p:sp>
+      <p:sp>
+        <p:nvSpPr>
+          <p:cNvPr id="9" name="TextBox 8"/>
+          <p:cNvSpPr txBox="1"/>
+          <p:nvPr/>
+        </p:nvSpPr>
+        <p:spPr>
+          <a:xfrm>
+            <a:off x="502920" y="1051560"/>
+            <a:ext cx="8138160" cy="5212080"/>
           </a:xfrm>
           <a:prstGeom prst="rect">
             <a:avLst/>
@@ -6624,76 +10304,76 @@
           <a:p>
             <a:pPr>
               <a:spcAft>
-                <a:spcPts val="800"/>
+                <a:spcPts val="700"/>
               </a:spcAft>
-              <a:defRPr sz="1600">
+              <a:defRPr sz="1500">
                 <a:solidFill>
                   <a:srgbClr val="333333"/>
                 </a:solidFill>
               </a:defRPr>
             </a:pPr>
             <a:r>
-              <a:t>Judgement (J): skala 0–3 — proses, kerapian, kolaborasi, kualitas dokumentasi</a:t>
+              <a:t>Judgement (J): skala 0–3 — proses, kerapian, kolaborasi</a:t>
             </a:r>
           </a:p>
           <a:p>
             <a:pPr>
               <a:spcAft>
-                <a:spcPts val="800"/>
+                <a:spcPts val="700"/>
               </a:spcAft>
-              <a:defRPr sz="1600">
+              <a:defRPr sz="1500">
                 <a:solidFill>
                   <a:srgbClr val="333333"/>
                 </a:solidFill>
               </a:defRPr>
             </a:pPr>
             <a:r>
-              <a:t>Measurement (M): biner 1/0 — akurasi gerak, sukses misi, penempatan kubus</a:t>
+              <a:t>Measurement (M): biner 1/0 — akurasi gerak &amp; sukses misi</a:t>
             </a:r>
           </a:p>
           <a:p>
             <a:pPr>
               <a:spcAft>
-                <a:spcPts val="800"/>
+                <a:spcPts val="700"/>
               </a:spcAft>
-              <a:defRPr sz="1600">
+              <a:defRPr sz="1500">
                 <a:solidFill>
                   <a:srgbClr val="333333"/>
                 </a:solidFill>
               </a:defRPr>
             </a:pPr>
             <a:r>
-              <a:t>Komposisi total: Judgement 26 poin + Measurement 74 poin = 100</a:t>
+              <a:t>3 juri untuk J → rata-rata; selisih ≥2 → ulangi penilaian</a:t>
             </a:r>
           </a:p>
           <a:p>
             <a:pPr>
               <a:spcAft>
-                <a:spcPts val="800"/>
+                <a:spcPts val="700"/>
               </a:spcAft>
-              <a:defRPr sz="1600">
+              <a:defRPr sz="1500">
                 <a:solidFill>
                   <a:srgbClr val="333333"/>
                 </a:solidFill>
               </a:defRPr>
             </a:pPr>
             <a:r>
-              <a:t>3 juri untuk Judgement → rata-rata; selisih ≥2 → ulangi penilaian</a:t>
+              <a:t>Input ke CIS → skala 700; Medallion of Excellence jika &gt;700</a:t>
             </a:r>
           </a:p>
           <a:p>
             <a:pPr>
               <a:spcAft>
-                <a:spcPts val="800"/>
+                <a:spcPts val="700"/>
               </a:spcAft>
-              <a:defRPr sz="1600">
+              <a:defRPr sz="1500">
                 <a:solidFill>
                   <a:srgbClr val="333333"/>
                 </a:solidFill>
               </a:defRPr>
             </a:pPr>
             <a:r>
-              <a:t>Skor dimasukkan ke CIS → konversi skala 700; Medallion of Excellence jika &gt;700</a:t>
+              <a:t>60% skor dari Modul E — penilaian Anda sangat menentukan juara</a:t>
             </a:r>
           </a:p>
         </p:txBody>
@@ -6725,7 +10405,7 @@
         <p:spPr>
           <a:xfrm>
             <a:off x="0" y="0"/>
-            <a:ext cx="9144000" cy="822960"/>
+            <a:ext cx="9144000" cy="777240"/>
           </a:xfrm>
           <a:prstGeom prst="rect">
             <a:avLst/>
@@ -6761,14 +10441,148 @@
       </p:sp>
       <p:sp>
         <p:nvSpPr>
-          <p:cNvPr id="3" name="TextBox 2"/>
+          <p:cNvPr id="3" name="Rectangle 2"/>
+          <p:cNvSpPr/>
+          <p:nvPr/>
+        </p:nvSpPr>
+        <p:spPr>
+          <a:xfrm>
+            <a:off x="0" y="777240"/>
+            <a:ext cx="9144000" cy="54864"/>
+          </a:xfrm>
+          <a:prstGeom prst="rect">
+            <a:avLst/>
+          </a:prstGeom>
+          <a:solidFill>
+            <a:srgbClr val="ED7D31"/>
+          </a:solidFill>
+          <a:ln>
+            <a:noFill/>
+          </a:ln>
+        </p:spPr>
+        <p:style>
+          <a:lnRef idx="1">
+            <a:schemeClr val="accent1"/>
+          </a:lnRef>
+          <a:fillRef idx="3">
+            <a:schemeClr val="accent1"/>
+          </a:fillRef>
+          <a:effectRef idx="2">
+            <a:schemeClr val="accent1"/>
+          </a:effectRef>
+          <a:fontRef idx="minor">
+            <a:schemeClr val="lt1"/>
+          </a:fontRef>
+        </p:style>
+        <p:txBody>
+          <a:bodyPr rtlCol="0" anchor="ctr"/>
+          <a:lstStyle/>
+          <a:p>
+            <a:pPr algn="ctr"/>
+          </a:p>
+        </p:txBody>
+      </p:sp>
+      <p:pic>
+        <p:nvPicPr>
+          <p:cNvPr id="4" name="Picture 3" descr="logo-kemendikdasmen.png"/>
+          <p:cNvPicPr>
+            <a:picLocks noChangeAspect="1"/>
+          </p:cNvPicPr>
+          <p:nvPr/>
+        </p:nvPicPr>
+        <p:blipFill>
+          <a:blip r:embed="rId2"/>
+          <a:stretch>
+            <a:fillRect/>
+          </a:stretch>
+        </p:blipFill>
+        <p:spPr>
+          <a:xfrm>
+            <a:off x="137160" y="73152"/>
+            <a:ext cx="1619157" cy="502920"/>
+          </a:xfrm>
+          <a:prstGeom prst="rect">
+            <a:avLst/>
+          </a:prstGeom>
+        </p:spPr>
+      </p:pic>
+      <p:pic>
+        <p:nvPicPr>
+          <p:cNvPr id="5" name="Picture 4" descr="logo-lks-dikmen.png"/>
+          <p:cNvPicPr>
+            <a:picLocks noChangeAspect="1"/>
+          </p:cNvPicPr>
+          <p:nvPr/>
+        </p:nvPicPr>
+        <p:blipFill>
+          <a:blip r:embed="rId3"/>
+          <a:stretch>
+            <a:fillRect/>
+          </a:stretch>
+        </p:blipFill>
+        <p:spPr>
+          <a:xfrm>
+            <a:off x="7818120" y="45720"/>
+            <a:ext cx="658368" cy="658368"/>
+          </a:xfrm>
+          <a:prstGeom prst="rect">
+            <a:avLst/>
+          </a:prstGeom>
+        </p:spPr>
+      </p:pic>
+      <p:sp>
+        <p:nvSpPr>
+          <p:cNvPr id="6" name="Rectangle 5"/>
+          <p:cNvSpPr/>
+          <p:nvPr/>
+        </p:nvSpPr>
+        <p:spPr>
+          <a:xfrm>
+            <a:off x="0" y="6446520"/>
+            <a:ext cx="9144000" cy="411480"/>
+          </a:xfrm>
+          <a:prstGeom prst="rect">
+            <a:avLst/>
+          </a:prstGeom>
+          <a:solidFill>
+            <a:srgbClr val="2E7D32"/>
+          </a:solidFill>
+          <a:ln>
+            <a:noFill/>
+          </a:ln>
+        </p:spPr>
+        <p:style>
+          <a:lnRef idx="1">
+            <a:schemeClr val="accent1"/>
+          </a:lnRef>
+          <a:fillRef idx="3">
+            <a:schemeClr val="accent1"/>
+          </a:fillRef>
+          <a:effectRef idx="2">
+            <a:schemeClr val="accent1"/>
+          </a:effectRef>
+          <a:fontRef idx="minor">
+            <a:schemeClr val="lt1"/>
+          </a:fontRef>
+        </p:style>
+        <p:txBody>
+          <a:bodyPr rtlCol="0" anchor="ctr"/>
+          <a:lstStyle/>
+          <a:p>
+            <a:pPr algn="ctr"/>
+          </a:p>
+        </p:txBody>
+      </p:sp>
+      <p:sp>
+        <p:nvSpPr>
+          <p:cNvPr id="7" name="TextBox 6"/>
           <p:cNvSpPr txBox="1"/>
           <p:nvPr/>
         </p:nvSpPr>
         <p:spPr>
           <a:xfrm>
-            <a:off x="457200" y="137160"/>
-            <a:ext cx="8229600" cy="640080"/>
+            <a:off x="274320" y="6492240"/>
+            <a:ext cx="8595360" cy="320040"/>
           </a:xfrm>
           <a:prstGeom prst="rect">
             <a:avLst/>
@@ -6781,352 +10595,101 @@
           </a:bodyPr>
           <a:lstStyle/>
           <a:p>
-            <a:pPr>
-              <a:defRPr sz="2200" b="1">
+            <a:pPr algn="ctr">
+              <a:defRPr sz="1000">
                 <a:solidFill>
                   <a:srgbClr val="FFFFFF"/>
                 </a:solidFill>
               </a:defRPr>
             </a:pPr>
             <a:r>
-              <a:t>Jadwal Operasional</a:t>
-            </a:r>
-          </a:p>
-        </p:txBody>
-      </p:sp>
-      <p:graphicFrame>
-        <p:nvGraphicFramePr>
-          <p:cNvPr id="4" name="Table 3"/>
-          <p:cNvGraphicFramePr>
-            <a:graphicFrameLocks noGrp="1"/>
-          </p:cNvGraphicFramePr>
-          <p:nvPr/>
-        </p:nvGraphicFramePr>
-        <p:xfrm>
-          <a:off x="365760" y="1005840"/>
-          <a:ext cx="8412480" cy="2651760"/>
-        </p:xfrm>
-        <a:graphic>
-          <a:graphicData uri="http://schemas.openxmlformats.org/drawingml/2006/table">
-            <a:tbl>
-              <a:tblPr firstRow="1" bandRow="1">
-                <a:tableStyleId>{5C22544A-7EE6-4342-B048-85BDC9FD1C3A}</a:tableStyleId>
-              </a:tblPr>
-              <a:tblGrid>
-                <a:gridCol w="2804160"/>
-                <a:gridCol w="2804160"/>
-                <a:gridCol w="2804160"/>
-              </a:tblGrid>
-              <a:tr h="441960">
-                <a:tc>
-                  <a:txBody>
-                    <a:bodyPr/>
-                    <a:lstStyle/>
-                    <a:p>
-                      <a:pPr>
-                        <a:defRPr b="1" sz="1100">
-                          <a:solidFill>
-                            <a:srgbClr val="FFFFFF"/>
-                          </a:solidFill>
-                        </a:defRPr>
-                      </a:pPr>
-                      <a:r>
-                        <a:t>Hari</a:t>
-                      </a:r>
-                    </a:p>
-                  </a:txBody>
-                  <a:tcPr>
-                    <a:solidFill>
-                      <a:srgbClr val="1F4E79"/>
-                    </a:solidFill>
-                  </a:tcPr>
-                </a:tc>
-                <a:tc>
-                  <a:txBody>
-                    <a:bodyPr/>
-                    <a:lstStyle/>
-                    <a:p>
-                      <a:pPr>
-                        <a:defRPr b="1" sz="1100">
-                          <a:solidFill>
-                            <a:srgbClr val="FFFFFF"/>
-                          </a:solidFill>
-                        </a:defRPr>
-                      </a:pPr>
-                      <a:r>
-                        <a:t>Waktu utama</a:t>
-                      </a:r>
-                    </a:p>
-                  </a:txBody>
-                  <a:tcPr>
-                    <a:solidFill>
-                      <a:srgbClr val="1F4E79"/>
-                    </a:solidFill>
-                  </a:tcPr>
-                </a:tc>
-                <a:tc>
-                  <a:txBody>
-                    <a:bodyPr/>
-                    <a:lstStyle/>
-                    <a:p>
-                      <a:pPr>
-                        <a:defRPr b="1" sz="1100">
-                          <a:solidFill>
-                            <a:srgbClr val="FFFFFF"/>
-                          </a:solidFill>
-                        </a:defRPr>
-                      </a:pPr>
-                      <a:r>
-                        <a:t>Kegiatan penilaian</a:t>
-                      </a:r>
-                    </a:p>
-                  </a:txBody>
-                  <a:tcPr>
-                    <a:solidFill>
-                      <a:srgbClr val="1F4E79"/>
-                    </a:solidFill>
-                  </a:tcPr>
-                </a:tc>
-              </a:tr>
-              <a:tr h="441960">
-                <a:tc>
-                  <a:txBody>
-                    <a:bodyPr/>
-                    <a:lstStyle/>
-                    <a:p>
-                      <a:pPr>
-                        <a:defRPr sz="1100"/>
-                      </a:pPr>
-                      <a:r>
-                        <a:t>H-1</a:t>
-                      </a:r>
-                    </a:p>
-                  </a:txBody>
-                  <a:tcPr/>
-                </a:tc>
-                <a:tc>
-                  <a:txBody>
-                    <a:bodyPr/>
-                    <a:lstStyle/>
-                    <a:p>
-                      <a:pPr>
-                        <a:defRPr sz="1100"/>
-                      </a:pPr>
-                      <a:r>
-                        <a:t>TM + 2 jam</a:t>
-                      </a:r>
-                    </a:p>
-                  </a:txBody>
-                  <a:tcPr/>
-                </a:tc>
-                <a:tc>
-                  <a:txBody>
-                    <a:bodyPr/>
-                    <a:lstStyle/>
-                    <a:p>
-                      <a:pPr>
-                        <a:defRPr sz="1100"/>
-                      </a:pPr>
-                      <a:r>
-                        <a:t>Familiarisasi arena &amp; alat</a:t>
-                      </a:r>
-                    </a:p>
-                  </a:txBody>
-                  <a:tcPr/>
-                </a:tc>
-              </a:tr>
-              <a:tr h="441960">
-                <a:tc>
-                  <a:txBody>
-                    <a:bodyPr/>
-                    <a:lstStyle/>
-                    <a:p>
-                      <a:pPr>
-                        <a:defRPr sz="1100"/>
-                      </a:pPr>
-                      <a:r>
-                        <a:t>H1</a:t>
-                      </a:r>
-                    </a:p>
-                  </a:txBody>
-                  <a:tcPr/>
-                </a:tc>
-                <a:tc>
-                  <a:txBody>
-                    <a:bodyPr/>
-                    <a:lstStyle/>
-                    <a:p>
-                      <a:pPr>
-                        <a:defRPr sz="1100"/>
-                      </a:pPr>
-                      <a:r>
-                        <a:t>08.30–12.00</a:t>
-                      </a:r>
-                    </a:p>
-                  </a:txBody>
-                  <a:tcPr/>
-                </a:tc>
-                <a:tc>
-                  <a:txBody>
-                    <a:bodyPr/>
-                    <a:lstStyle/>
-                    <a:p>
-                      <a:pPr>
-                        <a:defRPr sz="1100"/>
-                      </a:pPr>
-                      <a:r>
-                        <a:t>Modul C: perakitan L-Channel (maks. 2 jam)</a:t>
-                      </a:r>
-                    </a:p>
-                  </a:txBody>
-                  <a:tcPr/>
-                </a:tc>
-              </a:tr>
-              <a:tr h="441960">
-                <a:tc>
-                  <a:txBody>
-                    <a:bodyPr/>
-                    <a:lstStyle/>
-                    <a:p>
-                      <a:pPr>
-                        <a:defRPr sz="1100"/>
-                      </a:pPr>
-                      <a:r>
-                        <a:t>H1</a:t>
-                      </a:r>
-                    </a:p>
-                  </a:txBody>
-                  <a:tcPr/>
-                </a:tc>
-                <a:tc>
-                  <a:txBody>
-                    <a:bodyPr/>
-                    <a:lstStyle/>
-                    <a:p>
-                      <a:pPr>
-                        <a:defRPr sz="1100"/>
-                      </a:pPr>
-                      <a:r>
-                        <a:t>Sepanjang hari</a:t>
-                      </a:r>
-                    </a:p>
-                  </a:txBody>
-                  <a:tcPr/>
-                </a:tc>
-                <a:tc>
-                  <a:txBody>
-                    <a:bodyPr/>
-                    <a:lstStyle/>
-                    <a:p>
-                      <a:pPr>
-                        <a:defRPr sz="1100"/>
-                      </a:pPr>
-                      <a:r>
-                        <a:t>Modul A, B</a:t>
-                      </a:r>
-                    </a:p>
-                  </a:txBody>
-                  <a:tcPr/>
-                </a:tc>
-              </a:tr>
-              <a:tr h="441960">
-                <a:tc>
-                  <a:txBody>
-                    <a:bodyPr/>
-                    <a:lstStyle/>
-                    <a:p>
-                      <a:pPr>
-                        <a:defRPr sz="1100"/>
-                      </a:pPr>
-                      <a:r>
-                        <a:t>H2</a:t>
-                      </a:r>
-                    </a:p>
-                  </a:txBody>
-                  <a:tcPr/>
-                </a:tc>
-                <a:tc>
-                  <a:txBody>
-                    <a:bodyPr/>
-                    <a:lstStyle/>
-                    <a:p>
-                      <a:pPr>
-                        <a:defRPr sz="1100"/>
-                      </a:pPr>
-                      <a:r>
-                        <a:t>15 menit/tim</a:t>
-                      </a:r>
-                    </a:p>
-                  </a:txBody>
-                  <a:tcPr/>
-                </a:tc>
-                <a:tc>
-                  <a:txBody>
-                    <a:bodyPr/>
-                    <a:lstStyle/>
-                    <a:p>
-                      <a:pPr>
-                        <a:defRPr sz="1100"/>
-                      </a:pPr>
-                      <a:r>
-                        <a:t>Modul D — gerakan dasar</a:t>
-                      </a:r>
-                    </a:p>
-                  </a:txBody>
-                  <a:tcPr/>
-                </a:tc>
-              </a:tr>
-              <a:tr h="441960">
-                <a:tc>
-                  <a:txBody>
-                    <a:bodyPr/>
-                    <a:lstStyle/>
-                    <a:p>
-                      <a:pPr>
-                        <a:defRPr sz="1100"/>
-                      </a:pPr>
-                      <a:r>
-                        <a:t>H2–H3</a:t>
-                      </a:r>
-                    </a:p>
-                  </a:txBody>
-                  <a:tcPr/>
-                </a:tc>
-                <a:tc>
-                  <a:txBody>
-                    <a:bodyPr/>
-                    <a:lstStyle/>
-                    <a:p>
-                      <a:pPr>
-                        <a:defRPr sz="1100"/>
-                      </a:pPr>
-                      <a:r>
-                        <a:t>Trial + marking</a:t>
-                      </a:r>
-                    </a:p>
-                  </a:txBody>
-                  <a:tcPr/>
-                </a:tc>
-                <a:tc>
-                  <a:txBody>
-                    <a:bodyPr/>
-                    <a:lstStyle/>
-                    <a:p>
-                      <a:pPr>
-                        <a:defRPr sz="1100"/>
-                      </a:pPr>
-                      <a:r>
-                        <a:t>Modul E — performa otonom (60%)</a:t>
-                      </a:r>
-                    </a:p>
-                  </a:txBody>
-                  <a:tcPr/>
-                </a:tc>
-              </a:tr>
-            </a:tbl>
-          </a:graphicData>
-        </a:graphic>
-      </p:graphicFrame>
+              <a:t>LKS Nasional 2026 — Robot Bergerak Otonom | Kemendikdasmen</a:t>
+            </a:r>
+          </a:p>
+        </p:txBody>
+      </p:sp>
+      <p:sp>
+        <p:nvSpPr>
+          <p:cNvPr id="8" name="Rectangle 7"/>
+          <p:cNvSpPr/>
+          <p:nvPr/>
+        </p:nvSpPr>
+        <p:spPr>
+          <a:xfrm>
+            <a:off x="731520" y="2560320"/>
+            <a:ext cx="7680960" cy="1188720"/>
+          </a:xfrm>
+          <a:prstGeom prst="rect">
+            <a:avLst/>
+          </a:prstGeom>
+          <a:solidFill>
+            <a:srgbClr val="1F4E79"/>
+          </a:solidFill>
+          <a:ln>
+            <a:noFill/>
+          </a:ln>
+        </p:spPr>
+        <p:style>
+          <a:lnRef idx="1">
+            <a:schemeClr val="accent1"/>
+          </a:lnRef>
+          <a:fillRef idx="3">
+            <a:schemeClr val="accent1"/>
+          </a:fillRef>
+          <a:effectRef idx="2">
+            <a:schemeClr val="accent1"/>
+          </a:effectRef>
+          <a:fontRef idx="minor">
+            <a:schemeClr val="lt1"/>
+          </a:fontRef>
+        </p:style>
+        <p:txBody>
+          <a:bodyPr rtlCol="0" anchor="ctr"/>
+          <a:lstStyle/>
+          <a:p>
+            <a:pPr algn="ctr"/>
+          </a:p>
+        </p:txBody>
+      </p:sp>
+      <p:sp>
+        <p:nvSpPr>
+          <p:cNvPr id="9" name="TextBox 8"/>
+          <p:cNvSpPr txBox="1"/>
+          <p:nvPr/>
+        </p:nvSpPr>
+        <p:spPr>
+          <a:xfrm>
+            <a:off x="914400" y="2697480"/>
+            <a:ext cx="7315200" cy="914400"/>
+          </a:xfrm>
+          <a:prstGeom prst="rect">
+            <a:avLst/>
+          </a:prstGeom>
+          <a:noFill/>
+        </p:spPr>
+        <p:txBody>
+          <a:bodyPr wrap="none">
+            <a:spAutoFit/>
+          </a:bodyPr>
+          <a:lstStyle/>
+          <a:p>
+            <a:pPr algn="ctr">
+              <a:defRPr sz="2600" b="1">
+                <a:solidFill>
+                  <a:srgbClr val="FFFFFF"/>
+                </a:solidFill>
+              </a:defRPr>
+            </a:pPr>
+            <a:r>
+              <a:t>Demo Penilaian Modul E</a:t>
+            </a:r>
+            <a:br/>
+            <a:r>
+              <a:t>(Step-by-Step untuk Juri)</a:t>
+            </a:r>
+          </a:p>
+        </p:txBody>
+      </p:sp>
     </p:spTree>
   </p:cSld>
   <p:clrMapOvr>
@@ -7153,8 +10716,8 @@
         </p:nvSpPr>
         <p:spPr>
           <a:xfrm>
-            <a:off x="0" y="2286000"/>
-            <a:ext cx="9144000" cy="1097280"/>
+            <a:off x="0" y="0"/>
+            <a:ext cx="9144000" cy="777240"/>
           </a:xfrm>
           <a:prstGeom prst="rect">
             <a:avLst/>
@@ -7190,14 +10753,105 @@
       </p:sp>
       <p:sp>
         <p:nvSpPr>
-          <p:cNvPr id="3" name="TextBox 2"/>
+          <p:cNvPr id="3" name="Rectangle 2"/>
+          <p:cNvSpPr/>
+          <p:nvPr/>
+        </p:nvSpPr>
+        <p:spPr>
+          <a:xfrm>
+            <a:off x="0" y="777240"/>
+            <a:ext cx="9144000" cy="54864"/>
+          </a:xfrm>
+          <a:prstGeom prst="rect">
+            <a:avLst/>
+          </a:prstGeom>
+          <a:solidFill>
+            <a:srgbClr val="ED7D31"/>
+          </a:solidFill>
+          <a:ln>
+            <a:noFill/>
+          </a:ln>
+        </p:spPr>
+        <p:style>
+          <a:lnRef idx="1">
+            <a:schemeClr val="accent1"/>
+          </a:lnRef>
+          <a:fillRef idx="3">
+            <a:schemeClr val="accent1"/>
+          </a:fillRef>
+          <a:effectRef idx="2">
+            <a:schemeClr val="accent1"/>
+          </a:effectRef>
+          <a:fontRef idx="minor">
+            <a:schemeClr val="lt1"/>
+          </a:fontRef>
+        </p:style>
+        <p:txBody>
+          <a:bodyPr rtlCol="0" anchor="ctr"/>
+          <a:lstStyle/>
+          <a:p>
+            <a:pPr algn="ctr"/>
+          </a:p>
+        </p:txBody>
+      </p:sp>
+      <p:pic>
+        <p:nvPicPr>
+          <p:cNvPr id="4" name="Picture 3" descr="logo-kemendikdasmen.png"/>
+          <p:cNvPicPr>
+            <a:picLocks noChangeAspect="1"/>
+          </p:cNvPicPr>
+          <p:nvPr/>
+        </p:nvPicPr>
+        <p:blipFill>
+          <a:blip r:embed="rId2"/>
+          <a:stretch>
+            <a:fillRect/>
+          </a:stretch>
+        </p:blipFill>
+        <p:spPr>
+          <a:xfrm>
+            <a:off x="137160" y="73152"/>
+            <a:ext cx="1619157" cy="502920"/>
+          </a:xfrm>
+          <a:prstGeom prst="rect">
+            <a:avLst/>
+          </a:prstGeom>
+        </p:spPr>
+      </p:pic>
+      <p:pic>
+        <p:nvPicPr>
+          <p:cNvPr id="5" name="Picture 4" descr="logo-lks-dikmen.png"/>
+          <p:cNvPicPr>
+            <a:picLocks noChangeAspect="1"/>
+          </p:cNvPicPr>
+          <p:nvPr/>
+        </p:nvPicPr>
+        <p:blipFill>
+          <a:blip r:embed="rId3"/>
+          <a:stretch>
+            <a:fillRect/>
+          </a:stretch>
+        </p:blipFill>
+        <p:spPr>
+          <a:xfrm>
+            <a:off x="7818120" y="45720"/>
+            <a:ext cx="658368" cy="658368"/>
+          </a:xfrm>
+          <a:prstGeom prst="rect">
+            <a:avLst/>
+          </a:prstGeom>
+        </p:spPr>
+      </p:pic>
+      <p:sp>
+        <p:nvSpPr>
+          <p:cNvPr id="6" name="TextBox 5"/>
           <p:cNvSpPr txBox="1"/>
           <p:nvPr/>
         </p:nvSpPr>
         <p:spPr>
           <a:xfrm>
-            <a:off x="457200" y="2331720"/>
-            <a:ext cx="8229600" cy="914400"/>
+            <a:off x="2286000" y="109728"/>
+            <a:ext cx="5303520" cy="594360"/>
           </a:xfrm>
           <a:prstGeom prst="rect">
             <a:avLst/>
@@ -7211,14 +10865,352 @@
           <a:lstStyle/>
           <a:p>
             <a:pPr algn="ctr">
-              <a:defRPr sz="2800" b="1">
+              <a:defRPr sz="1800" b="1">
                 <a:solidFill>
                   <a:srgbClr val="FFFFFF"/>
                 </a:solidFill>
               </a:defRPr>
             </a:pPr>
             <a:r>
-              <a:t>Modul A — Organisasi &amp; Manajemen Kerja</a:t>
+              <a:t>Demo Modul E — Langkah 1</a:t>
+            </a:r>
+          </a:p>
+        </p:txBody>
+      </p:sp>
+      <p:sp>
+        <p:nvSpPr>
+          <p:cNvPr id="7" name="Rectangle 6"/>
+          <p:cNvSpPr/>
+          <p:nvPr/>
+        </p:nvSpPr>
+        <p:spPr>
+          <a:xfrm>
+            <a:off x="0" y="6446520"/>
+            <a:ext cx="9144000" cy="411480"/>
+          </a:xfrm>
+          <a:prstGeom prst="rect">
+            <a:avLst/>
+          </a:prstGeom>
+          <a:solidFill>
+            <a:srgbClr val="2E7D32"/>
+          </a:solidFill>
+          <a:ln>
+            <a:noFill/>
+          </a:ln>
+        </p:spPr>
+        <p:style>
+          <a:lnRef idx="1">
+            <a:schemeClr val="accent1"/>
+          </a:lnRef>
+          <a:fillRef idx="3">
+            <a:schemeClr val="accent1"/>
+          </a:fillRef>
+          <a:effectRef idx="2">
+            <a:schemeClr val="accent1"/>
+          </a:effectRef>
+          <a:fontRef idx="minor">
+            <a:schemeClr val="lt1"/>
+          </a:fontRef>
+        </p:style>
+        <p:txBody>
+          <a:bodyPr rtlCol="0" anchor="ctr"/>
+          <a:lstStyle/>
+          <a:p>
+            <a:pPr algn="ctr"/>
+          </a:p>
+        </p:txBody>
+      </p:sp>
+      <p:sp>
+        <p:nvSpPr>
+          <p:cNvPr id="8" name="TextBox 7"/>
+          <p:cNvSpPr txBox="1"/>
+          <p:nvPr/>
+        </p:nvSpPr>
+        <p:spPr>
+          <a:xfrm>
+            <a:off x="274320" y="6492240"/>
+            <a:ext cx="8595360" cy="320040"/>
+          </a:xfrm>
+          <a:prstGeom prst="rect">
+            <a:avLst/>
+          </a:prstGeom>
+          <a:noFill/>
+        </p:spPr>
+        <p:txBody>
+          <a:bodyPr wrap="none">
+            <a:spAutoFit/>
+          </a:bodyPr>
+          <a:lstStyle/>
+          <a:p>
+            <a:pPr algn="ctr">
+              <a:defRPr sz="1000">
+                <a:solidFill>
+                  <a:srgbClr val="FFFFFF"/>
+                </a:solidFill>
+              </a:defRPr>
+            </a:pPr>
+            <a:r>
+              <a:t>LKS Nasional 2026 — Robot Bergerak Otonom | Kemendikdasmen</a:t>
+            </a:r>
+          </a:p>
+        </p:txBody>
+      </p:sp>
+      <p:sp>
+        <p:nvSpPr>
+          <p:cNvPr id="9" name="Rectangle 8"/>
+          <p:cNvSpPr/>
+          <p:nvPr/>
+        </p:nvSpPr>
+        <p:spPr>
+          <a:xfrm>
+            <a:off x="457200" y="1005840"/>
+            <a:ext cx="640080" cy="640080"/>
+          </a:xfrm>
+          <a:prstGeom prst="rect">
+            <a:avLst/>
+          </a:prstGeom>
+          <a:solidFill>
+            <a:srgbClr val="ED7D31"/>
+          </a:solidFill>
+          <a:ln>
+            <a:noFill/>
+          </a:ln>
+        </p:spPr>
+        <p:style>
+          <a:lnRef idx="1">
+            <a:schemeClr val="accent1"/>
+          </a:lnRef>
+          <a:fillRef idx="3">
+            <a:schemeClr val="accent1"/>
+          </a:fillRef>
+          <a:effectRef idx="2">
+            <a:schemeClr val="accent1"/>
+          </a:effectRef>
+          <a:fontRef idx="minor">
+            <a:schemeClr val="lt1"/>
+          </a:fontRef>
+        </p:style>
+        <p:txBody>
+          <a:bodyPr rtlCol="0" anchor="ctr"/>
+          <a:lstStyle/>
+          <a:p>
+            <a:pPr algn="ctr"/>
+          </a:p>
+        </p:txBody>
+      </p:sp>
+      <p:sp>
+        <p:nvSpPr>
+          <p:cNvPr id="10" name="TextBox 9"/>
+          <p:cNvSpPr txBox="1"/>
+          <p:nvPr/>
+        </p:nvSpPr>
+        <p:spPr>
+          <a:xfrm>
+            <a:off x="457200" y="1078992"/>
+            <a:ext cx="640080" cy="502920"/>
+          </a:xfrm>
+          <a:prstGeom prst="rect">
+            <a:avLst/>
+          </a:prstGeom>
+          <a:noFill/>
+        </p:spPr>
+        <p:txBody>
+          <a:bodyPr wrap="none">
+            <a:spAutoFit/>
+          </a:bodyPr>
+          <a:lstStyle/>
+          <a:p>
+            <a:pPr algn="ctr">
+              <a:defRPr sz="2200" b="1">
+                <a:solidFill>
+                  <a:srgbClr val="FFFFFF"/>
+                </a:solidFill>
+              </a:defRPr>
+            </a:pPr>
+            <a:r>
+              <a:t>1</a:t>
+            </a:r>
+          </a:p>
+        </p:txBody>
+      </p:sp>
+      <p:sp>
+        <p:nvSpPr>
+          <p:cNvPr id="11" name="TextBox 10"/>
+          <p:cNvSpPr txBox="1"/>
+          <p:nvPr/>
+        </p:nvSpPr>
+        <p:spPr>
+          <a:xfrm>
+            <a:off x="1280160" y="960120"/>
+            <a:ext cx="7315200" cy="731520"/>
+          </a:xfrm>
+          <a:prstGeom prst="rect">
+            <a:avLst/>
+          </a:prstGeom>
+          <a:noFill/>
+        </p:spPr>
+        <p:txBody>
+          <a:bodyPr wrap="none">
+            <a:spAutoFit/>
+          </a:bodyPr>
+          <a:lstStyle/>
+          <a:p>
+            <a:pPr>
+              <a:defRPr sz="2200" b="1">
+                <a:solidFill>
+                  <a:srgbClr val="1F4E79"/>
+                </a:solidFill>
+              </a:defRPr>
+            </a:pPr>
+            <a:r>
+              <a:t>Briefing Layout Arena</a:t>
+            </a:r>
+          </a:p>
+        </p:txBody>
+      </p:sp>
+      <p:sp>
+        <p:nvSpPr>
+          <p:cNvPr id="12" name="TextBox 11"/>
+          <p:cNvSpPr txBox="1"/>
+          <p:nvPr/>
+        </p:nvSpPr>
+        <p:spPr>
+          <a:xfrm>
+            <a:off x="548640" y="1828800"/>
+            <a:ext cx="8046720" cy="4114800"/>
+          </a:xfrm>
+          <a:prstGeom prst="rect">
+            <a:avLst/>
+          </a:prstGeom>
+          <a:noFill/>
+        </p:spPr>
+        <p:txBody>
+          <a:bodyPr wrap="square">
+            <a:spAutoFit/>
+          </a:bodyPr>
+          <a:lstStyle/>
+          <a:p>
+            <a:pPr>
+              <a:spcAft>
+                <a:spcPts val="1000"/>
+              </a:spcAft>
+              <a:defRPr sz="1500"/>
+            </a:pPr>
+            <a:r>
+              <a:t>• Jelaskan ke peserta: posisi START, orientasi 3 rak, gate tengah, obstacle</a:t>
+            </a:r>
+          </a:p>
+          <a:p>
+            <a:pPr>
+              <a:spcAft>
+                <a:spcPts val="1000"/>
+              </a:spcAft>
+              <a:defRPr sz="1500"/>
+            </a:pPr>
+            <a:r>
+              <a:t>• Tunjukkan marker warna di atas setiap slot rak (dapat berubah per soal)</a:t>
+            </a:r>
+          </a:p>
+          <a:p>
+            <a:pPr>
+              <a:spcAft>
+                <a:spcPts val="1000"/>
+              </a:spcAft>
+              <a:defRPr sz="1500"/>
+            </a:pPr>
+            <a:r>
+              <a:t>• Pastikan penerangan arena menyala (lampu 100 W × 2)</a:t>
+            </a:r>
+          </a:p>
+          <a:p>
+            <a:pPr>
+              <a:spcAft>
+                <a:spcPts val="1000"/>
+              </a:spcAft>
+              <a:defRPr sz="1500"/>
+            </a:pPr>
+            <a:r>
+              <a:t>• Catat konfigurasi marker hari ini di lembar undian</a:t>
+            </a:r>
+          </a:p>
+        </p:txBody>
+      </p:sp>
+      <p:sp>
+        <p:nvSpPr>
+          <p:cNvPr id="13" name="Rectangle 12"/>
+          <p:cNvSpPr/>
+          <p:nvPr/>
+        </p:nvSpPr>
+        <p:spPr>
+          <a:xfrm>
+            <a:off x="457200" y="5669280"/>
+            <a:ext cx="8229600" cy="640080"/>
+          </a:xfrm>
+          <a:prstGeom prst="rect">
+            <a:avLst/>
+          </a:prstGeom>
+          <a:solidFill>
+            <a:srgbClr val="FFF3E0"/>
+          </a:solidFill>
+          <a:ln>
+            <a:solidFill>
+              <a:srgbClr val="ED7D31"/>
+            </a:solidFill>
+          </a:ln>
+        </p:spPr>
+        <p:style>
+          <a:lnRef idx="1">
+            <a:schemeClr val="accent1"/>
+          </a:lnRef>
+          <a:fillRef idx="3">
+            <a:schemeClr val="accent1"/>
+          </a:fillRef>
+          <a:effectRef idx="2">
+            <a:schemeClr val="accent1"/>
+          </a:effectRef>
+          <a:fontRef idx="minor">
+            <a:schemeClr val="lt1"/>
+          </a:fontRef>
+        </p:style>
+        <p:txBody>
+          <a:bodyPr rtlCol="0" anchor="ctr"/>
+          <a:lstStyle/>
+          <a:p>
+            <a:pPr algn="ctr"/>
+          </a:p>
+        </p:txBody>
+      </p:sp>
+      <p:sp>
+        <p:nvSpPr>
+          <p:cNvPr id="14" name="TextBox 13"/>
+          <p:cNvSpPr txBox="1"/>
+          <p:nvPr/>
+        </p:nvSpPr>
+        <p:spPr>
+          <a:xfrm>
+            <a:off x="594360" y="5742432"/>
+            <a:ext cx="7955279" cy="502920"/>
+          </a:xfrm>
+          <a:prstGeom prst="rect">
+            <a:avLst/>
+          </a:prstGeom>
+          <a:noFill/>
+        </p:spPr>
+        <p:txBody>
+          <a:bodyPr wrap="none">
+            <a:spAutoFit/>
+          </a:bodyPr>
+          <a:lstStyle/>
+          <a:p>
+            <a:pPr>
+              <a:defRPr sz="1200" b="1">
+                <a:solidFill>
+                  <a:srgbClr val="ED7D31"/>
+                </a:solidFill>
+              </a:defRPr>
+            </a:pPr>
+            <a:r>
+              <a:t>⚠ Juri: Jangan mulai run sebelum peserta paham layout.</a:t>
             </a:r>
           </a:p>
         </p:txBody>
@@ -7250,7 +11242,7 @@
         <p:spPr>
           <a:xfrm>
             <a:off x="0" y="0"/>
-            <a:ext cx="9144000" cy="822960"/>
+            <a:ext cx="9144000" cy="777240"/>
           </a:xfrm>
           <a:prstGeom prst="rect">
             <a:avLst/>
@@ -7286,14 +11278,105 @@
       </p:sp>
       <p:sp>
         <p:nvSpPr>
-          <p:cNvPr id="3" name="TextBox 2"/>
+          <p:cNvPr id="3" name="Rectangle 2"/>
+          <p:cNvSpPr/>
+          <p:nvPr/>
+        </p:nvSpPr>
+        <p:spPr>
+          <a:xfrm>
+            <a:off x="0" y="777240"/>
+            <a:ext cx="9144000" cy="54864"/>
+          </a:xfrm>
+          <a:prstGeom prst="rect">
+            <a:avLst/>
+          </a:prstGeom>
+          <a:solidFill>
+            <a:srgbClr val="ED7D31"/>
+          </a:solidFill>
+          <a:ln>
+            <a:noFill/>
+          </a:ln>
+        </p:spPr>
+        <p:style>
+          <a:lnRef idx="1">
+            <a:schemeClr val="accent1"/>
+          </a:lnRef>
+          <a:fillRef idx="3">
+            <a:schemeClr val="accent1"/>
+          </a:fillRef>
+          <a:effectRef idx="2">
+            <a:schemeClr val="accent1"/>
+          </a:effectRef>
+          <a:fontRef idx="minor">
+            <a:schemeClr val="lt1"/>
+          </a:fontRef>
+        </p:style>
+        <p:txBody>
+          <a:bodyPr rtlCol="0" anchor="ctr"/>
+          <a:lstStyle/>
+          <a:p>
+            <a:pPr algn="ctr"/>
+          </a:p>
+        </p:txBody>
+      </p:sp>
+      <p:pic>
+        <p:nvPicPr>
+          <p:cNvPr id="4" name="Picture 3" descr="logo-kemendikdasmen.png"/>
+          <p:cNvPicPr>
+            <a:picLocks noChangeAspect="1"/>
+          </p:cNvPicPr>
+          <p:nvPr/>
+        </p:nvPicPr>
+        <p:blipFill>
+          <a:blip r:embed="rId2"/>
+          <a:stretch>
+            <a:fillRect/>
+          </a:stretch>
+        </p:blipFill>
+        <p:spPr>
+          <a:xfrm>
+            <a:off x="137160" y="73152"/>
+            <a:ext cx="1619157" cy="502920"/>
+          </a:xfrm>
+          <a:prstGeom prst="rect">
+            <a:avLst/>
+          </a:prstGeom>
+        </p:spPr>
+      </p:pic>
+      <p:pic>
+        <p:nvPicPr>
+          <p:cNvPr id="5" name="Picture 4" descr="logo-lks-dikmen.png"/>
+          <p:cNvPicPr>
+            <a:picLocks noChangeAspect="1"/>
+          </p:cNvPicPr>
+          <p:nvPr/>
+        </p:nvPicPr>
+        <p:blipFill>
+          <a:blip r:embed="rId3"/>
+          <a:stretch>
+            <a:fillRect/>
+          </a:stretch>
+        </p:blipFill>
+        <p:spPr>
+          <a:xfrm>
+            <a:off x="7818120" y="45720"/>
+            <a:ext cx="658368" cy="658368"/>
+          </a:xfrm>
+          <a:prstGeom prst="rect">
+            <a:avLst/>
+          </a:prstGeom>
+        </p:spPr>
+      </p:pic>
+      <p:sp>
+        <p:nvSpPr>
+          <p:cNvPr id="6" name="TextBox 5"/>
           <p:cNvSpPr txBox="1"/>
           <p:nvPr/>
         </p:nvSpPr>
         <p:spPr>
           <a:xfrm>
-            <a:off x="457200" y="137160"/>
-            <a:ext cx="8229600" cy="640080"/>
+            <a:off x="2286000" y="109728"/>
+            <a:ext cx="5303520" cy="594360"/>
           </a:xfrm>
           <a:prstGeom prst="rect">
             <a:avLst/>
@@ -7306,7 +11389,163 @@
           </a:bodyPr>
           <a:lstStyle/>
           <a:p>
-            <a:pPr>
+            <a:pPr algn="ctr">
+              <a:defRPr sz="1800" b="1">
+                <a:solidFill>
+                  <a:srgbClr val="FFFFFF"/>
+                </a:solidFill>
+              </a:defRPr>
+            </a:pPr>
+            <a:r>
+              <a:t>Demo Modul E — Langkah 2</a:t>
+            </a:r>
+          </a:p>
+        </p:txBody>
+      </p:sp>
+      <p:sp>
+        <p:nvSpPr>
+          <p:cNvPr id="7" name="Rectangle 6"/>
+          <p:cNvSpPr/>
+          <p:nvPr/>
+        </p:nvSpPr>
+        <p:spPr>
+          <a:xfrm>
+            <a:off x="0" y="6446520"/>
+            <a:ext cx="9144000" cy="411480"/>
+          </a:xfrm>
+          <a:prstGeom prst="rect">
+            <a:avLst/>
+          </a:prstGeom>
+          <a:solidFill>
+            <a:srgbClr val="2E7D32"/>
+          </a:solidFill>
+          <a:ln>
+            <a:noFill/>
+          </a:ln>
+        </p:spPr>
+        <p:style>
+          <a:lnRef idx="1">
+            <a:schemeClr val="accent1"/>
+          </a:lnRef>
+          <a:fillRef idx="3">
+            <a:schemeClr val="accent1"/>
+          </a:fillRef>
+          <a:effectRef idx="2">
+            <a:schemeClr val="accent1"/>
+          </a:effectRef>
+          <a:fontRef idx="minor">
+            <a:schemeClr val="lt1"/>
+          </a:fontRef>
+        </p:style>
+        <p:txBody>
+          <a:bodyPr rtlCol="0" anchor="ctr"/>
+          <a:lstStyle/>
+          <a:p>
+            <a:pPr algn="ctr"/>
+          </a:p>
+        </p:txBody>
+      </p:sp>
+      <p:sp>
+        <p:nvSpPr>
+          <p:cNvPr id="8" name="TextBox 7"/>
+          <p:cNvSpPr txBox="1"/>
+          <p:nvPr/>
+        </p:nvSpPr>
+        <p:spPr>
+          <a:xfrm>
+            <a:off x="274320" y="6492240"/>
+            <a:ext cx="8595360" cy="320040"/>
+          </a:xfrm>
+          <a:prstGeom prst="rect">
+            <a:avLst/>
+          </a:prstGeom>
+          <a:noFill/>
+        </p:spPr>
+        <p:txBody>
+          <a:bodyPr wrap="none">
+            <a:spAutoFit/>
+          </a:bodyPr>
+          <a:lstStyle/>
+          <a:p>
+            <a:pPr algn="ctr">
+              <a:defRPr sz="1000">
+                <a:solidFill>
+                  <a:srgbClr val="FFFFFF"/>
+                </a:solidFill>
+              </a:defRPr>
+            </a:pPr>
+            <a:r>
+              <a:t>LKS Nasional 2026 — Robot Bergerak Otonom | Kemendikdasmen</a:t>
+            </a:r>
+          </a:p>
+        </p:txBody>
+      </p:sp>
+      <p:sp>
+        <p:nvSpPr>
+          <p:cNvPr id="9" name="Rectangle 8"/>
+          <p:cNvSpPr/>
+          <p:nvPr/>
+        </p:nvSpPr>
+        <p:spPr>
+          <a:xfrm>
+            <a:off x="457200" y="1005840"/>
+            <a:ext cx="640080" cy="640080"/>
+          </a:xfrm>
+          <a:prstGeom prst="rect">
+            <a:avLst/>
+          </a:prstGeom>
+          <a:solidFill>
+            <a:srgbClr val="ED7D31"/>
+          </a:solidFill>
+          <a:ln>
+            <a:noFill/>
+          </a:ln>
+        </p:spPr>
+        <p:style>
+          <a:lnRef idx="1">
+            <a:schemeClr val="accent1"/>
+          </a:lnRef>
+          <a:fillRef idx="3">
+            <a:schemeClr val="accent1"/>
+          </a:fillRef>
+          <a:effectRef idx="2">
+            <a:schemeClr val="accent1"/>
+          </a:effectRef>
+          <a:fontRef idx="minor">
+            <a:schemeClr val="lt1"/>
+          </a:fontRef>
+        </p:style>
+        <p:txBody>
+          <a:bodyPr rtlCol="0" anchor="ctr"/>
+          <a:lstStyle/>
+          <a:p>
+            <a:pPr algn="ctr"/>
+          </a:p>
+        </p:txBody>
+      </p:sp>
+      <p:sp>
+        <p:nvSpPr>
+          <p:cNvPr id="10" name="TextBox 9"/>
+          <p:cNvSpPr txBox="1"/>
+          <p:nvPr/>
+        </p:nvSpPr>
+        <p:spPr>
+          <a:xfrm>
+            <a:off x="457200" y="1078992"/>
+            <a:ext cx="640080" cy="502920"/>
+          </a:xfrm>
+          <a:prstGeom prst="rect">
+            <a:avLst/>
+          </a:prstGeom>
+          <a:noFill/>
+        </p:spPr>
+        <p:txBody>
+          <a:bodyPr wrap="none">
+            <a:spAutoFit/>
+          </a:bodyPr>
+          <a:lstStyle/>
+          <a:p>
+            <a:pPr algn="ctr">
               <a:defRPr sz="2200" b="1">
                 <a:solidFill>
                   <a:srgbClr val="FFFFFF"/>
@@ -7314,21 +11553,56 @@
               </a:defRPr>
             </a:pPr>
             <a:r>
-              <a:t>Modul A (8 poin)</a:t>
-            </a:r>
-          </a:p>
-        </p:txBody>
-      </p:sp>
-      <p:sp>
-        <p:nvSpPr>
-          <p:cNvPr id="4" name="TextBox 3"/>
+              <a:t>2</a:t>
+            </a:r>
+          </a:p>
+        </p:txBody>
+      </p:sp>
+      <p:sp>
+        <p:nvSpPr>
+          <p:cNvPr id="11" name="TextBox 10"/>
           <p:cNvSpPr txBox="1"/>
           <p:nvPr/>
         </p:nvSpPr>
         <p:spPr>
           <a:xfrm>
-            <a:off x="548640" y="1005840"/>
-            <a:ext cx="8046720" cy="5029200"/>
+            <a:off x="1280160" y="960120"/>
+            <a:ext cx="7315200" cy="731520"/>
+          </a:xfrm>
+          <a:prstGeom prst="rect">
+            <a:avLst/>
+          </a:prstGeom>
+          <a:noFill/>
+        </p:spPr>
+        <p:txBody>
+          <a:bodyPr wrap="none">
+            <a:spAutoFit/>
+          </a:bodyPr>
+          <a:lstStyle/>
+          <a:p>
+            <a:pPr>
+              <a:defRPr sz="2200" b="1">
+                <a:solidFill>
+                  <a:srgbClr val="1F4E79"/>
+                </a:solidFill>
+              </a:defRPr>
+            </a:pPr>
+            <a:r>
+              <a:t>Programming &amp; Persiapan</a:t>
+            </a:r>
+          </a:p>
+        </p:txBody>
+      </p:sp>
+      <p:sp>
+        <p:nvSpPr>
+          <p:cNvPr id="12" name="TextBox 11"/>
+          <p:cNvSpPr txBox="1"/>
+          <p:nvPr/>
+        </p:nvSpPr>
+        <p:spPr>
+          <a:xfrm>
+            <a:off x="548640" y="1828800"/>
+            <a:ext cx="8046720" cy="4114800"/>
           </a:xfrm>
           <a:prstGeom prst="rect">
             <a:avLst/>
@@ -7343,88 +11617,45 @@
           <a:p>
             <a:pPr>
               <a:spcAft>
-                <a:spcPts val="800"/>
+                <a:spcPts val="1000"/>
               </a:spcAft>
-              <a:defRPr sz="1600">
-                <a:solidFill>
-                  <a:srgbClr val="333333"/>
-                </a:solidFill>
-              </a:defRPr>
-            </a:pPr>
-            <a:r>
-              <a:t>A1: Efisiensi penjadwalan (mekanik / elektronik / debugging)</a:t>
+              <a:defRPr sz="1500"/>
+            </a:pPr>
+            <a:r>
+              <a:t>• Peserta memprogram navigasi, visi, dan pick-place sesuai layout</a:t>
             </a:r>
           </a:p>
           <a:p>
             <a:pPr>
               <a:spcAft>
-                <a:spcPts val="800"/>
+                <a:spcPts val="1000"/>
               </a:spcAft>
-              <a:defRPr sz="1600">
-                <a:solidFill>
-                  <a:srgbClr val="333333"/>
-                </a:solidFill>
-              </a:defRPr>
-            </a:pPr>
-            <a:r>
-              <a:t>A2: Kolaborasi tim &amp; pembagian peran</a:t>
+              <a:defRPr sz="1500"/>
+            </a:pPr>
+            <a:r>
+              <a:t>• Peserta BOLEH menyentuh laptop pada tahap ini</a:t>
             </a:r>
           </a:p>
           <a:p>
             <a:pPr>
               <a:spcAft>
-                <a:spcPts val="800"/>
+                <a:spcPts val="1000"/>
               </a:spcAft>
-              <a:defRPr sz="1600">
-                <a:solidFill>
-                  <a:srgbClr val="333333"/>
-                </a:solidFill>
-              </a:defRPr>
-            </a:pPr>
-            <a:r>
-              <a:t>A3: Kerapian area kerja — penerapan 5S</a:t>
+              <a:defRPr sz="1500"/>
+            </a:pPr>
+            <a:r>
+              <a:t>• Pastikan tombol START di robot dan tombol STOP merah siap</a:t>
             </a:r>
           </a:p>
           <a:p>
             <a:pPr>
               <a:spcAft>
-                <a:spcPts val="800"/>
+                <a:spcPts val="1000"/>
               </a:spcAft>
-              <a:defRPr sz="1600">
-                <a:solidFill>
-                  <a:srgbClr val="333333"/>
-                </a:solidFill>
-              </a:defRPr>
-            </a:pPr>
-            <a:r>
-              <a:t>A4: Restorasi area kerja setelah selesai</a:t>
-            </a:r>
-          </a:p>
-          <a:p>
-            <a:pPr>
-              <a:spcAft>
-                <a:spcPts val="800"/>
-              </a:spcAft>
-              <a:defRPr sz="1600">
-                <a:solidFill>
-                  <a:srgbClr val="333333"/>
-                </a:solidFill>
-              </a:defRPr>
-            </a:pPr>
-            <a:r>
-              <a:t>Dinilai H1, H2, H3 secara observasi berkelanjutan</a:t>
-            </a:r>
-          </a:p>
-          <a:p>
-            <a:pPr>
-              <a:defRPr sz="1200" i="1">
-                <a:solidFill>
-                  <a:srgbClr val="ED7D31"/>
-                </a:solidFill>
-              </a:defRPr>
-            </a:pPr>
-            <a:r>
-              <a:t>Template: modul-a-organisasi.csv | Sheet Modul A (Excel)</a:t>
+              <a:defRPr sz="1500"/>
+            </a:pPr>
+            <a:r>
+              <a:t>• Juri observasi Modul A (kolaborasi, 5S) selama sesi ini</a:t>
             </a:r>
           </a:p>
         </p:txBody>
@@ -7455,8 +11686,8 @@
         </p:nvSpPr>
         <p:spPr>
           <a:xfrm>
-            <a:off x="0" y="2286000"/>
-            <a:ext cx="9144000" cy="1097280"/>
+            <a:off x="0" y="0"/>
+            <a:ext cx="9144000" cy="777240"/>
           </a:xfrm>
           <a:prstGeom prst="rect">
             <a:avLst/>
@@ -7492,14 +11723,105 @@
       </p:sp>
       <p:sp>
         <p:nvSpPr>
-          <p:cNvPr id="3" name="TextBox 2"/>
+          <p:cNvPr id="3" name="Rectangle 2"/>
+          <p:cNvSpPr/>
+          <p:nvPr/>
+        </p:nvSpPr>
+        <p:spPr>
+          <a:xfrm>
+            <a:off x="0" y="777240"/>
+            <a:ext cx="9144000" cy="54864"/>
+          </a:xfrm>
+          <a:prstGeom prst="rect">
+            <a:avLst/>
+          </a:prstGeom>
+          <a:solidFill>
+            <a:srgbClr val="ED7D31"/>
+          </a:solidFill>
+          <a:ln>
+            <a:noFill/>
+          </a:ln>
+        </p:spPr>
+        <p:style>
+          <a:lnRef idx="1">
+            <a:schemeClr val="accent1"/>
+          </a:lnRef>
+          <a:fillRef idx="3">
+            <a:schemeClr val="accent1"/>
+          </a:fillRef>
+          <a:effectRef idx="2">
+            <a:schemeClr val="accent1"/>
+          </a:effectRef>
+          <a:fontRef idx="minor">
+            <a:schemeClr val="lt1"/>
+          </a:fontRef>
+        </p:style>
+        <p:txBody>
+          <a:bodyPr rtlCol="0" anchor="ctr"/>
+          <a:lstStyle/>
+          <a:p>
+            <a:pPr algn="ctr"/>
+          </a:p>
+        </p:txBody>
+      </p:sp>
+      <p:pic>
+        <p:nvPicPr>
+          <p:cNvPr id="4" name="Picture 3" descr="logo-kemendikdasmen.png"/>
+          <p:cNvPicPr>
+            <a:picLocks noChangeAspect="1"/>
+          </p:cNvPicPr>
+          <p:nvPr/>
+        </p:nvPicPr>
+        <p:blipFill>
+          <a:blip r:embed="rId2"/>
+          <a:stretch>
+            <a:fillRect/>
+          </a:stretch>
+        </p:blipFill>
+        <p:spPr>
+          <a:xfrm>
+            <a:off x="137160" y="73152"/>
+            <a:ext cx="1619157" cy="502920"/>
+          </a:xfrm>
+          <a:prstGeom prst="rect">
+            <a:avLst/>
+          </a:prstGeom>
+        </p:spPr>
+      </p:pic>
+      <p:pic>
+        <p:nvPicPr>
+          <p:cNvPr id="5" name="Picture 4" descr="logo-lks-dikmen.png"/>
+          <p:cNvPicPr>
+            <a:picLocks noChangeAspect="1"/>
+          </p:cNvPicPr>
+          <p:nvPr/>
+        </p:nvPicPr>
+        <p:blipFill>
+          <a:blip r:embed="rId3"/>
+          <a:stretch>
+            <a:fillRect/>
+          </a:stretch>
+        </p:blipFill>
+        <p:spPr>
+          <a:xfrm>
+            <a:off x="7818120" y="45720"/>
+            <a:ext cx="658368" cy="658368"/>
+          </a:xfrm>
+          <a:prstGeom prst="rect">
+            <a:avLst/>
+          </a:prstGeom>
+        </p:spPr>
+      </p:pic>
+      <p:sp>
+        <p:nvSpPr>
+          <p:cNvPr id="6" name="TextBox 5"/>
           <p:cNvSpPr txBox="1"/>
           <p:nvPr/>
         </p:nvSpPr>
         <p:spPr>
           <a:xfrm>
-            <a:off x="457200" y="2331720"/>
-            <a:ext cx="8229600" cy="914400"/>
+            <a:off x="2286000" y="109728"/>
+            <a:ext cx="5303520" cy="594360"/>
           </a:xfrm>
           <a:prstGeom prst="rect">
             <a:avLst/>
@@ -7513,14 +11835,352 @@
           <a:lstStyle/>
           <a:p>
             <a:pPr algn="ctr">
-              <a:defRPr sz="2800" b="1">
+              <a:defRPr sz="1800" b="1">
                 <a:solidFill>
                   <a:srgbClr val="FFFFFF"/>
                 </a:solidFill>
               </a:defRPr>
             </a:pPr>
             <a:r>
-              <a:t>Modul B &amp; C — Hari Pertama</a:t>
+              <a:t>Demo Modul E — Langkah 3</a:t>
+            </a:r>
+          </a:p>
+        </p:txBody>
+      </p:sp>
+      <p:sp>
+        <p:nvSpPr>
+          <p:cNvPr id="7" name="Rectangle 6"/>
+          <p:cNvSpPr/>
+          <p:nvPr/>
+        </p:nvSpPr>
+        <p:spPr>
+          <a:xfrm>
+            <a:off x="0" y="6446520"/>
+            <a:ext cx="9144000" cy="411480"/>
+          </a:xfrm>
+          <a:prstGeom prst="rect">
+            <a:avLst/>
+          </a:prstGeom>
+          <a:solidFill>
+            <a:srgbClr val="2E7D32"/>
+          </a:solidFill>
+          <a:ln>
+            <a:noFill/>
+          </a:ln>
+        </p:spPr>
+        <p:style>
+          <a:lnRef idx="1">
+            <a:schemeClr val="accent1"/>
+          </a:lnRef>
+          <a:fillRef idx="3">
+            <a:schemeClr val="accent1"/>
+          </a:fillRef>
+          <a:effectRef idx="2">
+            <a:schemeClr val="accent1"/>
+          </a:effectRef>
+          <a:fontRef idx="minor">
+            <a:schemeClr val="lt1"/>
+          </a:fontRef>
+        </p:style>
+        <p:txBody>
+          <a:bodyPr rtlCol="0" anchor="ctr"/>
+          <a:lstStyle/>
+          <a:p>
+            <a:pPr algn="ctr"/>
+          </a:p>
+        </p:txBody>
+      </p:sp>
+      <p:sp>
+        <p:nvSpPr>
+          <p:cNvPr id="8" name="TextBox 7"/>
+          <p:cNvSpPr txBox="1"/>
+          <p:nvPr/>
+        </p:nvSpPr>
+        <p:spPr>
+          <a:xfrm>
+            <a:off x="274320" y="6492240"/>
+            <a:ext cx="8595360" cy="320040"/>
+          </a:xfrm>
+          <a:prstGeom prst="rect">
+            <a:avLst/>
+          </a:prstGeom>
+          <a:noFill/>
+        </p:spPr>
+        <p:txBody>
+          <a:bodyPr wrap="none">
+            <a:spAutoFit/>
+          </a:bodyPr>
+          <a:lstStyle/>
+          <a:p>
+            <a:pPr algn="ctr">
+              <a:defRPr sz="1000">
+                <a:solidFill>
+                  <a:srgbClr val="FFFFFF"/>
+                </a:solidFill>
+              </a:defRPr>
+            </a:pPr>
+            <a:r>
+              <a:t>LKS Nasional 2026 — Robot Bergerak Otonom | Kemendikdasmen</a:t>
+            </a:r>
+          </a:p>
+        </p:txBody>
+      </p:sp>
+      <p:sp>
+        <p:nvSpPr>
+          <p:cNvPr id="9" name="Rectangle 8"/>
+          <p:cNvSpPr/>
+          <p:nvPr/>
+        </p:nvSpPr>
+        <p:spPr>
+          <a:xfrm>
+            <a:off x="457200" y="1005840"/>
+            <a:ext cx="640080" cy="640080"/>
+          </a:xfrm>
+          <a:prstGeom prst="rect">
+            <a:avLst/>
+          </a:prstGeom>
+          <a:solidFill>
+            <a:srgbClr val="ED7D31"/>
+          </a:solidFill>
+          <a:ln>
+            <a:noFill/>
+          </a:ln>
+        </p:spPr>
+        <p:style>
+          <a:lnRef idx="1">
+            <a:schemeClr val="accent1"/>
+          </a:lnRef>
+          <a:fillRef idx="3">
+            <a:schemeClr val="accent1"/>
+          </a:fillRef>
+          <a:effectRef idx="2">
+            <a:schemeClr val="accent1"/>
+          </a:effectRef>
+          <a:fontRef idx="minor">
+            <a:schemeClr val="lt1"/>
+          </a:fontRef>
+        </p:style>
+        <p:txBody>
+          <a:bodyPr rtlCol="0" anchor="ctr"/>
+          <a:lstStyle/>
+          <a:p>
+            <a:pPr algn="ctr"/>
+          </a:p>
+        </p:txBody>
+      </p:sp>
+      <p:sp>
+        <p:nvSpPr>
+          <p:cNvPr id="10" name="TextBox 9"/>
+          <p:cNvSpPr txBox="1"/>
+          <p:nvPr/>
+        </p:nvSpPr>
+        <p:spPr>
+          <a:xfrm>
+            <a:off x="457200" y="1078992"/>
+            <a:ext cx="640080" cy="502920"/>
+          </a:xfrm>
+          <a:prstGeom prst="rect">
+            <a:avLst/>
+          </a:prstGeom>
+          <a:noFill/>
+        </p:spPr>
+        <p:txBody>
+          <a:bodyPr wrap="none">
+            <a:spAutoFit/>
+          </a:bodyPr>
+          <a:lstStyle/>
+          <a:p>
+            <a:pPr algn="ctr">
+              <a:defRPr sz="2200" b="1">
+                <a:solidFill>
+                  <a:srgbClr val="FFFFFF"/>
+                </a:solidFill>
+              </a:defRPr>
+            </a:pPr>
+            <a:r>
+              <a:t>3</a:t>
+            </a:r>
+          </a:p>
+        </p:txBody>
+      </p:sp>
+      <p:sp>
+        <p:nvSpPr>
+          <p:cNvPr id="11" name="TextBox 10"/>
+          <p:cNvSpPr txBox="1"/>
+          <p:nvPr/>
+        </p:nvSpPr>
+        <p:spPr>
+          <a:xfrm>
+            <a:off x="1280160" y="960120"/>
+            <a:ext cx="7315200" cy="731520"/>
+          </a:xfrm>
+          <a:prstGeom prst="rect">
+            <a:avLst/>
+          </a:prstGeom>
+          <a:noFill/>
+        </p:spPr>
+        <p:txBody>
+          <a:bodyPr wrap="none">
+            <a:spAutoFit/>
+          </a:bodyPr>
+          <a:lstStyle/>
+          <a:p>
+            <a:pPr>
+              <a:defRPr sz="2200" b="1">
+                <a:solidFill>
+                  <a:srgbClr val="1F4E79"/>
+                </a:solidFill>
+              </a:defRPr>
+            </a:pPr>
+            <a:r>
+              <a:t>Sinyal SIAP</a:t>
+            </a:r>
+          </a:p>
+        </p:txBody>
+      </p:sp>
+      <p:sp>
+        <p:nvSpPr>
+          <p:cNvPr id="12" name="TextBox 11"/>
+          <p:cNvSpPr txBox="1"/>
+          <p:nvPr/>
+        </p:nvSpPr>
+        <p:spPr>
+          <a:xfrm>
+            <a:off x="548640" y="1828800"/>
+            <a:ext cx="8046720" cy="4114800"/>
+          </a:xfrm>
+          <a:prstGeom prst="rect">
+            <a:avLst/>
+          </a:prstGeom>
+          <a:noFill/>
+        </p:spPr>
+        <p:txBody>
+          <a:bodyPr wrap="square">
+            <a:spAutoFit/>
+          </a:bodyPr>
+          <a:lstStyle/>
+          <a:p>
+            <a:pPr>
+              <a:spcAft>
+                <a:spcPts val="1000"/>
+              </a:spcAft>
+              <a:defRPr sz="1500"/>
+            </a:pPr>
+            <a:r>
+              <a:t>• Peserta menyatakan SIAP ketika program siap dijalankan</a:t>
+            </a:r>
+          </a:p>
+          <a:p>
+            <a:pPr>
+              <a:spcAft>
+                <a:spcPts val="1000"/>
+              </a:spcAft>
+              <a:defRPr sz="1500"/>
+            </a:pPr>
+            <a:r>
+              <a:t>• Setelah SIAP → peserta TIDAK BOLEH menyentuh laptop lagi</a:t>
+            </a:r>
+          </a:p>
+          <a:p>
+            <a:pPr>
+              <a:spcAft>
+                <a:spcPts val="1000"/>
+              </a:spcAft>
+              <a:defRPr sz="1500"/>
+            </a:pPr>
+            <a:r>
+              <a:t>• Juri verifikasi: tangan peserta menjauh dari laptop</a:t>
+            </a:r>
+          </a:p>
+          <a:p>
+            <a:pPr>
+              <a:spcAft>
+                <a:spcPts val="1000"/>
+              </a:spcAft>
+              <a:defRPr sz="1500"/>
+            </a:pPr>
+            <a:r>
+              <a:t>• Siapkan lembar undian untuk pengacakan kubus</a:t>
+            </a:r>
+          </a:p>
+        </p:txBody>
+      </p:sp>
+      <p:sp>
+        <p:nvSpPr>
+          <p:cNvPr id="13" name="Rectangle 12"/>
+          <p:cNvSpPr/>
+          <p:nvPr/>
+        </p:nvSpPr>
+        <p:spPr>
+          <a:xfrm>
+            <a:off x="457200" y="5669280"/>
+            <a:ext cx="8229600" cy="640080"/>
+          </a:xfrm>
+          <a:prstGeom prst="rect">
+            <a:avLst/>
+          </a:prstGeom>
+          <a:solidFill>
+            <a:srgbClr val="FFF3E0"/>
+          </a:solidFill>
+          <a:ln>
+            <a:solidFill>
+              <a:srgbClr val="ED7D31"/>
+            </a:solidFill>
+          </a:ln>
+        </p:spPr>
+        <p:style>
+          <a:lnRef idx="1">
+            <a:schemeClr val="accent1"/>
+          </a:lnRef>
+          <a:fillRef idx="3">
+            <a:schemeClr val="accent1"/>
+          </a:fillRef>
+          <a:effectRef idx="2">
+            <a:schemeClr val="accent1"/>
+          </a:effectRef>
+          <a:fontRef idx="minor">
+            <a:schemeClr val="lt1"/>
+          </a:fontRef>
+        </p:style>
+        <p:txBody>
+          <a:bodyPr rtlCol="0" anchor="ctr"/>
+          <a:lstStyle/>
+          <a:p>
+            <a:pPr algn="ctr"/>
+          </a:p>
+        </p:txBody>
+      </p:sp>
+      <p:sp>
+        <p:nvSpPr>
+          <p:cNvPr id="14" name="TextBox 13"/>
+          <p:cNvSpPr txBox="1"/>
+          <p:nvPr/>
+        </p:nvSpPr>
+        <p:spPr>
+          <a:xfrm>
+            <a:off x="594360" y="5742432"/>
+            <a:ext cx="7955279" cy="502920"/>
+          </a:xfrm>
+          <a:prstGeom prst="rect">
+            <a:avLst/>
+          </a:prstGeom>
+          <a:noFill/>
+        </p:spPr>
+        <p:txBody>
+          <a:bodyPr wrap="none">
+            <a:spAutoFit/>
+          </a:bodyPr>
+          <a:lstStyle/>
+          <a:p>
+            <a:pPr>
+              <a:defRPr sz="1200" b="1">
+                <a:solidFill>
+                  <a:srgbClr val="ED7D31"/>
+                </a:solidFill>
+              </a:defRPr>
+            </a:pPr>
+            <a:r>
+              <a:t>⚠ Juri: Sentuh laptop setelah SIAP = pelanggaran (run batal).</a:t>
             </a:r>
           </a:p>
         </p:txBody>

--- a/docs/Briefing-Juri-LKS2026-Robot-Otonom.pptx
+++ b/docs/Briefing-Juri-LKS2026-Robot-Otonom.pptx
@@ -28,6 +28,7 @@
     <p:sldId id="276" r:id="rId27"/>
     <p:sldId id="277" r:id="rId28"/>
     <p:sldId id="278" r:id="rId29"/>
+    <p:sldId id="279" r:id="rId30"/>
   </p:sldIdLst>
   <p:sldSz cx="9144000" cy="6858000" type="screen4x3"/>
   <p:notesSz cx="6858000" cy="9144000"/>
@@ -3637,7 +3638,7 @@
               </a:defRPr>
             </a:pPr>
             <a:r>
-              <a:t>Demo Modul E — Langkah 1/8</a:t>
+              <a:t>Alur Run Otonom (Modul E)</a:t>
             </a:r>
           </a:p>
         </p:txBody>
@@ -3725,133 +3726,14 @@
       </p:sp>
       <p:sp>
         <p:nvSpPr>
-          <p:cNvPr id="9" name="Rectangle 8"/>
-          <p:cNvSpPr/>
-          <p:nvPr/>
-        </p:nvSpPr>
-        <p:spPr>
-          <a:xfrm>
-            <a:off x="411480" y="960120"/>
-            <a:ext cx="502920" cy="502920"/>
-          </a:xfrm>
-          <a:prstGeom prst="rect">
-            <a:avLst/>
-          </a:prstGeom>
-          <a:solidFill>
-            <a:srgbClr val="ED7D31"/>
-          </a:solidFill>
-          <a:ln>
-            <a:noFill/>
-          </a:ln>
-        </p:spPr>
-        <p:style>
-          <a:lnRef idx="1">
-            <a:schemeClr val="accent1"/>
-          </a:lnRef>
-          <a:fillRef idx="3">
-            <a:schemeClr val="accent1"/>
-          </a:fillRef>
-          <a:effectRef idx="2">
-            <a:schemeClr val="accent1"/>
-          </a:effectRef>
-          <a:fontRef idx="minor">
-            <a:schemeClr val="lt1"/>
-          </a:fontRef>
-        </p:style>
-        <p:txBody>
-          <a:bodyPr rtlCol="0" anchor="ctr"/>
-          <a:lstStyle/>
-          <a:p>
-            <a:pPr algn="ctr"/>
-          </a:p>
-        </p:txBody>
-      </p:sp>
-      <p:sp>
-        <p:nvSpPr>
-          <p:cNvPr id="10" name="TextBox 9"/>
+          <p:cNvPr id="9" name="TextBox 8"/>
           <p:cNvSpPr txBox="1"/>
           <p:nvPr/>
         </p:nvSpPr>
         <p:spPr>
           <a:xfrm>
-            <a:off x="411480" y="1014984"/>
-            <a:ext cx="502920" cy="411480"/>
-          </a:xfrm>
-          <a:prstGeom prst="rect">
-            <a:avLst/>
-          </a:prstGeom>
-          <a:noFill/>
-        </p:spPr>
-        <p:txBody>
-          <a:bodyPr wrap="none">
-            <a:spAutoFit/>
-          </a:bodyPr>
-          <a:lstStyle/>
-          <a:p>
-            <a:pPr algn="ctr">
-              <a:spcAft>
-                <a:spcPts val="0"/>
-              </a:spcAft>
-              <a:defRPr sz="2000" b="1">
-                <a:solidFill>
-                  <a:srgbClr val="FFFFFF"/>
-                </a:solidFill>
-              </a:defRPr>
-            </a:pPr>
-            <a:r>
-              <a:t>1</a:t>
-            </a:r>
-          </a:p>
-        </p:txBody>
-      </p:sp>
-      <p:sp>
-        <p:nvSpPr>
-          <p:cNvPr id="11" name="TextBox 10"/>
-          <p:cNvSpPr txBox="1"/>
-          <p:nvPr/>
-        </p:nvSpPr>
-        <p:spPr>
-          <a:xfrm>
-            <a:off x="1051560" y="941832"/>
-            <a:ext cx="7589520" cy="502920"/>
-          </a:xfrm>
-          <a:prstGeom prst="rect">
-            <a:avLst/>
-          </a:prstGeom>
-          <a:noFill/>
-        </p:spPr>
-        <p:txBody>
-          <a:bodyPr wrap="none">
-            <a:spAutoFit/>
-          </a:bodyPr>
-          <a:lstStyle/>
-          <a:p>
-            <a:pPr>
-              <a:spcAft>
-                <a:spcPts val="0"/>
-              </a:spcAft>
-              <a:defRPr sz="2200" b="1">
-                <a:solidFill>
-                  <a:srgbClr val="1F4E79"/>
-                </a:solidFill>
-              </a:defRPr>
-            </a:pPr>
-            <a:r>
-              <a:t>Briefing layout arena</a:t>
-            </a:r>
-          </a:p>
-        </p:txBody>
-      </p:sp>
-      <p:sp>
-        <p:nvSpPr>
-          <p:cNvPr id="12" name="TextBox 11"/>
-          <p:cNvSpPr txBox="1"/>
-          <p:nvPr/>
-        </p:nvSpPr>
-        <p:spPr>
-          <a:xfrm>
-            <a:off x="457200" y="1554480"/>
-            <a:ext cx="8229600" cy="4434840"/>
+            <a:off x="457200" y="960120"/>
+            <a:ext cx="8229600" cy="5257800"/>
           </a:xfrm>
           <a:prstGeom prst="rect">
             <a:avLst/>
@@ -3866,75 +3748,120 @@
           <a:p>
             <a:pPr>
               <a:spcAft>
-                <a:spcPts val="1200"/>
-              </a:spcAft>
-              <a:defRPr sz="1700" b="0">
+                <a:spcPts val="800"/>
+              </a:spcAft>
+              <a:defRPr sz="1800" b="0">
                 <a:solidFill>
                   <a:srgbClr val="333333"/>
                 </a:solidFill>
               </a:defRPr>
             </a:pPr>
             <a:r>
-              <a:t>Jelaskan posisi START, 3 rak, gate, dan obstacle</a:t>
+              <a:t>1. Briefing layout arena</a:t>
             </a:r>
           </a:p>
           <a:p>
             <a:pPr>
               <a:spcAft>
-                <a:spcPts val="1200"/>
-              </a:spcAft>
-              <a:defRPr sz="1700" b="0">
+                <a:spcPts val="800"/>
+              </a:spcAft>
+              <a:defRPr sz="1800" b="0">
                 <a:solidFill>
                   <a:srgbClr val="333333"/>
                 </a:solidFill>
               </a:defRPr>
             </a:pPr>
             <a:r>
-              <a:t>Tunjukkan marker warna di slot rak (bisa berubah tiap soal)</a:t>
+              <a:t>2. Programming (laptop boleh disentuh)</a:t>
             </a:r>
           </a:p>
           <a:p>
             <a:pPr>
               <a:spcAft>
-                <a:spcPts val="1200"/>
-              </a:spcAft>
-              <a:defRPr sz="1700" b="0">
+                <a:spcPts val="800"/>
+              </a:spcAft>
+              <a:defRPr sz="1800" b="1">
                 <a:solidFill>
                   <a:srgbClr val="333333"/>
                 </a:solidFill>
               </a:defRPr>
             </a:pPr>
             <a:r>
-              <a:t>Pastikan lampu arena menyala</a:t>
+              <a:t>3. Peserta nyatakan SIAP</a:t>
             </a:r>
           </a:p>
           <a:p>
             <a:pPr>
               <a:spcAft>
-                <a:spcPts val="1200"/>
-              </a:spcAft>
-              <a:defRPr sz="1700" b="0">
+                <a:spcPts val="800"/>
+              </a:spcAft>
+              <a:defRPr sz="1800" b="0">
                 <a:solidFill>
                   <a:srgbClr val="333333"/>
                 </a:solidFill>
               </a:defRPr>
             </a:pPr>
             <a:r>
-              <a:t>Isi sheet Undian Kubus di Excel</a:t>
-            </a:r>
-          </a:p>
-        </p:txBody>
-      </p:sp>
-      <p:sp>
-        <p:nvSpPr>
-          <p:cNvPr id="13" name="Rectangle 12"/>
+              <a:t>4. Laptop dilarang | Juri acak kubus</a:t>
+            </a:r>
+          </a:p>
+          <a:p>
+            <a:pPr>
+              <a:spcAft>
+                <a:spcPts val="800"/>
+              </a:spcAft>
+              <a:defRPr sz="1800" b="1">
+                <a:solidFill>
+                  <a:srgbClr val="333333"/>
+                </a:solidFill>
+              </a:defRPr>
+            </a:pPr>
+            <a:r>
+              <a:t>5. START → tekan tombol di robot</a:t>
+            </a:r>
+          </a:p>
+          <a:p>
+            <a:pPr>
+              <a:spcAft>
+                <a:spcPts val="800"/>
+              </a:spcAft>
+              <a:defRPr sz="1800" b="0">
+                <a:solidFill>
+                  <a:srgbClr val="333333"/>
+                </a:solidFill>
+              </a:defRPr>
+            </a:pPr>
+            <a:r>
+              <a:t>6. Run otonom — catat di Excel</a:t>
+            </a:r>
+          </a:p>
+          <a:p>
+            <a:pPr>
+              <a:spcAft>
+                <a:spcPts val="800"/>
+              </a:spcAft>
+              <a:defRPr sz="1800" b="0">
+                <a:solidFill>
+                  <a:srgbClr val="333333"/>
+                </a:solidFill>
+              </a:defRPr>
+            </a:pPr>
+            <a:r>
+              <a:t>7. Nilai 1/0 per kubus di Modul E</a:t>
+            </a:r>
+          </a:p>
+        </p:txBody>
+      </p:sp>
+      <p:sp>
+        <p:nvSpPr>
+          <p:cNvPr id="10" name="Rectangle 9"/>
           <p:cNvSpPr/>
           <p:nvPr/>
         </p:nvSpPr>
         <p:spPr>
           <a:xfrm>
-            <a:off x="411480" y="5532120"/>
-            <a:ext cx="8321040" cy="713232"/>
+            <a:off x="411480" y="5349240"/>
+            <a:ext cx="8321040" cy="777240"/>
           </a:xfrm>
           <a:prstGeom prst="rect">
             <a:avLst/>
@@ -3972,14 +3899,14 @@
       </p:sp>
       <p:sp>
         <p:nvSpPr>
-          <p:cNvPr id="14" name="TextBox 13"/>
+          <p:cNvPr id="11" name="TextBox 10"/>
           <p:cNvSpPr txBox="1"/>
           <p:nvPr/>
         </p:nvSpPr>
         <p:spPr>
           <a:xfrm>
-            <a:off x="548640" y="5623560"/>
-            <a:ext cx="8046720" cy="566928"/>
+            <a:off x="548640" y="5440680"/>
+            <a:ext cx="8046720" cy="640080"/>
           </a:xfrm>
           <a:prstGeom prst="rect">
             <a:avLst/>
@@ -3996,14 +3923,14 @@
               <a:spcAft>
                 <a:spcPts val="0"/>
               </a:spcAft>
-              <a:defRPr sz="1200" b="1">
+              <a:defRPr sz="1300" b="1">
                 <a:solidFill>
                   <a:srgbClr val="ED7D31"/>
                 </a:solidFill>
               </a:defRPr>
             </a:pPr>
             <a:r>
-              <a:t>PENTING — Juri: Jangan mulai run sebelum peserta paham layout.</a:t>
+              <a:t>PENTING: Sentuh laptop setelah SIAP atau sentuh robot setelah START = pelanggaran (run dapat dibatalkan).</a:t>
             </a:r>
           </a:p>
         </p:txBody>
@@ -4193,7 +4120,7 @@
               </a:defRPr>
             </a:pPr>
             <a:r>
-              <a:t>Demo Modul E — Langkah 2/8</a:t>
+              <a:t>Demo Modul E — Langkah 1/8</a:t>
             </a:r>
           </a:p>
         </p:txBody>
@@ -4355,7 +4282,7 @@
               </a:defRPr>
             </a:pPr>
             <a:r>
-              <a:t>2</a:t>
+              <a:t>1</a:t>
             </a:r>
           </a:p>
         </p:txBody>
@@ -4393,7 +4320,7 @@
               </a:defRPr>
             </a:pPr>
             <a:r>
-              <a:t>Programming &amp; persiapan</a:t>
+              <a:t>Briefing layout arena</a:t>
             </a:r>
           </a:p>
         </p:txBody>
@@ -4407,7 +4334,7 @@
         <p:spPr>
           <a:xfrm>
             <a:off x="457200" y="1554480"/>
-            <a:ext cx="8229600" cy="4663440"/>
+            <a:ext cx="8229600" cy="4434840"/>
           </a:xfrm>
           <a:prstGeom prst="rect">
             <a:avLst/>
@@ -4431,7 +4358,7 @@
               </a:defRPr>
             </a:pPr>
             <a:r>
-              <a:t>Peserta memprogram navigasi, visi, pick-place</a:t>
+              <a:t>Jelaskan posisi START, 3 rak, gate, dan obstacle</a:t>
             </a:r>
           </a:p>
           <a:p>
@@ -4446,7 +4373,7 @@
               </a:defRPr>
             </a:pPr>
             <a:r>
-              <a:t>Peserta BOLEH menyentuh laptop</a:t>
+              <a:t>Tunjukkan marker warna di slot rak (bisa berubah tiap soal)</a:t>
             </a:r>
           </a:p>
           <a:p>
@@ -4461,7 +4388,7 @@
               </a:defRPr>
             </a:pPr>
             <a:r>
-              <a:t>Cek tombol START di robot dan STOP merah</a:t>
+              <a:t>Pastikan lampu arena menyala</a:t>
             </a:r>
           </a:p>
           <a:p>
@@ -4476,7 +4403,90 @@
               </a:defRPr>
             </a:pPr>
             <a:r>
-              <a:t>Juri observasi Modul A (kolaborasi &amp; 5S)</a:t>
+              <a:t>Isi sheet Undian Kubus di Excel</a:t>
+            </a:r>
+          </a:p>
+        </p:txBody>
+      </p:sp>
+      <p:sp>
+        <p:nvSpPr>
+          <p:cNvPr id="13" name="Rectangle 12"/>
+          <p:cNvSpPr/>
+          <p:nvPr/>
+        </p:nvSpPr>
+        <p:spPr>
+          <a:xfrm>
+            <a:off x="411480" y="5532120"/>
+            <a:ext cx="8321040" cy="713232"/>
+          </a:xfrm>
+          <a:prstGeom prst="rect">
+            <a:avLst/>
+          </a:prstGeom>
+          <a:solidFill>
+            <a:srgbClr val="FFF3E0"/>
+          </a:solidFill>
+          <a:ln>
+            <a:solidFill>
+              <a:srgbClr val="ED7D31"/>
+            </a:solidFill>
+          </a:ln>
+        </p:spPr>
+        <p:style>
+          <a:lnRef idx="1">
+            <a:schemeClr val="accent1"/>
+          </a:lnRef>
+          <a:fillRef idx="3">
+            <a:schemeClr val="accent1"/>
+          </a:fillRef>
+          <a:effectRef idx="2">
+            <a:schemeClr val="accent1"/>
+          </a:effectRef>
+          <a:fontRef idx="minor">
+            <a:schemeClr val="lt1"/>
+          </a:fontRef>
+        </p:style>
+        <p:txBody>
+          <a:bodyPr rtlCol="0" anchor="ctr"/>
+          <a:lstStyle/>
+          <a:p>
+            <a:pPr algn="ctr"/>
+          </a:p>
+        </p:txBody>
+      </p:sp>
+      <p:sp>
+        <p:nvSpPr>
+          <p:cNvPr id="14" name="TextBox 13"/>
+          <p:cNvSpPr txBox="1"/>
+          <p:nvPr/>
+        </p:nvSpPr>
+        <p:spPr>
+          <a:xfrm>
+            <a:off x="548640" y="5623560"/>
+            <a:ext cx="8046720" cy="566928"/>
+          </a:xfrm>
+          <a:prstGeom prst="rect">
+            <a:avLst/>
+          </a:prstGeom>
+          <a:noFill/>
+        </p:spPr>
+        <p:txBody>
+          <a:bodyPr wrap="none">
+            <a:spAutoFit/>
+          </a:bodyPr>
+          <a:lstStyle/>
+          <a:p>
+            <a:pPr>
+              <a:spcAft>
+                <a:spcPts val="0"/>
+              </a:spcAft>
+              <a:defRPr sz="1200" b="1">
+                <a:solidFill>
+                  <a:srgbClr val="ED7D31"/>
+                </a:solidFill>
+              </a:defRPr>
+            </a:pPr>
+            <a:r>
+              <a:t>PENTING — Juri: Jangan mulai run sebelum peserta paham layout.</a:t>
             </a:r>
           </a:p>
         </p:txBody>
@@ -4666,7 +4676,7 @@
               </a:defRPr>
             </a:pPr>
             <a:r>
-              <a:t>Demo Modul E — Langkah 3/8</a:t>
+              <a:t>Demo Modul E — Langkah 2/8</a:t>
             </a:r>
           </a:p>
         </p:txBody>
@@ -4828,7 +4838,7 @@
               </a:defRPr>
             </a:pPr>
             <a:r>
-              <a:t>3</a:t>
+              <a:t>2</a:t>
             </a:r>
           </a:p>
         </p:txBody>
@@ -4866,7 +4876,7 @@
               </a:defRPr>
             </a:pPr>
             <a:r>
-              <a:t>Sinyal SIAP</a:t>
+              <a:t>Programming &amp; persiapan</a:t>
             </a:r>
           </a:p>
         </p:txBody>
@@ -4880,7 +4890,7 @@
         <p:spPr>
           <a:xfrm>
             <a:off x="457200" y="1554480"/>
-            <a:ext cx="8229600" cy="4434840"/>
+            <a:ext cx="8229600" cy="4663440"/>
           </a:xfrm>
           <a:prstGeom prst="rect">
             <a:avLst/>
@@ -4904,7 +4914,7 @@
               </a:defRPr>
             </a:pPr>
             <a:r>
-              <a:t>Peserta menyatakan SIAP saat program siap</a:t>
+              <a:t>Peserta memprogram navigasi, visi, pick-place</a:t>
             </a:r>
           </a:p>
           <a:p>
@@ -4919,7 +4929,7 @@
               </a:defRPr>
             </a:pPr>
             <a:r>
-              <a:t>Setelah SIAP: TIDAK BOLEH sentuh laptop</a:t>
+              <a:t>Peserta BOLEH menyentuh laptop</a:t>
             </a:r>
           </a:p>
           <a:p>
@@ -4934,7 +4944,7 @@
               </a:defRPr>
             </a:pPr>
             <a:r>
-              <a:t>Juri pastikan tangan peserta menjauh dari laptop</a:t>
+              <a:t>Cek tombol START di robot dan STOP merah</a:t>
             </a:r>
           </a:p>
           <a:p>
@@ -4949,90 +4959,7 @@
               </a:defRPr>
             </a:pPr>
             <a:r>
-              <a:t>Siapkan pengacakan kubus</a:t>
-            </a:r>
-          </a:p>
-        </p:txBody>
-      </p:sp>
-      <p:sp>
-        <p:nvSpPr>
-          <p:cNvPr id="13" name="Rectangle 12"/>
-          <p:cNvSpPr/>
-          <p:nvPr/>
-        </p:nvSpPr>
-        <p:spPr>
-          <a:xfrm>
-            <a:off x="411480" y="5532120"/>
-            <a:ext cx="8321040" cy="713232"/>
-          </a:xfrm>
-          <a:prstGeom prst="rect">
-            <a:avLst/>
-          </a:prstGeom>
-          <a:solidFill>
-            <a:srgbClr val="FFF3E0"/>
-          </a:solidFill>
-          <a:ln>
-            <a:solidFill>
-              <a:srgbClr val="ED7D31"/>
-            </a:solidFill>
-          </a:ln>
-        </p:spPr>
-        <p:style>
-          <a:lnRef idx="1">
-            <a:schemeClr val="accent1"/>
-          </a:lnRef>
-          <a:fillRef idx="3">
-            <a:schemeClr val="accent1"/>
-          </a:fillRef>
-          <a:effectRef idx="2">
-            <a:schemeClr val="accent1"/>
-          </a:effectRef>
-          <a:fontRef idx="minor">
-            <a:schemeClr val="lt1"/>
-          </a:fontRef>
-        </p:style>
-        <p:txBody>
-          <a:bodyPr rtlCol="0" anchor="ctr"/>
-          <a:lstStyle/>
-          <a:p>
-            <a:pPr algn="ctr"/>
-          </a:p>
-        </p:txBody>
-      </p:sp>
-      <p:sp>
-        <p:nvSpPr>
-          <p:cNvPr id="14" name="TextBox 13"/>
-          <p:cNvSpPr txBox="1"/>
-          <p:nvPr/>
-        </p:nvSpPr>
-        <p:spPr>
-          <a:xfrm>
-            <a:off x="548640" y="5623560"/>
-            <a:ext cx="8046720" cy="566928"/>
-          </a:xfrm>
-          <a:prstGeom prst="rect">
-            <a:avLst/>
-          </a:prstGeom>
-          <a:noFill/>
-        </p:spPr>
-        <p:txBody>
-          <a:bodyPr wrap="none">
-            <a:spAutoFit/>
-          </a:bodyPr>
-          <a:lstStyle/>
-          <a:p>
-            <a:pPr>
-              <a:spcAft>
-                <a:spcPts val="0"/>
-              </a:spcAft>
-              <a:defRPr sz="1200" b="1">
-                <a:solidFill>
-                  <a:srgbClr val="ED7D31"/>
-                </a:solidFill>
-              </a:defRPr>
-            </a:pPr>
-            <a:r>
-              <a:t>PENTING — Juri: Sentuh laptop setelah SIAP = pelanggaran.</a:t>
+              <a:t>Juri observasi Modul A (kolaborasi &amp; 5S)</a:t>
             </a:r>
           </a:p>
         </p:txBody>
@@ -5222,7 +5149,7 @@
               </a:defRPr>
             </a:pPr>
             <a:r>
-              <a:t>Demo Modul E — Langkah 4/8</a:t>
+              <a:t>Demo Modul E — Langkah 3/8</a:t>
             </a:r>
           </a:p>
         </p:txBody>
@@ -5384,7 +5311,7 @@
               </a:defRPr>
             </a:pPr>
             <a:r>
-              <a:t>4</a:t>
+              <a:t>3</a:t>
             </a:r>
           </a:p>
         </p:txBody>
@@ -5422,7 +5349,7 @@
               </a:defRPr>
             </a:pPr>
             <a:r>
-              <a:t>Pengacakan posisi kubus</a:t>
+              <a:t>Sinyal SIAP</a:t>
             </a:r>
           </a:p>
         </p:txBody>
@@ -5460,7 +5387,7 @@
               </a:defRPr>
             </a:pPr>
             <a:r>
-              <a:t>Acak 9 kubus di rak dan stand (beberapa sengaja salah)</a:t>
+              <a:t>Peserta menyatakan SIAP saat program siap</a:t>
             </a:r>
           </a:p>
           <a:p>
@@ -5475,7 +5402,7 @@
               </a:defRPr>
             </a:pPr>
             <a:r>
-              <a:t>Isi kolom ID di sheet Undian Kubus</a:t>
+              <a:t>Setelah SIAP: TIDAK BOLEH sentuh laptop</a:t>
             </a:r>
           </a:p>
           <a:p>
@@ -5490,7 +5417,7 @@
               </a:defRPr>
             </a:pPr>
             <a:r>
-              <a:t>Warna &amp; bentuk terisi otomatis (VLOOKUP)</a:t>
+              <a:t>Juri pastikan tangan peserta menjauh dari laptop</a:t>
             </a:r>
           </a:p>
           <a:p>
@@ -5505,7 +5432,7 @@
               </a:defRPr>
             </a:pPr>
             <a:r>
-              <a:t>Peserta tidak mengatur posisi setelah SIAP</a:t>
+              <a:t>Siapkan pengacakan kubus</a:t>
             </a:r>
           </a:p>
         </p:txBody>
@@ -5588,7 +5515,7 @@
               </a:defRPr>
             </a:pPr>
             <a:r>
-              <a:t>PENTING — Juri: Setelah SIAP, posisi kubus diacak ulang.</a:t>
+              <a:t>PENTING — Juri: Sentuh laptop setelah SIAP = pelanggaran.</a:t>
             </a:r>
           </a:p>
         </p:txBody>
@@ -5778,7 +5705,7 @@
               </a:defRPr>
             </a:pPr>
             <a:r>
-              <a:t>Demo Modul E — Langkah 5/8</a:t>
+              <a:t>Demo Modul E — Langkah 4/8</a:t>
             </a:r>
           </a:p>
         </p:txBody>
@@ -5940,7 +5867,7 @@
               </a:defRPr>
             </a:pPr>
             <a:r>
-              <a:t>5</a:t>
+              <a:t>4</a:t>
             </a:r>
           </a:p>
         </p:txBody>
@@ -5978,7 +5905,7 @@
               </a:defRPr>
             </a:pPr>
             <a:r>
-              <a:t>Sinyal START &amp; run otonom</a:t>
+              <a:t>Pengacakan &amp; isi Excel Undian Kubus</a:t>
             </a:r>
           </a:p>
         </p:txBody>
@@ -6016,7 +5943,7 @@
               </a:defRPr>
             </a:pPr>
             <a:r>
-              <a:t>Juri beri sinyal START</a:t>
+              <a:t>Acak 9 kubus di rak dan stand (beberapa sengaja salah)</a:t>
             </a:r>
           </a:p>
           <a:p>
@@ -6031,7 +5958,7 @@
               </a:defRPr>
             </a:pPr>
             <a:r>
-              <a:t>Peserta tekan tombol START di robot</a:t>
+              <a:t>Baris 24: isi warna marker per slot (Merah/Hijau/Biru)</a:t>
             </a:r>
           </a:p>
           <a:p>
@@ -6046,7 +5973,7 @@
               </a:defRPr>
             </a:pPr>
             <a:r>
-              <a:t>Robot berjalan sepenuhnya otonom</a:t>
+              <a:t>Baris 28–36: kolom A = ID | E = Rak/Stand | F = Slot</a:t>
             </a:r>
           </a:p>
           <a:p>
@@ -6061,7 +5988,7 @@
               </a:defRPr>
             </a:pPr>
             <a:r>
-              <a:t>Catat di sheet Log Run Otonom</a:t>
+              <a:t>Warna, bentuk, lokasi, slot target terisi otomatis</a:t>
             </a:r>
           </a:p>
         </p:txBody>
@@ -6144,7 +6071,7 @@
               </a:defRPr>
             </a:pPr>
             <a:r>
-              <a:t>PENTING — Juri: Jangan sentuh robot setelah START.</a:t>
+              <a:t>PENTING — Juri: Isi Undian SEBELUM run — Modul E membaca data dari sini.</a:t>
             </a:r>
           </a:p>
         </p:txBody>
@@ -6334,7 +6261,7 @@
               </a:defRPr>
             </a:pPr>
             <a:r>
-              <a:t>Demo Modul E — Langkah 6/8</a:t>
+              <a:t>Demo Modul E — Langkah 5/8</a:t>
             </a:r>
           </a:p>
         </p:txBody>
@@ -6496,7 +6423,7 @@
               </a:defRPr>
             </a:pPr>
             <a:r>
-              <a:t>6</a:t>
+              <a:t>5</a:t>
             </a:r>
           </a:p>
         </p:txBody>
@@ -6534,7 +6461,7 @@
               </a:defRPr>
             </a:pPr>
             <a:r>
-              <a:t>Penilaian per kubus</a:t>
+              <a:t>Sinyal START &amp; run otonom</a:t>
             </a:r>
           </a:p>
         </p:txBody>
@@ -6548,7 +6475,7 @@
         <p:spPr>
           <a:xfrm>
             <a:off x="457200" y="1554480"/>
-            <a:ext cx="8229600" cy="4663440"/>
+            <a:ext cx="8229600" cy="4434840"/>
           </a:xfrm>
           <a:prstGeom prst="rect">
             <a:avLst/>
@@ -6572,7 +6499,7 @@
               </a:defRPr>
             </a:pPr>
             <a:r>
-              <a:t>Sukses = kubus di slot rak, marker warna cocok, stabil</a:t>
+              <a:t>Juri beri sinyal START</a:t>
             </a:r>
           </a:p>
           <a:p>
@@ -6587,7 +6514,7 @@
               </a:defRPr>
             </a:pPr>
             <a:r>
-              <a:t>Isi kolom Hasil (1/0) di sheet Modul E</a:t>
+              <a:t>Peserta tekan tombol START di robot</a:t>
             </a:r>
           </a:p>
           <a:p>
@@ -6602,7 +6529,7 @@
               </a:defRPr>
             </a:pPr>
             <a:r>
-              <a:t>Bobot: 60/9 poin per kubus (total 60)</a:t>
+              <a:t>Robot berjalan sepenuhnya otonom</a:t>
             </a:r>
           </a:p>
           <a:p>
@@ -6617,7 +6544,90 @@
               </a:defRPr>
             </a:pPr>
             <a:r>
-              <a:t>Konfirmasi ke CE: kubus sudah benar di awal dapat poin atau tidak</a:t>
+              <a:t>Catat di sheet Log Run Otonom</a:t>
+            </a:r>
+          </a:p>
+        </p:txBody>
+      </p:sp>
+      <p:sp>
+        <p:nvSpPr>
+          <p:cNvPr id="13" name="Rectangle 12"/>
+          <p:cNvSpPr/>
+          <p:nvPr/>
+        </p:nvSpPr>
+        <p:spPr>
+          <a:xfrm>
+            <a:off x="411480" y="5532120"/>
+            <a:ext cx="8321040" cy="713232"/>
+          </a:xfrm>
+          <a:prstGeom prst="rect">
+            <a:avLst/>
+          </a:prstGeom>
+          <a:solidFill>
+            <a:srgbClr val="FFF3E0"/>
+          </a:solidFill>
+          <a:ln>
+            <a:solidFill>
+              <a:srgbClr val="ED7D31"/>
+            </a:solidFill>
+          </a:ln>
+        </p:spPr>
+        <p:style>
+          <a:lnRef idx="1">
+            <a:schemeClr val="accent1"/>
+          </a:lnRef>
+          <a:fillRef idx="3">
+            <a:schemeClr val="accent1"/>
+          </a:fillRef>
+          <a:effectRef idx="2">
+            <a:schemeClr val="accent1"/>
+          </a:effectRef>
+          <a:fontRef idx="minor">
+            <a:schemeClr val="lt1"/>
+          </a:fontRef>
+        </p:style>
+        <p:txBody>
+          <a:bodyPr rtlCol="0" anchor="ctr"/>
+          <a:lstStyle/>
+          <a:p>
+            <a:pPr algn="ctr"/>
+          </a:p>
+        </p:txBody>
+      </p:sp>
+      <p:sp>
+        <p:nvSpPr>
+          <p:cNvPr id="14" name="TextBox 13"/>
+          <p:cNvSpPr txBox="1"/>
+          <p:nvPr/>
+        </p:nvSpPr>
+        <p:spPr>
+          <a:xfrm>
+            <a:off x="548640" y="5623560"/>
+            <a:ext cx="8046720" cy="566928"/>
+          </a:xfrm>
+          <a:prstGeom prst="rect">
+            <a:avLst/>
+          </a:prstGeom>
+          <a:noFill/>
+        </p:spPr>
+        <p:txBody>
+          <a:bodyPr wrap="none">
+            <a:spAutoFit/>
+          </a:bodyPr>
+          <a:lstStyle/>
+          <a:p>
+            <a:pPr>
+              <a:spcAft>
+                <a:spcPts val="0"/>
+              </a:spcAft>
+              <a:defRPr sz="1200" b="1">
+                <a:solidFill>
+                  <a:srgbClr val="ED7D31"/>
+                </a:solidFill>
+              </a:defRPr>
+            </a:pPr>
+            <a:r>
+              <a:t>PENTING — Juri: Jangan sentuh robot setelah START.</a:t>
             </a:r>
           </a:p>
         </p:txBody>
@@ -6807,7 +6817,7 @@
               </a:defRPr>
             </a:pPr>
             <a:r>
-              <a:t>Contoh penilaian (latihan)</a:t>
+              <a:t>Demo Modul E — Langkah 6/8</a:t>
             </a:r>
           </a:p>
         </p:txBody>
@@ -6889,6 +6899,479 @@
             </a:pPr>
             <a:r>
               <a:t>Slide 16  |  Briefing Juri LKS 2026 — Robot Bergerak Otonom  |  Kemendikdasmen</a:t>
+            </a:r>
+          </a:p>
+        </p:txBody>
+      </p:sp>
+      <p:sp>
+        <p:nvSpPr>
+          <p:cNvPr id="9" name="Rectangle 8"/>
+          <p:cNvSpPr/>
+          <p:nvPr/>
+        </p:nvSpPr>
+        <p:spPr>
+          <a:xfrm>
+            <a:off x="411480" y="960120"/>
+            <a:ext cx="502920" cy="502920"/>
+          </a:xfrm>
+          <a:prstGeom prst="rect">
+            <a:avLst/>
+          </a:prstGeom>
+          <a:solidFill>
+            <a:srgbClr val="ED7D31"/>
+          </a:solidFill>
+          <a:ln>
+            <a:noFill/>
+          </a:ln>
+        </p:spPr>
+        <p:style>
+          <a:lnRef idx="1">
+            <a:schemeClr val="accent1"/>
+          </a:lnRef>
+          <a:fillRef idx="3">
+            <a:schemeClr val="accent1"/>
+          </a:fillRef>
+          <a:effectRef idx="2">
+            <a:schemeClr val="accent1"/>
+          </a:effectRef>
+          <a:fontRef idx="minor">
+            <a:schemeClr val="lt1"/>
+          </a:fontRef>
+        </p:style>
+        <p:txBody>
+          <a:bodyPr rtlCol="0" anchor="ctr"/>
+          <a:lstStyle/>
+          <a:p>
+            <a:pPr algn="ctr"/>
+          </a:p>
+        </p:txBody>
+      </p:sp>
+      <p:sp>
+        <p:nvSpPr>
+          <p:cNvPr id="10" name="TextBox 9"/>
+          <p:cNvSpPr txBox="1"/>
+          <p:nvPr/>
+        </p:nvSpPr>
+        <p:spPr>
+          <a:xfrm>
+            <a:off x="411480" y="1014984"/>
+            <a:ext cx="502920" cy="411480"/>
+          </a:xfrm>
+          <a:prstGeom prst="rect">
+            <a:avLst/>
+          </a:prstGeom>
+          <a:noFill/>
+        </p:spPr>
+        <p:txBody>
+          <a:bodyPr wrap="none">
+            <a:spAutoFit/>
+          </a:bodyPr>
+          <a:lstStyle/>
+          <a:p>
+            <a:pPr algn="ctr">
+              <a:spcAft>
+                <a:spcPts val="0"/>
+              </a:spcAft>
+              <a:defRPr sz="2000" b="1">
+                <a:solidFill>
+                  <a:srgbClr val="FFFFFF"/>
+                </a:solidFill>
+              </a:defRPr>
+            </a:pPr>
+            <a:r>
+              <a:t>6</a:t>
+            </a:r>
+          </a:p>
+        </p:txBody>
+      </p:sp>
+      <p:sp>
+        <p:nvSpPr>
+          <p:cNvPr id="11" name="TextBox 10"/>
+          <p:cNvSpPr txBox="1"/>
+          <p:nvPr/>
+        </p:nvSpPr>
+        <p:spPr>
+          <a:xfrm>
+            <a:off x="1051560" y="941832"/>
+            <a:ext cx="7589520" cy="502920"/>
+          </a:xfrm>
+          <a:prstGeom prst="rect">
+            <a:avLst/>
+          </a:prstGeom>
+          <a:noFill/>
+        </p:spPr>
+        <p:txBody>
+          <a:bodyPr wrap="none">
+            <a:spAutoFit/>
+          </a:bodyPr>
+          <a:lstStyle/>
+          <a:p>
+            <a:pPr>
+              <a:spcAft>
+                <a:spcPts val="0"/>
+              </a:spcAft>
+              <a:defRPr sz="2200" b="1">
+                <a:solidFill>
+                  <a:srgbClr val="1F4E79"/>
+                </a:solidFill>
+              </a:defRPr>
+            </a:pPr>
+            <a:r>
+              <a:t>Penilaian per kubus (Modul E)</a:t>
+            </a:r>
+          </a:p>
+        </p:txBody>
+      </p:sp>
+      <p:sp>
+        <p:nvSpPr>
+          <p:cNvPr id="12" name="TextBox 11"/>
+          <p:cNvSpPr txBox="1"/>
+          <p:nvPr/>
+        </p:nvSpPr>
+        <p:spPr>
+          <a:xfrm>
+            <a:off x="457200" y="1554480"/>
+            <a:ext cx="8229600" cy="4663440"/>
+          </a:xfrm>
+          <a:prstGeom prst="rect">
+            <a:avLst/>
+          </a:prstGeom>
+          <a:noFill/>
+        </p:spPr>
+        <p:txBody>
+          <a:bodyPr wrap="square" anchor="t">
+            <a:spAutoFit/>
+          </a:bodyPr>
+          <a:lstStyle/>
+          <a:p>
+            <a:pPr>
+              <a:spcAft>
+                <a:spcPts val="1200"/>
+              </a:spcAft>
+              <a:defRPr sz="1700" b="0">
+                <a:solidFill>
+                  <a:srgbClr val="333333"/>
+                </a:solidFill>
+              </a:defRPr>
+            </a:pPr>
+            <a:r>
+              <a:t>Sukses = kubus di slot rak, marker warna cocok, stabil</a:t>
+            </a:r>
+          </a:p>
+          <a:p>
+            <a:pPr>
+              <a:spcAft>
+                <a:spcPts val="1200"/>
+              </a:spcAft>
+              <a:defRPr sz="1700" b="0">
+                <a:solidFill>
+                  <a:srgbClr val="333333"/>
+                </a:solidFill>
+              </a:defRPr>
+            </a:pPr>
+            <a:r>
+              <a:t>Kolom OK Awal = sudah benar sebelum run (referensi)</a:t>
+            </a:r>
+          </a:p>
+          <a:p>
+            <a:pPr>
+              <a:spcAft>
+                <a:spcPts val="1200"/>
+              </a:spcAft>
+              <a:defRPr sz="1700" b="0">
+                <a:solidFill>
+                  <a:srgbClr val="333333"/>
+                </a:solidFill>
+              </a:defRPr>
+            </a:pPr>
+            <a:r>
+              <a:t>Kolom Hasil Run (1/0) = keputusan juri SETELAH run</a:t>
+            </a:r>
+          </a:p>
+          <a:p>
+            <a:pPr>
+              <a:spcAft>
+                <a:spcPts val="1200"/>
+              </a:spcAft>
+              <a:defRPr sz="1700" b="0">
+                <a:solidFill>
+                  <a:srgbClr val="333333"/>
+                </a:solidFill>
+              </a:defRPr>
+            </a:pPr>
+            <a:r>
+              <a:t>Bobot: 60/9 poin per kubus (total 60) — konfirmasi ke CE</a:t>
+            </a:r>
+          </a:p>
+        </p:txBody>
+      </p:sp>
+    </p:spTree>
+  </p:cSld>
+  <p:clrMapOvr>
+    <a:masterClrMapping/>
+  </p:clrMapOvr>
+</p:sld>
+</file>
+
+<file path=ppt/slides/slide17.xml><?xml version="1.0" encoding="utf-8"?>
+<p:sld xmlns:a="http://schemas.openxmlformats.org/drawingml/2006/main" xmlns:p="http://schemas.openxmlformats.org/presentationml/2006/main" xmlns:r="http://schemas.openxmlformats.org/officeDocument/2006/relationships">
+  <p:cSld>
+    <p:spTree>
+      <p:nvGrpSpPr>
+        <p:cNvPr id="1" name=""/>
+        <p:cNvGrpSpPr/>
+        <p:nvPr/>
+      </p:nvGrpSpPr>
+      <p:grpSpPr/>
+      <p:sp>
+        <p:nvSpPr>
+          <p:cNvPr id="2" name="Rectangle 1"/>
+          <p:cNvSpPr/>
+          <p:nvPr/>
+        </p:nvSpPr>
+        <p:spPr>
+          <a:xfrm>
+            <a:off x="0" y="0"/>
+            <a:ext cx="9144000" cy="841248"/>
+          </a:xfrm>
+          <a:prstGeom prst="rect">
+            <a:avLst/>
+          </a:prstGeom>
+          <a:solidFill>
+            <a:srgbClr val="1F4E79"/>
+          </a:solidFill>
+          <a:ln>
+            <a:noFill/>
+          </a:ln>
+        </p:spPr>
+        <p:style>
+          <a:lnRef idx="1">
+            <a:schemeClr val="accent1"/>
+          </a:lnRef>
+          <a:fillRef idx="3">
+            <a:schemeClr val="accent1"/>
+          </a:fillRef>
+          <a:effectRef idx="2">
+            <a:schemeClr val="accent1"/>
+          </a:effectRef>
+          <a:fontRef idx="minor">
+            <a:schemeClr val="lt1"/>
+          </a:fontRef>
+        </p:style>
+        <p:txBody>
+          <a:bodyPr rtlCol="0" anchor="ctr"/>
+          <a:lstStyle/>
+          <a:p>
+            <a:pPr algn="ctr"/>
+          </a:p>
+        </p:txBody>
+      </p:sp>
+      <p:sp>
+        <p:nvSpPr>
+          <p:cNvPr id="3" name="Rectangle 2"/>
+          <p:cNvSpPr/>
+          <p:nvPr/>
+        </p:nvSpPr>
+        <p:spPr>
+          <a:xfrm>
+            <a:off x="0" y="841248"/>
+            <a:ext cx="9144000" cy="45720"/>
+          </a:xfrm>
+          <a:prstGeom prst="rect">
+            <a:avLst/>
+          </a:prstGeom>
+          <a:solidFill>
+            <a:srgbClr val="ED7D31"/>
+          </a:solidFill>
+          <a:ln>
+            <a:noFill/>
+          </a:ln>
+        </p:spPr>
+        <p:style>
+          <a:lnRef idx="1">
+            <a:schemeClr val="accent1"/>
+          </a:lnRef>
+          <a:fillRef idx="3">
+            <a:schemeClr val="accent1"/>
+          </a:fillRef>
+          <a:effectRef idx="2">
+            <a:schemeClr val="accent1"/>
+          </a:effectRef>
+          <a:fontRef idx="minor">
+            <a:schemeClr val="lt1"/>
+          </a:fontRef>
+        </p:style>
+        <p:txBody>
+          <a:bodyPr rtlCol="0" anchor="ctr"/>
+          <a:lstStyle/>
+          <a:p>
+            <a:pPr algn="ctr"/>
+          </a:p>
+        </p:txBody>
+      </p:sp>
+      <p:pic>
+        <p:nvPicPr>
+          <p:cNvPr id="4" name="Picture 3" descr="logo-kemendikdasmen.png"/>
+          <p:cNvPicPr>
+            <a:picLocks noChangeAspect="1"/>
+          </p:cNvPicPr>
+          <p:nvPr/>
+        </p:nvPicPr>
+        <p:blipFill>
+          <a:blip r:embed="rId2"/>
+          <a:stretch>
+            <a:fillRect/>
+          </a:stretch>
+        </p:blipFill>
+        <p:spPr>
+          <a:xfrm>
+            <a:off x="109728" y="91440"/>
+            <a:ext cx="1707475" cy="530352"/>
+          </a:xfrm>
+          <a:prstGeom prst="rect">
+            <a:avLst/>
+          </a:prstGeom>
+        </p:spPr>
+      </p:pic>
+      <p:pic>
+        <p:nvPicPr>
+          <p:cNvPr id="5" name="Picture 4" descr="logo-lks-dikmen.png"/>
+          <p:cNvPicPr>
+            <a:picLocks noChangeAspect="1"/>
+          </p:cNvPicPr>
+          <p:nvPr/>
+        </p:nvPicPr>
+        <p:blipFill>
+          <a:blip r:embed="rId3"/>
+          <a:stretch>
+            <a:fillRect/>
+          </a:stretch>
+        </p:blipFill>
+        <p:spPr>
+          <a:xfrm>
+            <a:off x="7973568" y="54864"/>
+            <a:ext cx="621792" cy="621792"/>
+          </a:xfrm>
+          <a:prstGeom prst="rect">
+            <a:avLst/>
+          </a:prstGeom>
+        </p:spPr>
+      </p:pic>
+      <p:sp>
+        <p:nvSpPr>
+          <p:cNvPr id="6" name="TextBox 5"/>
+          <p:cNvSpPr txBox="1"/>
+          <p:nvPr/>
+        </p:nvSpPr>
+        <p:spPr>
+          <a:xfrm>
+            <a:off x="2148840" y="128016"/>
+            <a:ext cx="5486400" cy="566928"/>
+          </a:xfrm>
+          <a:prstGeom prst="rect">
+            <a:avLst/>
+          </a:prstGeom>
+          <a:noFill/>
+        </p:spPr>
+        <p:txBody>
+          <a:bodyPr wrap="square">
+            <a:spAutoFit/>
+          </a:bodyPr>
+          <a:lstStyle/>
+          <a:p>
+            <a:pPr algn="ctr">
+              <a:spcAft>
+                <a:spcPts val="600"/>
+              </a:spcAft>
+              <a:defRPr sz="1700" b="1">
+                <a:solidFill>
+                  <a:srgbClr val="FFFFFF"/>
+                </a:solidFill>
+              </a:defRPr>
+            </a:pPr>
+            <a:r>
+              <a:t>Contoh baris Modul E (setelah Undian terisi)</a:t>
+            </a:r>
+          </a:p>
+        </p:txBody>
+      </p:sp>
+      <p:sp>
+        <p:nvSpPr>
+          <p:cNvPr id="7" name="Rectangle 6"/>
+          <p:cNvSpPr/>
+          <p:nvPr/>
+        </p:nvSpPr>
+        <p:spPr>
+          <a:xfrm>
+            <a:off x="0" y="6419088"/>
+            <a:ext cx="9144000" cy="365760"/>
+          </a:xfrm>
+          <a:prstGeom prst="rect">
+            <a:avLst/>
+          </a:prstGeom>
+          <a:solidFill>
+            <a:srgbClr val="2E7D32"/>
+          </a:solidFill>
+          <a:ln>
+            <a:noFill/>
+          </a:ln>
+        </p:spPr>
+        <p:style>
+          <a:lnRef idx="1">
+            <a:schemeClr val="accent1"/>
+          </a:lnRef>
+          <a:fillRef idx="3">
+            <a:schemeClr val="accent1"/>
+          </a:fillRef>
+          <a:effectRef idx="2">
+            <a:schemeClr val="accent1"/>
+          </a:effectRef>
+          <a:fontRef idx="minor">
+            <a:schemeClr val="lt1"/>
+          </a:fontRef>
+        </p:style>
+        <p:txBody>
+          <a:bodyPr rtlCol="0" anchor="ctr"/>
+          <a:lstStyle/>
+          <a:p>
+            <a:pPr algn="ctr"/>
+          </a:p>
+        </p:txBody>
+      </p:sp>
+      <p:sp>
+        <p:nvSpPr>
+          <p:cNvPr id="8" name="TextBox 7"/>
+          <p:cNvSpPr txBox="1"/>
+          <p:nvPr/>
+        </p:nvSpPr>
+        <p:spPr>
+          <a:xfrm>
+            <a:off x="228600" y="6455664"/>
+            <a:ext cx="8686800" cy="292608"/>
+          </a:xfrm>
+          <a:prstGeom prst="rect">
+            <a:avLst/>
+          </a:prstGeom>
+          <a:noFill/>
+        </p:spPr>
+        <p:txBody>
+          <a:bodyPr wrap="none">
+            <a:spAutoFit/>
+          </a:bodyPr>
+          <a:lstStyle/>
+          <a:p>
+            <a:pPr algn="ctr">
+              <a:spcAft>
+                <a:spcPts val="0"/>
+              </a:spcAft>
+              <a:defRPr sz="900" b="0">
+                <a:solidFill>
+                  <a:srgbClr val="FFFFFF"/>
+                </a:solidFill>
+              </a:defRPr>
+            </a:pPr>
+            <a:r>
+              <a:t>Slide 17  |  Briefing Juri LKS 2026 — Robot Bergerak Otonom  |  Kemendikdasmen</a:t>
             </a:r>
           </a:p>
         </p:txBody>
@@ -6935,7 +7418,7 @@
                         </a:defRPr>
                       </a:pPr>
                       <a:r>
-                        <a:t>Kubus</a:t>
+                        <a:t>ID</a:t>
                       </a:r>
                     </a:p>
                   </a:txBody>
@@ -6961,7 +7444,7 @@
                         </a:defRPr>
                       </a:pPr>
                       <a:r>
-                        <a:t>Awal</a:t>
+                        <a:t>Posisi Awal</a:t>
                       </a:r>
                     </a:p>
                   </a:txBody>
@@ -6987,7 +7470,7 @@
                         </a:defRPr>
                       </a:pPr>
                       <a:r>
-                        <a:t>Target</a:t>
+                        <a:t>Slot Target</a:t>
                       </a:r>
                     </a:p>
                   </a:txBody>
@@ -7013,7 +7496,7 @@
                         </a:defRPr>
                       </a:pPr>
                       <a:r>
-                        <a:t>Hasil</a:t>
+                        <a:t>OK Awal</a:t>
                       </a:r>
                     </a:p>
                   </a:txBody>
@@ -7039,7 +7522,7 @@
                         </a:defRPr>
                       </a:pPr>
                       <a:r>
-                        <a:t>Skor</a:t>
+                        <a:t>Hasil Run</a:t>
                       </a:r>
                     </a:p>
                   </a:txBody>
@@ -7089,7 +7572,7 @@
                         </a:defRPr>
                       </a:pPr>
                       <a:r>
-                        <a:t>Stand A</a:t>
+                        <a:t>Stand A — depan</a:t>
                       </a:r>
                     </a:p>
                   </a:txBody>
@@ -7111,7 +7594,7 @@
                         </a:defRPr>
                       </a:pPr>
                       <a:r>
-                        <a:t>Marker merah</a:t>
+                        <a:t>R1-S1, R2-S2, R3-S3</a:t>
                       </a:r>
                     </a:p>
                   </a:txBody>
@@ -7133,7 +7616,7 @@
                         </a:defRPr>
                       </a:pPr>
                       <a:r>
-                        <a:t>1 Berhasil</a:t>
+                        <a:t>0</a:t>
                       </a:r>
                     </a:p>
                   </a:txBody>
@@ -7155,7 +7638,7 @@
                         </a:defRPr>
                       </a:pPr>
                       <a:r>
-                        <a:t>60/9</a:t>
+                        <a:t>1</a:t>
                       </a:r>
                     </a:p>
                   </a:txBody>
@@ -7201,7 +7684,7 @@
                         </a:defRPr>
                       </a:pPr>
                       <a:r>
-                        <a:t>Stand B</a:t>
+                        <a:t>Stand B — depan</a:t>
                       </a:r>
                     </a:p>
                   </a:txBody>
@@ -7223,7 +7706,7 @@
                         </a:defRPr>
                       </a:pPr>
                       <a:r>
-                        <a:t>Marker hijau</a:t>
+                        <a:t>R1-S2, R2-S3, R3-S1</a:t>
                       </a:r>
                     </a:p>
                   </a:txBody>
@@ -7245,7 +7728,7 @@
                         </a:defRPr>
                       </a:pPr>
                       <a:r>
-                        <a:t>0 Jatuh</a:t>
+                        <a:t>0</a:t>
                       </a:r>
                     </a:p>
                   </a:txBody>
@@ -7291,7 +7774,7 @@
                         </a:defRPr>
                       </a:pPr>
                       <a:r>
-                        <a:t>K-B3</a:t>
+                        <a:t>K-M1</a:t>
                       </a:r>
                     </a:p>
                   </a:txBody>
@@ -7313,7 +7796,7 @@
                         </a:defRPr>
                       </a:pPr>
                       <a:r>
-                        <a:t>Stand C</a:t>
+                        <a:t>Rak 1 — kiri</a:t>
                       </a:r>
                     </a:p>
                   </a:txBody>
@@ -7335,7 +7818,7 @@
                         </a:defRPr>
                       </a:pPr>
                       <a:r>
-                        <a:t>Marker biru</a:t>
+                        <a:t>R1-S1, R2-S2, R3-S3</a:t>
                       </a:r>
                     </a:p>
                   </a:txBody>
@@ -7357,7 +7840,7 @@
                         </a:defRPr>
                       </a:pPr>
                       <a:r>
-                        <a:t>1 Berhasil</a:t>
+                        <a:t>1</a:t>
                       </a:r>
                     </a:p>
                   </a:txBody>
@@ -7379,7 +7862,7 @@
                         </a:defRPr>
                       </a:pPr>
                       <a:r>
-                        <a:t>60/9</a:t>
+                        <a:t>1</a:t>
                       </a:r>
                     </a:p>
                   </a:txBody>
@@ -7398,479 +7881,6 @@
 </p:sld>
 </file>
 
-<file path=ppt/slides/slide17.xml><?xml version="1.0" encoding="utf-8"?>
-<p:sld xmlns:a="http://schemas.openxmlformats.org/drawingml/2006/main" xmlns:p="http://schemas.openxmlformats.org/presentationml/2006/main" xmlns:r="http://schemas.openxmlformats.org/officeDocument/2006/relationships">
-  <p:cSld>
-    <p:spTree>
-      <p:nvGrpSpPr>
-        <p:cNvPr id="1" name=""/>
-        <p:cNvGrpSpPr/>
-        <p:nvPr/>
-      </p:nvGrpSpPr>
-      <p:grpSpPr/>
-      <p:sp>
-        <p:nvSpPr>
-          <p:cNvPr id="2" name="Rectangle 1"/>
-          <p:cNvSpPr/>
-          <p:nvPr/>
-        </p:nvSpPr>
-        <p:spPr>
-          <a:xfrm>
-            <a:off x="0" y="0"/>
-            <a:ext cx="9144000" cy="841248"/>
-          </a:xfrm>
-          <a:prstGeom prst="rect">
-            <a:avLst/>
-          </a:prstGeom>
-          <a:solidFill>
-            <a:srgbClr val="1F4E79"/>
-          </a:solidFill>
-          <a:ln>
-            <a:noFill/>
-          </a:ln>
-        </p:spPr>
-        <p:style>
-          <a:lnRef idx="1">
-            <a:schemeClr val="accent1"/>
-          </a:lnRef>
-          <a:fillRef idx="3">
-            <a:schemeClr val="accent1"/>
-          </a:fillRef>
-          <a:effectRef idx="2">
-            <a:schemeClr val="accent1"/>
-          </a:effectRef>
-          <a:fontRef idx="minor">
-            <a:schemeClr val="lt1"/>
-          </a:fontRef>
-        </p:style>
-        <p:txBody>
-          <a:bodyPr rtlCol="0" anchor="ctr"/>
-          <a:lstStyle/>
-          <a:p>
-            <a:pPr algn="ctr"/>
-          </a:p>
-        </p:txBody>
-      </p:sp>
-      <p:sp>
-        <p:nvSpPr>
-          <p:cNvPr id="3" name="Rectangle 2"/>
-          <p:cNvSpPr/>
-          <p:nvPr/>
-        </p:nvSpPr>
-        <p:spPr>
-          <a:xfrm>
-            <a:off x="0" y="841248"/>
-            <a:ext cx="9144000" cy="45720"/>
-          </a:xfrm>
-          <a:prstGeom prst="rect">
-            <a:avLst/>
-          </a:prstGeom>
-          <a:solidFill>
-            <a:srgbClr val="ED7D31"/>
-          </a:solidFill>
-          <a:ln>
-            <a:noFill/>
-          </a:ln>
-        </p:spPr>
-        <p:style>
-          <a:lnRef idx="1">
-            <a:schemeClr val="accent1"/>
-          </a:lnRef>
-          <a:fillRef idx="3">
-            <a:schemeClr val="accent1"/>
-          </a:fillRef>
-          <a:effectRef idx="2">
-            <a:schemeClr val="accent1"/>
-          </a:effectRef>
-          <a:fontRef idx="minor">
-            <a:schemeClr val="lt1"/>
-          </a:fontRef>
-        </p:style>
-        <p:txBody>
-          <a:bodyPr rtlCol="0" anchor="ctr"/>
-          <a:lstStyle/>
-          <a:p>
-            <a:pPr algn="ctr"/>
-          </a:p>
-        </p:txBody>
-      </p:sp>
-      <p:pic>
-        <p:nvPicPr>
-          <p:cNvPr id="4" name="Picture 3" descr="logo-kemendikdasmen.png"/>
-          <p:cNvPicPr>
-            <a:picLocks noChangeAspect="1"/>
-          </p:cNvPicPr>
-          <p:nvPr/>
-        </p:nvPicPr>
-        <p:blipFill>
-          <a:blip r:embed="rId2"/>
-          <a:stretch>
-            <a:fillRect/>
-          </a:stretch>
-        </p:blipFill>
-        <p:spPr>
-          <a:xfrm>
-            <a:off x="109728" y="91440"/>
-            <a:ext cx="1707475" cy="530352"/>
-          </a:xfrm>
-          <a:prstGeom prst="rect">
-            <a:avLst/>
-          </a:prstGeom>
-        </p:spPr>
-      </p:pic>
-      <p:pic>
-        <p:nvPicPr>
-          <p:cNvPr id="5" name="Picture 4" descr="logo-lks-dikmen.png"/>
-          <p:cNvPicPr>
-            <a:picLocks noChangeAspect="1"/>
-          </p:cNvPicPr>
-          <p:nvPr/>
-        </p:nvPicPr>
-        <p:blipFill>
-          <a:blip r:embed="rId3"/>
-          <a:stretch>
-            <a:fillRect/>
-          </a:stretch>
-        </p:blipFill>
-        <p:spPr>
-          <a:xfrm>
-            <a:off x="7973568" y="54864"/>
-            <a:ext cx="621792" cy="621792"/>
-          </a:xfrm>
-          <a:prstGeom prst="rect">
-            <a:avLst/>
-          </a:prstGeom>
-        </p:spPr>
-      </p:pic>
-      <p:sp>
-        <p:nvSpPr>
-          <p:cNvPr id="6" name="TextBox 5"/>
-          <p:cNvSpPr txBox="1"/>
-          <p:nvPr/>
-        </p:nvSpPr>
-        <p:spPr>
-          <a:xfrm>
-            <a:off x="2148840" y="128016"/>
-            <a:ext cx="5486400" cy="566928"/>
-          </a:xfrm>
-          <a:prstGeom prst="rect">
-            <a:avLst/>
-          </a:prstGeom>
-          <a:noFill/>
-        </p:spPr>
-        <p:txBody>
-          <a:bodyPr wrap="square">
-            <a:spAutoFit/>
-          </a:bodyPr>
-          <a:lstStyle/>
-          <a:p>
-            <a:pPr algn="ctr">
-              <a:spcAft>
-                <a:spcPts val="600"/>
-              </a:spcAft>
-              <a:defRPr sz="1700" b="1">
-                <a:solidFill>
-                  <a:srgbClr val="FFFFFF"/>
-                </a:solidFill>
-              </a:defRPr>
-            </a:pPr>
-            <a:r>
-              <a:t>Demo Modul E — Langkah 7/8</a:t>
-            </a:r>
-          </a:p>
-        </p:txBody>
-      </p:sp>
-      <p:sp>
-        <p:nvSpPr>
-          <p:cNvPr id="7" name="Rectangle 6"/>
-          <p:cNvSpPr/>
-          <p:nvPr/>
-        </p:nvSpPr>
-        <p:spPr>
-          <a:xfrm>
-            <a:off x="0" y="6419088"/>
-            <a:ext cx="9144000" cy="365760"/>
-          </a:xfrm>
-          <a:prstGeom prst="rect">
-            <a:avLst/>
-          </a:prstGeom>
-          <a:solidFill>
-            <a:srgbClr val="2E7D32"/>
-          </a:solidFill>
-          <a:ln>
-            <a:noFill/>
-          </a:ln>
-        </p:spPr>
-        <p:style>
-          <a:lnRef idx="1">
-            <a:schemeClr val="accent1"/>
-          </a:lnRef>
-          <a:fillRef idx="3">
-            <a:schemeClr val="accent1"/>
-          </a:fillRef>
-          <a:effectRef idx="2">
-            <a:schemeClr val="accent1"/>
-          </a:effectRef>
-          <a:fontRef idx="minor">
-            <a:schemeClr val="lt1"/>
-          </a:fontRef>
-        </p:style>
-        <p:txBody>
-          <a:bodyPr rtlCol="0" anchor="ctr"/>
-          <a:lstStyle/>
-          <a:p>
-            <a:pPr algn="ctr"/>
-          </a:p>
-        </p:txBody>
-      </p:sp>
-      <p:sp>
-        <p:nvSpPr>
-          <p:cNvPr id="8" name="TextBox 7"/>
-          <p:cNvSpPr txBox="1"/>
-          <p:nvPr/>
-        </p:nvSpPr>
-        <p:spPr>
-          <a:xfrm>
-            <a:off x="228600" y="6455664"/>
-            <a:ext cx="8686800" cy="292608"/>
-          </a:xfrm>
-          <a:prstGeom prst="rect">
-            <a:avLst/>
-          </a:prstGeom>
-          <a:noFill/>
-        </p:spPr>
-        <p:txBody>
-          <a:bodyPr wrap="none">
-            <a:spAutoFit/>
-          </a:bodyPr>
-          <a:lstStyle/>
-          <a:p>
-            <a:pPr algn="ctr">
-              <a:spcAft>
-                <a:spcPts val="0"/>
-              </a:spcAft>
-              <a:defRPr sz="900" b="0">
-                <a:solidFill>
-                  <a:srgbClr val="FFFFFF"/>
-                </a:solidFill>
-              </a:defRPr>
-            </a:pPr>
-            <a:r>
-              <a:t>Slide 17  |  Briefing Juri LKS 2026 — Robot Bergerak Otonom  |  Kemendikdasmen</a:t>
-            </a:r>
-          </a:p>
-        </p:txBody>
-      </p:sp>
-      <p:sp>
-        <p:nvSpPr>
-          <p:cNvPr id="9" name="Rectangle 8"/>
-          <p:cNvSpPr/>
-          <p:nvPr/>
-        </p:nvSpPr>
-        <p:spPr>
-          <a:xfrm>
-            <a:off x="411480" y="960120"/>
-            <a:ext cx="502920" cy="502920"/>
-          </a:xfrm>
-          <a:prstGeom prst="rect">
-            <a:avLst/>
-          </a:prstGeom>
-          <a:solidFill>
-            <a:srgbClr val="ED7D31"/>
-          </a:solidFill>
-          <a:ln>
-            <a:noFill/>
-          </a:ln>
-        </p:spPr>
-        <p:style>
-          <a:lnRef idx="1">
-            <a:schemeClr val="accent1"/>
-          </a:lnRef>
-          <a:fillRef idx="3">
-            <a:schemeClr val="accent1"/>
-          </a:fillRef>
-          <a:effectRef idx="2">
-            <a:schemeClr val="accent1"/>
-          </a:effectRef>
-          <a:fontRef idx="minor">
-            <a:schemeClr val="lt1"/>
-          </a:fontRef>
-        </p:style>
-        <p:txBody>
-          <a:bodyPr rtlCol="0" anchor="ctr"/>
-          <a:lstStyle/>
-          <a:p>
-            <a:pPr algn="ctr"/>
-          </a:p>
-        </p:txBody>
-      </p:sp>
-      <p:sp>
-        <p:nvSpPr>
-          <p:cNvPr id="10" name="TextBox 9"/>
-          <p:cNvSpPr txBox="1"/>
-          <p:nvPr/>
-        </p:nvSpPr>
-        <p:spPr>
-          <a:xfrm>
-            <a:off x="411480" y="1014984"/>
-            <a:ext cx="502920" cy="411480"/>
-          </a:xfrm>
-          <a:prstGeom prst="rect">
-            <a:avLst/>
-          </a:prstGeom>
-          <a:noFill/>
-        </p:spPr>
-        <p:txBody>
-          <a:bodyPr wrap="none">
-            <a:spAutoFit/>
-          </a:bodyPr>
-          <a:lstStyle/>
-          <a:p>
-            <a:pPr algn="ctr">
-              <a:spcAft>
-                <a:spcPts val="0"/>
-              </a:spcAft>
-              <a:defRPr sz="2000" b="1">
-                <a:solidFill>
-                  <a:srgbClr val="FFFFFF"/>
-                </a:solidFill>
-              </a:defRPr>
-            </a:pPr>
-            <a:r>
-              <a:t>7</a:t>
-            </a:r>
-          </a:p>
-        </p:txBody>
-      </p:sp>
-      <p:sp>
-        <p:nvSpPr>
-          <p:cNvPr id="11" name="TextBox 10"/>
-          <p:cNvSpPr txBox="1"/>
-          <p:nvPr/>
-        </p:nvSpPr>
-        <p:spPr>
-          <a:xfrm>
-            <a:off x="1051560" y="941832"/>
-            <a:ext cx="7589520" cy="502920"/>
-          </a:xfrm>
-          <a:prstGeom prst="rect">
-            <a:avLst/>
-          </a:prstGeom>
-          <a:noFill/>
-        </p:spPr>
-        <p:txBody>
-          <a:bodyPr wrap="none">
-            <a:spAutoFit/>
-          </a:bodyPr>
-          <a:lstStyle/>
-          <a:p>
-            <a:pPr>
-              <a:spcAft>
-                <a:spcPts val="0"/>
-              </a:spcAft>
-              <a:defRPr sz="2200" b="1">
-                <a:solidFill>
-                  <a:srgbClr val="1F4E79"/>
-                </a:solidFill>
-              </a:defRPr>
-            </a:pPr>
-            <a:r>
-              <a:t>Prosedur RETRY</a:t>
-            </a:r>
-          </a:p>
-        </p:txBody>
-      </p:sp>
-      <p:sp>
-        <p:nvSpPr>
-          <p:cNvPr id="12" name="TextBox 11"/>
-          <p:cNvSpPr txBox="1"/>
-          <p:nvPr/>
-        </p:nvSpPr>
-        <p:spPr>
-          <a:xfrm>
-            <a:off x="457200" y="1554480"/>
-            <a:ext cx="8229600" cy="4663440"/>
-          </a:xfrm>
-          <a:prstGeom prst="rect">
-            <a:avLst/>
-          </a:prstGeom>
-          <a:noFill/>
-        </p:spPr>
-        <p:txBody>
-          <a:bodyPr wrap="square" anchor="t">
-            <a:spAutoFit/>
-          </a:bodyPr>
-          <a:lstStyle/>
-          <a:p>
-            <a:pPr>
-              <a:spcAft>
-                <a:spcPts val="1200"/>
-              </a:spcAft>
-              <a:defRPr sz="1700" b="0">
-                <a:solidFill>
-                  <a:srgbClr val="333333"/>
-                </a:solidFill>
-              </a:defRPr>
-            </a:pPr>
-            <a:r>
-              <a:t>Peserta boleh minta RETRY dan ubah program</a:t>
-            </a:r>
-          </a:p>
-          <a:p>
-            <a:pPr>
-              <a:spcAft>
-                <a:spcPts val="1200"/>
-              </a:spcAft>
-              <a:defRPr sz="1700" b="0">
-                <a:solidFill>
-                  <a:srgbClr val="333333"/>
-                </a:solidFill>
-              </a:defRPr>
-            </a:pPr>
-            <a:r>
-              <a:t>Kubus di robot dikeluarkan ke luar arena</a:t>
-            </a:r>
-          </a:p>
-          <a:p>
-            <a:pPr>
-              <a:spcAft>
-                <a:spcPts val="1200"/>
-              </a:spcAft>
-              <a:defRPr sz="1700" b="0">
-                <a:solidFill>
-                  <a:srgbClr val="333333"/>
-                </a:solidFill>
-              </a:defRPr>
-            </a:pPr>
-            <a:r>
-              <a:t>Posisi kubus tidak dikembalikan ke awal</a:t>
-            </a:r>
-          </a:p>
-          <a:p>
-            <a:pPr>
-              <a:spcAft>
-                <a:spcPts val="1200"/>
-              </a:spcAft>
-              <a:defRPr sz="1700" b="0">
-                <a:solidFill>
-                  <a:srgbClr val="333333"/>
-                </a:solidFill>
-              </a:defRPr>
-            </a:pPr>
-            <a:r>
-              <a:t>SIAP lagi → acak ulang → START baru</a:t>
-            </a:r>
-          </a:p>
-        </p:txBody>
-      </p:sp>
-    </p:spTree>
-  </p:cSld>
-  <p:clrMapOvr>
-    <a:masterClrMapping/>
-  </p:clrMapOvr>
-</p:sld>
-</file>
-
 <file path=ppt/slides/slide18.xml><?xml version="1.0" encoding="utf-8"?>
 <p:sld xmlns:a="http://schemas.openxmlformats.org/drawingml/2006/main" xmlns:p="http://schemas.openxmlformats.org/presentationml/2006/main" xmlns:r="http://schemas.openxmlformats.org/officeDocument/2006/relationships">
   <p:cSld>
@@ -8048,7 +8058,7 @@
               </a:defRPr>
             </a:pPr>
             <a:r>
-              <a:t>Demo Modul E — Langkah 8/8</a:t>
+              <a:t>Demo Modul E — Langkah 7/8</a:t>
             </a:r>
           </a:p>
         </p:txBody>
@@ -8210,7 +8220,7 @@
               </a:defRPr>
             </a:pPr>
             <a:r>
-              <a:t>8</a:t>
+              <a:t>7</a:t>
             </a:r>
           </a:p>
         </p:txBody>
@@ -8248,7 +8258,7 @@
               </a:defRPr>
             </a:pPr>
             <a:r>
-              <a:t>Rekap &amp; CIS</a:t>
+              <a:t>Prosedur RETRY</a:t>
             </a:r>
           </a:p>
         </p:txBody>
@@ -8286,7 +8296,7 @@
               </a:defRPr>
             </a:pPr>
             <a:r>
-              <a:t>Periksa sheet Rekapitulasi di Excel</a:t>
+              <a:t>Peserta boleh minta RETRY dan ubah program</a:t>
             </a:r>
           </a:p>
           <a:p>
@@ -8301,7 +8311,7 @@
               </a:defRPr>
             </a:pPr>
             <a:r>
-              <a:t>Chief Expert review pelanggaran &amp; outlier</a:t>
+              <a:t>Kubus di robot dikeluarkan ke luar arena</a:t>
             </a:r>
           </a:p>
           <a:p>
@@ -8316,7 +8326,7 @@
               </a:defRPr>
             </a:pPr>
             <a:r>
-              <a:t>Input skor resmi ke CIS</a:t>
+              <a:t>Posisi kubus tidak dikembalikan ke awal</a:t>
             </a:r>
           </a:p>
           <a:p>
@@ -8331,7 +8341,7 @@
               </a:defRPr>
             </a:pPr>
             <a:r>
-              <a:t>Penentuan juara &amp; Medallion of Excellence</a:t>
+              <a:t>SIAP lagi → acak ulang → START baru</a:t>
             </a:r>
           </a:p>
         </p:txBody>
@@ -8521,7 +8531,7 @@
               </a:defRPr>
             </a:pPr>
             <a:r>
-              <a:t>Latihan bersama juri</a:t>
+              <a:t>Demo Modul E — Langkah 8/8</a:t>
             </a:r>
           </a:p>
         </p:txBody>
@@ -8609,14 +8619,133 @@
       </p:sp>
       <p:sp>
         <p:nvSpPr>
-          <p:cNvPr id="9" name="TextBox 8"/>
+          <p:cNvPr id="9" name="Rectangle 8"/>
+          <p:cNvSpPr/>
+          <p:nvPr/>
+        </p:nvSpPr>
+        <p:spPr>
+          <a:xfrm>
+            <a:off x="411480" y="960120"/>
+            <a:ext cx="502920" cy="502920"/>
+          </a:xfrm>
+          <a:prstGeom prst="rect">
+            <a:avLst/>
+          </a:prstGeom>
+          <a:solidFill>
+            <a:srgbClr val="ED7D31"/>
+          </a:solidFill>
+          <a:ln>
+            <a:noFill/>
+          </a:ln>
+        </p:spPr>
+        <p:style>
+          <a:lnRef idx="1">
+            <a:schemeClr val="accent1"/>
+          </a:lnRef>
+          <a:fillRef idx="3">
+            <a:schemeClr val="accent1"/>
+          </a:fillRef>
+          <a:effectRef idx="2">
+            <a:schemeClr val="accent1"/>
+          </a:effectRef>
+          <a:fontRef idx="minor">
+            <a:schemeClr val="lt1"/>
+          </a:fontRef>
+        </p:style>
+        <p:txBody>
+          <a:bodyPr rtlCol="0" anchor="ctr"/>
+          <a:lstStyle/>
+          <a:p>
+            <a:pPr algn="ctr"/>
+          </a:p>
+        </p:txBody>
+      </p:sp>
+      <p:sp>
+        <p:nvSpPr>
+          <p:cNvPr id="10" name="TextBox 9"/>
           <p:cNvSpPr txBox="1"/>
           <p:nvPr/>
         </p:nvSpPr>
         <p:spPr>
           <a:xfrm>
-            <a:off x="457200" y="960120"/>
-            <a:ext cx="8229600" cy="5257800"/>
+            <a:off x="411480" y="1014984"/>
+            <a:ext cx="502920" cy="411480"/>
+          </a:xfrm>
+          <a:prstGeom prst="rect">
+            <a:avLst/>
+          </a:prstGeom>
+          <a:noFill/>
+        </p:spPr>
+        <p:txBody>
+          <a:bodyPr wrap="none">
+            <a:spAutoFit/>
+          </a:bodyPr>
+          <a:lstStyle/>
+          <a:p>
+            <a:pPr algn="ctr">
+              <a:spcAft>
+                <a:spcPts val="0"/>
+              </a:spcAft>
+              <a:defRPr sz="2000" b="1">
+                <a:solidFill>
+                  <a:srgbClr val="FFFFFF"/>
+                </a:solidFill>
+              </a:defRPr>
+            </a:pPr>
+            <a:r>
+              <a:t>8</a:t>
+            </a:r>
+          </a:p>
+        </p:txBody>
+      </p:sp>
+      <p:sp>
+        <p:nvSpPr>
+          <p:cNvPr id="11" name="TextBox 10"/>
+          <p:cNvSpPr txBox="1"/>
+          <p:nvPr/>
+        </p:nvSpPr>
+        <p:spPr>
+          <a:xfrm>
+            <a:off x="1051560" y="941832"/>
+            <a:ext cx="7589520" cy="502920"/>
+          </a:xfrm>
+          <a:prstGeom prst="rect">
+            <a:avLst/>
+          </a:prstGeom>
+          <a:noFill/>
+        </p:spPr>
+        <p:txBody>
+          <a:bodyPr wrap="none">
+            <a:spAutoFit/>
+          </a:bodyPr>
+          <a:lstStyle/>
+          <a:p>
+            <a:pPr>
+              <a:spcAft>
+                <a:spcPts val="0"/>
+              </a:spcAft>
+              <a:defRPr sz="2200" b="1">
+                <a:solidFill>
+                  <a:srgbClr val="1F4E79"/>
+                </a:solidFill>
+              </a:defRPr>
+            </a:pPr>
+            <a:r>
+              <a:t>Rekap &amp; CIS</a:t>
+            </a:r>
+          </a:p>
+        </p:txBody>
+      </p:sp>
+      <p:sp>
+        <p:nvSpPr>
+          <p:cNvPr id="12" name="TextBox 11"/>
+          <p:cNvSpPr txBox="1"/>
+          <p:nvPr/>
+        </p:nvSpPr>
+        <p:spPr>
+          <a:xfrm>
+            <a:off x="457200" y="1554480"/>
+            <a:ext cx="8229600" cy="4663440"/>
           </a:xfrm>
           <a:prstGeom prst="rect">
             <a:avLst/>
@@ -8631,7 +8760,7 @@
           <a:p>
             <a:pPr>
               <a:spcAft>
-                <a:spcPts val="1000"/>
+                <a:spcPts val="1200"/>
               </a:spcAft>
               <a:defRPr sz="1700" b="0">
                 <a:solidFill>
@@ -8640,13 +8769,13 @@
               </a:defRPr>
             </a:pPr>
             <a:r>
-              <a:t>Buka docs/SKENARIO-SOAL-CONTOH.md (Tim 05)</a:t>
+              <a:t>Periksa sheet Rekapitulasi di Excel</a:t>
             </a:r>
           </a:p>
           <a:p>
             <a:pPr>
               <a:spcAft>
-                <a:spcPts val="1000"/>
+                <a:spcPts val="1200"/>
               </a:spcAft>
               <a:defRPr sz="1700" b="0">
                 <a:solidFill>
@@ -8655,13 +8784,13 @@
               </a:defRPr>
             </a:pPr>
             <a:r>
-              <a:t>Praktikkan: SIAP → acak → START → isi Modul E</a:t>
+              <a:t>Chief Expert review pelanggaran &amp; outlier</a:t>
             </a:r>
           </a:p>
           <a:p>
             <a:pPr>
               <a:spcAft>
-                <a:spcPts val="1000"/>
+                <a:spcPts val="1200"/>
               </a:spcAft>
               <a:defRPr sz="1700" b="0">
                 <a:solidFill>
@@ -8670,13 +8799,13 @@
               </a:defRPr>
             </a:pPr>
             <a:r>
-              <a:t>Simulasikan RETRY dan pelanggaran</a:t>
+              <a:t>Input skor resmi ke CIS</a:t>
             </a:r>
           </a:p>
           <a:p>
             <a:pPr>
               <a:spcAft>
-                <a:spcPts val="1000"/>
+                <a:spcPts val="1200"/>
               </a:spcAft>
               <a:defRPr sz="1700" b="0">
                 <a:solidFill>
@@ -8685,7 +8814,7 @@
               </a:defRPr>
             </a:pPr>
             <a:r>
-              <a:t>Diskusi dengan CE: konflik slot &amp; bobot CIS</a:t>
+              <a:t>Penentuan juara &amp; Medallion of Excellence</a:t>
             </a:r>
           </a:p>
         </p:txBody>
@@ -9228,7 +9357,45 @@
       </p:pic>
       <p:sp>
         <p:nvSpPr>
-          <p:cNvPr id="6" name="Rectangle 5"/>
+          <p:cNvPr id="6" name="TextBox 5"/>
+          <p:cNvSpPr txBox="1"/>
+          <p:nvPr/>
+        </p:nvSpPr>
+        <p:spPr>
+          <a:xfrm>
+            <a:off x="2148840" y="128016"/>
+            <a:ext cx="5486400" cy="566928"/>
+          </a:xfrm>
+          <a:prstGeom prst="rect">
+            <a:avLst/>
+          </a:prstGeom>
+          <a:noFill/>
+        </p:spPr>
+        <p:txBody>
+          <a:bodyPr wrap="square">
+            <a:spAutoFit/>
+          </a:bodyPr>
+          <a:lstStyle/>
+          <a:p>
+            <a:pPr algn="ctr">
+              <a:spcAft>
+                <a:spcPts val="600"/>
+              </a:spcAft>
+              <a:defRPr sz="1700" b="1">
+                <a:solidFill>
+                  <a:srgbClr val="FFFFFF"/>
+                </a:solidFill>
+              </a:defRPr>
+            </a:pPr>
+            <a:r>
+              <a:t>Latihan bersama juri</a:t>
+            </a:r>
+          </a:p>
+        </p:txBody>
+      </p:sp>
+      <p:sp>
+        <p:nvSpPr>
+          <p:cNvPr id="7" name="Rectangle 6"/>
           <p:cNvSpPr/>
           <p:nvPr/>
         </p:nvSpPr>
@@ -9271,7 +9438,7 @@
       </p:sp>
       <p:sp>
         <p:nvSpPr>
-          <p:cNvPr id="7" name="TextBox 6"/>
+          <p:cNvPr id="8" name="TextBox 7"/>
           <p:cNvSpPr txBox="1"/>
           <p:nvPr/>
         </p:nvSpPr>
@@ -9309,57 +9476,14 @@
       </p:sp>
       <p:sp>
         <p:nvSpPr>
-          <p:cNvPr id="8" name="Rectangle 7"/>
-          <p:cNvSpPr/>
-          <p:nvPr/>
-        </p:nvSpPr>
-        <p:spPr>
-          <a:xfrm>
-            <a:off x="640080" y="2286000"/>
-            <a:ext cx="7863840" cy="1828800"/>
-          </a:xfrm>
-          <a:prstGeom prst="rect">
-            <a:avLst/>
-          </a:prstGeom>
-          <a:solidFill>
-            <a:srgbClr val="1F4E79"/>
-          </a:solidFill>
-          <a:ln>
-            <a:noFill/>
-          </a:ln>
-        </p:spPr>
-        <p:style>
-          <a:lnRef idx="1">
-            <a:schemeClr val="accent1"/>
-          </a:lnRef>
-          <a:fillRef idx="3">
-            <a:schemeClr val="accent1"/>
-          </a:fillRef>
-          <a:effectRef idx="2">
-            <a:schemeClr val="accent1"/>
-          </a:effectRef>
-          <a:fontRef idx="minor">
-            <a:schemeClr val="lt1"/>
-          </a:fontRef>
-        </p:style>
-        <p:txBody>
-          <a:bodyPr rtlCol="0" anchor="ctr"/>
-          <a:lstStyle/>
-          <a:p>
-            <a:pPr algn="ctr"/>
-          </a:p>
-        </p:txBody>
-      </p:sp>
-      <p:sp>
-        <p:nvSpPr>
           <p:cNvPr id="9" name="TextBox 8"/>
           <p:cNvSpPr txBox="1"/>
           <p:nvPr/>
         </p:nvSpPr>
         <p:spPr>
           <a:xfrm>
-            <a:off x="914400" y="2514600"/>
-            <a:ext cx="7315200" cy="1645920"/>
+            <a:off x="457200" y="960120"/>
+            <a:ext cx="8229600" cy="5257800"/>
           </a:xfrm>
           <a:prstGeom prst="rect">
             <a:avLst/>
@@ -9367,38 +9491,68 @@
           <a:noFill/>
         </p:spPr>
         <p:txBody>
-          <a:bodyPr wrap="square">
+          <a:bodyPr wrap="square" anchor="t">
             <a:spAutoFit/>
           </a:bodyPr>
           <a:lstStyle/>
           <a:p>
-            <a:pPr algn="ctr">
-              <a:spcAft>
-                <a:spcPts val="600"/>
-              </a:spcAft>
-              <a:defRPr sz="2800" b="1">
-                <a:solidFill>
-                  <a:srgbClr val="FFFFFF"/>
-                </a:solidFill>
-              </a:defRPr>
-            </a:pPr>
-            <a:r>
-              <a:t>Bagian 3</a:t>
-            </a:r>
-          </a:p>
-          <a:p>
-            <a:pPr algn="ctr">
-              <a:spcAft>
-                <a:spcPts val="0"/>
-              </a:spcAft>
-              <a:defRPr sz="1600" b="0">
-                <a:solidFill>
-                  <a:srgbClr val="ED7D31"/>
-                </a:solidFill>
-              </a:defRPr>
-            </a:pPr>
-            <a:r>
-              <a:t>Ringkasan Modul D, Arena &amp; K3</a:t>
+            <a:pPr>
+              <a:spcAft>
+                <a:spcPts val="1000"/>
+              </a:spcAft>
+              <a:defRPr sz="1700" b="0">
+                <a:solidFill>
+                  <a:srgbClr val="333333"/>
+                </a:solidFill>
+              </a:defRPr>
+            </a:pPr>
+            <a:r>
+              <a:t>Buka templates/LKS2026-Penilaian-Juri-CONTOH.xlsx (contoh terisi)</a:t>
+            </a:r>
+          </a:p>
+          <a:p>
+            <a:pPr>
+              <a:spcAft>
+                <a:spcPts val="1000"/>
+              </a:spcAft>
+              <a:defRPr sz="1700" b="0">
+                <a:solidFill>
+                  <a:srgbClr val="333333"/>
+                </a:solidFill>
+              </a:defRPr>
+            </a:pPr>
+            <a:r>
+              <a:t>Baca docs/CONTOH-EXCEL-MODUL-E.md dan SKENARIO-SOAL-CONTOH.md</a:t>
+            </a:r>
+          </a:p>
+          <a:p>
+            <a:pPr>
+              <a:spcAft>
+                <a:spcPts val="1000"/>
+              </a:spcAft>
+              <a:defRPr sz="1700" b="0">
+                <a:solidFill>
+                  <a:srgbClr val="333333"/>
+                </a:solidFill>
+              </a:defRPr>
+            </a:pPr>
+            <a:r>
+              <a:t>Praktikkan: isi Undian → cek Modul E → isi Hasil Run</a:t>
+            </a:r>
+          </a:p>
+          <a:p>
+            <a:pPr>
+              <a:spcAft>
+                <a:spcPts val="1000"/>
+              </a:spcAft>
+              <a:defRPr sz="1700" b="0">
+                <a:solidFill>
+                  <a:srgbClr val="333333"/>
+                </a:solidFill>
+              </a:defRPr>
+            </a:pPr>
+            <a:r>
+              <a:t>Simulasikan RETRY dan pelanggaran SIAP/START</a:t>
             </a:r>
           </a:p>
         </p:txBody>
@@ -9557,45 +9711,7 @@
       </p:pic>
       <p:sp>
         <p:nvSpPr>
-          <p:cNvPr id="6" name="TextBox 5"/>
-          <p:cNvSpPr txBox="1"/>
-          <p:nvPr/>
-        </p:nvSpPr>
-        <p:spPr>
-          <a:xfrm>
-            <a:off x="2148840" y="128016"/>
-            <a:ext cx="5486400" cy="566928"/>
-          </a:xfrm>
-          <a:prstGeom prst="rect">
-            <a:avLst/>
-          </a:prstGeom>
-          <a:noFill/>
-        </p:spPr>
-        <p:txBody>
-          <a:bodyPr wrap="square">
-            <a:spAutoFit/>
-          </a:bodyPr>
-          <a:lstStyle/>
-          <a:p>
-            <a:pPr algn="ctr">
-              <a:spcAft>
-                <a:spcPts val="600"/>
-              </a:spcAft>
-              <a:defRPr sz="1700" b="1">
-                <a:solidFill>
-                  <a:srgbClr val="FFFFFF"/>
-                </a:solidFill>
-              </a:defRPr>
-            </a:pPr>
-            <a:r>
-              <a:t>Modul D (12 poin, 15 menit/tim)</a:t>
-            </a:r>
-          </a:p>
-        </p:txBody>
-      </p:sp>
-      <p:sp>
-        <p:nvSpPr>
-          <p:cNvPr id="7" name="Rectangle 6"/>
+          <p:cNvPr id="6" name="Rectangle 5"/>
           <p:cNvSpPr/>
           <p:nvPr/>
         </p:nvSpPr>
@@ -9638,7 +9754,7 @@
       </p:sp>
       <p:sp>
         <p:nvSpPr>
-          <p:cNvPr id="8" name="TextBox 7"/>
+          <p:cNvPr id="7" name="TextBox 6"/>
           <p:cNvSpPr txBox="1"/>
           <p:nvPr/>
         </p:nvSpPr>
@@ -9676,14 +9792,57 @@
       </p:sp>
       <p:sp>
         <p:nvSpPr>
+          <p:cNvPr id="8" name="Rectangle 7"/>
+          <p:cNvSpPr/>
+          <p:nvPr/>
+        </p:nvSpPr>
+        <p:spPr>
+          <a:xfrm>
+            <a:off x="640080" y="2286000"/>
+            <a:ext cx="7863840" cy="1828800"/>
+          </a:xfrm>
+          <a:prstGeom prst="rect">
+            <a:avLst/>
+          </a:prstGeom>
+          <a:solidFill>
+            <a:srgbClr val="1F4E79"/>
+          </a:solidFill>
+          <a:ln>
+            <a:noFill/>
+          </a:ln>
+        </p:spPr>
+        <p:style>
+          <a:lnRef idx="1">
+            <a:schemeClr val="accent1"/>
+          </a:lnRef>
+          <a:fillRef idx="3">
+            <a:schemeClr val="accent1"/>
+          </a:fillRef>
+          <a:effectRef idx="2">
+            <a:schemeClr val="accent1"/>
+          </a:effectRef>
+          <a:fontRef idx="minor">
+            <a:schemeClr val="lt1"/>
+          </a:fontRef>
+        </p:style>
+        <p:txBody>
+          <a:bodyPr rtlCol="0" anchor="ctr"/>
+          <a:lstStyle/>
+          <a:p>
+            <a:pPr algn="ctr"/>
+          </a:p>
+        </p:txBody>
+      </p:sp>
+      <p:sp>
+        <p:nvSpPr>
           <p:cNvPr id="9" name="TextBox 8"/>
           <p:cNvSpPr txBox="1"/>
           <p:nvPr/>
         </p:nvSpPr>
         <p:spPr>
           <a:xfrm>
-            <a:off x="457200" y="960120"/>
-            <a:ext cx="8229600" cy="5257800"/>
+            <a:off x="914400" y="2514600"/>
+            <a:ext cx="7315200" cy="1645920"/>
           </a:xfrm>
           <a:prstGeom prst="rect">
             <a:avLst/>
@@ -9691,83 +9850,38 @@
           <a:noFill/>
         </p:spPr>
         <p:txBody>
-          <a:bodyPr wrap="square" anchor="t">
+          <a:bodyPr wrap="square">
             <a:spAutoFit/>
           </a:bodyPr>
           <a:lstStyle/>
           <a:p>
-            <a:pPr>
-              <a:spcAft>
-                <a:spcPts val="1000"/>
-              </a:spcAft>
-              <a:defRPr sz="1700" b="0">
-                <a:solidFill>
-                  <a:srgbClr val="333333"/>
-                </a:solidFill>
-              </a:defRPr>
-            </a:pPr>
-            <a:r>
-              <a:t>Gerak 4 arah, deteksi dinding, line follower U</a:t>
-            </a:r>
-          </a:p>
-          <a:p>
-            <a:pPr>
-              <a:spcAft>
-                <a:spcPts val="1000"/>
-              </a:spcAft>
-              <a:defRPr sz="1700" b="0">
-                <a:solidFill>
-                  <a:srgbClr val="333333"/>
-                </a:solidFill>
-              </a:defRPr>
-            </a:pPr>
-            <a:r>
-              <a:t>Deteksi warna: merah, hijau, biru (tampil di monitor)</a:t>
-            </a:r>
-          </a:p>
-          <a:p>
-            <a:pPr>
-              <a:spcAft>
-                <a:spcPts val="1000"/>
-              </a:spcAft>
-              <a:defRPr sz="1700" b="0">
-                <a:solidFill>
-                  <a:srgbClr val="333333"/>
-                </a:solidFill>
-              </a:defRPr>
-            </a:pPr>
-            <a:r>
-              <a:t>Deteksi bentuk: O-merah, O-hijau</a:t>
-            </a:r>
-          </a:p>
-          <a:p>
-            <a:pPr>
-              <a:spcAft>
-                <a:spcPts val="1000"/>
-              </a:spcAft>
-              <a:defRPr sz="1700" b="0">
-                <a:solidFill>
-                  <a:srgbClr val="333333"/>
-                </a:solidFill>
-              </a:defRPr>
-            </a:pPr>
-            <a:r>
-              <a:t>Pick dari rak &amp; place ke stand — otonom</a:t>
-            </a:r>
-          </a:p>
-          <a:p>
-            <a:pPr>
+            <a:pPr algn="ctr">
+              <a:spcAft>
+                <a:spcPts val="600"/>
+              </a:spcAft>
+              <a:defRPr sz="2800" b="1">
+                <a:solidFill>
+                  <a:srgbClr val="FFFFFF"/>
+                </a:solidFill>
+              </a:defRPr>
+            </a:pPr>
+            <a:r>
+              <a:t>Bagian 3</a:t>
+            </a:r>
+          </a:p>
+          <a:p>
+            <a:pPr algn="ctr">
               <a:spcAft>
                 <a:spcPts val="0"/>
               </a:spcAft>
-              <a:defRPr sz="1200" b="0">
+              <a:defRPr sz="1600" b="0">
                 <a:solidFill>
                   <a:srgbClr val="ED7D31"/>
                 </a:solidFill>
               </a:defRPr>
             </a:pPr>
             <a:r>
-              <a:t>Bobot item mentah 12,9 — diskalakan ke 12 di Excel.</a:t>
+              <a:t>Ringkasan Modul D, Arena &amp; K3</a:t>
             </a:r>
           </a:p>
         </p:txBody>
@@ -9957,7 +10071,7 @@
               </a:defRPr>
             </a:pPr>
             <a:r>
-              <a:t>Arena &amp; spesifikasi robot</a:t>
+              <a:t>Modul D (12 poin, 15 menit/tim)</a:t>
             </a:r>
           </a:p>
         </p:txBody>
@@ -10076,7 +10190,7 @@
               </a:defRPr>
             </a:pPr>
             <a:r>
-              <a:t>Arena ±4040×2040 mm | 3 rak | 9 kubus | 10 obstacle | 1 gate</a:t>
+              <a:t>Gerak 4 arah, deteksi dinding, line follower U</a:t>
             </a:r>
           </a:p>
           <a:p>
@@ -10091,7 +10205,7 @@
               </a:defRPr>
             </a:pPr>
             <a:r>
-              <a:t>Controller: Raspberry Pi atau myRIO</a:t>
+              <a:t>Deteksi warna: merah, hijau, biru (tampil di monitor)</a:t>
             </a:r>
           </a:p>
           <a:p>
@@ -10106,7 +10220,7 @@
               </a:defRPr>
             </a:pPr>
             <a:r>
-              <a:t>Python / C++ / LabVIEW | baterai ≤12V</a:t>
+              <a:t>Deteksi bentuk: O-merah, O-hijau</a:t>
             </a:r>
           </a:p>
           <a:p>
@@ -10121,7 +10235,22 @@
               </a:defRPr>
             </a:pPr>
             <a:r>
-              <a:t>Tombol STOP merah wajib | 30% rule di H3</a:t>
+              <a:t>Pick dari rak &amp; place ke stand — otonom</a:t>
+            </a:r>
+          </a:p>
+          <a:p>
+            <a:pPr>
+              <a:spcAft>
+                <a:spcPts val="0"/>
+              </a:spcAft>
+              <a:defRPr sz="1200" b="0">
+                <a:solidFill>
+                  <a:srgbClr val="ED7D31"/>
+                </a:solidFill>
+              </a:defRPr>
+            </a:pPr>
+            <a:r>
+              <a:t>Bobot item mentah 12,9 — diskalakan ke 12 di Excel.</a:t>
             </a:r>
           </a:p>
         </p:txBody>
@@ -10311,7 +10440,7 @@
               </a:defRPr>
             </a:pPr>
             <a:r>
-              <a:t>K3 &amp; klarifikasi ke Chief Expert</a:t>
+              <a:t>Arena &amp; spesifikasi robot</a:t>
             </a:r>
           </a:p>
         </p:txBody>
@@ -10393,6 +10522,360 @@
             </a:pPr>
             <a:r>
               <a:t>Slide 23  |  Briefing Juri LKS 2026 — Robot Bergerak Otonom  |  Kemendikdasmen</a:t>
+            </a:r>
+          </a:p>
+        </p:txBody>
+      </p:sp>
+      <p:sp>
+        <p:nvSpPr>
+          <p:cNvPr id="9" name="TextBox 8"/>
+          <p:cNvSpPr txBox="1"/>
+          <p:nvPr/>
+        </p:nvSpPr>
+        <p:spPr>
+          <a:xfrm>
+            <a:off x="457200" y="960120"/>
+            <a:ext cx="8229600" cy="5257800"/>
+          </a:xfrm>
+          <a:prstGeom prst="rect">
+            <a:avLst/>
+          </a:prstGeom>
+          <a:noFill/>
+        </p:spPr>
+        <p:txBody>
+          <a:bodyPr wrap="square" anchor="t">
+            <a:spAutoFit/>
+          </a:bodyPr>
+          <a:lstStyle/>
+          <a:p>
+            <a:pPr>
+              <a:spcAft>
+                <a:spcPts val="1000"/>
+              </a:spcAft>
+              <a:defRPr sz="1700" b="0">
+                <a:solidFill>
+                  <a:srgbClr val="333333"/>
+                </a:solidFill>
+              </a:defRPr>
+            </a:pPr>
+            <a:r>
+              <a:t>Arena ±4040×2040 mm | 3 rak | 9 kubus | 10 obstacle | 1 gate</a:t>
+            </a:r>
+          </a:p>
+          <a:p>
+            <a:pPr>
+              <a:spcAft>
+                <a:spcPts val="1000"/>
+              </a:spcAft>
+              <a:defRPr sz="1700" b="0">
+                <a:solidFill>
+                  <a:srgbClr val="333333"/>
+                </a:solidFill>
+              </a:defRPr>
+            </a:pPr>
+            <a:r>
+              <a:t>Controller: Raspberry Pi atau myRIO</a:t>
+            </a:r>
+          </a:p>
+          <a:p>
+            <a:pPr>
+              <a:spcAft>
+                <a:spcPts val="1000"/>
+              </a:spcAft>
+              <a:defRPr sz="1700" b="0">
+                <a:solidFill>
+                  <a:srgbClr val="333333"/>
+                </a:solidFill>
+              </a:defRPr>
+            </a:pPr>
+            <a:r>
+              <a:t>Python / C++ / LabVIEW | baterai ≤12V</a:t>
+            </a:r>
+          </a:p>
+          <a:p>
+            <a:pPr>
+              <a:spcAft>
+                <a:spcPts val="1000"/>
+              </a:spcAft>
+              <a:defRPr sz="1700" b="0">
+                <a:solidFill>
+                  <a:srgbClr val="333333"/>
+                </a:solidFill>
+              </a:defRPr>
+            </a:pPr>
+            <a:r>
+              <a:t>Tombol STOP merah wajib | 30% rule di H3</a:t>
+            </a:r>
+          </a:p>
+        </p:txBody>
+      </p:sp>
+    </p:spTree>
+  </p:cSld>
+  <p:clrMapOvr>
+    <a:masterClrMapping/>
+  </p:clrMapOvr>
+</p:sld>
+</file>
+
+<file path=ppt/slides/slide24.xml><?xml version="1.0" encoding="utf-8"?>
+<p:sld xmlns:a="http://schemas.openxmlformats.org/drawingml/2006/main" xmlns:p="http://schemas.openxmlformats.org/presentationml/2006/main" xmlns:r="http://schemas.openxmlformats.org/officeDocument/2006/relationships">
+  <p:cSld>
+    <p:spTree>
+      <p:nvGrpSpPr>
+        <p:cNvPr id="1" name=""/>
+        <p:cNvGrpSpPr/>
+        <p:nvPr/>
+      </p:nvGrpSpPr>
+      <p:grpSpPr/>
+      <p:sp>
+        <p:nvSpPr>
+          <p:cNvPr id="2" name="Rectangle 1"/>
+          <p:cNvSpPr/>
+          <p:nvPr/>
+        </p:nvSpPr>
+        <p:spPr>
+          <a:xfrm>
+            <a:off x="0" y="0"/>
+            <a:ext cx="9144000" cy="841248"/>
+          </a:xfrm>
+          <a:prstGeom prst="rect">
+            <a:avLst/>
+          </a:prstGeom>
+          <a:solidFill>
+            <a:srgbClr val="1F4E79"/>
+          </a:solidFill>
+          <a:ln>
+            <a:noFill/>
+          </a:ln>
+        </p:spPr>
+        <p:style>
+          <a:lnRef idx="1">
+            <a:schemeClr val="accent1"/>
+          </a:lnRef>
+          <a:fillRef idx="3">
+            <a:schemeClr val="accent1"/>
+          </a:fillRef>
+          <a:effectRef idx="2">
+            <a:schemeClr val="accent1"/>
+          </a:effectRef>
+          <a:fontRef idx="minor">
+            <a:schemeClr val="lt1"/>
+          </a:fontRef>
+        </p:style>
+        <p:txBody>
+          <a:bodyPr rtlCol="0" anchor="ctr"/>
+          <a:lstStyle/>
+          <a:p>
+            <a:pPr algn="ctr"/>
+          </a:p>
+        </p:txBody>
+      </p:sp>
+      <p:sp>
+        <p:nvSpPr>
+          <p:cNvPr id="3" name="Rectangle 2"/>
+          <p:cNvSpPr/>
+          <p:nvPr/>
+        </p:nvSpPr>
+        <p:spPr>
+          <a:xfrm>
+            <a:off x="0" y="841248"/>
+            <a:ext cx="9144000" cy="45720"/>
+          </a:xfrm>
+          <a:prstGeom prst="rect">
+            <a:avLst/>
+          </a:prstGeom>
+          <a:solidFill>
+            <a:srgbClr val="ED7D31"/>
+          </a:solidFill>
+          <a:ln>
+            <a:noFill/>
+          </a:ln>
+        </p:spPr>
+        <p:style>
+          <a:lnRef idx="1">
+            <a:schemeClr val="accent1"/>
+          </a:lnRef>
+          <a:fillRef idx="3">
+            <a:schemeClr val="accent1"/>
+          </a:fillRef>
+          <a:effectRef idx="2">
+            <a:schemeClr val="accent1"/>
+          </a:effectRef>
+          <a:fontRef idx="minor">
+            <a:schemeClr val="lt1"/>
+          </a:fontRef>
+        </p:style>
+        <p:txBody>
+          <a:bodyPr rtlCol="0" anchor="ctr"/>
+          <a:lstStyle/>
+          <a:p>
+            <a:pPr algn="ctr"/>
+          </a:p>
+        </p:txBody>
+      </p:sp>
+      <p:pic>
+        <p:nvPicPr>
+          <p:cNvPr id="4" name="Picture 3" descr="logo-kemendikdasmen.png"/>
+          <p:cNvPicPr>
+            <a:picLocks noChangeAspect="1"/>
+          </p:cNvPicPr>
+          <p:nvPr/>
+        </p:nvPicPr>
+        <p:blipFill>
+          <a:blip r:embed="rId2"/>
+          <a:stretch>
+            <a:fillRect/>
+          </a:stretch>
+        </p:blipFill>
+        <p:spPr>
+          <a:xfrm>
+            <a:off x="109728" y="91440"/>
+            <a:ext cx="1707475" cy="530352"/>
+          </a:xfrm>
+          <a:prstGeom prst="rect">
+            <a:avLst/>
+          </a:prstGeom>
+        </p:spPr>
+      </p:pic>
+      <p:pic>
+        <p:nvPicPr>
+          <p:cNvPr id="5" name="Picture 4" descr="logo-lks-dikmen.png"/>
+          <p:cNvPicPr>
+            <a:picLocks noChangeAspect="1"/>
+          </p:cNvPicPr>
+          <p:nvPr/>
+        </p:nvPicPr>
+        <p:blipFill>
+          <a:blip r:embed="rId3"/>
+          <a:stretch>
+            <a:fillRect/>
+          </a:stretch>
+        </p:blipFill>
+        <p:spPr>
+          <a:xfrm>
+            <a:off x="7973568" y="54864"/>
+            <a:ext cx="621792" cy="621792"/>
+          </a:xfrm>
+          <a:prstGeom prst="rect">
+            <a:avLst/>
+          </a:prstGeom>
+        </p:spPr>
+      </p:pic>
+      <p:sp>
+        <p:nvSpPr>
+          <p:cNvPr id="6" name="TextBox 5"/>
+          <p:cNvSpPr txBox="1"/>
+          <p:nvPr/>
+        </p:nvSpPr>
+        <p:spPr>
+          <a:xfrm>
+            <a:off x="2148840" y="128016"/>
+            <a:ext cx="5486400" cy="566928"/>
+          </a:xfrm>
+          <a:prstGeom prst="rect">
+            <a:avLst/>
+          </a:prstGeom>
+          <a:noFill/>
+        </p:spPr>
+        <p:txBody>
+          <a:bodyPr wrap="square">
+            <a:spAutoFit/>
+          </a:bodyPr>
+          <a:lstStyle/>
+          <a:p>
+            <a:pPr algn="ctr">
+              <a:spcAft>
+                <a:spcPts val="600"/>
+              </a:spcAft>
+              <a:defRPr sz="1700" b="1">
+                <a:solidFill>
+                  <a:srgbClr val="FFFFFF"/>
+                </a:solidFill>
+              </a:defRPr>
+            </a:pPr>
+            <a:r>
+              <a:t>K3 &amp; klarifikasi ke Chief Expert</a:t>
+            </a:r>
+          </a:p>
+        </p:txBody>
+      </p:sp>
+      <p:sp>
+        <p:nvSpPr>
+          <p:cNvPr id="7" name="Rectangle 6"/>
+          <p:cNvSpPr/>
+          <p:nvPr/>
+        </p:nvSpPr>
+        <p:spPr>
+          <a:xfrm>
+            <a:off x="0" y="6419088"/>
+            <a:ext cx="9144000" cy="365760"/>
+          </a:xfrm>
+          <a:prstGeom prst="rect">
+            <a:avLst/>
+          </a:prstGeom>
+          <a:solidFill>
+            <a:srgbClr val="2E7D32"/>
+          </a:solidFill>
+          <a:ln>
+            <a:noFill/>
+          </a:ln>
+        </p:spPr>
+        <p:style>
+          <a:lnRef idx="1">
+            <a:schemeClr val="accent1"/>
+          </a:lnRef>
+          <a:fillRef idx="3">
+            <a:schemeClr val="accent1"/>
+          </a:fillRef>
+          <a:effectRef idx="2">
+            <a:schemeClr val="accent1"/>
+          </a:effectRef>
+          <a:fontRef idx="minor">
+            <a:schemeClr val="lt1"/>
+          </a:fontRef>
+        </p:style>
+        <p:txBody>
+          <a:bodyPr rtlCol="0" anchor="ctr"/>
+          <a:lstStyle/>
+          <a:p>
+            <a:pPr algn="ctr"/>
+          </a:p>
+        </p:txBody>
+      </p:sp>
+      <p:sp>
+        <p:nvSpPr>
+          <p:cNvPr id="8" name="TextBox 7"/>
+          <p:cNvSpPr txBox="1"/>
+          <p:nvPr/>
+        </p:nvSpPr>
+        <p:spPr>
+          <a:xfrm>
+            <a:off x="228600" y="6455664"/>
+            <a:ext cx="8686800" cy="292608"/>
+          </a:xfrm>
+          <a:prstGeom prst="rect">
+            <a:avLst/>
+          </a:prstGeom>
+          <a:noFill/>
+        </p:spPr>
+        <p:txBody>
+          <a:bodyPr wrap="none">
+            <a:spAutoFit/>
+          </a:bodyPr>
+          <a:lstStyle/>
+          <a:p>
+            <a:pPr algn="ctr">
+              <a:spcAft>
+                <a:spcPts val="0"/>
+              </a:spcAft>
+              <a:defRPr sz="900" b="0">
+                <a:solidFill>
+                  <a:srgbClr val="FFFFFF"/>
+                </a:solidFill>
+              </a:defRPr>
+            </a:pPr>
+            <a:r>
+              <a:t>Slide 24  |  Briefing Juri LKS 2026 — Robot Bergerak Otonom  |  Kemendikdasmen</a:t>
             </a:r>
           </a:p>
         </p:txBody>
@@ -10814,6 +11297,21 @@
               </a:defRPr>
             </a:pPr>
             <a:r>
+              <a:t>File latihan: LKS2026-Penilaian-Juri-CONTOH.xlsx (sudah terisi contoh)</a:t>
+            </a:r>
+          </a:p>
+          <a:p>
+            <a:pPr>
+              <a:spcAft>
+                <a:spcPts val="1000"/>
+              </a:spcAft>
+              <a:defRPr sz="1700" b="0">
+                <a:solidFill>
+                  <a:srgbClr val="333333"/>
+                </a:solidFill>
+              </a:defRPr>
+            </a:pPr>
+            <a:r>
               <a:t>Duplikat per tim (Save As) — jangan pakai file CSV</a:t>
             </a:r>
           </a:p>
@@ -10829,7 +11327,7 @@
               </a:defRPr>
             </a:pPr>
             <a:r>
-              <a:t>Sheet utama: Modul A–E, Undian Kubus, Log Run, Rekapitulasi</a:t>
+              <a:t>Kompatibel Excel 2010+ (Microsoft Excel desktop)</a:t>
             </a:r>
           </a:p>
           <a:p>
@@ -10844,7 +11342,7 @@
               </a:defRPr>
             </a:pPr>
             <a:r>
-              <a:t>Acuan prosedur: docs/SOP-JURI.md</a:t>
+              <a:t>Bingung? Klik link GitHub di baris 2 setiap sheet Excel</a:t>
             </a:r>
           </a:p>
           <a:p>
@@ -10859,7 +11357,22 @@
               </a:defRPr>
             </a:pPr>
             <a:r>
-              <a:t>Repo materi: github.com/antonprafanto/LKS2026</a:t>
+              <a:t>Repositori: github.com/antonprafanto/LKS2026</a:t>
+            </a:r>
+          </a:p>
+          <a:p>
+            <a:pPr>
+              <a:spcAft>
+                <a:spcPts val="1000"/>
+              </a:spcAft>
+              <a:defRPr sz="1700" b="0">
+                <a:solidFill>
+                  <a:srgbClr val="333333"/>
+                </a:solidFill>
+              </a:defRPr>
+            </a:pPr>
+            <a:r>
+              <a:t>Panduan per modul: docs/SOP-JURI.md (§5–§10, §12) di GitHub</a:t>
             </a:r>
           </a:p>
           <a:p>
@@ -11064,7 +11577,7 @@
               </a:defRPr>
             </a:pPr>
             <a:r>
-              <a:t>Identitas Lomba</a:t>
+              <a:t>Cara Isi Excel — Sheet Undian Kubus</a:t>
             </a:r>
           </a:p>
         </p:txBody>
@@ -11150,104 +11663,453 @@
           </a:p>
         </p:txBody>
       </p:sp>
-      <p:sp>
-        <p:nvSpPr>
-          <p:cNvPr id="9" name="TextBox 8"/>
-          <p:cNvSpPr txBox="1"/>
-          <p:nvPr/>
-        </p:nvSpPr>
-        <p:spPr>
-          <a:xfrm>
-            <a:off x="457200" y="960120"/>
-            <a:ext cx="8229600" cy="5257800"/>
-          </a:xfrm>
-          <a:prstGeom prst="rect">
-            <a:avLst/>
-          </a:prstGeom>
-          <a:noFill/>
-        </p:spPr>
-        <p:txBody>
-          <a:bodyPr wrap="square" anchor="t">
-            <a:spAutoFit/>
-          </a:bodyPr>
-          <a:lstStyle/>
-          <a:p>
-            <a:pPr>
-              <a:spcAft>
-                <a:spcPts val="1000"/>
-              </a:spcAft>
-              <a:defRPr sz="1700" b="0">
-                <a:solidFill>
-                  <a:srgbClr val="333333"/>
-                </a:solidFill>
-              </a:defRPr>
-            </a:pPr>
-            <a:r>
-              <a:t>Bidang: Robot Bergerak Otonom (Autonomous Mobile Robotics)</a:t>
-            </a:r>
-          </a:p>
-          <a:p>
-            <a:pPr>
-              <a:spcAft>
-                <a:spcPts val="1000"/>
-              </a:spcAft>
-              <a:defRPr sz="1700" b="0">
-                <a:solidFill>
-                  <a:srgbClr val="333333"/>
-                </a:solidFill>
-              </a:defRPr>
-            </a:pPr>
-            <a:r>
-              <a:t>Tim: 2 peserta | Offline | ±15 jam kerja / 3 hari</a:t>
-            </a:r>
-          </a:p>
-          <a:p>
-            <a:pPr>
-              <a:spcAft>
-                <a:spcPts val="1000"/>
-              </a:spcAft>
-              <a:defRPr sz="1700" b="0">
-                <a:solidFill>
-                  <a:srgbClr val="333333"/>
-                </a:solidFill>
-              </a:defRPr>
-            </a:pPr>
-            <a:r>
-              <a:t>Tema 2026: Service Robot at Library</a:t>
-            </a:r>
-          </a:p>
-          <a:p>
-            <a:pPr>
-              <a:spcAft>
-                <a:spcPts val="1000"/>
-              </a:spcAft>
-              <a:defRPr sz="1700" b="0">
-                <a:solidFill>
-                  <a:srgbClr val="333333"/>
-                </a:solidFill>
-              </a:defRPr>
-            </a:pPr>
-            <a:r>
-              <a:t>Robot mengambil kubus (buku) dan menaruh ke rak sesuai marker warna</a:t>
-            </a:r>
-          </a:p>
-          <a:p>
-            <a:pPr>
-              <a:spcAft>
-                <a:spcPts val="1000"/>
-              </a:spcAft>
-              <a:defRPr sz="1700" b="0">
-                <a:solidFill>
-                  <a:srgbClr val="333333"/>
-                </a:solidFill>
-              </a:defRPr>
-            </a:pPr>
-            <a:r>
-              <a:t>Standar: WorldSkills WSOS Skill 23</a:t>
-            </a:r>
-          </a:p>
-        </p:txBody>
-      </p:sp>
+      <p:graphicFrame>
+        <p:nvGraphicFramePr>
+          <p:cNvPr id="9" name="Table 8"/>
+          <p:cNvGraphicFramePr>
+            <a:graphicFrameLocks noGrp="1"/>
+          </p:cNvGraphicFramePr>
+          <p:nvPr/>
+        </p:nvGraphicFramePr>
+        <p:xfrm>
+          <a:off x="365760" y="960120"/>
+          <a:ext cx="8412480" cy="2532888"/>
+        </p:xfrm>
+        <a:graphic>
+          <a:graphicData uri="http://schemas.openxmlformats.org/drawingml/2006/table">
+            <a:tbl>
+              <a:tblPr firstRow="1" bandRow="1">
+                <a:tableStyleId>{5C22544A-7EE6-4342-B048-85BDC9FD1C3A}</a:tableStyleId>
+              </a:tblPr>
+              <a:tblGrid>
+                <a:gridCol w="2804160"/>
+                <a:gridCol w="2804160"/>
+                <a:gridCol w="2804160"/>
+              </a:tblGrid>
+              <a:tr h="422148">
+                <a:tc>
+                  <a:txBody>
+                    <a:bodyPr/>
+                    <a:lstStyle/>
+                    <a:p>
+                      <a:pPr>
+                        <a:spcAft>
+                          <a:spcPts val="600"/>
+                        </a:spcAft>
+                        <a:defRPr sz="1200" b="1">
+                          <a:solidFill>
+                            <a:srgbClr val="FFFFFF"/>
+                          </a:solidFill>
+                        </a:defRPr>
+                      </a:pPr>
+                      <a:r>
+                        <a:t>Langkah</a:t>
+                      </a:r>
+                    </a:p>
+                  </a:txBody>
+                  <a:tcPr>
+                    <a:solidFill>
+                      <a:srgbClr val="1F4E79"/>
+                    </a:solidFill>
+                  </a:tcPr>
+                </a:tc>
+                <a:tc>
+                  <a:txBody>
+                    <a:bodyPr/>
+                    <a:lstStyle/>
+                    <a:p>
+                      <a:pPr>
+                        <a:spcAft>
+                          <a:spcPts val="600"/>
+                        </a:spcAft>
+                        <a:defRPr sz="1200" b="1">
+                          <a:solidFill>
+                            <a:srgbClr val="FFFFFF"/>
+                          </a:solidFill>
+                        </a:defRPr>
+                      </a:pPr>
+                      <a:r>
+                        <a:t>Di mana</a:t>
+                      </a:r>
+                    </a:p>
+                  </a:txBody>
+                  <a:tcPr>
+                    <a:solidFill>
+                      <a:srgbClr val="1F4E79"/>
+                    </a:solidFill>
+                  </a:tcPr>
+                </a:tc>
+                <a:tc>
+                  <a:txBody>
+                    <a:bodyPr/>
+                    <a:lstStyle/>
+                    <a:p>
+                      <a:pPr>
+                        <a:spcAft>
+                          <a:spcPts val="600"/>
+                        </a:spcAft>
+                        <a:defRPr sz="1200" b="1">
+                          <a:solidFill>
+                            <a:srgbClr val="FFFFFF"/>
+                          </a:solidFill>
+                        </a:defRPr>
+                      </a:pPr>
+                      <a:r>
+                        <a:t>Isi apa</a:t>
+                      </a:r>
+                    </a:p>
+                  </a:txBody>
+                  <a:tcPr>
+                    <a:solidFill>
+                      <a:srgbClr val="1F4E79"/>
+                    </a:solidFill>
+                  </a:tcPr>
+                </a:tc>
+              </a:tr>
+              <a:tr h="422148">
+                <a:tc>
+                  <a:txBody>
+                    <a:bodyPr/>
+                    <a:lstStyle/>
+                    <a:p>
+                      <a:pPr>
+                        <a:spcAft>
+                          <a:spcPts val="600"/>
+                        </a:spcAft>
+                        <a:defRPr sz="1100" b="0">
+                          <a:solidFill>
+                            <a:srgbClr val="333333"/>
+                          </a:solidFill>
+                        </a:defRPr>
+                      </a:pPr>
+                      <a:r>
+                        <a:t>1</a:t>
+                      </a:r>
+                    </a:p>
+                  </a:txBody>
+                  <a:tcPr/>
+                </a:tc>
+                <a:tc>
+                  <a:txBody>
+                    <a:bodyPr/>
+                    <a:lstStyle/>
+                    <a:p>
+                      <a:pPr>
+                        <a:spcAft>
+                          <a:spcPts val="600"/>
+                        </a:spcAft>
+                        <a:defRPr sz="1100" b="0">
+                          <a:solidFill>
+                            <a:srgbClr val="333333"/>
+                          </a:solidFill>
+                        </a:defRPr>
+                      </a:pPr>
+                      <a:r>
+                        <a:t>Baris 24 (kuning)</a:t>
+                      </a:r>
+                    </a:p>
+                  </a:txBody>
+                  <a:tcPr/>
+                </a:tc>
+                <a:tc>
+                  <a:txBody>
+                    <a:bodyPr/>
+                    <a:lstStyle/>
+                    <a:p>
+                      <a:pPr>
+                        <a:spcAft>
+                          <a:spcPts val="600"/>
+                        </a:spcAft>
+                        <a:defRPr sz="1100" b="0">
+                          <a:solidFill>
+                            <a:srgbClr val="333333"/>
+                          </a:solidFill>
+                        </a:defRPr>
+                      </a:pPr>
+                      <a:r>
+                        <a:t>Warna marker: Merah / Hijau / Biru per slot</a:t>
+                      </a:r>
+                    </a:p>
+                  </a:txBody>
+                  <a:tcPr/>
+                </a:tc>
+              </a:tr>
+              <a:tr h="422148">
+                <a:tc>
+                  <a:txBody>
+                    <a:bodyPr/>
+                    <a:lstStyle/>
+                    <a:p>
+                      <a:pPr>
+                        <a:spcAft>
+                          <a:spcPts val="600"/>
+                        </a:spcAft>
+                        <a:defRPr sz="1100" b="0">
+                          <a:solidFill>
+                            <a:srgbClr val="333333"/>
+                          </a:solidFill>
+                        </a:defRPr>
+                      </a:pPr>
+                      <a:r>
+                        <a:t>2</a:t>
+                      </a:r>
+                    </a:p>
+                  </a:txBody>
+                  <a:tcPr/>
+                </a:tc>
+                <a:tc>
+                  <a:txBody>
+                    <a:bodyPr/>
+                    <a:lstStyle/>
+                    <a:p>
+                      <a:pPr>
+                        <a:spcAft>
+                          <a:spcPts val="600"/>
+                        </a:spcAft>
+                        <a:defRPr sz="1100" b="0">
+                          <a:solidFill>
+                            <a:srgbClr val="333333"/>
+                          </a:solidFill>
+                        </a:defRPr>
+                      </a:pPr>
+                      <a:r>
+                        <a:t>Baris 28–36 kolom A</a:t>
+                      </a:r>
+                    </a:p>
+                  </a:txBody>
+                  <a:tcPr/>
+                </a:tc>
+                <a:tc>
+                  <a:txBody>
+                    <a:bodyPr/>
+                    <a:lstStyle/>
+                    <a:p>
+                      <a:pPr>
+                        <a:spcAft>
+                          <a:spcPts val="600"/>
+                        </a:spcAft>
+                        <a:defRPr sz="1100" b="0">
+                          <a:solidFill>
+                            <a:srgbClr val="333333"/>
+                          </a:solidFill>
+                        </a:defRPr>
+                      </a:pPr>
+                      <a:r>
+                        <a:t>ID kubus: K-M1, K-H2, dst.</a:t>
+                      </a:r>
+                    </a:p>
+                  </a:txBody>
+                  <a:tcPr/>
+                </a:tc>
+              </a:tr>
+              <a:tr h="422148">
+                <a:tc>
+                  <a:txBody>
+                    <a:bodyPr/>
+                    <a:lstStyle/>
+                    <a:p>
+                      <a:pPr>
+                        <a:spcAft>
+                          <a:spcPts val="600"/>
+                        </a:spcAft>
+                        <a:defRPr sz="1100" b="0">
+                          <a:solidFill>
+                            <a:srgbClr val="333333"/>
+                          </a:solidFill>
+                        </a:defRPr>
+                      </a:pPr>
+                      <a:r>
+                        <a:t>3</a:t>
+                      </a:r>
+                    </a:p>
+                  </a:txBody>
+                  <a:tcPr/>
+                </a:tc>
+                <a:tc>
+                  <a:txBody>
+                    <a:bodyPr/>
+                    <a:lstStyle/>
+                    <a:p>
+                      <a:pPr>
+                        <a:spcAft>
+                          <a:spcPts val="600"/>
+                        </a:spcAft>
+                        <a:defRPr sz="1100" b="0">
+                          <a:solidFill>
+                            <a:srgbClr val="333333"/>
+                          </a:solidFill>
+                        </a:defRPr>
+                      </a:pPr>
+                      <a:r>
+                        <a:t>Kolom E</a:t>
+                      </a:r>
+                    </a:p>
+                  </a:txBody>
+                  <a:tcPr/>
+                </a:tc>
+                <a:tc>
+                  <a:txBody>
+                    <a:bodyPr/>
+                    <a:lstStyle/>
+                    <a:p>
+                      <a:pPr>
+                        <a:spcAft>
+                          <a:spcPts val="600"/>
+                        </a:spcAft>
+                        <a:defRPr sz="1100" b="0">
+                          <a:solidFill>
+                            <a:srgbClr val="333333"/>
+                          </a:solidFill>
+                        </a:defRPr>
+                      </a:pPr>
+                      <a:r>
+                        <a:t>Rak/Stand: Rak 1, Stand A, ... (dropdown)</a:t>
+                      </a:r>
+                    </a:p>
+                  </a:txBody>
+                  <a:tcPr/>
+                </a:tc>
+              </a:tr>
+              <a:tr h="422148">
+                <a:tc>
+                  <a:txBody>
+                    <a:bodyPr/>
+                    <a:lstStyle/>
+                    <a:p>
+                      <a:pPr>
+                        <a:spcAft>
+                          <a:spcPts val="600"/>
+                        </a:spcAft>
+                        <a:defRPr sz="1100" b="0">
+                          <a:solidFill>
+                            <a:srgbClr val="333333"/>
+                          </a:solidFill>
+                        </a:defRPr>
+                      </a:pPr>
+                      <a:r>
+                        <a:t>4</a:t>
+                      </a:r>
+                    </a:p>
+                  </a:txBody>
+                  <a:tcPr/>
+                </a:tc>
+                <a:tc>
+                  <a:txBody>
+                    <a:bodyPr/>
+                    <a:lstStyle/>
+                    <a:p>
+                      <a:pPr>
+                        <a:spcAft>
+                          <a:spcPts val="600"/>
+                        </a:spcAft>
+                        <a:defRPr sz="1100" b="0">
+                          <a:solidFill>
+                            <a:srgbClr val="333333"/>
+                          </a:solidFill>
+                        </a:defRPr>
+                      </a:pPr>
+                      <a:r>
+                        <a:t>Kolom F</a:t>
+                      </a:r>
+                    </a:p>
+                  </a:txBody>
+                  <a:tcPr/>
+                </a:tc>
+                <a:tc>
+                  <a:txBody>
+                    <a:bodyPr/>
+                    <a:lstStyle/>
+                    <a:p>
+                      <a:pPr>
+                        <a:spcAft>
+                          <a:spcPts val="600"/>
+                        </a:spcAft>
+                        <a:defRPr sz="1100" b="0">
+                          <a:solidFill>
+                            <a:srgbClr val="333333"/>
+                          </a:solidFill>
+                        </a:defRPr>
+                      </a:pPr>
+                      <a:r>
+                        <a:t>Slot: kiri / tengah / kanan (dropdown)</a:t>
+                      </a:r>
+                    </a:p>
+                  </a:txBody>
+                  <a:tcPr/>
+                </a:tc>
+              </a:tr>
+              <a:tr h="422148">
+                <a:tc>
+                  <a:txBody>
+                    <a:bodyPr/>
+                    <a:lstStyle/>
+                    <a:p>
+                      <a:pPr>
+                        <a:spcAft>
+                          <a:spcPts val="600"/>
+                        </a:spcAft>
+                        <a:defRPr sz="1100" b="0">
+                          <a:solidFill>
+                            <a:srgbClr val="333333"/>
+                          </a:solidFill>
+                        </a:defRPr>
+                      </a:pPr>
+                      <a:r>
+                        <a:t>5</a:t>
+                      </a:r>
+                    </a:p>
+                  </a:txBody>
+                  <a:tcPr/>
+                </a:tc>
+                <a:tc>
+                  <a:txBody>
+                    <a:bodyPr/>
+                    <a:lstStyle/>
+                    <a:p>
+                      <a:pPr>
+                        <a:spcAft>
+                          <a:spcPts val="600"/>
+                        </a:spcAft>
+                        <a:defRPr sz="1100" b="0">
+                          <a:solidFill>
+                            <a:srgbClr val="333333"/>
+                          </a:solidFill>
+                        </a:defRPr>
+                      </a:pPr>
+                      <a:r>
+                        <a:t>Sheet Modul E</a:t>
+                      </a:r>
+                    </a:p>
+                  </a:txBody>
+                  <a:tcPr/>
+                </a:tc>
+                <a:tc>
+                  <a:txBody>
+                    <a:bodyPr/>
+                    <a:lstStyle/>
+                    <a:p>
+                      <a:pPr>
+                        <a:spcAft>
+                          <a:spcPts val="600"/>
+                        </a:spcAft>
+                        <a:defRPr sz="1100" b="0">
+                          <a:solidFill>
+                            <a:srgbClr val="333333"/>
+                          </a:solidFill>
+                        </a:defRPr>
+                      </a:pPr>
+                      <a:r>
+                        <a:t>Otomatis — juri isi Hasil Run (1/0) saja</a:t>
+                      </a:r>
+                    </a:p>
+                  </a:txBody>
+                  <a:tcPr/>
+                </a:tc>
+              </a:tr>
+            </a:tbl>
+          </a:graphicData>
+        </a:graphic>
+      </p:graphicFrame>
     </p:spTree>
   </p:cSld>
   <p:clrMapOvr>
@@ -11433,7 +12295,7 @@
               </a:defRPr>
             </a:pPr>
             <a:r>
-              <a:t>Bobot Modul (total 100 poin)</a:t>
+              <a:t>Identitas Lomba</a:t>
             </a:r>
           </a:p>
         </p:txBody>
@@ -11515,6 +12377,375 @@
             </a:pPr>
             <a:r>
               <a:t>Slide 5  |  Briefing Juri LKS 2026 — Robot Bergerak Otonom  |  Kemendikdasmen</a:t>
+            </a:r>
+          </a:p>
+        </p:txBody>
+      </p:sp>
+      <p:sp>
+        <p:nvSpPr>
+          <p:cNvPr id="9" name="TextBox 8"/>
+          <p:cNvSpPr txBox="1"/>
+          <p:nvPr/>
+        </p:nvSpPr>
+        <p:spPr>
+          <a:xfrm>
+            <a:off x="457200" y="960120"/>
+            <a:ext cx="8229600" cy="5257800"/>
+          </a:xfrm>
+          <a:prstGeom prst="rect">
+            <a:avLst/>
+          </a:prstGeom>
+          <a:noFill/>
+        </p:spPr>
+        <p:txBody>
+          <a:bodyPr wrap="square" anchor="t">
+            <a:spAutoFit/>
+          </a:bodyPr>
+          <a:lstStyle/>
+          <a:p>
+            <a:pPr>
+              <a:spcAft>
+                <a:spcPts val="1000"/>
+              </a:spcAft>
+              <a:defRPr sz="1700" b="0">
+                <a:solidFill>
+                  <a:srgbClr val="333333"/>
+                </a:solidFill>
+              </a:defRPr>
+            </a:pPr>
+            <a:r>
+              <a:t>Bidang: Robot Bergerak Otonom (Autonomous Mobile Robotics)</a:t>
+            </a:r>
+          </a:p>
+          <a:p>
+            <a:pPr>
+              <a:spcAft>
+                <a:spcPts val="1000"/>
+              </a:spcAft>
+              <a:defRPr sz="1700" b="0">
+                <a:solidFill>
+                  <a:srgbClr val="333333"/>
+                </a:solidFill>
+              </a:defRPr>
+            </a:pPr>
+            <a:r>
+              <a:t>Tim: 2 peserta | Offline | ±15 jam kerja / 3 hari</a:t>
+            </a:r>
+          </a:p>
+          <a:p>
+            <a:pPr>
+              <a:spcAft>
+                <a:spcPts val="1000"/>
+              </a:spcAft>
+              <a:defRPr sz="1700" b="0">
+                <a:solidFill>
+                  <a:srgbClr val="333333"/>
+                </a:solidFill>
+              </a:defRPr>
+            </a:pPr>
+            <a:r>
+              <a:t>Tema 2026: Service Robot at Library</a:t>
+            </a:r>
+          </a:p>
+          <a:p>
+            <a:pPr>
+              <a:spcAft>
+                <a:spcPts val="1000"/>
+              </a:spcAft>
+              <a:defRPr sz="1700" b="0">
+                <a:solidFill>
+                  <a:srgbClr val="333333"/>
+                </a:solidFill>
+              </a:defRPr>
+            </a:pPr>
+            <a:r>
+              <a:t>Robot mengambil kubus (buku) dan menaruh ke rak sesuai marker warna</a:t>
+            </a:r>
+          </a:p>
+          <a:p>
+            <a:pPr>
+              <a:spcAft>
+                <a:spcPts val="1000"/>
+              </a:spcAft>
+              <a:defRPr sz="1700" b="0">
+                <a:solidFill>
+                  <a:srgbClr val="333333"/>
+                </a:solidFill>
+              </a:defRPr>
+            </a:pPr>
+            <a:r>
+              <a:t>Standar: WorldSkills WSOS Skill 23</a:t>
+            </a:r>
+          </a:p>
+        </p:txBody>
+      </p:sp>
+    </p:spTree>
+  </p:cSld>
+  <p:clrMapOvr>
+    <a:masterClrMapping/>
+  </p:clrMapOvr>
+</p:sld>
+</file>
+
+<file path=ppt/slides/slide6.xml><?xml version="1.0" encoding="utf-8"?>
+<p:sld xmlns:a="http://schemas.openxmlformats.org/drawingml/2006/main" xmlns:p="http://schemas.openxmlformats.org/presentationml/2006/main" xmlns:r="http://schemas.openxmlformats.org/officeDocument/2006/relationships">
+  <p:cSld>
+    <p:spTree>
+      <p:nvGrpSpPr>
+        <p:cNvPr id="1" name=""/>
+        <p:cNvGrpSpPr/>
+        <p:nvPr/>
+      </p:nvGrpSpPr>
+      <p:grpSpPr/>
+      <p:sp>
+        <p:nvSpPr>
+          <p:cNvPr id="2" name="Rectangle 1"/>
+          <p:cNvSpPr/>
+          <p:nvPr/>
+        </p:nvSpPr>
+        <p:spPr>
+          <a:xfrm>
+            <a:off x="0" y="0"/>
+            <a:ext cx="9144000" cy="841248"/>
+          </a:xfrm>
+          <a:prstGeom prst="rect">
+            <a:avLst/>
+          </a:prstGeom>
+          <a:solidFill>
+            <a:srgbClr val="1F4E79"/>
+          </a:solidFill>
+          <a:ln>
+            <a:noFill/>
+          </a:ln>
+        </p:spPr>
+        <p:style>
+          <a:lnRef idx="1">
+            <a:schemeClr val="accent1"/>
+          </a:lnRef>
+          <a:fillRef idx="3">
+            <a:schemeClr val="accent1"/>
+          </a:fillRef>
+          <a:effectRef idx="2">
+            <a:schemeClr val="accent1"/>
+          </a:effectRef>
+          <a:fontRef idx="minor">
+            <a:schemeClr val="lt1"/>
+          </a:fontRef>
+        </p:style>
+        <p:txBody>
+          <a:bodyPr rtlCol="0" anchor="ctr"/>
+          <a:lstStyle/>
+          <a:p>
+            <a:pPr algn="ctr"/>
+          </a:p>
+        </p:txBody>
+      </p:sp>
+      <p:sp>
+        <p:nvSpPr>
+          <p:cNvPr id="3" name="Rectangle 2"/>
+          <p:cNvSpPr/>
+          <p:nvPr/>
+        </p:nvSpPr>
+        <p:spPr>
+          <a:xfrm>
+            <a:off x="0" y="841248"/>
+            <a:ext cx="9144000" cy="45720"/>
+          </a:xfrm>
+          <a:prstGeom prst="rect">
+            <a:avLst/>
+          </a:prstGeom>
+          <a:solidFill>
+            <a:srgbClr val="ED7D31"/>
+          </a:solidFill>
+          <a:ln>
+            <a:noFill/>
+          </a:ln>
+        </p:spPr>
+        <p:style>
+          <a:lnRef idx="1">
+            <a:schemeClr val="accent1"/>
+          </a:lnRef>
+          <a:fillRef idx="3">
+            <a:schemeClr val="accent1"/>
+          </a:fillRef>
+          <a:effectRef idx="2">
+            <a:schemeClr val="accent1"/>
+          </a:effectRef>
+          <a:fontRef idx="minor">
+            <a:schemeClr val="lt1"/>
+          </a:fontRef>
+        </p:style>
+        <p:txBody>
+          <a:bodyPr rtlCol="0" anchor="ctr"/>
+          <a:lstStyle/>
+          <a:p>
+            <a:pPr algn="ctr"/>
+          </a:p>
+        </p:txBody>
+      </p:sp>
+      <p:pic>
+        <p:nvPicPr>
+          <p:cNvPr id="4" name="Picture 3" descr="logo-kemendikdasmen.png"/>
+          <p:cNvPicPr>
+            <a:picLocks noChangeAspect="1"/>
+          </p:cNvPicPr>
+          <p:nvPr/>
+        </p:nvPicPr>
+        <p:blipFill>
+          <a:blip r:embed="rId2"/>
+          <a:stretch>
+            <a:fillRect/>
+          </a:stretch>
+        </p:blipFill>
+        <p:spPr>
+          <a:xfrm>
+            <a:off x="109728" y="91440"/>
+            <a:ext cx="1707475" cy="530352"/>
+          </a:xfrm>
+          <a:prstGeom prst="rect">
+            <a:avLst/>
+          </a:prstGeom>
+        </p:spPr>
+      </p:pic>
+      <p:pic>
+        <p:nvPicPr>
+          <p:cNvPr id="5" name="Picture 4" descr="logo-lks-dikmen.png"/>
+          <p:cNvPicPr>
+            <a:picLocks noChangeAspect="1"/>
+          </p:cNvPicPr>
+          <p:nvPr/>
+        </p:nvPicPr>
+        <p:blipFill>
+          <a:blip r:embed="rId3"/>
+          <a:stretch>
+            <a:fillRect/>
+          </a:stretch>
+        </p:blipFill>
+        <p:spPr>
+          <a:xfrm>
+            <a:off x="7973568" y="54864"/>
+            <a:ext cx="621792" cy="621792"/>
+          </a:xfrm>
+          <a:prstGeom prst="rect">
+            <a:avLst/>
+          </a:prstGeom>
+        </p:spPr>
+      </p:pic>
+      <p:sp>
+        <p:nvSpPr>
+          <p:cNvPr id="6" name="TextBox 5"/>
+          <p:cNvSpPr txBox="1"/>
+          <p:nvPr/>
+        </p:nvSpPr>
+        <p:spPr>
+          <a:xfrm>
+            <a:off x="2148840" y="128016"/>
+            <a:ext cx="5486400" cy="566928"/>
+          </a:xfrm>
+          <a:prstGeom prst="rect">
+            <a:avLst/>
+          </a:prstGeom>
+          <a:noFill/>
+        </p:spPr>
+        <p:txBody>
+          <a:bodyPr wrap="square">
+            <a:spAutoFit/>
+          </a:bodyPr>
+          <a:lstStyle/>
+          <a:p>
+            <a:pPr algn="ctr">
+              <a:spcAft>
+                <a:spcPts val="600"/>
+              </a:spcAft>
+              <a:defRPr sz="1700" b="1">
+                <a:solidFill>
+                  <a:srgbClr val="FFFFFF"/>
+                </a:solidFill>
+              </a:defRPr>
+            </a:pPr>
+            <a:r>
+              <a:t>Bobot Modul (total 100 poin)</a:t>
+            </a:r>
+          </a:p>
+        </p:txBody>
+      </p:sp>
+      <p:sp>
+        <p:nvSpPr>
+          <p:cNvPr id="7" name="Rectangle 6"/>
+          <p:cNvSpPr/>
+          <p:nvPr/>
+        </p:nvSpPr>
+        <p:spPr>
+          <a:xfrm>
+            <a:off x="0" y="6419088"/>
+            <a:ext cx="9144000" cy="365760"/>
+          </a:xfrm>
+          <a:prstGeom prst="rect">
+            <a:avLst/>
+          </a:prstGeom>
+          <a:solidFill>
+            <a:srgbClr val="2E7D32"/>
+          </a:solidFill>
+          <a:ln>
+            <a:noFill/>
+          </a:ln>
+        </p:spPr>
+        <p:style>
+          <a:lnRef idx="1">
+            <a:schemeClr val="accent1"/>
+          </a:lnRef>
+          <a:fillRef idx="3">
+            <a:schemeClr val="accent1"/>
+          </a:fillRef>
+          <a:effectRef idx="2">
+            <a:schemeClr val="accent1"/>
+          </a:effectRef>
+          <a:fontRef idx="minor">
+            <a:schemeClr val="lt1"/>
+          </a:fontRef>
+        </p:style>
+        <p:txBody>
+          <a:bodyPr rtlCol="0" anchor="ctr"/>
+          <a:lstStyle/>
+          <a:p>
+            <a:pPr algn="ctr"/>
+          </a:p>
+        </p:txBody>
+      </p:sp>
+      <p:sp>
+        <p:nvSpPr>
+          <p:cNvPr id="8" name="TextBox 7"/>
+          <p:cNvSpPr txBox="1"/>
+          <p:nvPr/>
+        </p:nvSpPr>
+        <p:spPr>
+          <a:xfrm>
+            <a:off x="228600" y="6455664"/>
+            <a:ext cx="8686800" cy="292608"/>
+          </a:xfrm>
+          <a:prstGeom prst="rect">
+            <a:avLst/>
+          </a:prstGeom>
+          <a:noFill/>
+        </p:spPr>
+        <p:txBody>
+          <a:bodyPr wrap="none">
+            <a:spAutoFit/>
+          </a:bodyPr>
+          <a:lstStyle/>
+          <a:p>
+            <a:pPr algn="ctr">
+              <a:spcAft>
+                <a:spcPts val="0"/>
+              </a:spcAft>
+              <a:defRPr sz="900" b="0">
+                <a:solidFill>
+                  <a:srgbClr val="FFFFFF"/>
+                </a:solidFill>
+              </a:defRPr>
+            </a:pPr>
+            <a:r>
+              <a:t>Slide 6  |  Briefing Juri LKS 2026 — Robot Bergerak Otonom  |  Kemendikdasmen</a:t>
             </a:r>
           </a:p>
         </p:txBody>
@@ -12248,375 +13479,6 @@
 </p:sld>
 </file>
 
-<file path=ppt/slides/slide6.xml><?xml version="1.0" encoding="utf-8"?>
-<p:sld xmlns:a="http://schemas.openxmlformats.org/drawingml/2006/main" xmlns:p="http://schemas.openxmlformats.org/presentationml/2006/main" xmlns:r="http://schemas.openxmlformats.org/officeDocument/2006/relationships">
-  <p:cSld>
-    <p:spTree>
-      <p:nvGrpSpPr>
-        <p:cNvPr id="1" name=""/>
-        <p:cNvGrpSpPr/>
-        <p:nvPr/>
-      </p:nvGrpSpPr>
-      <p:grpSpPr/>
-      <p:sp>
-        <p:nvSpPr>
-          <p:cNvPr id="2" name="Rectangle 1"/>
-          <p:cNvSpPr/>
-          <p:nvPr/>
-        </p:nvSpPr>
-        <p:spPr>
-          <a:xfrm>
-            <a:off x="0" y="0"/>
-            <a:ext cx="9144000" cy="841248"/>
-          </a:xfrm>
-          <a:prstGeom prst="rect">
-            <a:avLst/>
-          </a:prstGeom>
-          <a:solidFill>
-            <a:srgbClr val="1F4E79"/>
-          </a:solidFill>
-          <a:ln>
-            <a:noFill/>
-          </a:ln>
-        </p:spPr>
-        <p:style>
-          <a:lnRef idx="1">
-            <a:schemeClr val="accent1"/>
-          </a:lnRef>
-          <a:fillRef idx="3">
-            <a:schemeClr val="accent1"/>
-          </a:fillRef>
-          <a:effectRef idx="2">
-            <a:schemeClr val="accent1"/>
-          </a:effectRef>
-          <a:fontRef idx="minor">
-            <a:schemeClr val="lt1"/>
-          </a:fontRef>
-        </p:style>
-        <p:txBody>
-          <a:bodyPr rtlCol="0" anchor="ctr"/>
-          <a:lstStyle/>
-          <a:p>
-            <a:pPr algn="ctr"/>
-          </a:p>
-        </p:txBody>
-      </p:sp>
-      <p:sp>
-        <p:nvSpPr>
-          <p:cNvPr id="3" name="Rectangle 2"/>
-          <p:cNvSpPr/>
-          <p:nvPr/>
-        </p:nvSpPr>
-        <p:spPr>
-          <a:xfrm>
-            <a:off x="0" y="841248"/>
-            <a:ext cx="9144000" cy="45720"/>
-          </a:xfrm>
-          <a:prstGeom prst="rect">
-            <a:avLst/>
-          </a:prstGeom>
-          <a:solidFill>
-            <a:srgbClr val="ED7D31"/>
-          </a:solidFill>
-          <a:ln>
-            <a:noFill/>
-          </a:ln>
-        </p:spPr>
-        <p:style>
-          <a:lnRef idx="1">
-            <a:schemeClr val="accent1"/>
-          </a:lnRef>
-          <a:fillRef idx="3">
-            <a:schemeClr val="accent1"/>
-          </a:fillRef>
-          <a:effectRef idx="2">
-            <a:schemeClr val="accent1"/>
-          </a:effectRef>
-          <a:fontRef idx="minor">
-            <a:schemeClr val="lt1"/>
-          </a:fontRef>
-        </p:style>
-        <p:txBody>
-          <a:bodyPr rtlCol="0" anchor="ctr"/>
-          <a:lstStyle/>
-          <a:p>
-            <a:pPr algn="ctr"/>
-          </a:p>
-        </p:txBody>
-      </p:sp>
-      <p:pic>
-        <p:nvPicPr>
-          <p:cNvPr id="4" name="Picture 3" descr="logo-kemendikdasmen.png"/>
-          <p:cNvPicPr>
-            <a:picLocks noChangeAspect="1"/>
-          </p:cNvPicPr>
-          <p:nvPr/>
-        </p:nvPicPr>
-        <p:blipFill>
-          <a:blip r:embed="rId2"/>
-          <a:stretch>
-            <a:fillRect/>
-          </a:stretch>
-        </p:blipFill>
-        <p:spPr>
-          <a:xfrm>
-            <a:off x="109728" y="91440"/>
-            <a:ext cx="1707475" cy="530352"/>
-          </a:xfrm>
-          <a:prstGeom prst="rect">
-            <a:avLst/>
-          </a:prstGeom>
-        </p:spPr>
-      </p:pic>
-      <p:pic>
-        <p:nvPicPr>
-          <p:cNvPr id="5" name="Picture 4" descr="logo-lks-dikmen.png"/>
-          <p:cNvPicPr>
-            <a:picLocks noChangeAspect="1"/>
-          </p:cNvPicPr>
-          <p:nvPr/>
-        </p:nvPicPr>
-        <p:blipFill>
-          <a:blip r:embed="rId3"/>
-          <a:stretch>
-            <a:fillRect/>
-          </a:stretch>
-        </p:blipFill>
-        <p:spPr>
-          <a:xfrm>
-            <a:off x="7973568" y="54864"/>
-            <a:ext cx="621792" cy="621792"/>
-          </a:xfrm>
-          <a:prstGeom prst="rect">
-            <a:avLst/>
-          </a:prstGeom>
-        </p:spPr>
-      </p:pic>
-      <p:sp>
-        <p:nvSpPr>
-          <p:cNvPr id="6" name="TextBox 5"/>
-          <p:cNvSpPr txBox="1"/>
-          <p:nvPr/>
-        </p:nvSpPr>
-        <p:spPr>
-          <a:xfrm>
-            <a:off x="2148840" y="128016"/>
-            <a:ext cx="5486400" cy="566928"/>
-          </a:xfrm>
-          <a:prstGeom prst="rect">
-            <a:avLst/>
-          </a:prstGeom>
-          <a:noFill/>
-        </p:spPr>
-        <p:txBody>
-          <a:bodyPr wrap="square">
-            <a:spAutoFit/>
-          </a:bodyPr>
-          <a:lstStyle/>
-          <a:p>
-            <a:pPr algn="ctr">
-              <a:spcAft>
-                <a:spcPts val="600"/>
-              </a:spcAft>
-              <a:defRPr sz="1700" b="1">
-                <a:solidFill>
-                  <a:srgbClr val="FFFFFF"/>
-                </a:solidFill>
-              </a:defRPr>
-            </a:pPr>
-            <a:r>
-              <a:t>Sistem Penilaian</a:t>
-            </a:r>
-          </a:p>
-        </p:txBody>
-      </p:sp>
-      <p:sp>
-        <p:nvSpPr>
-          <p:cNvPr id="7" name="Rectangle 6"/>
-          <p:cNvSpPr/>
-          <p:nvPr/>
-        </p:nvSpPr>
-        <p:spPr>
-          <a:xfrm>
-            <a:off x="0" y="6419088"/>
-            <a:ext cx="9144000" cy="365760"/>
-          </a:xfrm>
-          <a:prstGeom prst="rect">
-            <a:avLst/>
-          </a:prstGeom>
-          <a:solidFill>
-            <a:srgbClr val="2E7D32"/>
-          </a:solidFill>
-          <a:ln>
-            <a:noFill/>
-          </a:ln>
-        </p:spPr>
-        <p:style>
-          <a:lnRef idx="1">
-            <a:schemeClr val="accent1"/>
-          </a:lnRef>
-          <a:fillRef idx="3">
-            <a:schemeClr val="accent1"/>
-          </a:fillRef>
-          <a:effectRef idx="2">
-            <a:schemeClr val="accent1"/>
-          </a:effectRef>
-          <a:fontRef idx="minor">
-            <a:schemeClr val="lt1"/>
-          </a:fontRef>
-        </p:style>
-        <p:txBody>
-          <a:bodyPr rtlCol="0" anchor="ctr"/>
-          <a:lstStyle/>
-          <a:p>
-            <a:pPr algn="ctr"/>
-          </a:p>
-        </p:txBody>
-      </p:sp>
-      <p:sp>
-        <p:nvSpPr>
-          <p:cNvPr id="8" name="TextBox 7"/>
-          <p:cNvSpPr txBox="1"/>
-          <p:nvPr/>
-        </p:nvSpPr>
-        <p:spPr>
-          <a:xfrm>
-            <a:off x="228600" y="6455664"/>
-            <a:ext cx="8686800" cy="292608"/>
-          </a:xfrm>
-          <a:prstGeom prst="rect">
-            <a:avLst/>
-          </a:prstGeom>
-          <a:noFill/>
-        </p:spPr>
-        <p:txBody>
-          <a:bodyPr wrap="none">
-            <a:spAutoFit/>
-          </a:bodyPr>
-          <a:lstStyle/>
-          <a:p>
-            <a:pPr algn="ctr">
-              <a:spcAft>
-                <a:spcPts val="0"/>
-              </a:spcAft>
-              <a:defRPr sz="900" b="0">
-                <a:solidFill>
-                  <a:srgbClr val="FFFFFF"/>
-                </a:solidFill>
-              </a:defRPr>
-            </a:pPr>
-            <a:r>
-              <a:t>Slide 6  |  Briefing Juri LKS 2026 — Robot Bergerak Otonom  |  Kemendikdasmen</a:t>
-            </a:r>
-          </a:p>
-        </p:txBody>
-      </p:sp>
-      <p:sp>
-        <p:nvSpPr>
-          <p:cNvPr id="9" name="TextBox 8"/>
-          <p:cNvSpPr txBox="1"/>
-          <p:nvPr/>
-        </p:nvSpPr>
-        <p:spPr>
-          <a:xfrm>
-            <a:off x="457200" y="960120"/>
-            <a:ext cx="8229600" cy="5257800"/>
-          </a:xfrm>
-          <a:prstGeom prst="rect">
-            <a:avLst/>
-          </a:prstGeom>
-          <a:noFill/>
-        </p:spPr>
-        <p:txBody>
-          <a:bodyPr wrap="square" anchor="t">
-            <a:spAutoFit/>
-          </a:bodyPr>
-          <a:lstStyle/>
-          <a:p>
-            <a:pPr>
-              <a:spcAft>
-                <a:spcPts val="1000"/>
-              </a:spcAft>
-              <a:defRPr sz="1700" b="0">
-                <a:solidFill>
-                  <a:srgbClr val="333333"/>
-                </a:solidFill>
-              </a:defRPr>
-            </a:pPr>
-            <a:r>
-              <a:t>Judgement (J): skala 0–3 untuk proses, kerapian, kolaborasi</a:t>
-            </a:r>
-          </a:p>
-          <a:p>
-            <a:pPr>
-              <a:spcAft>
-                <a:spcPts val="1000"/>
-              </a:spcAft>
-              <a:defRPr sz="1700" b="0">
-                <a:solidFill>
-                  <a:srgbClr val="333333"/>
-                </a:solidFill>
-              </a:defRPr>
-            </a:pPr>
-            <a:r>
-              <a:t>Measurement (M): 1 = berhasil, 0 = gagal</a:t>
-            </a:r>
-          </a:p>
-          <a:p>
-            <a:pPr>
-              <a:spcAft>
-                <a:spcPts val="1000"/>
-              </a:spcAft>
-              <a:defRPr sz="1700" b="0">
-                <a:solidFill>
-                  <a:srgbClr val="333333"/>
-                </a:solidFill>
-              </a:defRPr>
-            </a:pPr>
-            <a:r>
-              <a:t>3 juri untuk J → rata-rata; selisih ≥ 2 poin → ulangi</a:t>
-            </a:r>
-          </a:p>
-          <a:p>
-            <a:pPr>
-              <a:spcAft>
-                <a:spcPts val="1000"/>
-              </a:spcAft>
-              <a:defRPr sz="1700" b="0">
-                <a:solidFill>
-                  <a:srgbClr val="333333"/>
-                </a:solidFill>
-              </a:defRPr>
-            </a:pPr>
-            <a:r>
-              <a:t>Input ke CIS → skala 700 (Medallion jika &gt; 700)</a:t>
-            </a:r>
-          </a:p>
-          <a:p>
-            <a:pPr>
-              <a:spcAft>
-                <a:spcPts val="1000"/>
-              </a:spcAft>
-              <a:defRPr sz="1700" b="0">
-                <a:solidFill>
-                  <a:srgbClr val="333333"/>
-                </a:solidFill>
-              </a:defRPr>
-            </a:pPr>
-            <a:r>
-              <a:t>60% skor dari Modul E — fokus utama penilaian juri</a:t>
-            </a:r>
-          </a:p>
-        </p:txBody>
-      </p:sp>
-    </p:spTree>
-  </p:cSld>
-  <p:clrMapOvr>
-    <a:masterClrMapping/>
-  </p:clrMapOvr>
-</p:sld>
-</file>
-
 <file path=ppt/slides/slide7.xml><?xml version="1.0" encoding="utf-8"?>
 <p:sld xmlns:a="http://schemas.openxmlformats.org/drawingml/2006/main" xmlns:p="http://schemas.openxmlformats.org/presentationml/2006/main" xmlns:r="http://schemas.openxmlformats.org/officeDocument/2006/relationships">
   <p:cSld>
@@ -12794,7 +13656,7 @@
               </a:defRPr>
             </a:pPr>
             <a:r>
-              <a:t>Jadwal Singkat</a:t>
+              <a:t>Sistem Penilaian</a:t>
             </a:r>
           </a:p>
         </p:txBody>
@@ -12876,6 +13738,375 @@
             </a:pPr>
             <a:r>
               <a:t>Slide 7  |  Briefing Juri LKS 2026 — Robot Bergerak Otonom  |  Kemendikdasmen</a:t>
+            </a:r>
+          </a:p>
+        </p:txBody>
+      </p:sp>
+      <p:sp>
+        <p:nvSpPr>
+          <p:cNvPr id="9" name="TextBox 8"/>
+          <p:cNvSpPr txBox="1"/>
+          <p:nvPr/>
+        </p:nvSpPr>
+        <p:spPr>
+          <a:xfrm>
+            <a:off x="457200" y="960120"/>
+            <a:ext cx="8229600" cy="5257800"/>
+          </a:xfrm>
+          <a:prstGeom prst="rect">
+            <a:avLst/>
+          </a:prstGeom>
+          <a:noFill/>
+        </p:spPr>
+        <p:txBody>
+          <a:bodyPr wrap="square" anchor="t">
+            <a:spAutoFit/>
+          </a:bodyPr>
+          <a:lstStyle/>
+          <a:p>
+            <a:pPr>
+              <a:spcAft>
+                <a:spcPts val="1000"/>
+              </a:spcAft>
+              <a:defRPr sz="1700" b="0">
+                <a:solidFill>
+                  <a:srgbClr val="333333"/>
+                </a:solidFill>
+              </a:defRPr>
+            </a:pPr>
+            <a:r>
+              <a:t>Judgement (J): skala 0–3 untuk proses, kerapian, kolaborasi</a:t>
+            </a:r>
+          </a:p>
+          <a:p>
+            <a:pPr>
+              <a:spcAft>
+                <a:spcPts val="1000"/>
+              </a:spcAft>
+              <a:defRPr sz="1700" b="0">
+                <a:solidFill>
+                  <a:srgbClr val="333333"/>
+                </a:solidFill>
+              </a:defRPr>
+            </a:pPr>
+            <a:r>
+              <a:t>Measurement (M): 1 = berhasil, 0 = gagal</a:t>
+            </a:r>
+          </a:p>
+          <a:p>
+            <a:pPr>
+              <a:spcAft>
+                <a:spcPts val="1000"/>
+              </a:spcAft>
+              <a:defRPr sz="1700" b="0">
+                <a:solidFill>
+                  <a:srgbClr val="333333"/>
+                </a:solidFill>
+              </a:defRPr>
+            </a:pPr>
+            <a:r>
+              <a:t>3 juri untuk J → rata-rata; selisih ≥ 2 poin → ulangi</a:t>
+            </a:r>
+          </a:p>
+          <a:p>
+            <a:pPr>
+              <a:spcAft>
+                <a:spcPts val="1000"/>
+              </a:spcAft>
+              <a:defRPr sz="1700" b="0">
+                <a:solidFill>
+                  <a:srgbClr val="333333"/>
+                </a:solidFill>
+              </a:defRPr>
+            </a:pPr>
+            <a:r>
+              <a:t>Input ke CIS → skala 700 (Medallion jika &gt; 700)</a:t>
+            </a:r>
+          </a:p>
+          <a:p>
+            <a:pPr>
+              <a:spcAft>
+                <a:spcPts val="1000"/>
+              </a:spcAft>
+              <a:defRPr sz="1700" b="0">
+                <a:solidFill>
+                  <a:srgbClr val="333333"/>
+                </a:solidFill>
+              </a:defRPr>
+            </a:pPr>
+            <a:r>
+              <a:t>60% skor dari Modul E — fokus utama penilaian juri</a:t>
+            </a:r>
+          </a:p>
+        </p:txBody>
+      </p:sp>
+    </p:spTree>
+  </p:cSld>
+  <p:clrMapOvr>
+    <a:masterClrMapping/>
+  </p:clrMapOvr>
+</p:sld>
+</file>
+
+<file path=ppt/slides/slide8.xml><?xml version="1.0" encoding="utf-8"?>
+<p:sld xmlns:a="http://schemas.openxmlformats.org/drawingml/2006/main" xmlns:p="http://schemas.openxmlformats.org/presentationml/2006/main" xmlns:r="http://schemas.openxmlformats.org/officeDocument/2006/relationships">
+  <p:cSld>
+    <p:spTree>
+      <p:nvGrpSpPr>
+        <p:cNvPr id="1" name=""/>
+        <p:cNvGrpSpPr/>
+        <p:nvPr/>
+      </p:nvGrpSpPr>
+      <p:grpSpPr/>
+      <p:sp>
+        <p:nvSpPr>
+          <p:cNvPr id="2" name="Rectangle 1"/>
+          <p:cNvSpPr/>
+          <p:nvPr/>
+        </p:nvSpPr>
+        <p:spPr>
+          <a:xfrm>
+            <a:off x="0" y="0"/>
+            <a:ext cx="9144000" cy="841248"/>
+          </a:xfrm>
+          <a:prstGeom prst="rect">
+            <a:avLst/>
+          </a:prstGeom>
+          <a:solidFill>
+            <a:srgbClr val="1F4E79"/>
+          </a:solidFill>
+          <a:ln>
+            <a:noFill/>
+          </a:ln>
+        </p:spPr>
+        <p:style>
+          <a:lnRef idx="1">
+            <a:schemeClr val="accent1"/>
+          </a:lnRef>
+          <a:fillRef idx="3">
+            <a:schemeClr val="accent1"/>
+          </a:fillRef>
+          <a:effectRef idx="2">
+            <a:schemeClr val="accent1"/>
+          </a:effectRef>
+          <a:fontRef idx="minor">
+            <a:schemeClr val="lt1"/>
+          </a:fontRef>
+        </p:style>
+        <p:txBody>
+          <a:bodyPr rtlCol="0" anchor="ctr"/>
+          <a:lstStyle/>
+          <a:p>
+            <a:pPr algn="ctr"/>
+          </a:p>
+        </p:txBody>
+      </p:sp>
+      <p:sp>
+        <p:nvSpPr>
+          <p:cNvPr id="3" name="Rectangle 2"/>
+          <p:cNvSpPr/>
+          <p:nvPr/>
+        </p:nvSpPr>
+        <p:spPr>
+          <a:xfrm>
+            <a:off x="0" y="841248"/>
+            <a:ext cx="9144000" cy="45720"/>
+          </a:xfrm>
+          <a:prstGeom prst="rect">
+            <a:avLst/>
+          </a:prstGeom>
+          <a:solidFill>
+            <a:srgbClr val="ED7D31"/>
+          </a:solidFill>
+          <a:ln>
+            <a:noFill/>
+          </a:ln>
+        </p:spPr>
+        <p:style>
+          <a:lnRef idx="1">
+            <a:schemeClr val="accent1"/>
+          </a:lnRef>
+          <a:fillRef idx="3">
+            <a:schemeClr val="accent1"/>
+          </a:fillRef>
+          <a:effectRef idx="2">
+            <a:schemeClr val="accent1"/>
+          </a:effectRef>
+          <a:fontRef idx="minor">
+            <a:schemeClr val="lt1"/>
+          </a:fontRef>
+        </p:style>
+        <p:txBody>
+          <a:bodyPr rtlCol="0" anchor="ctr"/>
+          <a:lstStyle/>
+          <a:p>
+            <a:pPr algn="ctr"/>
+          </a:p>
+        </p:txBody>
+      </p:sp>
+      <p:pic>
+        <p:nvPicPr>
+          <p:cNvPr id="4" name="Picture 3" descr="logo-kemendikdasmen.png"/>
+          <p:cNvPicPr>
+            <a:picLocks noChangeAspect="1"/>
+          </p:cNvPicPr>
+          <p:nvPr/>
+        </p:nvPicPr>
+        <p:blipFill>
+          <a:blip r:embed="rId2"/>
+          <a:stretch>
+            <a:fillRect/>
+          </a:stretch>
+        </p:blipFill>
+        <p:spPr>
+          <a:xfrm>
+            <a:off x="109728" y="91440"/>
+            <a:ext cx="1707475" cy="530352"/>
+          </a:xfrm>
+          <a:prstGeom prst="rect">
+            <a:avLst/>
+          </a:prstGeom>
+        </p:spPr>
+      </p:pic>
+      <p:pic>
+        <p:nvPicPr>
+          <p:cNvPr id="5" name="Picture 4" descr="logo-lks-dikmen.png"/>
+          <p:cNvPicPr>
+            <a:picLocks noChangeAspect="1"/>
+          </p:cNvPicPr>
+          <p:nvPr/>
+        </p:nvPicPr>
+        <p:blipFill>
+          <a:blip r:embed="rId3"/>
+          <a:stretch>
+            <a:fillRect/>
+          </a:stretch>
+        </p:blipFill>
+        <p:spPr>
+          <a:xfrm>
+            <a:off x="7973568" y="54864"/>
+            <a:ext cx="621792" cy="621792"/>
+          </a:xfrm>
+          <a:prstGeom prst="rect">
+            <a:avLst/>
+          </a:prstGeom>
+        </p:spPr>
+      </p:pic>
+      <p:sp>
+        <p:nvSpPr>
+          <p:cNvPr id="6" name="TextBox 5"/>
+          <p:cNvSpPr txBox="1"/>
+          <p:nvPr/>
+        </p:nvSpPr>
+        <p:spPr>
+          <a:xfrm>
+            <a:off x="2148840" y="128016"/>
+            <a:ext cx="5486400" cy="566928"/>
+          </a:xfrm>
+          <a:prstGeom prst="rect">
+            <a:avLst/>
+          </a:prstGeom>
+          <a:noFill/>
+        </p:spPr>
+        <p:txBody>
+          <a:bodyPr wrap="square">
+            <a:spAutoFit/>
+          </a:bodyPr>
+          <a:lstStyle/>
+          <a:p>
+            <a:pPr algn="ctr">
+              <a:spcAft>
+                <a:spcPts val="600"/>
+              </a:spcAft>
+              <a:defRPr sz="1700" b="1">
+                <a:solidFill>
+                  <a:srgbClr val="FFFFFF"/>
+                </a:solidFill>
+              </a:defRPr>
+            </a:pPr>
+            <a:r>
+              <a:t>Jadwal Singkat</a:t>
+            </a:r>
+          </a:p>
+        </p:txBody>
+      </p:sp>
+      <p:sp>
+        <p:nvSpPr>
+          <p:cNvPr id="7" name="Rectangle 6"/>
+          <p:cNvSpPr/>
+          <p:nvPr/>
+        </p:nvSpPr>
+        <p:spPr>
+          <a:xfrm>
+            <a:off x="0" y="6419088"/>
+            <a:ext cx="9144000" cy="365760"/>
+          </a:xfrm>
+          <a:prstGeom prst="rect">
+            <a:avLst/>
+          </a:prstGeom>
+          <a:solidFill>
+            <a:srgbClr val="2E7D32"/>
+          </a:solidFill>
+          <a:ln>
+            <a:noFill/>
+          </a:ln>
+        </p:spPr>
+        <p:style>
+          <a:lnRef idx="1">
+            <a:schemeClr val="accent1"/>
+          </a:lnRef>
+          <a:fillRef idx="3">
+            <a:schemeClr val="accent1"/>
+          </a:fillRef>
+          <a:effectRef idx="2">
+            <a:schemeClr val="accent1"/>
+          </a:effectRef>
+          <a:fontRef idx="minor">
+            <a:schemeClr val="lt1"/>
+          </a:fontRef>
+        </p:style>
+        <p:txBody>
+          <a:bodyPr rtlCol="0" anchor="ctr"/>
+          <a:lstStyle/>
+          <a:p>
+            <a:pPr algn="ctr"/>
+          </a:p>
+        </p:txBody>
+      </p:sp>
+      <p:sp>
+        <p:nvSpPr>
+          <p:cNvPr id="8" name="TextBox 7"/>
+          <p:cNvSpPr txBox="1"/>
+          <p:nvPr/>
+        </p:nvSpPr>
+        <p:spPr>
+          <a:xfrm>
+            <a:off x="228600" y="6455664"/>
+            <a:ext cx="8686800" cy="292608"/>
+          </a:xfrm>
+          <a:prstGeom prst="rect">
+            <a:avLst/>
+          </a:prstGeom>
+          <a:noFill/>
+        </p:spPr>
+        <p:txBody>
+          <a:bodyPr wrap="none">
+            <a:spAutoFit/>
+          </a:bodyPr>
+          <a:lstStyle/>
+          <a:p>
+            <a:pPr algn="ctr">
+              <a:spcAft>
+                <a:spcPts val="0"/>
+              </a:spcAft>
+              <a:defRPr sz="900" b="0">
+                <a:solidFill>
+                  <a:srgbClr val="FFFFFF"/>
+                </a:solidFill>
+              </a:defRPr>
+            </a:pPr>
+            <a:r>
+              <a:t>Slide 8  |  Briefing Juri LKS 2026 — Robot Bergerak Otonom  |  Kemendikdasmen</a:t>
             </a:r>
           </a:p>
         </p:txBody>
@@ -13152,335 +14383,6 @@
 </p:sld>
 </file>
 
-<file path=ppt/slides/slide8.xml><?xml version="1.0" encoding="utf-8"?>
-<p:sld xmlns:a="http://schemas.openxmlformats.org/drawingml/2006/main" xmlns:p="http://schemas.openxmlformats.org/presentationml/2006/main" xmlns:r="http://schemas.openxmlformats.org/officeDocument/2006/relationships">
-  <p:cSld>
-    <p:spTree>
-      <p:nvGrpSpPr>
-        <p:cNvPr id="1" name=""/>
-        <p:cNvGrpSpPr/>
-        <p:nvPr/>
-      </p:nvGrpSpPr>
-      <p:grpSpPr/>
-      <p:sp>
-        <p:nvSpPr>
-          <p:cNvPr id="2" name="Rectangle 1"/>
-          <p:cNvSpPr/>
-          <p:nvPr/>
-        </p:nvSpPr>
-        <p:spPr>
-          <a:xfrm>
-            <a:off x="0" y="0"/>
-            <a:ext cx="9144000" cy="841248"/>
-          </a:xfrm>
-          <a:prstGeom prst="rect">
-            <a:avLst/>
-          </a:prstGeom>
-          <a:solidFill>
-            <a:srgbClr val="1F4E79"/>
-          </a:solidFill>
-          <a:ln>
-            <a:noFill/>
-          </a:ln>
-        </p:spPr>
-        <p:style>
-          <a:lnRef idx="1">
-            <a:schemeClr val="accent1"/>
-          </a:lnRef>
-          <a:fillRef idx="3">
-            <a:schemeClr val="accent1"/>
-          </a:fillRef>
-          <a:effectRef idx="2">
-            <a:schemeClr val="accent1"/>
-          </a:effectRef>
-          <a:fontRef idx="minor">
-            <a:schemeClr val="lt1"/>
-          </a:fontRef>
-        </p:style>
-        <p:txBody>
-          <a:bodyPr rtlCol="0" anchor="ctr"/>
-          <a:lstStyle/>
-          <a:p>
-            <a:pPr algn="ctr"/>
-          </a:p>
-        </p:txBody>
-      </p:sp>
-      <p:sp>
-        <p:nvSpPr>
-          <p:cNvPr id="3" name="Rectangle 2"/>
-          <p:cNvSpPr/>
-          <p:nvPr/>
-        </p:nvSpPr>
-        <p:spPr>
-          <a:xfrm>
-            <a:off x="0" y="841248"/>
-            <a:ext cx="9144000" cy="45720"/>
-          </a:xfrm>
-          <a:prstGeom prst="rect">
-            <a:avLst/>
-          </a:prstGeom>
-          <a:solidFill>
-            <a:srgbClr val="ED7D31"/>
-          </a:solidFill>
-          <a:ln>
-            <a:noFill/>
-          </a:ln>
-        </p:spPr>
-        <p:style>
-          <a:lnRef idx="1">
-            <a:schemeClr val="accent1"/>
-          </a:lnRef>
-          <a:fillRef idx="3">
-            <a:schemeClr val="accent1"/>
-          </a:fillRef>
-          <a:effectRef idx="2">
-            <a:schemeClr val="accent1"/>
-          </a:effectRef>
-          <a:fontRef idx="minor">
-            <a:schemeClr val="lt1"/>
-          </a:fontRef>
-        </p:style>
-        <p:txBody>
-          <a:bodyPr rtlCol="0" anchor="ctr"/>
-          <a:lstStyle/>
-          <a:p>
-            <a:pPr algn="ctr"/>
-          </a:p>
-        </p:txBody>
-      </p:sp>
-      <p:pic>
-        <p:nvPicPr>
-          <p:cNvPr id="4" name="Picture 3" descr="logo-kemendikdasmen.png"/>
-          <p:cNvPicPr>
-            <a:picLocks noChangeAspect="1"/>
-          </p:cNvPicPr>
-          <p:nvPr/>
-        </p:nvPicPr>
-        <p:blipFill>
-          <a:blip r:embed="rId2"/>
-          <a:stretch>
-            <a:fillRect/>
-          </a:stretch>
-        </p:blipFill>
-        <p:spPr>
-          <a:xfrm>
-            <a:off x="109728" y="91440"/>
-            <a:ext cx="1707475" cy="530352"/>
-          </a:xfrm>
-          <a:prstGeom prst="rect">
-            <a:avLst/>
-          </a:prstGeom>
-        </p:spPr>
-      </p:pic>
-      <p:pic>
-        <p:nvPicPr>
-          <p:cNvPr id="5" name="Picture 4" descr="logo-lks-dikmen.png"/>
-          <p:cNvPicPr>
-            <a:picLocks noChangeAspect="1"/>
-          </p:cNvPicPr>
-          <p:nvPr/>
-        </p:nvPicPr>
-        <p:blipFill>
-          <a:blip r:embed="rId3"/>
-          <a:stretch>
-            <a:fillRect/>
-          </a:stretch>
-        </p:blipFill>
-        <p:spPr>
-          <a:xfrm>
-            <a:off x="7973568" y="54864"/>
-            <a:ext cx="621792" cy="621792"/>
-          </a:xfrm>
-          <a:prstGeom prst="rect">
-            <a:avLst/>
-          </a:prstGeom>
-        </p:spPr>
-      </p:pic>
-      <p:sp>
-        <p:nvSpPr>
-          <p:cNvPr id="6" name="Rectangle 5"/>
-          <p:cNvSpPr/>
-          <p:nvPr/>
-        </p:nvSpPr>
-        <p:spPr>
-          <a:xfrm>
-            <a:off x="0" y="6419088"/>
-            <a:ext cx="9144000" cy="365760"/>
-          </a:xfrm>
-          <a:prstGeom prst="rect">
-            <a:avLst/>
-          </a:prstGeom>
-          <a:solidFill>
-            <a:srgbClr val="2E7D32"/>
-          </a:solidFill>
-          <a:ln>
-            <a:noFill/>
-          </a:ln>
-        </p:spPr>
-        <p:style>
-          <a:lnRef idx="1">
-            <a:schemeClr val="accent1"/>
-          </a:lnRef>
-          <a:fillRef idx="3">
-            <a:schemeClr val="accent1"/>
-          </a:fillRef>
-          <a:effectRef idx="2">
-            <a:schemeClr val="accent1"/>
-          </a:effectRef>
-          <a:fontRef idx="minor">
-            <a:schemeClr val="lt1"/>
-          </a:fontRef>
-        </p:style>
-        <p:txBody>
-          <a:bodyPr rtlCol="0" anchor="ctr"/>
-          <a:lstStyle/>
-          <a:p>
-            <a:pPr algn="ctr"/>
-          </a:p>
-        </p:txBody>
-      </p:sp>
-      <p:sp>
-        <p:nvSpPr>
-          <p:cNvPr id="7" name="TextBox 6"/>
-          <p:cNvSpPr txBox="1"/>
-          <p:nvPr/>
-        </p:nvSpPr>
-        <p:spPr>
-          <a:xfrm>
-            <a:off x="228600" y="6455664"/>
-            <a:ext cx="8686800" cy="292608"/>
-          </a:xfrm>
-          <a:prstGeom prst="rect">
-            <a:avLst/>
-          </a:prstGeom>
-          <a:noFill/>
-        </p:spPr>
-        <p:txBody>
-          <a:bodyPr wrap="none">
-            <a:spAutoFit/>
-          </a:bodyPr>
-          <a:lstStyle/>
-          <a:p>
-            <a:pPr algn="ctr">
-              <a:spcAft>
-                <a:spcPts val="0"/>
-              </a:spcAft>
-              <a:defRPr sz="900" b="0">
-                <a:solidFill>
-                  <a:srgbClr val="FFFFFF"/>
-                </a:solidFill>
-              </a:defRPr>
-            </a:pPr>
-            <a:r>
-              <a:t>Slide 8  |  Briefing Juri LKS 2026 — Robot Bergerak Otonom  |  Kemendikdasmen</a:t>
-            </a:r>
-          </a:p>
-        </p:txBody>
-      </p:sp>
-      <p:sp>
-        <p:nvSpPr>
-          <p:cNvPr id="8" name="Rectangle 7"/>
-          <p:cNvSpPr/>
-          <p:nvPr/>
-        </p:nvSpPr>
-        <p:spPr>
-          <a:xfrm>
-            <a:off x="640080" y="2286000"/>
-            <a:ext cx="7863840" cy="1828800"/>
-          </a:xfrm>
-          <a:prstGeom prst="rect">
-            <a:avLst/>
-          </a:prstGeom>
-          <a:solidFill>
-            <a:srgbClr val="1F4E79"/>
-          </a:solidFill>
-          <a:ln>
-            <a:noFill/>
-          </a:ln>
-        </p:spPr>
-        <p:style>
-          <a:lnRef idx="1">
-            <a:schemeClr val="accent1"/>
-          </a:lnRef>
-          <a:fillRef idx="3">
-            <a:schemeClr val="accent1"/>
-          </a:fillRef>
-          <a:effectRef idx="2">
-            <a:schemeClr val="accent1"/>
-          </a:effectRef>
-          <a:fontRef idx="minor">
-            <a:schemeClr val="lt1"/>
-          </a:fontRef>
-        </p:style>
-        <p:txBody>
-          <a:bodyPr rtlCol="0" anchor="ctr"/>
-          <a:lstStyle/>
-          <a:p>
-            <a:pPr algn="ctr"/>
-          </a:p>
-        </p:txBody>
-      </p:sp>
-      <p:sp>
-        <p:nvSpPr>
-          <p:cNvPr id="9" name="TextBox 8"/>
-          <p:cNvSpPr txBox="1"/>
-          <p:nvPr/>
-        </p:nvSpPr>
-        <p:spPr>
-          <a:xfrm>
-            <a:off x="914400" y="2514600"/>
-            <a:ext cx="7315200" cy="1645920"/>
-          </a:xfrm>
-          <a:prstGeom prst="rect">
-            <a:avLst/>
-          </a:prstGeom>
-          <a:noFill/>
-        </p:spPr>
-        <p:txBody>
-          <a:bodyPr wrap="square">
-            <a:spAutoFit/>
-          </a:bodyPr>
-          <a:lstStyle/>
-          <a:p>
-            <a:pPr algn="ctr">
-              <a:spcAft>
-                <a:spcPts val="600"/>
-              </a:spcAft>
-              <a:defRPr sz="2800" b="1">
-                <a:solidFill>
-                  <a:srgbClr val="FFFFFF"/>
-                </a:solidFill>
-              </a:defRPr>
-            </a:pPr>
-            <a:r>
-              <a:t>Bagian 2</a:t>
-            </a:r>
-          </a:p>
-          <a:p>
-            <a:pPr algn="ctr">
-              <a:spcAft>
-                <a:spcPts val="0"/>
-              </a:spcAft>
-              <a:defRPr sz="1600" b="0">
-                <a:solidFill>
-                  <a:srgbClr val="ED7D31"/>
-                </a:solidFill>
-              </a:defRPr>
-            </a:pPr>
-            <a:r>
-              <a:t>Alur Run Otonom — Modul E (60%)</a:t>
-            </a:r>
-          </a:p>
-        </p:txBody>
-      </p:sp>
-    </p:spTree>
-  </p:cSld>
-  <p:clrMapOvr>
-    <a:masterClrMapping/>
-  </p:clrMapOvr>
-</p:sld>
-</file>
-
 <file path=ppt/slides/slide9.xml><?xml version="1.0" encoding="utf-8"?>
 <p:sld xmlns:a="http://schemas.openxmlformats.org/drawingml/2006/main" xmlns:p="http://schemas.openxmlformats.org/presentationml/2006/main" xmlns:r="http://schemas.openxmlformats.org/officeDocument/2006/relationships">
   <p:cSld>
@@ -13627,45 +14529,7 @@
       </p:pic>
       <p:sp>
         <p:nvSpPr>
-          <p:cNvPr id="6" name="TextBox 5"/>
-          <p:cNvSpPr txBox="1"/>
-          <p:nvPr/>
-        </p:nvSpPr>
-        <p:spPr>
-          <a:xfrm>
-            <a:off x="2148840" y="128016"/>
-            <a:ext cx="5486400" cy="566928"/>
-          </a:xfrm>
-          <a:prstGeom prst="rect">
-            <a:avLst/>
-          </a:prstGeom>
-          <a:noFill/>
-        </p:spPr>
-        <p:txBody>
-          <a:bodyPr wrap="square">
-            <a:spAutoFit/>
-          </a:bodyPr>
-          <a:lstStyle/>
-          <a:p>
-            <a:pPr algn="ctr">
-              <a:spcAft>
-                <a:spcPts val="600"/>
-              </a:spcAft>
-              <a:defRPr sz="1700" b="1">
-                <a:solidFill>
-                  <a:srgbClr val="FFFFFF"/>
-                </a:solidFill>
-              </a:defRPr>
-            </a:pPr>
-            <a:r>
-              <a:t>Alur Run Otonom (Modul E)</a:t>
-            </a:r>
-          </a:p>
-        </p:txBody>
-      </p:sp>
-      <p:sp>
-        <p:nvSpPr>
-          <p:cNvPr id="7" name="Rectangle 6"/>
+          <p:cNvPr id="6" name="Rectangle 5"/>
           <p:cNvSpPr/>
           <p:nvPr/>
         </p:nvSpPr>
@@ -13708,7 +14572,7 @@
       </p:sp>
       <p:sp>
         <p:nvSpPr>
-          <p:cNvPr id="8" name="TextBox 7"/>
+          <p:cNvPr id="7" name="TextBox 6"/>
           <p:cNvSpPr txBox="1"/>
           <p:nvPr/>
         </p:nvSpPr>
@@ -13746,153 +14610,23 @@
       </p:sp>
       <p:sp>
         <p:nvSpPr>
-          <p:cNvPr id="9" name="TextBox 8"/>
-          <p:cNvSpPr txBox="1"/>
-          <p:nvPr/>
-        </p:nvSpPr>
-        <p:spPr>
-          <a:xfrm>
-            <a:off x="457200" y="960120"/>
-            <a:ext cx="8229600" cy="5257800"/>
-          </a:xfrm>
-          <a:prstGeom prst="rect">
-            <a:avLst/>
-          </a:prstGeom>
-          <a:noFill/>
-        </p:spPr>
-        <p:txBody>
-          <a:bodyPr wrap="square" anchor="t">
-            <a:spAutoFit/>
-          </a:bodyPr>
-          <a:lstStyle/>
-          <a:p>
-            <a:pPr>
-              <a:spcAft>
-                <a:spcPts val="800"/>
-              </a:spcAft>
-              <a:defRPr sz="1800" b="0">
-                <a:solidFill>
-                  <a:srgbClr val="333333"/>
-                </a:solidFill>
-              </a:defRPr>
-            </a:pPr>
-            <a:r>
-              <a:t>1. Briefing layout arena</a:t>
-            </a:r>
-          </a:p>
-          <a:p>
-            <a:pPr>
-              <a:spcAft>
-                <a:spcPts val="800"/>
-              </a:spcAft>
-              <a:defRPr sz="1800" b="0">
-                <a:solidFill>
-                  <a:srgbClr val="333333"/>
-                </a:solidFill>
-              </a:defRPr>
-            </a:pPr>
-            <a:r>
-              <a:t>2. Programming (laptop boleh disentuh)</a:t>
-            </a:r>
-          </a:p>
-          <a:p>
-            <a:pPr>
-              <a:spcAft>
-                <a:spcPts val="800"/>
-              </a:spcAft>
-              <a:defRPr sz="1800" b="1">
-                <a:solidFill>
-                  <a:srgbClr val="333333"/>
-                </a:solidFill>
-              </a:defRPr>
-            </a:pPr>
-            <a:r>
-              <a:t>3. Peserta nyatakan SIAP</a:t>
-            </a:r>
-          </a:p>
-          <a:p>
-            <a:pPr>
-              <a:spcAft>
-                <a:spcPts val="800"/>
-              </a:spcAft>
-              <a:defRPr sz="1800" b="0">
-                <a:solidFill>
-                  <a:srgbClr val="333333"/>
-                </a:solidFill>
-              </a:defRPr>
-            </a:pPr>
-            <a:r>
-              <a:t>4. Laptop dilarang | Juri acak kubus</a:t>
-            </a:r>
-          </a:p>
-          <a:p>
-            <a:pPr>
-              <a:spcAft>
-                <a:spcPts val="800"/>
-              </a:spcAft>
-              <a:defRPr sz="1800" b="1">
-                <a:solidFill>
-                  <a:srgbClr val="333333"/>
-                </a:solidFill>
-              </a:defRPr>
-            </a:pPr>
-            <a:r>
-              <a:t>5. START → tekan tombol di robot</a:t>
-            </a:r>
-          </a:p>
-          <a:p>
-            <a:pPr>
-              <a:spcAft>
-                <a:spcPts val="800"/>
-              </a:spcAft>
-              <a:defRPr sz="1800" b="0">
-                <a:solidFill>
-                  <a:srgbClr val="333333"/>
-                </a:solidFill>
-              </a:defRPr>
-            </a:pPr>
-            <a:r>
-              <a:t>6. Run otonom — catat di Excel</a:t>
-            </a:r>
-          </a:p>
-          <a:p>
-            <a:pPr>
-              <a:spcAft>
-                <a:spcPts val="800"/>
-              </a:spcAft>
-              <a:defRPr sz="1800" b="0">
-                <a:solidFill>
-                  <a:srgbClr val="333333"/>
-                </a:solidFill>
-              </a:defRPr>
-            </a:pPr>
-            <a:r>
-              <a:t>7. Nilai 1/0 per kubus di Modul E</a:t>
-            </a:r>
-          </a:p>
-        </p:txBody>
-      </p:sp>
-      <p:sp>
-        <p:nvSpPr>
-          <p:cNvPr id="10" name="Rectangle 9"/>
+          <p:cNvPr id="8" name="Rectangle 7"/>
           <p:cNvSpPr/>
           <p:nvPr/>
         </p:nvSpPr>
         <p:spPr>
           <a:xfrm>
-            <a:off x="411480" y="5349240"/>
-            <a:ext cx="8321040" cy="777240"/>
+            <a:off x="640080" y="2286000"/>
+            <a:ext cx="7863840" cy="1828800"/>
           </a:xfrm>
           <a:prstGeom prst="rect">
             <a:avLst/>
           </a:prstGeom>
           <a:solidFill>
-            <a:srgbClr val="FFF3E0"/>
+            <a:srgbClr val="1F4E79"/>
           </a:solidFill>
           <a:ln>
-            <a:solidFill>
-              <a:srgbClr val="ED7D31"/>
-            </a:solidFill>
+            <a:noFill/>
           </a:ln>
         </p:spPr>
         <p:style>
@@ -13919,14 +14653,14 @@
       </p:sp>
       <p:sp>
         <p:nvSpPr>
-          <p:cNvPr id="11" name="TextBox 10"/>
+          <p:cNvPr id="9" name="TextBox 8"/>
           <p:cNvSpPr txBox="1"/>
           <p:nvPr/>
         </p:nvSpPr>
         <p:spPr>
           <a:xfrm>
-            <a:off x="548640" y="5440680"/>
-            <a:ext cx="8046720" cy="640080"/>
+            <a:off x="914400" y="2514600"/>
+            <a:ext cx="7315200" cy="1645920"/>
           </a:xfrm>
           <a:prstGeom prst="rect">
             <a:avLst/>
@@ -13934,23 +14668,38 @@
           <a:noFill/>
         </p:spPr>
         <p:txBody>
-          <a:bodyPr wrap="none">
+          <a:bodyPr wrap="square">
             <a:spAutoFit/>
           </a:bodyPr>
           <a:lstStyle/>
           <a:p>
-            <a:pPr>
+            <a:pPr algn="ctr">
+              <a:spcAft>
+                <a:spcPts val="600"/>
+              </a:spcAft>
+              <a:defRPr sz="2800" b="1">
+                <a:solidFill>
+                  <a:srgbClr val="FFFFFF"/>
+                </a:solidFill>
+              </a:defRPr>
+            </a:pPr>
+            <a:r>
+              <a:t>Bagian 2</a:t>
+            </a:r>
+          </a:p>
+          <a:p>
+            <a:pPr algn="ctr">
               <a:spcAft>
                 <a:spcPts val="0"/>
               </a:spcAft>
-              <a:defRPr sz="1300" b="1">
+              <a:defRPr sz="1600" b="0">
                 <a:solidFill>
                   <a:srgbClr val="ED7D31"/>
                 </a:solidFill>
               </a:defRPr>
             </a:pPr>
             <a:r>
-              <a:t>PENTING: Sentuh laptop setelah SIAP atau sentuh robot setelah START = pelanggaran (run dapat dibatalkan).</a:t>
+              <a:t>Alur Run Otonom — Modul E (60%)</a:t>
             </a:r>
           </a:p>
         </p:txBody>
